--- a/jsik2026taikai.pptx
+++ b/jsik2026taikai.pptx
@@ -9,6 +9,8 @@
     <p:sldId id="296" r:id="rId3"/>
     <p:sldId id="303" r:id="rId4"/>
     <p:sldId id="304" r:id="rId5"/>
+    <p:sldId id="305" r:id="rId6"/>
+    <p:sldId id="306" r:id="rId7"/>
   </p:sldIdLst>
   <p:sldSz cx="12192000" cy="6858000"/>
   <p:notesSz cx="6858000" cy="9144000"/>
@@ -3675,7 +3677,7 @@
         </p:nvSpPr>
         <p:spPr>
           <a:xfrm>
-            <a:off x="2292989" y="3565970"/>
+            <a:off x="2292989" y="3842010"/>
             <a:ext cx="7606021" cy="461665"/>
           </a:xfrm>
           <a:prstGeom prst="rect">
@@ -3762,7 +3764,7 @@
         </p:nvSpPr>
         <p:spPr>
           <a:xfrm>
-            <a:off x="4205994" y="4462834"/>
+            <a:off x="4205994" y="4557722"/>
             <a:ext cx="3780008" cy="830997"/>
           </a:xfrm>
           <a:prstGeom prst="rect">
@@ -3823,7 +3825,7 @@
         </p:nvSpPr>
         <p:spPr>
           <a:xfrm>
-            <a:off x="2925900" y="2311261"/>
+            <a:off x="2925900" y="2526919"/>
             <a:ext cx="6340197" cy="1077218"/>
           </a:xfrm>
           <a:prstGeom prst="rect">
@@ -4049,7 +4051,7 @@
           <a:p>
             <a:r>
               <a:rPr lang="ja-JP" altLang="en-US"/>
-              <a:t>すでに地域に根ざした研究を行ってきた本学では、より実効な地域課題解決のため、地域課題にかかる評価の計量化の仕組みを整備する</a:t>
+              <a:t>すでに地域に根ざした研究を行ってきた本学では、より実効な地域課題解決のため、地域課題にかかる計量化・評価の仕組みを整備する</a:t>
             </a:r>
           </a:p>
         </p:txBody>
@@ -4183,7 +4185,7 @@
           <a:p>
             <a:r>
               <a:rPr lang="ja-JP" altLang="en-US"/>
-              <a:t>地域課題解決には複数分野（複数学部・部局）の協調が必須であり、オープンサイエンス研究開発部門が有機的なハブとなると同時に、「データ」を中心とするシステム連携を作り出す</a:t>
+              <a:t>地域課題解決には複数分野（複数学部・部局）の協調が必須であり、オープンサイエンス研究開発部門がこのための有機的なハブとなると同時に、「データ」を中心とするシステム連携を創出する</a:t>
             </a:r>
             <a:endParaRPr lang="en-US" altLang="ja-JP" dirty="0"/>
           </a:p>
@@ -4220,7 +4222,7 @@
         </p:nvSpPr>
         <p:spPr>
           <a:xfrm>
-            <a:off x="1949315" y="2861146"/>
+            <a:off x="2406513" y="2861146"/>
             <a:ext cx="6618168" cy="3751764"/>
           </a:xfrm>
           <a:prstGeom prst="rect">
@@ -4274,7 +4276,7 @@
         </p:nvSpPr>
         <p:spPr>
           <a:xfrm>
-            <a:off x="2039302" y="3014173"/>
+            <a:off x="2496500" y="3014173"/>
             <a:ext cx="2949627" cy="3071465"/>
           </a:xfrm>
           <a:prstGeom prst="rect">
@@ -4326,7 +4328,7 @@
         </p:nvSpPr>
         <p:spPr>
           <a:xfrm>
-            <a:off x="4051481" y="5265280"/>
+            <a:off x="4508679" y="5265280"/>
             <a:ext cx="215153" cy="217074"/>
           </a:xfrm>
           <a:prstGeom prst="ellipse">
@@ -4378,7 +4380,7 @@
         </p:nvSpPr>
         <p:spPr>
           <a:xfrm>
-            <a:off x="4043796" y="3797520"/>
+            <a:off x="4500994" y="3797520"/>
             <a:ext cx="215153" cy="217074"/>
           </a:xfrm>
           <a:prstGeom prst="ellipse">
@@ -4430,7 +4432,7 @@
         </p:nvSpPr>
         <p:spPr>
           <a:xfrm>
-            <a:off x="3951307" y="5482353"/>
+            <a:off x="4408505" y="5482353"/>
             <a:ext cx="415498" cy="230832"/>
           </a:xfrm>
           <a:prstGeom prst="rect">
@@ -4465,7 +4467,7 @@
         </p:nvSpPr>
         <p:spPr>
           <a:xfrm>
-            <a:off x="3889835" y="4032839"/>
+            <a:off x="4347033" y="4032839"/>
             <a:ext cx="530915" cy="230832"/>
           </a:xfrm>
           <a:prstGeom prst="rect">
@@ -4501,7 +4503,7 @@
         </p:nvSpPr>
         <p:spPr>
           <a:xfrm>
-            <a:off x="2526321" y="3489189"/>
+            <a:off x="2983519" y="3489189"/>
             <a:ext cx="215153" cy="217074"/>
           </a:xfrm>
           <a:prstGeom prst="ellipse">
@@ -4553,7 +4555,7 @@
         </p:nvSpPr>
         <p:spPr>
           <a:xfrm>
-            <a:off x="2191883" y="4491049"/>
+            <a:off x="2649081" y="4491049"/>
             <a:ext cx="877163" cy="230832"/>
           </a:xfrm>
           <a:prstGeom prst="rect">
@@ -4589,7 +4591,7 @@
         </p:nvSpPr>
         <p:spPr>
           <a:xfrm>
-            <a:off x="2531777" y="4973663"/>
+            <a:off x="2988975" y="4973663"/>
             <a:ext cx="215153" cy="217074"/>
           </a:xfrm>
           <a:prstGeom prst="ellipse">
@@ -4641,7 +4643,7 @@
         </p:nvSpPr>
         <p:spPr>
           <a:xfrm>
-            <a:off x="2430422" y="5196554"/>
+            <a:off x="2887620" y="5196554"/>
             <a:ext cx="415498" cy="230832"/>
           </a:xfrm>
           <a:prstGeom prst="rect">
@@ -4676,7 +4678,7 @@
         </p:nvSpPr>
         <p:spPr>
           <a:xfrm>
-            <a:off x="4036112" y="4531400"/>
+            <a:off x="4493310" y="4531400"/>
             <a:ext cx="215153" cy="217074"/>
           </a:xfrm>
           <a:prstGeom prst="ellipse">
@@ -4728,7 +4730,7 @@
         </p:nvSpPr>
         <p:spPr>
           <a:xfrm>
-            <a:off x="3889835" y="4747927"/>
+            <a:off x="4347033" y="4747927"/>
             <a:ext cx="530915" cy="230832"/>
           </a:xfrm>
           <a:prstGeom prst="rect">
@@ -4768,7 +4770,7 @@
         </p:nvCxnSpPr>
         <p:spPr>
           <a:xfrm flipH="1" flipV="1">
-            <a:off x="2741474" y="3597726"/>
+            <a:off x="3198672" y="3597726"/>
             <a:ext cx="1294638" cy="1042211"/>
           </a:xfrm>
           <a:prstGeom prst="straightConnector1">
@@ -4814,7 +4816,7 @@
         </p:nvCxnSpPr>
         <p:spPr>
           <a:xfrm flipH="1" flipV="1">
-            <a:off x="2741474" y="3597726"/>
+            <a:off x="3198672" y="3597726"/>
             <a:ext cx="1310007" cy="1776091"/>
           </a:xfrm>
           <a:prstGeom prst="straightConnector1">
@@ -4860,7 +4862,7 @@
         </p:nvCxnSpPr>
         <p:spPr>
           <a:xfrm flipH="1" flipV="1">
-            <a:off x="2741474" y="3597726"/>
+            <a:off x="3198672" y="3597726"/>
             <a:ext cx="1302322" cy="308331"/>
           </a:xfrm>
           <a:prstGeom prst="straightConnector1">
@@ -4906,7 +4908,7 @@
         </p:nvCxnSpPr>
         <p:spPr>
           <a:xfrm flipH="1" flipV="1">
-            <a:off x="2746930" y="5082200"/>
+            <a:off x="3204128" y="5082200"/>
             <a:ext cx="1304551" cy="291617"/>
           </a:xfrm>
           <a:prstGeom prst="straightConnector1">
@@ -4951,7 +4953,7 @@
         </p:nvCxnSpPr>
         <p:spPr>
           <a:xfrm flipH="1" flipV="1">
-            <a:off x="4251265" y="4639937"/>
+            <a:off x="4708463" y="4639937"/>
             <a:ext cx="15369" cy="733880"/>
           </a:xfrm>
           <a:prstGeom prst="curvedConnector3">
@@ -4999,7 +5001,7 @@
         </p:nvCxnSpPr>
         <p:spPr>
           <a:xfrm flipH="1" flipV="1">
-            <a:off x="4258949" y="3906057"/>
+            <a:off x="4716147" y="3906057"/>
             <a:ext cx="7685" cy="1467760"/>
           </a:xfrm>
           <a:prstGeom prst="curvedConnector3">
@@ -5043,7 +5045,7 @@
         </p:nvSpPr>
         <p:spPr>
           <a:xfrm>
-            <a:off x="2773080" y="6089689"/>
+            <a:off x="3230278" y="6089689"/>
             <a:ext cx="1800493" cy="523220"/>
           </a:xfrm>
           <a:prstGeom prst="rect">
@@ -5085,7 +5087,7 @@
         </p:nvSpPr>
         <p:spPr>
           <a:xfrm>
-            <a:off x="6566029" y="3617876"/>
+            <a:off x="7023227" y="3617876"/>
             <a:ext cx="545566" cy="217074"/>
           </a:xfrm>
           <a:prstGeom prst="rect">
@@ -5134,7 +5136,7 @@
         </p:nvSpPr>
         <p:spPr>
           <a:xfrm>
-            <a:off x="6566029" y="4184803"/>
+            <a:off x="7023227" y="4184803"/>
             <a:ext cx="545566" cy="217074"/>
           </a:xfrm>
           <a:prstGeom prst="rect">
@@ -5183,7 +5185,7 @@
         </p:nvSpPr>
         <p:spPr>
           <a:xfrm>
-            <a:off x="6566029" y="4751730"/>
+            <a:off x="7023227" y="4751730"/>
             <a:ext cx="545566" cy="217074"/>
           </a:xfrm>
           <a:prstGeom prst="rect">
@@ -5232,7 +5234,7 @@
         </p:nvSpPr>
         <p:spPr>
           <a:xfrm>
-            <a:off x="6566029" y="5318657"/>
+            <a:off x="7023227" y="5318657"/>
             <a:ext cx="545566" cy="217074"/>
           </a:xfrm>
           <a:prstGeom prst="rect">
@@ -5285,7 +5287,7 @@
         </p:nvCxnSpPr>
         <p:spPr>
           <a:xfrm>
-            <a:off x="5917797" y="4429828"/>
+            <a:off x="6374995" y="4429828"/>
             <a:ext cx="648232" cy="997366"/>
           </a:xfrm>
           <a:prstGeom prst="straightConnector1">
@@ -5328,7 +5330,7 @@
         </p:nvSpPr>
         <p:spPr>
           <a:xfrm>
-            <a:off x="6528391" y="5510899"/>
+            <a:off x="6985589" y="5510899"/>
             <a:ext cx="606256" cy="230832"/>
           </a:xfrm>
           <a:prstGeom prst="rect">
@@ -5364,7 +5366,7 @@
         </p:nvSpPr>
         <p:spPr>
           <a:xfrm>
-            <a:off x="6483141" y="3814018"/>
+            <a:off x="6940339" y="3814018"/>
             <a:ext cx="761747" cy="230832"/>
           </a:xfrm>
           <a:prstGeom prst="rect">
@@ -5400,7 +5402,7 @@
         </p:nvSpPr>
         <p:spPr>
           <a:xfrm>
-            <a:off x="6292498" y="3249403"/>
+            <a:off x="6749696" y="3249403"/>
             <a:ext cx="1107996" cy="230832"/>
           </a:xfrm>
           <a:prstGeom prst="rect">
@@ -5436,7 +5438,7 @@
         </p:nvSpPr>
         <p:spPr>
           <a:xfrm>
-            <a:off x="6256229" y="4365383"/>
+            <a:off x="6713427" y="4365383"/>
             <a:ext cx="1339264" cy="369332"/>
           </a:xfrm>
           <a:prstGeom prst="rect">
@@ -5479,7 +5481,7 @@
         </p:nvSpPr>
         <p:spPr>
           <a:xfrm>
-            <a:off x="6573713" y="5885583"/>
+            <a:off x="7030911" y="5885583"/>
             <a:ext cx="545566" cy="217074"/>
           </a:xfrm>
           <a:prstGeom prst="rect">
@@ -5528,7 +5530,7 @@
         </p:nvSpPr>
         <p:spPr>
           <a:xfrm>
-            <a:off x="6474674" y="6088758"/>
+            <a:off x="6931872" y="6088758"/>
             <a:ext cx="761747" cy="230832"/>
           </a:xfrm>
           <a:prstGeom prst="rect">
@@ -5567,7 +5569,7 @@
         </p:nvCxnSpPr>
         <p:spPr>
           <a:xfrm>
-            <a:off x="4235126" y="5450564"/>
+            <a:off x="4692324" y="5450564"/>
             <a:ext cx="2338587" cy="543556"/>
           </a:xfrm>
           <a:prstGeom prst="straightConnector1">
@@ -5615,7 +5617,7 @@
         </p:nvCxnSpPr>
         <p:spPr>
           <a:xfrm>
-            <a:off x="5917797" y="4429828"/>
+            <a:off x="6374995" y="4429828"/>
             <a:ext cx="648232" cy="430439"/>
           </a:xfrm>
           <a:prstGeom prst="straightConnector1">
@@ -5662,7 +5664,7 @@
         </p:nvCxnSpPr>
         <p:spPr>
           <a:xfrm flipV="1">
-            <a:off x="5917797" y="4293340"/>
+            <a:off x="6374995" y="4293340"/>
             <a:ext cx="648232" cy="136488"/>
           </a:xfrm>
           <a:prstGeom prst="straightConnector1">
@@ -5709,7 +5711,7 @@
         </p:nvCxnSpPr>
         <p:spPr>
           <a:xfrm flipV="1">
-            <a:off x="5917797" y="3726413"/>
+            <a:off x="6374995" y="3726413"/>
             <a:ext cx="648232" cy="703415"/>
           </a:xfrm>
           <a:prstGeom prst="straightConnector1">
@@ -5752,7 +5754,7 @@
         </p:nvSpPr>
         <p:spPr>
           <a:xfrm>
-            <a:off x="6573713" y="3050949"/>
+            <a:off x="7030911" y="3050949"/>
             <a:ext cx="545566" cy="217074"/>
           </a:xfrm>
           <a:prstGeom prst="rect">
@@ -5801,7 +5803,7 @@
         </p:nvSpPr>
         <p:spPr>
           <a:xfrm>
-            <a:off x="6427733" y="4943401"/>
+            <a:off x="6884931" y="4943401"/>
             <a:ext cx="761747" cy="230832"/>
           </a:xfrm>
           <a:prstGeom prst="rect">
@@ -5840,7 +5842,7 @@
         </p:nvCxnSpPr>
         <p:spPr>
           <a:xfrm flipV="1">
-            <a:off x="5917797" y="3159486"/>
+            <a:off x="6374995" y="3159486"/>
             <a:ext cx="655916" cy="1270342"/>
           </a:xfrm>
           <a:prstGeom prst="straightConnector1">
@@ -5883,7 +5885,7 @@
         </p:nvSpPr>
         <p:spPr>
           <a:xfrm rot="16200000">
-            <a:off x="7588910" y="5283847"/>
+            <a:off x="8046108" y="5283847"/>
             <a:ext cx="2319569" cy="338554"/>
           </a:xfrm>
           <a:prstGeom prst="rect">
@@ -5928,7 +5930,7 @@
         </p:nvSpPr>
         <p:spPr>
           <a:xfrm>
-            <a:off x="5372231" y="4321291"/>
+            <a:off x="5829429" y="4321291"/>
             <a:ext cx="545566" cy="217074"/>
           </a:xfrm>
           <a:prstGeom prst="rect">
@@ -5977,7 +5979,7 @@
         </p:nvSpPr>
         <p:spPr>
           <a:xfrm>
-            <a:off x="5159337" y="4546733"/>
+            <a:off x="5616535" y="4546733"/>
             <a:ext cx="1003801" cy="230832"/>
           </a:xfrm>
           <a:prstGeom prst="rect">
@@ -6021,7 +6023,7 @@
         </p:nvCxnSpPr>
         <p:spPr>
           <a:xfrm flipV="1">
-            <a:off x="2715422" y="4429828"/>
+            <a:off x="3172620" y="4429828"/>
             <a:ext cx="2656809" cy="729119"/>
           </a:xfrm>
           <a:prstGeom prst="straightConnector1">
@@ -6064,7 +6066,7 @@
         </p:nvCxnSpPr>
         <p:spPr>
           <a:xfrm flipV="1">
-            <a:off x="4235126" y="4429828"/>
+            <a:off x="4692324" y="4429828"/>
             <a:ext cx="1137105" cy="1020736"/>
           </a:xfrm>
           <a:prstGeom prst="straightConnector1">
@@ -6107,7 +6109,7 @@
         </p:nvCxnSpPr>
         <p:spPr>
           <a:xfrm>
-            <a:off x="2709966" y="3674473"/>
+            <a:off x="3167164" y="3674473"/>
             <a:ext cx="2662265" cy="755355"/>
           </a:xfrm>
           <a:prstGeom prst="straightConnector1">
@@ -6150,7 +6152,7 @@
         </p:nvCxnSpPr>
         <p:spPr>
           <a:xfrm flipV="1">
-            <a:off x="4219757" y="4429828"/>
+            <a:off x="4676955" y="4429828"/>
             <a:ext cx="1152474" cy="286856"/>
           </a:xfrm>
           <a:prstGeom prst="straightConnector1">
@@ -6193,7 +6195,7 @@
         </p:nvCxnSpPr>
         <p:spPr>
           <a:xfrm>
-            <a:off x="4227441" y="3982804"/>
+            <a:off x="4684639" y="3982804"/>
             <a:ext cx="1144790" cy="447024"/>
           </a:xfrm>
           <a:prstGeom prst="straightConnector1">
@@ -6232,7 +6234,7 @@
         </p:nvSpPr>
         <p:spPr>
           <a:xfrm rot="16200000">
-            <a:off x="6815999" y="4311367"/>
+            <a:off x="7273197" y="4311367"/>
             <a:ext cx="2236510" cy="584775"/>
           </a:xfrm>
           <a:prstGeom prst="rect">
@@ -6277,7 +6279,7 @@
         </p:nvSpPr>
         <p:spPr>
           <a:xfrm>
-            <a:off x="9180776" y="5828157"/>
+            <a:off x="9637974" y="5828157"/>
             <a:ext cx="902811" cy="307777"/>
           </a:xfrm>
           <a:prstGeom prst="rect">
@@ -6315,7 +6317,7 @@
         </p:nvCxnSpPr>
         <p:spPr>
           <a:xfrm>
-            <a:off x="4995661" y="3141063"/>
+            <a:off x="5452859" y="3141063"/>
             <a:ext cx="4141757" cy="0"/>
           </a:xfrm>
           <a:prstGeom prst="straightConnector1">
@@ -6357,7 +6359,7 @@
         </p:nvSpPr>
         <p:spPr>
           <a:xfrm>
-            <a:off x="9137418" y="2962587"/>
+            <a:off x="9594616" y="2962587"/>
             <a:ext cx="1829433" cy="830997"/>
           </a:xfrm>
           <a:prstGeom prst="rect">
@@ -6428,7 +6430,7 @@
         </p:nvSpPr>
         <p:spPr>
           <a:xfrm rot="16200000">
-            <a:off x="8026166" y="3402581"/>
+            <a:off x="8483364" y="3402581"/>
             <a:ext cx="1442960" cy="338554"/>
           </a:xfrm>
           <a:prstGeom prst="rect">
@@ -6473,7 +6475,7 @@
         </p:nvCxnSpPr>
         <p:spPr>
           <a:xfrm>
-            <a:off x="4219757" y="4716684"/>
+            <a:off x="4676955" y="4716684"/>
             <a:ext cx="2353956" cy="1277436"/>
           </a:xfrm>
           <a:prstGeom prst="straightConnector1">
@@ -6521,7 +6523,7 @@
         </p:nvCxnSpPr>
         <p:spPr>
           <a:xfrm>
-            <a:off x="4227441" y="3982804"/>
+            <a:off x="4684639" y="3982804"/>
             <a:ext cx="2346272" cy="2011316"/>
           </a:xfrm>
           <a:prstGeom prst="straightConnector1">
@@ -6569,7 +6571,7 @@
         </p:nvCxnSpPr>
         <p:spPr>
           <a:xfrm>
-            <a:off x="2715422" y="5158947"/>
+            <a:off x="3172620" y="5158947"/>
             <a:ext cx="3858291" cy="835173"/>
           </a:xfrm>
           <a:prstGeom prst="straightConnector1">
@@ -6616,7 +6618,7 @@
         </p:nvCxnSpPr>
         <p:spPr>
           <a:xfrm>
-            <a:off x="4995661" y="5981371"/>
+            <a:off x="5452859" y="5981371"/>
             <a:ext cx="4185115" cy="675"/>
           </a:xfrm>
           <a:prstGeom prst="straightConnector1">
@@ -6662,7 +6664,7 @@
         </p:nvCxnSpPr>
         <p:spPr>
           <a:xfrm flipV="1">
-            <a:off x="8226642" y="3378086"/>
+            <a:off x="8683840" y="3378086"/>
             <a:ext cx="910776" cy="1225669"/>
           </a:xfrm>
           <a:prstGeom prst="bentConnector3">
@@ -6706,7 +6708,7 @@
         </p:nvSpPr>
         <p:spPr>
           <a:xfrm>
-            <a:off x="2520865" y="4231426"/>
+            <a:off x="2978063" y="4231426"/>
             <a:ext cx="215153" cy="217074"/>
           </a:xfrm>
           <a:prstGeom prst="ellipse">
@@ -6758,7 +6760,7 @@
         </p:nvSpPr>
         <p:spPr>
           <a:xfrm>
-            <a:off x="2426660" y="3719424"/>
+            <a:off x="2883858" y="3719424"/>
             <a:ext cx="415498" cy="230832"/>
           </a:xfrm>
           <a:prstGeom prst="rect">
@@ -6797,7 +6799,7 @@
         </p:nvCxnSpPr>
         <p:spPr>
           <a:xfrm flipH="1" flipV="1">
-            <a:off x="2736018" y="4339963"/>
+            <a:off x="3193216" y="4339963"/>
             <a:ext cx="1315463" cy="1033854"/>
           </a:xfrm>
           <a:prstGeom prst="straightConnector1">
@@ -6843,7 +6845,7 @@
         </p:nvCxnSpPr>
         <p:spPr>
           <a:xfrm>
-            <a:off x="2704510" y="4416710"/>
+            <a:off x="3161708" y="4416710"/>
             <a:ext cx="2667721" cy="13118"/>
           </a:xfrm>
           <a:prstGeom prst="straightConnector1">
@@ -6886,7 +6888,7 @@
         </p:nvCxnSpPr>
         <p:spPr>
           <a:xfrm flipH="1">
-            <a:off x="2736018" y="3906057"/>
+            <a:off x="3193216" y="3906057"/>
             <a:ext cx="1307778" cy="433906"/>
           </a:xfrm>
           <a:prstGeom prst="straightConnector1">
@@ -6932,7 +6934,7 @@
         </p:nvCxnSpPr>
         <p:spPr>
           <a:xfrm>
-            <a:off x="2709966" y="3674473"/>
+            <a:off x="3167164" y="3674473"/>
             <a:ext cx="3863747" cy="2319647"/>
           </a:xfrm>
           <a:prstGeom prst="straightConnector1">
@@ -6980,7 +6982,7 @@
         </p:nvCxnSpPr>
         <p:spPr>
           <a:xfrm>
-            <a:off x="2704510" y="4416710"/>
+            <a:off x="3161708" y="4416710"/>
             <a:ext cx="3869203" cy="1577410"/>
           </a:xfrm>
           <a:prstGeom prst="straightConnector1">
@@ -7028,7 +7030,7 @@
         </p:nvCxnSpPr>
         <p:spPr>
           <a:xfrm>
-            <a:off x="7119279" y="3159486"/>
+            <a:off x="7576477" y="3159486"/>
             <a:ext cx="12700" cy="2834634"/>
           </a:xfrm>
           <a:prstGeom prst="curvedConnector3">
@@ -7073,7 +7075,7 @@
         </p:nvCxnSpPr>
         <p:spPr>
           <a:xfrm>
-            <a:off x="7111595" y="3726413"/>
+            <a:off x="7568793" y="3726413"/>
             <a:ext cx="7684" cy="2267707"/>
           </a:xfrm>
           <a:prstGeom prst="curvedConnector3">
@@ -7118,7 +7120,7 @@
         </p:nvCxnSpPr>
         <p:spPr>
           <a:xfrm>
-            <a:off x="7111595" y="4293340"/>
+            <a:off x="7568793" y="4293340"/>
             <a:ext cx="7684" cy="1700780"/>
           </a:xfrm>
           <a:prstGeom prst="curvedConnector3">
@@ -7163,7 +7165,7 @@
         </p:nvCxnSpPr>
         <p:spPr>
           <a:xfrm>
-            <a:off x="7111595" y="4860267"/>
+            <a:off x="7568793" y="4860267"/>
             <a:ext cx="7684" cy="1133853"/>
           </a:xfrm>
           <a:prstGeom prst="curvedConnector3">
@@ -7208,7 +7210,7 @@
         </p:nvCxnSpPr>
         <p:spPr>
           <a:xfrm>
-            <a:off x="7111595" y="5427194"/>
+            <a:off x="7568793" y="5427194"/>
             <a:ext cx="7684" cy="566926"/>
           </a:xfrm>
           <a:prstGeom prst="curvedConnector3">
@@ -7249,7 +7251,7 @@
         </p:nvSpPr>
         <p:spPr>
           <a:xfrm>
-            <a:off x="243075" y="2887960"/>
+            <a:off x="700273" y="2887960"/>
             <a:ext cx="215153" cy="217074"/>
           </a:xfrm>
           <a:prstGeom prst="ellipse">
@@ -7301,7 +7303,7 @@
         </p:nvSpPr>
         <p:spPr>
           <a:xfrm>
-            <a:off x="403044" y="2864064"/>
+            <a:off x="860242" y="2864064"/>
             <a:ext cx="732893" cy="276999"/>
           </a:xfrm>
           <a:prstGeom prst="rect">
@@ -7340,7 +7342,7 @@
         </p:nvSpPr>
         <p:spPr>
           <a:xfrm>
-            <a:off x="239860" y="3169011"/>
+            <a:off x="697058" y="3169011"/>
             <a:ext cx="545566" cy="217074"/>
           </a:xfrm>
           <a:prstGeom prst="rect">
@@ -7389,7 +7391,7 @@
         </p:nvSpPr>
         <p:spPr>
           <a:xfrm>
-            <a:off x="744252" y="3145114"/>
+            <a:off x="1201450" y="3145114"/>
             <a:ext cx="798617" cy="276999"/>
           </a:xfrm>
           <a:prstGeom prst="rect">
@@ -7433,7 +7435,7 @@
         </p:nvSpPr>
         <p:spPr>
           <a:xfrm>
-            <a:off x="82144" y="3481161"/>
+            <a:off x="539342" y="3481161"/>
             <a:ext cx="1648825" cy="1015663"/>
           </a:xfrm>
           <a:prstGeom prst="rect">
@@ -7570,7 +7572,7 @@
         <p:spPr>
           <a:xfrm>
             <a:off x="-1" y="577517"/>
-            <a:ext cx="12192000" cy="4247317"/>
+            <a:ext cx="12192000" cy="5078313"/>
           </a:xfrm>
           <a:prstGeom prst="rect">
             <a:avLst/>
@@ -7585,7 +7587,15 @@
           <a:p>
             <a:r>
               <a:rPr lang="ja-JP" altLang="en-US" b="1"/>
-              <a:t>◾️技術的課題</a:t>
+              <a:t>◾️</a:t>
+            </a:r>
+            <a:r>
+              <a:rPr lang="en-US" altLang="ja-JP" b="1" dirty="0"/>
+              <a:t>NER</a:t>
+            </a:r>
+            <a:r>
+              <a:rPr lang="ja-JP" altLang="en-US" b="1"/>
+              <a:t>の技術的課題</a:t>
             </a:r>
             <a:endParaRPr lang="en-US" altLang="ja-JP" b="1" dirty="0"/>
           </a:p>
@@ -7596,7 +7606,7 @@
             </a:pPr>
             <a:r>
               <a:rPr lang="ja-JP" altLang="en-US"/>
-              <a:t>「地域」、「有体物」等にかかる記述の特定（ターム抽出）</a:t>
+              <a:t>「地域」、「個人名」、「固有現象」等にかかる記述の特定（ターム抽出）</a:t>
             </a:r>
             <a:endParaRPr lang="en-US" altLang="ja-JP" dirty="0"/>
           </a:p>
@@ -7639,14 +7649,14 @@
           <a:p>
             <a:r>
               <a:rPr lang="ja-JP" altLang="en-US" b="1"/>
-              <a:t>◾️「地域名称」（地名）関係の課題</a:t>
+              <a:t>◾️特に「地域名称」（地名）関係の課題</a:t>
             </a:r>
             <a:endParaRPr lang="en-US" altLang="ja-JP" b="1" dirty="0"/>
           </a:p>
           <a:p>
             <a:r>
               <a:rPr lang="ja-JP" altLang="en-US" b="1"/>
-              <a:t>▪️名称　←　今日の話題</a:t>
+              <a:t>▪️名称そのもの</a:t>
             </a:r>
             <a:endParaRPr lang="en-US" altLang="ja-JP" b="1" dirty="0"/>
           </a:p>
@@ -7689,7 +7699,7 @@
           <a:p>
             <a:r>
               <a:rPr lang="ja-JP" altLang="en-US" b="1"/>
-              <a:t>▪️関係性</a:t>
+              <a:t>▪️名称の関係性</a:t>
             </a:r>
             <a:endParaRPr lang="en-US" altLang="ja-JP" b="1" dirty="0"/>
           </a:p>
@@ -7715,12 +7725,619 @@
             </a:r>
             <a:endParaRPr lang="en-US" altLang="ja-JP" dirty="0"/>
           </a:p>
+          <a:p>
+            <a:endParaRPr lang="en-US" altLang="ja-JP" dirty="0"/>
+          </a:p>
+          <a:p>
+            <a:r>
+              <a:rPr lang="ja-JP" altLang="en-US" b="1"/>
+              <a:t>◾️本発表では</a:t>
+            </a:r>
+            <a:endParaRPr lang="en-US" altLang="ja-JP" b="1" dirty="0"/>
+          </a:p>
+          <a:p>
+            <a:pPr marL="285750" indent="-285750">
+              <a:buFont typeface="Arial" panose="020B0604020202020204" pitchFamily="34" charset="0"/>
+              <a:buChar char="•"/>
+            </a:pPr>
+            <a:r>
+              <a:rPr lang="ja-JP" altLang="en-US"/>
+              <a:t>文書からの「地名の抽出」に着目する</a:t>
+            </a:r>
+            <a:endParaRPr lang="en-US" altLang="ja-JP" dirty="0"/>
+          </a:p>
         </p:txBody>
       </p:sp>
     </p:spTree>
     <p:extLst>
       <p:ext uri="{BB962C8B-B14F-4D97-AF65-F5344CB8AC3E}">
         <p14:creationId xmlns:p14="http://schemas.microsoft.com/office/powerpoint/2010/main" val="3383124402"/>
+      </p:ext>
+    </p:extLst>
+  </p:cSld>
+  <p:clrMapOvr>
+    <a:masterClrMapping/>
+  </p:clrMapOvr>
+</p:sld>
+</file>
+
+<file path=ppt/slides/slide5.xml><?xml version="1.0" encoding="utf-8"?>
+<p:sld xmlns:a="http://schemas.openxmlformats.org/drawingml/2006/main" xmlns:r="http://schemas.openxmlformats.org/officeDocument/2006/relationships" xmlns:p="http://schemas.openxmlformats.org/presentationml/2006/main">
+  <p:cSld>
+    <p:spTree>
+      <p:nvGrpSpPr>
+        <p:cNvPr id="1" name="">
+          <a:extLst>
+            <a:ext uri="{FF2B5EF4-FFF2-40B4-BE49-F238E27FC236}">
+              <a16:creationId xmlns:a16="http://schemas.microsoft.com/office/drawing/2014/main" id="{8447BAEF-ED48-AA28-A78E-6C0057277139}"/>
+            </a:ext>
+          </a:extLst>
+        </p:cNvPr>
+        <p:cNvGrpSpPr/>
+        <p:nvPr/>
+      </p:nvGrpSpPr>
+      <p:grpSpPr>
+        <a:xfrm>
+          <a:off x="0" y="0"/>
+          <a:ext cx="0" cy="0"/>
+          <a:chOff x="0" y="0"/>
+          <a:chExt cx="0" cy="0"/>
+        </a:xfrm>
+      </p:grpSpPr>
+      <p:sp>
+        <p:nvSpPr>
+          <p:cNvPr id="2" name="タイトル 1">
+            <a:extLst>
+              <a:ext uri="{FF2B5EF4-FFF2-40B4-BE49-F238E27FC236}">
+                <a16:creationId xmlns:a16="http://schemas.microsoft.com/office/drawing/2014/main" id="{7531DFBF-5A22-D82C-DA39-238E0C1A3179}"/>
+              </a:ext>
+            </a:extLst>
+          </p:cNvPr>
+          <p:cNvSpPr>
+            <a:spLocks noGrp="1"/>
+          </p:cNvSpPr>
+          <p:nvPr>
+            <p:ph type="title"/>
+          </p:nvPr>
+        </p:nvSpPr>
+        <p:spPr>
+          <a:xfrm>
+            <a:off x="0" y="1"/>
+            <a:ext cx="12192000" cy="577516"/>
+          </a:xfrm>
+          <a:solidFill>
+            <a:schemeClr val="bg1">
+              <a:lumMod val="85000"/>
+            </a:schemeClr>
+          </a:solidFill>
+        </p:spPr>
+        <p:txBody>
+          <a:bodyPr>
+            <a:normAutofit fontScale="90000"/>
+          </a:bodyPr>
+          <a:lstStyle/>
+          <a:p>
+            <a:r>
+              <a:rPr lang="ja-JP" altLang="en-US" sz="3600"/>
+              <a:t>目的</a:t>
+            </a:r>
+            <a:endParaRPr kumimoji="1" lang="ja-JP" altLang="en-US" sz="3600"/>
+          </a:p>
+        </p:txBody>
+      </p:sp>
+      <p:sp>
+        <p:nvSpPr>
+          <p:cNvPr id="5" name="テキスト ボックス 4">
+            <a:extLst>
+              <a:ext uri="{FF2B5EF4-FFF2-40B4-BE49-F238E27FC236}">
+                <a16:creationId xmlns:a16="http://schemas.microsoft.com/office/drawing/2014/main" id="{2F2E5C55-83E2-107E-1378-E92140D4C437}"/>
+              </a:ext>
+            </a:extLst>
+          </p:cNvPr>
+          <p:cNvSpPr txBox="1"/>
+          <p:nvPr/>
+        </p:nvSpPr>
+        <p:spPr>
+          <a:xfrm>
+            <a:off x="-1" y="577517"/>
+            <a:ext cx="12192000" cy="1754326"/>
+          </a:xfrm>
+          <a:prstGeom prst="rect">
+            <a:avLst/>
+          </a:prstGeom>
+          <a:noFill/>
+        </p:spPr>
+        <p:txBody>
+          <a:bodyPr wrap="square" rtlCol="0">
+            <a:spAutoFit/>
+          </a:bodyPr>
+          <a:lstStyle/>
+          <a:p>
+            <a:r>
+              <a:rPr lang="ja-JP" altLang="en-US" b="1"/>
+              <a:t>◾️文書からの地名に抽出に関して、技術的な課題を検討する</a:t>
+            </a:r>
+            <a:endParaRPr lang="en-US" altLang="ja-JP" b="1" dirty="0"/>
+          </a:p>
+          <a:p>
+            <a:pPr marL="285750" indent="-285750">
+              <a:buFont typeface="Arial" panose="020B0604020202020204" pitchFamily="34" charset="0"/>
+              <a:buChar char="•"/>
+            </a:pPr>
+            <a:r>
+              <a:rPr lang="ja-JP" altLang="en-US"/>
+              <a:t>具体的には、日本語に対する</a:t>
+            </a:r>
+            <a:endParaRPr lang="en-US" altLang="ja-JP" dirty="0"/>
+          </a:p>
+          <a:p>
+            <a:pPr marL="742950" lvl="1" indent="-285750">
+              <a:buFont typeface="Arial" panose="020B0604020202020204" pitchFamily="34" charset="0"/>
+              <a:buChar char="•"/>
+            </a:pPr>
+            <a:r>
+              <a:rPr lang="ja-JP" altLang="en-US"/>
+              <a:t>固有表現抽出の試行</a:t>
+            </a:r>
+            <a:endParaRPr lang="en-US" altLang="ja-JP" dirty="0"/>
+          </a:p>
+          <a:p>
+            <a:pPr marL="742950" lvl="1" indent="-285750">
+              <a:buFont typeface="Arial" panose="020B0604020202020204" pitchFamily="34" charset="0"/>
+              <a:buChar char="•"/>
+            </a:pPr>
+            <a:r>
+              <a:rPr lang="ja-JP" altLang="en-US"/>
+              <a:t>抽出された固有表現の判定の試行</a:t>
+            </a:r>
+            <a:endParaRPr lang="en-US" altLang="ja-JP" dirty="0"/>
+          </a:p>
+          <a:p>
+            <a:pPr marL="742950" lvl="1" indent="-285750">
+              <a:buFont typeface="Arial" panose="020B0604020202020204" pitchFamily="34" charset="0"/>
+              <a:buChar char="•"/>
+            </a:pPr>
+            <a:r>
+              <a:rPr lang="ja-JP" altLang="en-US"/>
+              <a:t>判定における問題の整理</a:t>
+            </a:r>
+            <a:endParaRPr lang="en-US" altLang="ja-JP" dirty="0"/>
+          </a:p>
+          <a:p>
+            <a:pPr marL="285750" indent="-285750">
+              <a:buFont typeface="Arial" panose="020B0604020202020204" pitchFamily="34" charset="0"/>
+              <a:buChar char="•"/>
+            </a:pPr>
+            <a:r>
+              <a:rPr lang="ja-JP" altLang="en-US"/>
+              <a:t>近年利用しやすくなった学習済み</a:t>
+            </a:r>
+            <a:r>
+              <a:rPr lang="en-US" altLang="ja-JP" dirty="0"/>
+              <a:t>LLM</a:t>
+            </a:r>
+            <a:r>
+              <a:rPr lang="ja-JP" altLang="en-US"/>
+              <a:t>を用いることにより簡易な方法を模索する</a:t>
+            </a:r>
+            <a:endParaRPr lang="en-US" altLang="ja-JP" dirty="0"/>
+          </a:p>
+        </p:txBody>
+      </p:sp>
+    </p:spTree>
+    <p:extLst>
+      <p:ext uri="{BB962C8B-B14F-4D97-AF65-F5344CB8AC3E}">
+        <p14:creationId xmlns:p14="http://schemas.microsoft.com/office/powerpoint/2010/main" val="2396115686"/>
+      </p:ext>
+    </p:extLst>
+  </p:cSld>
+  <p:clrMapOvr>
+    <a:masterClrMapping/>
+  </p:clrMapOvr>
+</p:sld>
+</file>
+
+<file path=ppt/slides/slide6.xml><?xml version="1.0" encoding="utf-8"?>
+<p:sld xmlns:a="http://schemas.openxmlformats.org/drawingml/2006/main" xmlns:r="http://schemas.openxmlformats.org/officeDocument/2006/relationships" xmlns:p="http://schemas.openxmlformats.org/presentationml/2006/main">
+  <p:cSld>
+    <p:spTree>
+      <p:nvGrpSpPr>
+        <p:cNvPr id="1" name="">
+          <a:extLst>
+            <a:ext uri="{FF2B5EF4-FFF2-40B4-BE49-F238E27FC236}">
+              <a16:creationId xmlns:a16="http://schemas.microsoft.com/office/drawing/2014/main" id="{8AE62D95-6BB5-08C4-6C52-791A0EAD6D97}"/>
+            </a:ext>
+          </a:extLst>
+        </p:cNvPr>
+        <p:cNvGrpSpPr/>
+        <p:nvPr/>
+      </p:nvGrpSpPr>
+      <p:grpSpPr>
+        <a:xfrm>
+          <a:off x="0" y="0"/>
+          <a:ext cx="0" cy="0"/>
+          <a:chOff x="0" y="0"/>
+          <a:chExt cx="0" cy="0"/>
+        </a:xfrm>
+      </p:grpSpPr>
+      <p:sp>
+        <p:nvSpPr>
+          <p:cNvPr id="2" name="タイトル 1">
+            <a:extLst>
+              <a:ext uri="{FF2B5EF4-FFF2-40B4-BE49-F238E27FC236}">
+                <a16:creationId xmlns:a16="http://schemas.microsoft.com/office/drawing/2014/main" id="{059F9B36-6E1B-F1B7-3CA0-607DD3CB5039}"/>
+              </a:ext>
+            </a:extLst>
+          </p:cNvPr>
+          <p:cNvSpPr>
+            <a:spLocks noGrp="1"/>
+          </p:cNvSpPr>
+          <p:nvPr>
+            <p:ph type="title"/>
+          </p:nvPr>
+        </p:nvSpPr>
+        <p:spPr>
+          <a:xfrm>
+            <a:off x="0" y="1"/>
+            <a:ext cx="12192000" cy="577516"/>
+          </a:xfrm>
+          <a:solidFill>
+            <a:schemeClr val="bg1">
+              <a:lumMod val="85000"/>
+            </a:schemeClr>
+          </a:solidFill>
+        </p:spPr>
+        <p:txBody>
+          <a:bodyPr>
+            <a:normAutofit fontScale="90000"/>
+          </a:bodyPr>
+          <a:lstStyle/>
+          <a:p>
+            <a:r>
+              <a:rPr kumimoji="1" lang="ja-JP" altLang="en-US" sz="3600"/>
+              <a:t>先行研究</a:t>
+            </a:r>
+          </a:p>
+        </p:txBody>
+      </p:sp>
+      <p:sp>
+        <p:nvSpPr>
+          <p:cNvPr id="5" name="テキスト ボックス 4">
+            <a:extLst>
+              <a:ext uri="{FF2B5EF4-FFF2-40B4-BE49-F238E27FC236}">
+                <a16:creationId xmlns:a16="http://schemas.microsoft.com/office/drawing/2014/main" id="{A11988AF-0076-B539-AA4D-FB9D86D4B661}"/>
+              </a:ext>
+            </a:extLst>
+          </p:cNvPr>
+          <p:cNvSpPr txBox="1"/>
+          <p:nvPr/>
+        </p:nvSpPr>
+        <p:spPr>
+          <a:xfrm>
+            <a:off x="0" y="577517"/>
+            <a:ext cx="12192000" cy="3970318"/>
+          </a:xfrm>
+          <a:prstGeom prst="rect">
+            <a:avLst/>
+          </a:prstGeom>
+          <a:noFill/>
+        </p:spPr>
+        <p:txBody>
+          <a:bodyPr wrap="square" rtlCol="0">
+            <a:spAutoFit/>
+          </a:bodyPr>
+          <a:lstStyle/>
+          <a:p>
+            <a:pPr marL="285750" indent="-285750">
+              <a:buFont typeface="Arial" panose="020B0604020202020204" pitchFamily="34" charset="0"/>
+              <a:buChar char="•"/>
+            </a:pPr>
+            <a:r>
+              <a:rPr lang="en" altLang="ja-JP" dirty="0"/>
+              <a:t>Toponym resolution leveraging lightweight and open-source large language models and geo-knowledge. 2024.  (</a:t>
+            </a:r>
+            <a:r>
+              <a:rPr lang="en" altLang="ja-JP" dirty="0">
+                <a:hlinkClick r:id="rId2"/>
+              </a:rPr>
+              <a:t>https://www.tandfonline.com/doi/full/10.1080/13658816.2024.2405182</a:t>
+            </a:r>
+            <a:r>
+              <a:rPr lang="en" altLang="ja-JP" dirty="0"/>
+              <a:t>)</a:t>
+            </a:r>
+          </a:p>
+          <a:p>
+            <a:pPr marL="742950" lvl="1" indent="-285750">
+              <a:buFont typeface="Arial" panose="020B0604020202020204" pitchFamily="34" charset="0"/>
+              <a:buChar char="•"/>
+            </a:pPr>
+            <a:r>
+              <a:rPr lang="ja-JP" altLang="en-US"/>
+              <a:t>地名から地理的な位置を推定する</a:t>
+            </a:r>
+            <a:endParaRPr lang="en-US" altLang="ja-JP" dirty="0"/>
+          </a:p>
+          <a:p>
+            <a:pPr marL="742950" lvl="1" indent="-285750">
+              <a:buFont typeface="Arial" panose="020B0604020202020204" pitchFamily="34" charset="0"/>
+              <a:buChar char="•"/>
+            </a:pPr>
+            <a:r>
+              <a:rPr lang="en-US" altLang="ja-JP" dirty="0"/>
+              <a:t>GIS</a:t>
+            </a:r>
+            <a:r>
+              <a:rPr lang="ja-JP" altLang="en-US"/>
+              <a:t>情報を使う</a:t>
+            </a:r>
+            <a:endParaRPr lang="en-US" altLang="ja-JP" dirty="0"/>
+          </a:p>
+          <a:p>
+            <a:pPr marL="742950" lvl="1" indent="-285750">
+              <a:buFont typeface="Arial" panose="020B0604020202020204" pitchFamily="34" charset="0"/>
+              <a:buChar char="•"/>
+            </a:pPr>
+            <a:r>
+              <a:rPr lang="ja-JP" altLang="en-US"/>
+              <a:t>既存</a:t>
+            </a:r>
+            <a:r>
+              <a:rPr lang="en-US" altLang="ja-JP" dirty="0"/>
+              <a:t>LLM</a:t>
+            </a:r>
+            <a:r>
+              <a:rPr lang="ja-JP" altLang="en-US"/>
+              <a:t>を利用</a:t>
+            </a:r>
+            <a:endParaRPr lang="en-US" altLang="ja-JP" dirty="0"/>
+          </a:p>
+          <a:p>
+            <a:pPr marL="285750" indent="-285750">
+              <a:buFont typeface="Arial" panose="020B0604020202020204" pitchFamily="34" charset="0"/>
+              <a:buChar char="•"/>
+            </a:pPr>
+            <a:r>
+              <a:rPr lang="en" altLang="ja-JP" dirty="0"/>
+              <a:t>Collective Named Entity Disambiguation using Graph Ranking and Clique Partitioning Approaches. 2014. (</a:t>
+            </a:r>
+            <a:r>
+              <a:rPr lang="en" altLang="ja-JP" dirty="0">
+                <a:hlinkClick r:id="rId3"/>
+              </a:rPr>
+              <a:t>https://aclanthology.org/C14-1147.pdf</a:t>
+            </a:r>
+            <a:r>
+              <a:rPr lang="en" altLang="ja-JP" dirty="0"/>
+              <a:t>)</a:t>
+            </a:r>
+          </a:p>
+          <a:p>
+            <a:pPr marL="742950" lvl="1" indent="-285750">
+              <a:buFont typeface="Arial" panose="020B0604020202020204" pitchFamily="34" charset="0"/>
+              <a:buChar char="•"/>
+            </a:pPr>
+            <a:r>
+              <a:rPr lang="en-US" altLang="ja-JP" dirty="0"/>
+              <a:t>Knowledge Base</a:t>
+            </a:r>
+            <a:r>
+              <a:rPr lang="ja-JP" altLang="en-US"/>
+              <a:t>（辞書）を利用</a:t>
+            </a:r>
+            <a:endParaRPr lang="en-US" altLang="ja-JP" dirty="0"/>
+          </a:p>
+          <a:p>
+            <a:pPr marL="742950" lvl="1" indent="-285750">
+              <a:buFont typeface="Arial" panose="020B0604020202020204" pitchFamily="34" charset="0"/>
+              <a:buChar char="•"/>
+            </a:pPr>
+            <a:r>
+              <a:rPr lang="ja-JP" altLang="en-US"/>
+              <a:t>グラフ構造を解析（ノードが地名）</a:t>
+            </a:r>
+            <a:endParaRPr lang="en-US" altLang="ja-JP" dirty="0"/>
+          </a:p>
+          <a:p>
+            <a:pPr marL="742950" lvl="1" indent="-285750">
+              <a:buFont typeface="Arial" panose="020B0604020202020204" pitchFamily="34" charset="0"/>
+              <a:buChar char="•"/>
+            </a:pPr>
+            <a:r>
+              <a:rPr lang="ja-JP" altLang="en-US"/>
+              <a:t>既存</a:t>
+            </a:r>
+            <a:r>
+              <a:rPr lang="en-US" altLang="ja-JP" dirty="0"/>
+              <a:t>LLM</a:t>
+            </a:r>
+            <a:r>
+              <a:rPr lang="ja-JP" altLang="en-US"/>
+              <a:t>を利用しない</a:t>
+            </a:r>
+            <a:endParaRPr lang="en-US" altLang="ja-JP" dirty="0"/>
+          </a:p>
+          <a:p>
+            <a:pPr marL="285750" indent="-285750">
+              <a:buFont typeface="Arial" panose="020B0604020202020204" pitchFamily="34" charset="0"/>
+              <a:buChar char="•"/>
+            </a:pPr>
+            <a:r>
+              <a:rPr lang="ja-JP" altLang="en-US"/>
+              <a:t>歴史災害史料からの自動地名抽出に向けた自然言語処理システムの性能評価</a:t>
+            </a:r>
+            <a:r>
+              <a:rPr lang="en-US" altLang="ja-JP" dirty="0"/>
+              <a:t>. 2023. (https://</a:t>
+            </a:r>
+            <a:r>
+              <a:rPr lang="en-US" altLang="ja-JP" dirty="0" err="1"/>
+              <a:t>ipsj.ixsq.nii.ac.jp</a:t>
+            </a:r>
+            <a:r>
+              <a:rPr lang="en-US" altLang="ja-JP" dirty="0"/>
+              <a:t>/record/231338/files/IPSJ-CH2023003.pdf)</a:t>
+            </a:r>
+          </a:p>
+          <a:p>
+            <a:pPr marL="742950" lvl="1" indent="-285750">
+              <a:buFont typeface="Arial" panose="020B0604020202020204" pitchFamily="34" charset="0"/>
+              <a:buChar char="•"/>
+            </a:pPr>
+            <a:r>
+              <a:rPr lang="ja-JP" altLang="en-US"/>
+              <a:t>固有表現抽出と</a:t>
+            </a:r>
+            <a:r>
+              <a:rPr lang="en-US" altLang="ja-JP" dirty="0"/>
+              <a:t>LLM</a:t>
+            </a:r>
+            <a:r>
+              <a:rPr lang="ja-JP" altLang="en-US"/>
+              <a:t>に対して評価（連結利用は行なっていない）</a:t>
+            </a:r>
+            <a:endParaRPr lang="en-US" altLang="ja-JP" dirty="0"/>
+          </a:p>
+          <a:p>
+            <a:pPr marL="742950" lvl="1" indent="-285750">
+              <a:buFont typeface="Arial" panose="020B0604020202020204" pitchFamily="34" charset="0"/>
+              <a:buChar char="•"/>
+            </a:pPr>
+            <a:r>
+              <a:rPr lang="ja-JP" altLang="en-US"/>
+              <a:t>「正解」に対する正答の評価</a:t>
+            </a:r>
+            <a:endParaRPr lang="en-US" altLang="ja-JP" dirty="0"/>
+          </a:p>
+        </p:txBody>
+      </p:sp>
+      <p:sp>
+        <p:nvSpPr>
+          <p:cNvPr id="3" name="テキスト ボックス 2">
+            <a:extLst>
+              <a:ext uri="{FF2B5EF4-FFF2-40B4-BE49-F238E27FC236}">
+                <a16:creationId xmlns:a16="http://schemas.microsoft.com/office/drawing/2014/main" id="{AACCC8C1-61CC-DBD3-10A4-7D171D5FF268}"/>
+              </a:ext>
+            </a:extLst>
+          </p:cNvPr>
+          <p:cNvSpPr txBox="1"/>
+          <p:nvPr/>
+        </p:nvSpPr>
+        <p:spPr>
+          <a:xfrm>
+            <a:off x="0" y="4803155"/>
+            <a:ext cx="12192000" cy="1754326"/>
+          </a:xfrm>
+          <a:prstGeom prst="rect">
+            <a:avLst/>
+          </a:prstGeom>
+          <a:noFill/>
+        </p:spPr>
+        <p:txBody>
+          <a:bodyPr wrap="square" rtlCol="0">
+            <a:spAutoFit/>
+          </a:bodyPr>
+          <a:lstStyle/>
+          <a:p>
+            <a:pPr marL="285750" indent="-285750">
+              <a:buFont typeface="Wingdings" pitchFamily="2" charset="2"/>
+              <a:buChar char="Ø"/>
+            </a:pPr>
+            <a:r>
+              <a:rPr kumimoji="1" lang="ja-JP" altLang="en-US"/>
+              <a:t>海外では地名から地理的な位置を特定する研究は典型的（</a:t>
+            </a:r>
+            <a:r>
+              <a:rPr kumimoji="1" lang="en-US" altLang="ja-JP" dirty="0"/>
+              <a:t>toponym</a:t>
+            </a:r>
+            <a:r>
+              <a:rPr kumimoji="1" lang="ja-JP" altLang="en-US"/>
+              <a:t>）</a:t>
+            </a:r>
+            <a:endParaRPr lang="en-US" altLang="ja-JP" dirty="0"/>
+          </a:p>
+          <a:p>
+            <a:pPr marL="285750" indent="-285750">
+              <a:buFont typeface="Wingdings" pitchFamily="2" charset="2"/>
+              <a:buChar char="Ø"/>
+            </a:pPr>
+            <a:r>
+              <a:rPr kumimoji="1" lang="ja-JP" altLang="en-US"/>
+              <a:t>曖昧性解決においても地理情報と結びつけて行うものがほとんど</a:t>
+            </a:r>
+            <a:endParaRPr kumimoji="1" lang="en-US" altLang="ja-JP" dirty="0"/>
+          </a:p>
+          <a:p>
+            <a:pPr marL="285750" indent="-285750">
+              <a:buFont typeface="Wingdings" pitchFamily="2" charset="2"/>
+              <a:buChar char="Ø"/>
+            </a:pPr>
+            <a:r>
+              <a:rPr lang="ja-JP" altLang="en-US"/>
+              <a:t>地理情報を利用しない曖昧性解決においては、近年には独自</a:t>
+            </a:r>
+            <a:r>
+              <a:rPr lang="en-US" altLang="ja-JP" dirty="0"/>
+              <a:t>NN</a:t>
+            </a:r>
+            <a:r>
+              <a:rPr lang="ja-JP" altLang="en-US"/>
+              <a:t>開発によるものが見受けられる</a:t>
+            </a:r>
+            <a:endParaRPr lang="en-US" altLang="ja-JP" dirty="0"/>
+          </a:p>
+          <a:p>
+            <a:pPr marL="285750" indent="-285750">
+              <a:buFont typeface="Wingdings" pitchFamily="2" charset="2"/>
+              <a:buChar char="Ø"/>
+            </a:pPr>
+            <a:r>
+              <a:rPr lang="ja-JP" altLang="en-US"/>
+              <a:t>曖昧性解決において</a:t>
+            </a:r>
+            <a:r>
+              <a:rPr kumimoji="1" lang="ja-JP" altLang="en-US"/>
+              <a:t>一般的な</a:t>
+            </a:r>
+            <a:r>
+              <a:rPr kumimoji="1" lang="en-US" altLang="ja-JP" dirty="0"/>
+              <a:t>LLM</a:t>
+            </a:r>
+            <a:r>
+              <a:rPr lang="ja-JP" altLang="en-US"/>
+              <a:t>が用いられはじめたのはごく最近</a:t>
+            </a:r>
+            <a:endParaRPr lang="en-US" altLang="ja-JP" dirty="0"/>
+          </a:p>
+          <a:p>
+            <a:pPr marL="285750" indent="-285750">
+              <a:buFont typeface="Wingdings" pitchFamily="2" charset="2"/>
+              <a:buChar char="Ø"/>
+            </a:pPr>
+            <a:r>
+              <a:rPr lang="ja-JP" altLang="en-US"/>
+              <a:t>地名と地名以外を含む幅広い固有表現の曖昧性解決も行われている</a:t>
+            </a:r>
+            <a:endParaRPr lang="en-US" altLang="ja-JP" dirty="0"/>
+          </a:p>
+          <a:p>
+            <a:pPr marL="285750" indent="-285750">
+              <a:buFont typeface="Wingdings" pitchFamily="2" charset="2"/>
+              <a:buChar char="Ø"/>
+            </a:pPr>
+            <a:r>
+              <a:rPr kumimoji="1" lang="ja-JP" altLang="en-US"/>
+              <a:t>日本語における事例はほぼ見られない</a:t>
+            </a:r>
+            <a:endParaRPr kumimoji="1" lang="en-US" altLang="ja-JP" dirty="0"/>
+          </a:p>
+        </p:txBody>
+      </p:sp>
+    </p:spTree>
+    <p:extLst>
+      <p:ext uri="{BB962C8B-B14F-4D97-AF65-F5344CB8AC3E}">
+        <p14:creationId xmlns:p14="http://schemas.microsoft.com/office/powerpoint/2010/main" val="2513616949"/>
       </p:ext>
     </p:extLst>
   </p:cSld>

--- a/jsik2026taikai.pptx
+++ b/jsik2026taikai.pptx
@@ -9,8 +9,14 @@
     <p:sldId id="296" r:id="rId3"/>
     <p:sldId id="303" r:id="rId4"/>
     <p:sldId id="304" r:id="rId5"/>
-    <p:sldId id="305" r:id="rId6"/>
-    <p:sldId id="306" r:id="rId7"/>
+    <p:sldId id="306" r:id="rId6"/>
+    <p:sldId id="305" r:id="rId7"/>
+    <p:sldId id="307" r:id="rId8"/>
+    <p:sldId id="308" r:id="rId9"/>
+    <p:sldId id="309" r:id="rId10"/>
+    <p:sldId id="310" r:id="rId11"/>
+    <p:sldId id="311" r:id="rId12"/>
+    <p:sldId id="312" r:id="rId13"/>
   </p:sldIdLst>
   <p:sldSz cx="12192000" cy="6858000"/>
   <p:notesSz cx="6858000" cy="9144000"/>
@@ -264,7 +270,7 @@
           <a:p>
             <a:fld id="{716789AD-CAC3-AD41-B5C9-BF5C62A1889D}" type="datetimeFigureOut">
               <a:rPr kumimoji="1" lang="ja-JP" altLang="en-US" smtClean="0"/>
-              <a:t>2026/4/20</a:t>
+              <a:t>2026/4/21</a:t>
             </a:fld>
             <a:endParaRPr kumimoji="1" lang="ja-JP" altLang="en-US"/>
           </a:p>
@@ -494,7 +500,7 @@
           <a:p>
             <a:fld id="{716789AD-CAC3-AD41-B5C9-BF5C62A1889D}" type="datetimeFigureOut">
               <a:rPr kumimoji="1" lang="ja-JP" altLang="en-US" smtClean="0"/>
-              <a:t>2026/4/20</a:t>
+              <a:t>2026/4/21</a:t>
             </a:fld>
             <a:endParaRPr kumimoji="1" lang="ja-JP" altLang="en-US"/>
           </a:p>
@@ -734,7 +740,7 @@
           <a:p>
             <a:fld id="{716789AD-CAC3-AD41-B5C9-BF5C62A1889D}" type="datetimeFigureOut">
               <a:rPr kumimoji="1" lang="ja-JP" altLang="en-US" smtClean="0"/>
-              <a:t>2026/4/20</a:t>
+              <a:t>2026/4/21</a:t>
             </a:fld>
             <a:endParaRPr kumimoji="1" lang="ja-JP" altLang="en-US"/>
           </a:p>
@@ -964,7 +970,7 @@
           <a:p>
             <a:fld id="{716789AD-CAC3-AD41-B5C9-BF5C62A1889D}" type="datetimeFigureOut">
               <a:rPr kumimoji="1" lang="ja-JP" altLang="en-US" smtClean="0"/>
-              <a:t>2026/4/20</a:t>
+              <a:t>2026/4/21</a:t>
             </a:fld>
             <a:endParaRPr kumimoji="1" lang="ja-JP" altLang="en-US"/>
           </a:p>
@@ -1239,7 +1245,7 @@
           <a:p>
             <a:fld id="{716789AD-CAC3-AD41-B5C9-BF5C62A1889D}" type="datetimeFigureOut">
               <a:rPr kumimoji="1" lang="ja-JP" altLang="en-US" smtClean="0"/>
-              <a:t>2026/4/20</a:t>
+              <a:t>2026/4/21</a:t>
             </a:fld>
             <a:endParaRPr kumimoji="1" lang="ja-JP" altLang="en-US"/>
           </a:p>
@@ -1568,7 +1574,7 @@
           <a:p>
             <a:fld id="{716789AD-CAC3-AD41-B5C9-BF5C62A1889D}" type="datetimeFigureOut">
               <a:rPr kumimoji="1" lang="ja-JP" altLang="en-US" smtClean="0"/>
-              <a:t>2026/4/20</a:t>
+              <a:t>2026/4/21</a:t>
             </a:fld>
             <a:endParaRPr kumimoji="1" lang="ja-JP" altLang="en-US"/>
           </a:p>
@@ -2044,7 +2050,7 @@
           <a:p>
             <a:fld id="{716789AD-CAC3-AD41-B5C9-BF5C62A1889D}" type="datetimeFigureOut">
               <a:rPr kumimoji="1" lang="ja-JP" altLang="en-US" smtClean="0"/>
-              <a:t>2026/4/20</a:t>
+              <a:t>2026/4/21</a:t>
             </a:fld>
             <a:endParaRPr kumimoji="1" lang="ja-JP" altLang="en-US"/>
           </a:p>
@@ -2185,7 +2191,7 @@
           <a:p>
             <a:fld id="{716789AD-CAC3-AD41-B5C9-BF5C62A1889D}" type="datetimeFigureOut">
               <a:rPr kumimoji="1" lang="ja-JP" altLang="en-US" smtClean="0"/>
-              <a:t>2026/4/20</a:t>
+              <a:t>2026/4/21</a:t>
             </a:fld>
             <a:endParaRPr kumimoji="1" lang="ja-JP" altLang="en-US"/>
           </a:p>
@@ -2298,7 +2304,7 @@
           <a:p>
             <a:fld id="{716789AD-CAC3-AD41-B5C9-BF5C62A1889D}" type="datetimeFigureOut">
               <a:rPr kumimoji="1" lang="ja-JP" altLang="en-US" smtClean="0"/>
-              <a:t>2026/4/20</a:t>
+              <a:t>2026/4/21</a:t>
             </a:fld>
             <a:endParaRPr kumimoji="1" lang="ja-JP" altLang="en-US"/>
           </a:p>
@@ -2641,7 +2647,7 @@
           <a:p>
             <a:fld id="{716789AD-CAC3-AD41-B5C9-BF5C62A1889D}" type="datetimeFigureOut">
               <a:rPr kumimoji="1" lang="ja-JP" altLang="en-US" smtClean="0"/>
-              <a:t>2026/4/20</a:t>
+              <a:t>2026/4/21</a:t>
             </a:fld>
             <a:endParaRPr kumimoji="1" lang="ja-JP" altLang="en-US"/>
           </a:p>
@@ -2929,7 +2935,7 @@
           <a:p>
             <a:fld id="{716789AD-CAC3-AD41-B5C9-BF5C62A1889D}" type="datetimeFigureOut">
               <a:rPr kumimoji="1" lang="ja-JP" altLang="en-US" smtClean="0"/>
-              <a:t>2026/4/20</a:t>
+              <a:t>2026/4/21</a:t>
             </a:fld>
             <a:endParaRPr kumimoji="1" lang="ja-JP" altLang="en-US"/>
           </a:p>
@@ -3202,7 +3208,7 @@
           <a:p>
             <a:fld id="{716789AD-CAC3-AD41-B5C9-BF5C62A1889D}" type="datetimeFigureOut">
               <a:rPr kumimoji="1" lang="ja-JP" altLang="en-US" smtClean="0"/>
-              <a:t>2026/4/20</a:t>
+              <a:t>2026/4/21</a:t>
             </a:fld>
             <a:endParaRPr kumimoji="1" lang="ja-JP" altLang="en-US"/>
           </a:p>
@@ -3875,6 +3881,243 @@
 </p:sld>
 </file>
 
+<file path=ppt/slides/slide10.xml><?xml version="1.0" encoding="utf-8"?>
+<p:sld xmlns:a="http://schemas.openxmlformats.org/drawingml/2006/main" xmlns:r="http://schemas.openxmlformats.org/officeDocument/2006/relationships" xmlns:p="http://schemas.openxmlformats.org/presentationml/2006/main">
+  <p:cSld>
+    <p:spTree>
+      <p:nvGrpSpPr>
+        <p:cNvPr id="1" name="">
+          <a:extLst>
+            <a:ext uri="{FF2B5EF4-FFF2-40B4-BE49-F238E27FC236}">
+              <a16:creationId xmlns:a16="http://schemas.microsoft.com/office/drawing/2014/main" id="{B41F33F5-0DFD-B6B1-3D10-353348B2241A}"/>
+            </a:ext>
+          </a:extLst>
+        </p:cNvPr>
+        <p:cNvGrpSpPr/>
+        <p:nvPr/>
+      </p:nvGrpSpPr>
+      <p:grpSpPr>
+        <a:xfrm>
+          <a:off x="0" y="0"/>
+          <a:ext cx="0" cy="0"/>
+          <a:chOff x="0" y="0"/>
+          <a:chExt cx="0" cy="0"/>
+        </a:xfrm>
+      </p:grpSpPr>
+      <p:sp>
+        <p:nvSpPr>
+          <p:cNvPr id="2" name="タイトル 1">
+            <a:extLst>
+              <a:ext uri="{FF2B5EF4-FFF2-40B4-BE49-F238E27FC236}">
+                <a16:creationId xmlns:a16="http://schemas.microsoft.com/office/drawing/2014/main" id="{F3E65BD0-3870-7275-2979-ADFDF5B91F29}"/>
+              </a:ext>
+            </a:extLst>
+          </p:cNvPr>
+          <p:cNvSpPr>
+            <a:spLocks noGrp="1"/>
+          </p:cNvSpPr>
+          <p:nvPr>
+            <p:ph type="title"/>
+          </p:nvPr>
+        </p:nvSpPr>
+        <p:spPr>
+          <a:xfrm>
+            <a:off x="0" y="1"/>
+            <a:ext cx="12192000" cy="577516"/>
+          </a:xfrm>
+          <a:solidFill>
+            <a:schemeClr val="bg1">
+              <a:lumMod val="85000"/>
+            </a:schemeClr>
+          </a:solidFill>
+        </p:spPr>
+        <p:txBody>
+          <a:bodyPr>
+            <a:normAutofit fontScale="90000"/>
+          </a:bodyPr>
+          <a:lstStyle/>
+          <a:p>
+            <a:r>
+              <a:rPr kumimoji="1" lang="ja-JP" altLang="en-US" sz="3600"/>
+              <a:t>マテリアル・方法（使用した</a:t>
+            </a:r>
+            <a:r>
+              <a:rPr kumimoji="1" lang="en-US" altLang="ja-JP" sz="3600"/>
+              <a:t>AI</a:t>
+            </a:r>
+            <a:r>
+              <a:rPr kumimoji="1" lang="ja-JP" altLang="en-US" sz="3600"/>
+              <a:t>・条件）</a:t>
+            </a:r>
+          </a:p>
+        </p:txBody>
+      </p:sp>
+    </p:spTree>
+    <p:extLst>
+      <p:ext uri="{BB962C8B-B14F-4D97-AF65-F5344CB8AC3E}">
+        <p14:creationId xmlns:p14="http://schemas.microsoft.com/office/powerpoint/2010/main" val="3135446820"/>
+      </p:ext>
+    </p:extLst>
+  </p:cSld>
+  <p:clrMapOvr>
+    <a:masterClrMapping/>
+  </p:clrMapOvr>
+</p:sld>
+</file>
+
+<file path=ppt/slides/slide11.xml><?xml version="1.0" encoding="utf-8"?>
+<p:sld xmlns:a="http://schemas.openxmlformats.org/drawingml/2006/main" xmlns:r="http://schemas.openxmlformats.org/officeDocument/2006/relationships" xmlns:p="http://schemas.openxmlformats.org/presentationml/2006/main">
+  <p:cSld>
+    <p:spTree>
+      <p:nvGrpSpPr>
+        <p:cNvPr id="1" name="">
+          <a:extLst>
+            <a:ext uri="{FF2B5EF4-FFF2-40B4-BE49-F238E27FC236}">
+              <a16:creationId xmlns:a16="http://schemas.microsoft.com/office/drawing/2014/main" id="{373619AB-32C7-75F1-1F08-4BAC9A1F6472}"/>
+            </a:ext>
+          </a:extLst>
+        </p:cNvPr>
+        <p:cNvGrpSpPr/>
+        <p:nvPr/>
+      </p:nvGrpSpPr>
+      <p:grpSpPr>
+        <a:xfrm>
+          <a:off x="0" y="0"/>
+          <a:ext cx="0" cy="0"/>
+          <a:chOff x="0" y="0"/>
+          <a:chExt cx="0" cy="0"/>
+        </a:xfrm>
+      </p:grpSpPr>
+      <p:sp>
+        <p:nvSpPr>
+          <p:cNvPr id="2" name="タイトル 1">
+            <a:extLst>
+              <a:ext uri="{FF2B5EF4-FFF2-40B4-BE49-F238E27FC236}">
+                <a16:creationId xmlns:a16="http://schemas.microsoft.com/office/drawing/2014/main" id="{16978B4D-32B0-B54D-8A68-CBEF7CEB4EDA}"/>
+              </a:ext>
+            </a:extLst>
+          </p:cNvPr>
+          <p:cNvSpPr>
+            <a:spLocks noGrp="1"/>
+          </p:cNvSpPr>
+          <p:nvPr>
+            <p:ph type="title"/>
+          </p:nvPr>
+        </p:nvSpPr>
+        <p:spPr>
+          <a:xfrm>
+            <a:off x="0" y="1"/>
+            <a:ext cx="12192000" cy="577516"/>
+          </a:xfrm>
+          <a:solidFill>
+            <a:schemeClr val="bg1">
+              <a:lumMod val="85000"/>
+            </a:schemeClr>
+          </a:solidFill>
+        </p:spPr>
+        <p:txBody>
+          <a:bodyPr>
+            <a:normAutofit fontScale="90000"/>
+          </a:bodyPr>
+          <a:lstStyle/>
+          <a:p>
+            <a:r>
+              <a:rPr kumimoji="1" lang="ja-JP" altLang="en-US" sz="3600"/>
+              <a:t>マテリアル・方法（人への作業依頼）</a:t>
+            </a:r>
+          </a:p>
+        </p:txBody>
+      </p:sp>
+    </p:spTree>
+    <p:extLst>
+      <p:ext uri="{BB962C8B-B14F-4D97-AF65-F5344CB8AC3E}">
+        <p14:creationId xmlns:p14="http://schemas.microsoft.com/office/powerpoint/2010/main" val="687444550"/>
+      </p:ext>
+    </p:extLst>
+  </p:cSld>
+  <p:clrMapOvr>
+    <a:masterClrMapping/>
+  </p:clrMapOvr>
+</p:sld>
+</file>
+
+<file path=ppt/slides/slide12.xml><?xml version="1.0" encoding="utf-8"?>
+<p:sld xmlns:a="http://schemas.openxmlformats.org/drawingml/2006/main" xmlns:r="http://schemas.openxmlformats.org/officeDocument/2006/relationships" xmlns:p="http://schemas.openxmlformats.org/presentationml/2006/main">
+  <p:cSld>
+    <p:spTree>
+      <p:nvGrpSpPr>
+        <p:cNvPr id="1" name="">
+          <a:extLst>
+            <a:ext uri="{FF2B5EF4-FFF2-40B4-BE49-F238E27FC236}">
+              <a16:creationId xmlns:a16="http://schemas.microsoft.com/office/drawing/2014/main" id="{BA1014B9-95D4-2533-BF48-ABDFDC8D5837}"/>
+            </a:ext>
+          </a:extLst>
+        </p:cNvPr>
+        <p:cNvGrpSpPr/>
+        <p:nvPr/>
+      </p:nvGrpSpPr>
+      <p:grpSpPr>
+        <a:xfrm>
+          <a:off x="0" y="0"/>
+          <a:ext cx="0" cy="0"/>
+          <a:chOff x="0" y="0"/>
+          <a:chExt cx="0" cy="0"/>
+        </a:xfrm>
+      </p:grpSpPr>
+      <p:sp>
+        <p:nvSpPr>
+          <p:cNvPr id="2" name="タイトル 1">
+            <a:extLst>
+              <a:ext uri="{FF2B5EF4-FFF2-40B4-BE49-F238E27FC236}">
+                <a16:creationId xmlns:a16="http://schemas.microsoft.com/office/drawing/2014/main" id="{C7E8276E-4711-8839-5464-BA41B46B779B}"/>
+              </a:ext>
+            </a:extLst>
+          </p:cNvPr>
+          <p:cNvSpPr>
+            <a:spLocks noGrp="1"/>
+          </p:cNvSpPr>
+          <p:nvPr>
+            <p:ph type="title"/>
+          </p:nvPr>
+        </p:nvSpPr>
+        <p:spPr>
+          <a:xfrm>
+            <a:off x="0" y="1"/>
+            <a:ext cx="12192000" cy="577516"/>
+          </a:xfrm>
+          <a:solidFill>
+            <a:schemeClr val="bg1">
+              <a:lumMod val="85000"/>
+            </a:schemeClr>
+          </a:solidFill>
+        </p:spPr>
+        <p:txBody>
+          <a:bodyPr>
+            <a:normAutofit fontScale="90000"/>
+          </a:bodyPr>
+          <a:lstStyle/>
+          <a:p>
+            <a:r>
+              <a:rPr lang="ja-JP" altLang="en-US" sz="3600"/>
+              <a:t>結果</a:t>
+            </a:r>
+            <a:endParaRPr kumimoji="1" lang="ja-JP" altLang="en-US" sz="3600"/>
+          </a:p>
+        </p:txBody>
+      </p:sp>
+    </p:spTree>
+    <p:extLst>
+      <p:ext uri="{BB962C8B-B14F-4D97-AF65-F5344CB8AC3E}">
+        <p14:creationId xmlns:p14="http://schemas.microsoft.com/office/powerpoint/2010/main" val="2630796194"/>
+      </p:ext>
+    </p:extLst>
+  </p:cSld>
+  <p:clrMapOvr>
+    <a:masterClrMapping/>
+  </p:clrMapOvr>
+</p:sld>
+</file>
+
 <file path=ppt/slides/slide2.xml><?xml version="1.0" encoding="utf-8"?>
 <p:sld xmlns:a="http://schemas.openxmlformats.org/drawingml/2006/main" xmlns:r="http://schemas.openxmlformats.org/officeDocument/2006/relationships" xmlns:p="http://schemas.openxmlformats.org/presentationml/2006/main">
   <p:cSld>
@@ -7572,7 +7815,7 @@
         <p:spPr>
           <a:xfrm>
             <a:off x="-1" y="577517"/>
-            <a:ext cx="12192000" cy="5078313"/>
+            <a:ext cx="12192000" cy="4801314"/>
           </a:xfrm>
           <a:prstGeom prst="rect">
             <a:avLst/>
@@ -7584,6 +7827,16 @@
             <a:spAutoFit/>
           </a:bodyPr>
           <a:lstStyle/>
+          <a:p>
+            <a:r>
+              <a:rPr lang="ja-JP" altLang="en-US"/>
+              <a:t>文書（特に日本語）からの固有表現の抽出・判定に関して、</a:t>
+            </a:r>
+            <a:endParaRPr lang="en-US" altLang="ja-JP"/>
+          </a:p>
+          <a:p>
+            <a:endParaRPr lang="en-US" altLang="ja-JP" b="1"/>
+          </a:p>
           <a:p>
             <a:r>
               <a:rPr lang="ja-JP" altLang="en-US" b="1"/>
@@ -7606,7 +7859,26 @@
             </a:pPr>
             <a:r>
               <a:rPr lang="ja-JP" altLang="en-US"/>
-              <a:t>「地域」、「個人名」、「固有現象」等にかかる記述の特定（ターム抽出）</a:t>
+              <a:t>「地名」、「人名」、「固有現象名」等にかかる記述の特定（形態素の特徴量が十分か・正しいか）</a:t>
+            </a:r>
+            <a:endParaRPr lang="en-US" altLang="ja-JP"/>
+          </a:p>
+          <a:p>
+            <a:pPr marL="742950" lvl="1" indent="-285750">
+              <a:buFont typeface="Arial" panose="020B0604020202020204" pitchFamily="34" charset="0"/>
+              <a:buChar char="•"/>
+            </a:pPr>
+            <a:r>
+              <a:rPr lang="ja-JP" altLang="en-US"/>
+              <a:t>例</a:t>
+            </a:r>
+            <a:r>
+              <a:rPr lang="en-US" altLang="ja-JP"/>
+              <a:t>: </a:t>
+            </a:r>
+            <a:r>
+              <a:rPr lang="ja-JP" altLang="en-US"/>
+              <a:t>人名を地名と特定する可能性が残る</a:t>
             </a:r>
             <a:endParaRPr lang="en-US" altLang="ja-JP" dirty="0"/>
           </a:p>
@@ -7617,7 +7889,7 @@
             </a:pPr>
             <a:r>
               <a:rPr lang="ja-JP" altLang="en-US"/>
-              <a:t>特定された記述の整理</a:t>
+              <a:t>特定する記述のレベル（複合語等）</a:t>
             </a:r>
             <a:endParaRPr lang="en-US" altLang="ja-JP" dirty="0"/>
           </a:p>
@@ -7628,7 +7900,7 @@
             </a:pPr>
             <a:r>
               <a:rPr lang="ja-JP" altLang="en-US"/>
-              <a:t>同一性判定</a:t>
+              <a:t>トークンの上位判定（特定のトークン列を一つのトークンとして扱うか）</a:t>
             </a:r>
             <a:endParaRPr lang="en-US" altLang="ja-JP" dirty="0"/>
           </a:p>
@@ -7639,7 +7911,15 @@
             </a:pPr>
             <a:r>
               <a:rPr lang="ja-JP" altLang="en-US"/>
-              <a:t>クラス付与</a:t>
+              <a:t>クラス付与（従来の</a:t>
+            </a:r>
+            <a:r>
+              <a:rPr lang="en-US" altLang="ja-JP"/>
+              <a:t>NER</a:t>
+            </a:r>
+            <a:r>
+              <a:rPr lang="ja-JP" altLang="en-US"/>
+              <a:t>にはないさらに上位の概念の付与）</a:t>
             </a:r>
             <a:endParaRPr lang="en-US" altLang="ja-JP" dirty="0"/>
           </a:p>
@@ -7649,7 +7929,7 @@
           <a:p>
             <a:r>
               <a:rPr lang="ja-JP" altLang="en-US" b="1"/>
-              <a:t>◾️特に「地域名称」（地名）関係の課題</a:t>
+              <a:t>◾️特に地名にかかる課題として</a:t>
             </a:r>
             <a:endParaRPr lang="en-US" altLang="ja-JP" b="1" dirty="0"/>
           </a:p>
@@ -7667,7 +7947,7 @@
             </a:pPr>
             <a:r>
               <a:rPr lang="ja-JP" altLang="en-US"/>
-              <a:t>複数の同一の地名（ただし地理的な場所が異なる）</a:t>
+              <a:t>複数の同一の地名（ただし地理的な場所が異なる）の分離（曖昧性解決）</a:t>
             </a:r>
             <a:endParaRPr lang="en-US" altLang="ja-JP" dirty="0"/>
           </a:p>
@@ -7678,9 +7958,19 @@
             </a:pPr>
             <a:r>
               <a:rPr lang="ja-JP" altLang="en-US"/>
-              <a:t>複合名詞の一部としての地名</a:t>
+              <a:t>複合名詞の一部としての地名をどのように判定するか</a:t>
             </a:r>
             <a:endParaRPr lang="en-US" altLang="ja-JP" dirty="0"/>
+          </a:p>
+          <a:p>
+            <a:endParaRPr lang="en-US" altLang="ja-JP" dirty="0"/>
+          </a:p>
+          <a:p>
+            <a:r>
+              <a:rPr lang="ja-JP" altLang="en-US" b="1"/>
+              <a:t>▪️名称の関係性</a:t>
+            </a:r>
+            <a:endParaRPr lang="en-US" altLang="ja-JP" b="1" dirty="0"/>
           </a:p>
           <a:p>
             <a:pPr marL="285750" indent="-285750">
@@ -7689,19 +7979,9 @@
             </a:pPr>
             <a:r>
               <a:rPr lang="ja-JP" altLang="en-US"/>
-              <a:t>そもそも地名なのか</a:t>
+              <a:t>文脈による関係性</a:t>
             </a:r>
             <a:endParaRPr lang="en-US" altLang="ja-JP" dirty="0"/>
-          </a:p>
-          <a:p>
-            <a:endParaRPr lang="en-US" altLang="ja-JP" dirty="0"/>
-          </a:p>
-          <a:p>
-            <a:r>
-              <a:rPr lang="ja-JP" altLang="en-US" b="1"/>
-              <a:t>▪️名称の関係性</a:t>
-            </a:r>
-            <a:endParaRPr lang="en-US" altLang="ja-JP" b="1" dirty="0"/>
           </a:p>
           <a:p>
             <a:pPr marL="285750" indent="-285750">
@@ -7710,39 +7990,7 @@
             </a:pPr>
             <a:r>
               <a:rPr lang="ja-JP" altLang="en-US"/>
-              <a:t>名称としての関係性</a:t>
-            </a:r>
-            <a:endParaRPr lang="en-US" altLang="ja-JP" dirty="0"/>
-          </a:p>
-          <a:p>
-            <a:pPr marL="285750" indent="-285750">
-              <a:buFont typeface="Arial" panose="020B0604020202020204" pitchFamily="34" charset="0"/>
-              <a:buChar char="•"/>
-            </a:pPr>
-            <a:r>
-              <a:rPr lang="ja-JP" altLang="en-US"/>
               <a:t>地理的な関係性</a:t>
-            </a:r>
-            <a:endParaRPr lang="en-US" altLang="ja-JP" dirty="0"/>
-          </a:p>
-          <a:p>
-            <a:endParaRPr lang="en-US" altLang="ja-JP" dirty="0"/>
-          </a:p>
-          <a:p>
-            <a:r>
-              <a:rPr lang="ja-JP" altLang="en-US" b="1"/>
-              <a:t>◾️本発表では</a:t>
-            </a:r>
-            <a:endParaRPr lang="en-US" altLang="ja-JP" b="1" dirty="0"/>
-          </a:p>
-          <a:p>
-            <a:pPr marL="285750" indent="-285750">
-              <a:buFont typeface="Arial" panose="020B0604020202020204" pitchFamily="34" charset="0"/>
-              <a:buChar char="•"/>
-            </a:pPr>
-            <a:r>
-              <a:rPr lang="ja-JP" altLang="en-US"/>
-              <a:t>文書からの「地名の抽出」に着目する</a:t>
             </a:r>
             <a:endParaRPr lang="en-US" altLang="ja-JP" dirty="0"/>
           </a:p>
@@ -7762,6 +8010,420 @@
 </file>
 
 <file path=ppt/slides/slide5.xml><?xml version="1.0" encoding="utf-8"?>
+<p:sld xmlns:a="http://schemas.openxmlformats.org/drawingml/2006/main" xmlns:r="http://schemas.openxmlformats.org/officeDocument/2006/relationships" xmlns:p="http://schemas.openxmlformats.org/presentationml/2006/main">
+  <p:cSld>
+    <p:spTree>
+      <p:nvGrpSpPr>
+        <p:cNvPr id="1" name="">
+          <a:extLst>
+            <a:ext uri="{FF2B5EF4-FFF2-40B4-BE49-F238E27FC236}">
+              <a16:creationId xmlns:a16="http://schemas.microsoft.com/office/drawing/2014/main" id="{8AE62D95-6BB5-08C4-6C52-791A0EAD6D97}"/>
+            </a:ext>
+          </a:extLst>
+        </p:cNvPr>
+        <p:cNvGrpSpPr/>
+        <p:nvPr/>
+      </p:nvGrpSpPr>
+      <p:grpSpPr>
+        <a:xfrm>
+          <a:off x="0" y="0"/>
+          <a:ext cx="0" cy="0"/>
+          <a:chOff x="0" y="0"/>
+          <a:chExt cx="0" cy="0"/>
+        </a:xfrm>
+      </p:grpSpPr>
+      <p:sp>
+        <p:nvSpPr>
+          <p:cNvPr id="2" name="タイトル 1">
+            <a:extLst>
+              <a:ext uri="{FF2B5EF4-FFF2-40B4-BE49-F238E27FC236}">
+                <a16:creationId xmlns:a16="http://schemas.microsoft.com/office/drawing/2014/main" id="{059F9B36-6E1B-F1B7-3CA0-607DD3CB5039}"/>
+              </a:ext>
+            </a:extLst>
+          </p:cNvPr>
+          <p:cNvSpPr>
+            <a:spLocks noGrp="1"/>
+          </p:cNvSpPr>
+          <p:nvPr>
+            <p:ph type="title"/>
+          </p:nvPr>
+        </p:nvSpPr>
+        <p:spPr>
+          <a:xfrm>
+            <a:off x="0" y="1"/>
+            <a:ext cx="12192000" cy="577516"/>
+          </a:xfrm>
+          <a:solidFill>
+            <a:schemeClr val="bg1">
+              <a:lumMod val="85000"/>
+            </a:schemeClr>
+          </a:solidFill>
+        </p:spPr>
+        <p:txBody>
+          <a:bodyPr>
+            <a:normAutofit fontScale="90000"/>
+          </a:bodyPr>
+          <a:lstStyle/>
+          <a:p>
+            <a:r>
+              <a:rPr lang="ja-JP" altLang="en-US" sz="3600"/>
+              <a:t>関連</a:t>
+            </a:r>
+            <a:r>
+              <a:rPr kumimoji="1" lang="ja-JP" altLang="en-US" sz="3600"/>
+              <a:t>研究</a:t>
+            </a:r>
+          </a:p>
+        </p:txBody>
+      </p:sp>
+      <p:sp>
+        <p:nvSpPr>
+          <p:cNvPr id="5" name="テキスト ボックス 4">
+            <a:extLst>
+              <a:ext uri="{FF2B5EF4-FFF2-40B4-BE49-F238E27FC236}">
+                <a16:creationId xmlns:a16="http://schemas.microsoft.com/office/drawing/2014/main" id="{A11988AF-0076-B539-AA4D-FB9D86D4B661}"/>
+              </a:ext>
+            </a:extLst>
+          </p:cNvPr>
+          <p:cNvSpPr txBox="1"/>
+          <p:nvPr/>
+        </p:nvSpPr>
+        <p:spPr>
+          <a:xfrm>
+            <a:off x="0" y="577517"/>
+            <a:ext cx="12192000" cy="3970318"/>
+          </a:xfrm>
+          <a:prstGeom prst="rect">
+            <a:avLst/>
+          </a:prstGeom>
+          <a:noFill/>
+        </p:spPr>
+        <p:txBody>
+          <a:bodyPr wrap="square" rtlCol="0">
+            <a:spAutoFit/>
+          </a:bodyPr>
+          <a:lstStyle/>
+          <a:p>
+            <a:pPr marL="285750" indent="-285750">
+              <a:buFont typeface="Arial" panose="020B0604020202020204" pitchFamily="34" charset="0"/>
+              <a:buChar char="•"/>
+            </a:pPr>
+            <a:r>
+              <a:rPr lang="en" altLang="ja-JP" dirty="0"/>
+              <a:t>Toponym resolution leveraging lightweight and open-source large language models and geo-knowledge. 2024.  (</a:t>
+            </a:r>
+            <a:r>
+              <a:rPr lang="en" altLang="ja-JP" dirty="0">
+                <a:hlinkClick r:id="rId2"/>
+              </a:rPr>
+              <a:t>https://www.tandfonline.com/doi/full/10.1080/13658816.2024.2405182</a:t>
+            </a:r>
+            <a:r>
+              <a:rPr lang="en" altLang="ja-JP" dirty="0"/>
+              <a:t>)</a:t>
+            </a:r>
+          </a:p>
+          <a:p>
+            <a:pPr marL="742950" lvl="1" indent="-285750">
+              <a:buFont typeface="Arial" panose="020B0604020202020204" pitchFamily="34" charset="0"/>
+              <a:buChar char="•"/>
+            </a:pPr>
+            <a:r>
+              <a:rPr lang="ja-JP" altLang="en-US"/>
+              <a:t>地名から地理的な位置を推定する</a:t>
+            </a:r>
+            <a:endParaRPr lang="en-US" altLang="ja-JP" dirty="0"/>
+          </a:p>
+          <a:p>
+            <a:pPr marL="742950" lvl="1" indent="-285750">
+              <a:buFont typeface="Arial" panose="020B0604020202020204" pitchFamily="34" charset="0"/>
+              <a:buChar char="•"/>
+            </a:pPr>
+            <a:r>
+              <a:rPr lang="en-US" altLang="ja-JP" dirty="0"/>
+              <a:t>GIS</a:t>
+            </a:r>
+            <a:r>
+              <a:rPr lang="ja-JP" altLang="en-US"/>
+              <a:t>情報を使う</a:t>
+            </a:r>
+            <a:endParaRPr lang="en-US" altLang="ja-JP" dirty="0"/>
+          </a:p>
+          <a:p>
+            <a:pPr marL="742950" lvl="1" indent="-285750">
+              <a:buFont typeface="Arial" panose="020B0604020202020204" pitchFamily="34" charset="0"/>
+              <a:buChar char="•"/>
+            </a:pPr>
+            <a:r>
+              <a:rPr lang="ja-JP" altLang="en-US"/>
+              <a:t>既存</a:t>
+            </a:r>
+            <a:r>
+              <a:rPr lang="en-US" altLang="ja-JP" dirty="0"/>
+              <a:t>LLM</a:t>
+            </a:r>
+            <a:r>
+              <a:rPr lang="ja-JP" altLang="en-US"/>
+              <a:t>を利用</a:t>
+            </a:r>
+            <a:endParaRPr lang="en-US" altLang="ja-JP" dirty="0"/>
+          </a:p>
+          <a:p>
+            <a:pPr marL="285750" indent="-285750">
+              <a:buFont typeface="Arial" panose="020B0604020202020204" pitchFamily="34" charset="0"/>
+              <a:buChar char="•"/>
+            </a:pPr>
+            <a:r>
+              <a:rPr lang="en" altLang="ja-JP" dirty="0"/>
+              <a:t>Collective Named Entity Disambiguation using Graph Ranking and Clique Partitioning Approaches. 2014. (</a:t>
+            </a:r>
+            <a:r>
+              <a:rPr lang="en" altLang="ja-JP" dirty="0">
+                <a:hlinkClick r:id="rId3"/>
+              </a:rPr>
+              <a:t>https://aclanthology.org/C14-1147.pdf</a:t>
+            </a:r>
+            <a:r>
+              <a:rPr lang="en" altLang="ja-JP" dirty="0"/>
+              <a:t>)</a:t>
+            </a:r>
+          </a:p>
+          <a:p>
+            <a:pPr marL="742950" lvl="1" indent="-285750">
+              <a:buFont typeface="Arial" panose="020B0604020202020204" pitchFamily="34" charset="0"/>
+              <a:buChar char="•"/>
+            </a:pPr>
+            <a:r>
+              <a:rPr lang="en-US" altLang="ja-JP" dirty="0"/>
+              <a:t>Knowledge Base</a:t>
+            </a:r>
+            <a:r>
+              <a:rPr lang="ja-JP" altLang="en-US"/>
+              <a:t>（辞書）を利用</a:t>
+            </a:r>
+            <a:endParaRPr lang="en-US" altLang="ja-JP" dirty="0"/>
+          </a:p>
+          <a:p>
+            <a:pPr marL="742950" lvl="1" indent="-285750">
+              <a:buFont typeface="Arial" panose="020B0604020202020204" pitchFamily="34" charset="0"/>
+              <a:buChar char="•"/>
+            </a:pPr>
+            <a:r>
+              <a:rPr lang="ja-JP" altLang="en-US"/>
+              <a:t>グラフ構造を解析（ノードが地名）</a:t>
+            </a:r>
+            <a:endParaRPr lang="en-US" altLang="ja-JP" dirty="0"/>
+          </a:p>
+          <a:p>
+            <a:pPr marL="742950" lvl="1" indent="-285750">
+              <a:buFont typeface="Arial" panose="020B0604020202020204" pitchFamily="34" charset="0"/>
+              <a:buChar char="•"/>
+            </a:pPr>
+            <a:r>
+              <a:rPr lang="ja-JP" altLang="en-US"/>
+              <a:t>既存</a:t>
+            </a:r>
+            <a:r>
+              <a:rPr lang="en-US" altLang="ja-JP" dirty="0"/>
+              <a:t>LLM</a:t>
+            </a:r>
+            <a:r>
+              <a:rPr lang="ja-JP" altLang="en-US"/>
+              <a:t>を利用しない</a:t>
+            </a:r>
+            <a:endParaRPr lang="en-US" altLang="ja-JP" dirty="0"/>
+          </a:p>
+          <a:p>
+            <a:pPr marL="285750" indent="-285750">
+              <a:buFont typeface="Arial" panose="020B0604020202020204" pitchFamily="34" charset="0"/>
+              <a:buChar char="•"/>
+            </a:pPr>
+            <a:r>
+              <a:rPr lang="ja-JP" altLang="en-US"/>
+              <a:t>歴史災害史料からの自動地名抽出に向けた自然言語処理システムの性能評価</a:t>
+            </a:r>
+            <a:r>
+              <a:rPr lang="en-US" altLang="ja-JP" dirty="0"/>
+              <a:t>. 2023. (https://</a:t>
+            </a:r>
+            <a:r>
+              <a:rPr lang="en-US" altLang="ja-JP" dirty="0" err="1"/>
+              <a:t>ipsj.ixsq.nii.ac.jp</a:t>
+            </a:r>
+            <a:r>
+              <a:rPr lang="en-US" altLang="ja-JP" dirty="0"/>
+              <a:t>/record/231338/files/IPSJ-CH2023003.pdf)</a:t>
+            </a:r>
+          </a:p>
+          <a:p>
+            <a:pPr marL="742950" lvl="1" indent="-285750">
+              <a:buFont typeface="Arial" panose="020B0604020202020204" pitchFamily="34" charset="0"/>
+              <a:buChar char="•"/>
+            </a:pPr>
+            <a:r>
+              <a:rPr lang="ja-JP" altLang="en-US"/>
+              <a:t>固有表現抽出と</a:t>
+            </a:r>
+            <a:r>
+              <a:rPr lang="en-US" altLang="ja-JP" dirty="0"/>
+              <a:t>LLM</a:t>
+            </a:r>
+            <a:r>
+              <a:rPr lang="ja-JP" altLang="en-US"/>
+              <a:t>に対して評価（連結利用は行なっていない）</a:t>
+            </a:r>
+            <a:endParaRPr lang="en-US" altLang="ja-JP" dirty="0"/>
+          </a:p>
+          <a:p>
+            <a:pPr marL="742950" lvl="1" indent="-285750">
+              <a:buFont typeface="Arial" panose="020B0604020202020204" pitchFamily="34" charset="0"/>
+              <a:buChar char="•"/>
+            </a:pPr>
+            <a:r>
+              <a:rPr lang="ja-JP" altLang="en-US"/>
+              <a:t>「正解」に対する正答の評価</a:t>
+            </a:r>
+            <a:endParaRPr lang="en-US" altLang="ja-JP" dirty="0"/>
+          </a:p>
+        </p:txBody>
+      </p:sp>
+      <p:sp>
+        <p:nvSpPr>
+          <p:cNvPr id="3" name="テキスト ボックス 2">
+            <a:extLst>
+              <a:ext uri="{FF2B5EF4-FFF2-40B4-BE49-F238E27FC236}">
+                <a16:creationId xmlns:a16="http://schemas.microsoft.com/office/drawing/2014/main" id="{AACCC8C1-61CC-DBD3-10A4-7D171D5FF268}"/>
+              </a:ext>
+            </a:extLst>
+          </p:cNvPr>
+          <p:cNvSpPr txBox="1"/>
+          <p:nvPr/>
+        </p:nvSpPr>
+        <p:spPr>
+          <a:xfrm>
+            <a:off x="0" y="4803155"/>
+            <a:ext cx="12192000" cy="1754326"/>
+          </a:xfrm>
+          <a:prstGeom prst="rect">
+            <a:avLst/>
+          </a:prstGeom>
+          <a:noFill/>
+        </p:spPr>
+        <p:txBody>
+          <a:bodyPr wrap="square" rtlCol="0">
+            <a:spAutoFit/>
+          </a:bodyPr>
+          <a:lstStyle/>
+          <a:p>
+            <a:pPr marL="285750" indent="-285750">
+              <a:buFont typeface="Wingdings" pitchFamily="2" charset="2"/>
+              <a:buChar char="Ø"/>
+            </a:pPr>
+            <a:r>
+              <a:rPr kumimoji="1" lang="ja-JP" altLang="en-US"/>
+              <a:t>海外では地名から地理的な位置を特定する研究は典型的（</a:t>
+            </a:r>
+            <a:r>
+              <a:rPr kumimoji="1" lang="en-US" altLang="ja-JP" dirty="0"/>
+              <a:t>toponym</a:t>
+            </a:r>
+            <a:r>
+              <a:rPr kumimoji="1" lang="ja-JP" altLang="en-US"/>
+              <a:t>）</a:t>
+            </a:r>
+            <a:endParaRPr lang="en-US" altLang="ja-JP" dirty="0"/>
+          </a:p>
+          <a:p>
+            <a:pPr marL="285750" indent="-285750">
+              <a:buFont typeface="Wingdings" pitchFamily="2" charset="2"/>
+              <a:buChar char="Ø"/>
+            </a:pPr>
+            <a:r>
+              <a:rPr kumimoji="1" lang="ja-JP" altLang="en-US"/>
+              <a:t>曖昧性解決においても地理情報と結びつけて行うものがほとんど</a:t>
+            </a:r>
+            <a:endParaRPr kumimoji="1" lang="en-US" altLang="ja-JP" dirty="0"/>
+          </a:p>
+          <a:p>
+            <a:pPr marL="285750" indent="-285750">
+              <a:buFont typeface="Wingdings" pitchFamily="2" charset="2"/>
+              <a:buChar char="Ø"/>
+            </a:pPr>
+            <a:r>
+              <a:rPr lang="ja-JP" altLang="en-US"/>
+              <a:t>地理情報を利用しない曖昧性解決においては、近年には独自</a:t>
+            </a:r>
+            <a:r>
+              <a:rPr lang="en-US" altLang="ja-JP" dirty="0"/>
+              <a:t>NN</a:t>
+            </a:r>
+            <a:r>
+              <a:rPr lang="ja-JP" altLang="en-US"/>
+              <a:t>開発によるものが見受けられる</a:t>
+            </a:r>
+            <a:endParaRPr lang="en-US" altLang="ja-JP" dirty="0"/>
+          </a:p>
+          <a:p>
+            <a:pPr marL="285750" indent="-285750">
+              <a:buFont typeface="Wingdings" pitchFamily="2" charset="2"/>
+              <a:buChar char="Ø"/>
+            </a:pPr>
+            <a:r>
+              <a:rPr lang="ja-JP" altLang="en-US"/>
+              <a:t>曖昧性解決において</a:t>
+            </a:r>
+            <a:r>
+              <a:rPr kumimoji="1" lang="ja-JP" altLang="en-US"/>
+              <a:t>一般的な</a:t>
+            </a:r>
+            <a:r>
+              <a:rPr kumimoji="1" lang="en-US" altLang="ja-JP" dirty="0"/>
+              <a:t>LLM</a:t>
+            </a:r>
+            <a:r>
+              <a:rPr lang="ja-JP" altLang="en-US"/>
+              <a:t>が用いられはじめたのはごく最近</a:t>
+            </a:r>
+            <a:endParaRPr lang="en-US" altLang="ja-JP" dirty="0"/>
+          </a:p>
+          <a:p>
+            <a:pPr marL="285750" indent="-285750">
+              <a:buFont typeface="Wingdings" pitchFamily="2" charset="2"/>
+              <a:buChar char="Ø"/>
+            </a:pPr>
+            <a:r>
+              <a:rPr lang="ja-JP" altLang="en-US"/>
+              <a:t>地名と地名以外を含む幅広い固有表現の曖昧性解決も行われている</a:t>
+            </a:r>
+            <a:endParaRPr lang="en-US" altLang="ja-JP" dirty="0"/>
+          </a:p>
+          <a:p>
+            <a:pPr marL="285750" indent="-285750">
+              <a:buFont typeface="Wingdings" pitchFamily="2" charset="2"/>
+              <a:buChar char="Ø"/>
+            </a:pPr>
+            <a:r>
+              <a:rPr kumimoji="1" lang="ja-JP" altLang="en-US"/>
+              <a:t>日本語における事例はほぼ見られない</a:t>
+            </a:r>
+            <a:endParaRPr kumimoji="1" lang="en-US" altLang="ja-JP" dirty="0"/>
+          </a:p>
+        </p:txBody>
+      </p:sp>
+    </p:spTree>
+    <p:extLst>
+      <p:ext uri="{BB962C8B-B14F-4D97-AF65-F5344CB8AC3E}">
+        <p14:creationId xmlns:p14="http://schemas.microsoft.com/office/powerpoint/2010/main" val="2513616949"/>
+      </p:ext>
+    </p:extLst>
+  </p:cSld>
+  <p:clrMapOvr>
+    <a:masterClrMapping/>
+  </p:clrMapOvr>
+</p:sld>
+</file>
+
+<file path=ppt/slides/slide6.xml><?xml version="1.0" encoding="utf-8"?>
 <p:sld xmlns:a="http://schemas.openxmlformats.org/drawingml/2006/main" xmlns:r="http://schemas.openxmlformats.org/officeDocument/2006/relationships" xmlns:p="http://schemas.openxmlformats.org/presentationml/2006/main">
   <p:cSld>
     <p:spTree>
@@ -7855,7 +8517,7 @@
           <a:p>
             <a:r>
               <a:rPr lang="ja-JP" altLang="en-US" b="1"/>
-              <a:t>◾️文書からの地名に抽出に関して、技術的な課題を検討する</a:t>
+              <a:t>◾️文書からの地名の抽出に関して、技術的な課題を検討する</a:t>
             </a:r>
             <a:endParaRPr lang="en-US" altLang="ja-JP" b="1" dirty="0"/>
           </a:p>
@@ -7937,7 +8599,7 @@
 </p:sld>
 </file>
 
-<file path=ppt/slides/slide6.xml><?xml version="1.0" encoding="utf-8"?>
+<file path=ppt/slides/slide7.xml><?xml version="1.0" encoding="utf-8"?>
 <p:sld xmlns:a="http://schemas.openxmlformats.org/drawingml/2006/main" xmlns:r="http://schemas.openxmlformats.org/officeDocument/2006/relationships" xmlns:p="http://schemas.openxmlformats.org/presentationml/2006/main">
   <p:cSld>
     <p:spTree>
@@ -7945,7 +8607,7 @@
         <p:cNvPr id="1" name="">
           <a:extLst>
             <a:ext uri="{FF2B5EF4-FFF2-40B4-BE49-F238E27FC236}">
-              <a16:creationId xmlns:a16="http://schemas.microsoft.com/office/drawing/2014/main" id="{8AE62D95-6BB5-08C4-6C52-791A0EAD6D97}"/>
+              <a16:creationId xmlns:a16="http://schemas.microsoft.com/office/drawing/2014/main" id="{9B9A69AA-1FF6-E35B-D5AD-EF3CD814455F}"/>
             </a:ext>
           </a:extLst>
         </p:cNvPr>
@@ -7965,7 +8627,7 @@
           <p:cNvPr id="2" name="タイトル 1">
             <a:extLst>
               <a:ext uri="{FF2B5EF4-FFF2-40B4-BE49-F238E27FC236}">
-                <a16:creationId xmlns:a16="http://schemas.microsoft.com/office/drawing/2014/main" id="{059F9B36-6E1B-F1B7-3CA0-607DD3CB5039}"/>
+                <a16:creationId xmlns:a16="http://schemas.microsoft.com/office/drawing/2014/main" id="{29D666D7-9F06-2E12-DB10-5A1262FC6390}"/>
               </a:ext>
             </a:extLst>
           </p:cNvPr>
@@ -7995,17 +8657,17 @@
           <a:p>
             <a:r>
               <a:rPr kumimoji="1" lang="ja-JP" altLang="en-US" sz="3600"/>
-              <a:t>先行研究</a:t>
-            </a:r>
-          </a:p>
-        </p:txBody>
-      </p:sp>
-      <p:sp>
-        <p:nvSpPr>
-          <p:cNvPr id="5" name="テキスト ボックス 4">
-            <a:extLst>
-              <a:ext uri="{FF2B5EF4-FFF2-40B4-BE49-F238E27FC236}">
-                <a16:creationId xmlns:a16="http://schemas.microsoft.com/office/drawing/2014/main" id="{A11988AF-0076-B539-AA4D-FB9D86D4B661}"/>
+              <a:t>マテリアル・方法（概要）</a:t>
+            </a:r>
+          </a:p>
+        </p:txBody>
+      </p:sp>
+      <p:sp>
+        <p:nvSpPr>
+          <p:cNvPr id="3" name="テキスト ボックス 2">
+            <a:extLst>
+              <a:ext uri="{FF2B5EF4-FFF2-40B4-BE49-F238E27FC236}">
+                <a16:creationId xmlns:a16="http://schemas.microsoft.com/office/drawing/2014/main" id="{6BB50100-A622-8930-2A37-AA9F2F67F023}"/>
               </a:ext>
             </a:extLst>
           </p:cNvPr>
@@ -8014,209 +8676,39 @@
         </p:nvSpPr>
         <p:spPr>
           <a:xfrm>
-            <a:off x="0" y="577517"/>
-            <a:ext cx="12192000" cy="3970318"/>
+            <a:off x="2264575" y="708325"/>
+            <a:ext cx="1364476" cy="369332"/>
           </a:xfrm>
           <a:prstGeom prst="rect">
             <a:avLst/>
           </a:prstGeom>
           <a:noFill/>
-        </p:spPr>
-        <p:txBody>
-          <a:bodyPr wrap="square" rtlCol="0">
+          <a:ln>
+            <a:solidFill>
+              <a:schemeClr val="tx1"/>
+            </a:solidFill>
+          </a:ln>
+        </p:spPr>
+        <p:txBody>
+          <a:bodyPr wrap="none" rtlCol="0" anchor="ctr">
             <a:spAutoFit/>
           </a:bodyPr>
           <a:lstStyle/>
           <a:p>
-            <a:pPr marL="285750" indent="-285750">
-              <a:buFont typeface="Arial" panose="020B0604020202020204" pitchFamily="34" charset="0"/>
-              <a:buChar char="•"/>
-            </a:pPr>
-            <a:r>
-              <a:rPr lang="en" altLang="ja-JP" dirty="0"/>
-              <a:t>Toponym resolution leveraging lightweight and open-source large language models and geo-knowledge. 2024.  (</a:t>
-            </a:r>
-            <a:r>
-              <a:rPr lang="en" altLang="ja-JP" dirty="0">
-                <a:hlinkClick r:id="rId2"/>
-              </a:rPr>
-              <a:t>https://www.tandfonline.com/doi/full/10.1080/13658816.2024.2405182</a:t>
-            </a:r>
-            <a:r>
-              <a:rPr lang="en" altLang="ja-JP" dirty="0"/>
-              <a:t>)</a:t>
-            </a:r>
-          </a:p>
-          <a:p>
-            <a:pPr marL="742950" lvl="1" indent="-285750">
-              <a:buFont typeface="Arial" panose="020B0604020202020204" pitchFamily="34" charset="0"/>
-              <a:buChar char="•"/>
-            </a:pPr>
-            <a:r>
-              <a:rPr lang="ja-JP" altLang="en-US"/>
-              <a:t>地名から地理的な位置を推定する</a:t>
-            </a:r>
-            <a:endParaRPr lang="en-US" altLang="ja-JP" dirty="0"/>
-          </a:p>
-          <a:p>
-            <a:pPr marL="742950" lvl="1" indent="-285750">
-              <a:buFont typeface="Arial" panose="020B0604020202020204" pitchFamily="34" charset="0"/>
-              <a:buChar char="•"/>
-            </a:pPr>
-            <a:r>
-              <a:rPr lang="en-US" altLang="ja-JP" dirty="0"/>
-              <a:t>GIS</a:t>
-            </a:r>
-            <a:r>
-              <a:rPr lang="ja-JP" altLang="en-US"/>
-              <a:t>情報を使う</a:t>
-            </a:r>
-            <a:endParaRPr lang="en-US" altLang="ja-JP" dirty="0"/>
-          </a:p>
-          <a:p>
-            <a:pPr marL="742950" lvl="1" indent="-285750">
-              <a:buFont typeface="Arial" panose="020B0604020202020204" pitchFamily="34" charset="0"/>
-              <a:buChar char="•"/>
-            </a:pPr>
-            <a:r>
-              <a:rPr lang="ja-JP" altLang="en-US"/>
-              <a:t>既存</a:t>
-            </a:r>
-            <a:r>
-              <a:rPr lang="en-US" altLang="ja-JP" dirty="0"/>
-              <a:t>LLM</a:t>
-            </a:r>
-            <a:r>
-              <a:rPr lang="ja-JP" altLang="en-US"/>
-              <a:t>を利用</a:t>
-            </a:r>
-            <a:endParaRPr lang="en-US" altLang="ja-JP" dirty="0"/>
-          </a:p>
-          <a:p>
-            <a:pPr marL="285750" indent="-285750">
-              <a:buFont typeface="Arial" panose="020B0604020202020204" pitchFamily="34" charset="0"/>
-              <a:buChar char="•"/>
-            </a:pPr>
-            <a:r>
-              <a:rPr lang="en" altLang="ja-JP" dirty="0"/>
-              <a:t>Collective Named Entity Disambiguation using Graph Ranking and Clique Partitioning Approaches. 2014. (</a:t>
-            </a:r>
-            <a:r>
-              <a:rPr lang="en" altLang="ja-JP" dirty="0">
-                <a:hlinkClick r:id="rId3"/>
-              </a:rPr>
-              <a:t>https://aclanthology.org/C14-1147.pdf</a:t>
-            </a:r>
-            <a:r>
-              <a:rPr lang="en" altLang="ja-JP" dirty="0"/>
-              <a:t>)</a:t>
-            </a:r>
-          </a:p>
-          <a:p>
-            <a:pPr marL="742950" lvl="1" indent="-285750">
-              <a:buFont typeface="Arial" panose="020B0604020202020204" pitchFamily="34" charset="0"/>
-              <a:buChar char="•"/>
-            </a:pPr>
-            <a:r>
-              <a:rPr lang="en-US" altLang="ja-JP" dirty="0"/>
-              <a:t>Knowledge Base</a:t>
-            </a:r>
-            <a:r>
-              <a:rPr lang="ja-JP" altLang="en-US"/>
-              <a:t>（辞書）を利用</a:t>
-            </a:r>
-            <a:endParaRPr lang="en-US" altLang="ja-JP" dirty="0"/>
-          </a:p>
-          <a:p>
-            <a:pPr marL="742950" lvl="1" indent="-285750">
-              <a:buFont typeface="Arial" panose="020B0604020202020204" pitchFamily="34" charset="0"/>
-              <a:buChar char="•"/>
-            </a:pPr>
-            <a:r>
-              <a:rPr lang="ja-JP" altLang="en-US"/>
-              <a:t>グラフ構造を解析（ノードが地名）</a:t>
-            </a:r>
-            <a:endParaRPr lang="en-US" altLang="ja-JP" dirty="0"/>
-          </a:p>
-          <a:p>
-            <a:pPr marL="742950" lvl="1" indent="-285750">
-              <a:buFont typeface="Arial" panose="020B0604020202020204" pitchFamily="34" charset="0"/>
-              <a:buChar char="•"/>
-            </a:pPr>
-            <a:r>
-              <a:rPr lang="ja-JP" altLang="en-US"/>
-              <a:t>既存</a:t>
-            </a:r>
-            <a:r>
-              <a:rPr lang="en-US" altLang="ja-JP" dirty="0"/>
-              <a:t>LLM</a:t>
-            </a:r>
-            <a:r>
-              <a:rPr lang="ja-JP" altLang="en-US"/>
-              <a:t>を利用しない</a:t>
-            </a:r>
-            <a:endParaRPr lang="en-US" altLang="ja-JP" dirty="0"/>
-          </a:p>
-          <a:p>
-            <a:pPr marL="285750" indent="-285750">
-              <a:buFont typeface="Arial" panose="020B0604020202020204" pitchFamily="34" charset="0"/>
-              <a:buChar char="•"/>
-            </a:pPr>
-            <a:r>
-              <a:rPr lang="ja-JP" altLang="en-US"/>
-              <a:t>歴史災害史料からの自動地名抽出に向けた自然言語処理システムの性能評価</a:t>
-            </a:r>
-            <a:r>
-              <a:rPr lang="en-US" altLang="ja-JP" dirty="0"/>
-              <a:t>. 2023. (https://</a:t>
-            </a:r>
-            <a:r>
-              <a:rPr lang="en-US" altLang="ja-JP" dirty="0" err="1"/>
-              <a:t>ipsj.ixsq.nii.ac.jp</a:t>
-            </a:r>
-            <a:r>
-              <a:rPr lang="en-US" altLang="ja-JP" dirty="0"/>
-              <a:t>/record/231338/files/IPSJ-CH2023003.pdf)</a:t>
-            </a:r>
-          </a:p>
-          <a:p>
-            <a:pPr marL="742950" lvl="1" indent="-285750">
-              <a:buFont typeface="Arial" panose="020B0604020202020204" pitchFamily="34" charset="0"/>
-              <a:buChar char="•"/>
-            </a:pPr>
-            <a:r>
-              <a:rPr lang="ja-JP" altLang="en-US"/>
-              <a:t>固有表現抽出と</a:t>
-            </a:r>
-            <a:r>
-              <a:rPr lang="en-US" altLang="ja-JP" dirty="0"/>
-              <a:t>LLM</a:t>
-            </a:r>
-            <a:r>
-              <a:rPr lang="ja-JP" altLang="en-US"/>
-              <a:t>に対して評価（連結利用は行なっていない）</a:t>
-            </a:r>
-            <a:endParaRPr lang="en-US" altLang="ja-JP" dirty="0"/>
-          </a:p>
-          <a:p>
-            <a:pPr marL="742950" lvl="1" indent="-285750">
-              <a:buFont typeface="Arial" panose="020B0604020202020204" pitchFamily="34" charset="0"/>
-              <a:buChar char="•"/>
-            </a:pPr>
-            <a:r>
-              <a:rPr lang="ja-JP" altLang="en-US"/>
-              <a:t>「正解」に対する正答の評価</a:t>
-            </a:r>
-            <a:endParaRPr lang="en-US" altLang="ja-JP" dirty="0"/>
-          </a:p>
-        </p:txBody>
-      </p:sp>
-      <p:sp>
-        <p:nvSpPr>
-          <p:cNvPr id="3" name="テキスト ボックス 2">
-            <a:extLst>
-              <a:ext uri="{FF2B5EF4-FFF2-40B4-BE49-F238E27FC236}">
-                <a16:creationId xmlns:a16="http://schemas.microsoft.com/office/drawing/2014/main" id="{AACCC8C1-61CC-DBD3-10A4-7D171D5FF268}"/>
+            <a:r>
+              <a:rPr kumimoji="1" lang="en-US" altLang="ja-JP" dirty="0"/>
+              <a:t>KAKEN DB</a:t>
+            </a:r>
+            <a:endParaRPr kumimoji="1" lang="ja-JP" altLang="en-US"/>
+          </a:p>
+        </p:txBody>
+      </p:sp>
+      <p:sp>
+        <p:nvSpPr>
+          <p:cNvPr id="4" name="テキスト ボックス 3">
+            <a:extLst>
+              <a:ext uri="{FF2B5EF4-FFF2-40B4-BE49-F238E27FC236}">
+                <a16:creationId xmlns:a16="http://schemas.microsoft.com/office/drawing/2014/main" id="{50B5646A-820F-E60C-8230-4D0E4A410F3A}"/>
               </a:ext>
             </a:extLst>
           </p:cNvPr>
@@ -8225,119 +8717,1418 @@
         </p:nvSpPr>
         <p:spPr>
           <a:xfrm>
-            <a:off x="0" y="4803155"/>
-            <a:ext cx="12192000" cy="1754326"/>
+            <a:off x="1931151" y="1440873"/>
+            <a:ext cx="2031325" cy="369332"/>
           </a:xfrm>
           <a:prstGeom prst="rect">
             <a:avLst/>
           </a:prstGeom>
           <a:noFill/>
-        </p:spPr>
-        <p:txBody>
-          <a:bodyPr wrap="square" rtlCol="0">
+          <a:ln>
+            <a:solidFill>
+              <a:schemeClr val="tx1"/>
+            </a:solidFill>
+          </a:ln>
+        </p:spPr>
+        <p:txBody>
+          <a:bodyPr wrap="none" rtlCol="0" anchor="ctr">
             <a:spAutoFit/>
           </a:bodyPr>
           <a:lstStyle/>
           <a:p>
-            <a:pPr marL="285750" indent="-285750">
-              <a:buFont typeface="Wingdings" pitchFamily="2" charset="2"/>
-              <a:buChar char="Ø"/>
-            </a:pPr>
-            <a:r>
-              <a:rPr kumimoji="1" lang="ja-JP" altLang="en-US"/>
-              <a:t>海外では地名から地理的な位置を特定する研究は典型的（</a:t>
+            <a:r>
+              <a:rPr lang="ja-JP" altLang="en-US"/>
+              <a:t>国立大学の報告書</a:t>
+            </a:r>
+            <a:endParaRPr lang="en-US" altLang="ja-JP" dirty="0"/>
+          </a:p>
+        </p:txBody>
+      </p:sp>
+      <p:sp>
+        <p:nvSpPr>
+          <p:cNvPr id="6" name="テキスト ボックス 5">
+            <a:extLst>
+              <a:ext uri="{FF2B5EF4-FFF2-40B4-BE49-F238E27FC236}">
+                <a16:creationId xmlns:a16="http://schemas.microsoft.com/office/drawing/2014/main" id="{4AAEC8DF-7497-1AA4-07B3-498D72BB2882}"/>
+              </a:ext>
+            </a:extLst>
+          </p:cNvPr>
+          <p:cNvSpPr txBox="1"/>
+          <p:nvPr/>
+        </p:nvSpPr>
+        <p:spPr>
+          <a:xfrm>
+            <a:off x="3103267" y="1763449"/>
+            <a:ext cx="1199367" cy="369332"/>
+          </a:xfrm>
+          <a:prstGeom prst="rect">
+            <a:avLst/>
+          </a:prstGeom>
+          <a:noFill/>
+        </p:spPr>
+        <p:txBody>
+          <a:bodyPr wrap="none" rtlCol="0">
+            <a:spAutoFit/>
+          </a:bodyPr>
+          <a:lstStyle/>
+          <a:p>
+            <a:r>
+              <a:rPr kumimoji="1" lang="ja-JP" altLang="en-US"/>
+              <a:t>大学数</a:t>
             </a:r>
             <a:r>
               <a:rPr kumimoji="1" lang="en-US" altLang="ja-JP" dirty="0"/>
-              <a:t>toponym</a:t>
-            </a:r>
-            <a:r>
-              <a:rPr kumimoji="1" lang="ja-JP" altLang="en-US"/>
-              <a:t>）</a:t>
+              <a:t>:89</a:t>
+            </a:r>
+            <a:endParaRPr kumimoji="1" lang="ja-JP" altLang="en-US"/>
+          </a:p>
+        </p:txBody>
+      </p:sp>
+      <p:sp>
+        <p:nvSpPr>
+          <p:cNvPr id="7" name="テキスト ボックス 6">
+            <a:extLst>
+              <a:ext uri="{FF2B5EF4-FFF2-40B4-BE49-F238E27FC236}">
+                <a16:creationId xmlns:a16="http://schemas.microsoft.com/office/drawing/2014/main" id="{8E09B076-FFAF-2715-DBD3-50DFFF469A70}"/>
+              </a:ext>
+            </a:extLst>
+          </p:cNvPr>
+          <p:cNvSpPr txBox="1"/>
+          <p:nvPr/>
+        </p:nvSpPr>
+        <p:spPr>
+          <a:xfrm>
+            <a:off x="2559528" y="2173421"/>
+            <a:ext cx="774571" cy="369332"/>
+          </a:xfrm>
+          <a:prstGeom prst="rect">
+            <a:avLst/>
+          </a:prstGeom>
+          <a:noFill/>
+          <a:ln>
+            <a:solidFill>
+              <a:schemeClr val="tx1"/>
+            </a:solidFill>
+          </a:ln>
+        </p:spPr>
+        <p:txBody>
+          <a:bodyPr wrap="none" rtlCol="0" anchor="ctr">
+            <a:spAutoFit/>
+          </a:bodyPr>
+          <a:lstStyle/>
+          <a:p>
+            <a:r>
+              <a:rPr lang="en-US" altLang="ja-JP" dirty="0"/>
+              <a:t>4</a:t>
+            </a:r>
+            <a:r>
+              <a:rPr lang="ja-JP" altLang="en-US"/>
+              <a:t>大学</a:t>
             </a:r>
             <a:endParaRPr lang="en-US" altLang="ja-JP" dirty="0"/>
           </a:p>
-          <a:p>
-            <a:pPr marL="285750" indent="-285750">
-              <a:buFont typeface="Wingdings" pitchFamily="2" charset="2"/>
-              <a:buChar char="Ø"/>
-            </a:pPr>
-            <a:r>
-              <a:rPr kumimoji="1" lang="ja-JP" altLang="en-US"/>
-              <a:t>曖昧性解決においても地理情報と結びつけて行うものがほとんど</a:t>
-            </a:r>
-            <a:endParaRPr kumimoji="1" lang="en-US" altLang="ja-JP" dirty="0"/>
-          </a:p>
-          <a:p>
-            <a:pPr marL="285750" indent="-285750">
-              <a:buFont typeface="Wingdings" pitchFamily="2" charset="2"/>
-              <a:buChar char="Ø"/>
-            </a:pPr>
+        </p:txBody>
+      </p:sp>
+      <p:sp>
+        <p:nvSpPr>
+          <p:cNvPr id="8" name="テキスト ボックス 7">
+            <a:extLst>
+              <a:ext uri="{FF2B5EF4-FFF2-40B4-BE49-F238E27FC236}">
+                <a16:creationId xmlns:a16="http://schemas.microsoft.com/office/drawing/2014/main" id="{7860D382-58A5-C995-8FE8-E78F8C1B6F65}"/>
+              </a:ext>
+            </a:extLst>
+          </p:cNvPr>
+          <p:cNvSpPr txBox="1"/>
+          <p:nvPr/>
+        </p:nvSpPr>
+        <p:spPr>
+          <a:xfrm>
+            <a:off x="1936761" y="2905969"/>
+            <a:ext cx="2020105" cy="369332"/>
+          </a:xfrm>
+          <a:prstGeom prst="rect">
+            <a:avLst/>
+          </a:prstGeom>
+          <a:noFill/>
+          <a:ln>
+            <a:solidFill>
+              <a:schemeClr val="tx1"/>
+            </a:solidFill>
+          </a:ln>
+        </p:spPr>
+        <p:txBody>
+          <a:bodyPr wrap="none" rtlCol="0" anchor="ctr">
+            <a:spAutoFit/>
+          </a:bodyPr>
+          <a:lstStyle/>
+          <a:p>
+            <a:r>
+              <a:rPr lang="en-US" altLang="ja-JP" dirty="0"/>
+              <a:t>4</a:t>
+            </a:r>
             <a:r>
               <a:rPr lang="ja-JP" altLang="en-US"/>
-              <a:t>地理情報を利用しない曖昧性解決においては、近年には独自</a:t>
+              <a:t>大学</a:t>
             </a:r>
             <a:r>
               <a:rPr lang="en-US" altLang="ja-JP" dirty="0"/>
-              <a:t>NN</a:t>
+              <a:t> </a:t>
             </a:r>
             <a:r>
               <a:rPr lang="ja-JP" altLang="en-US"/>
-              <a:t>開発によるものが見受けられる</a:t>
+              <a:t>各</a:t>
+            </a:r>
+            <a:r>
+              <a:rPr lang="en-US" altLang="ja-JP" dirty="0"/>
+              <a:t>50</a:t>
+            </a:r>
+            <a:r>
+              <a:rPr lang="ja-JP" altLang="en-US"/>
+              <a:t>報告書</a:t>
             </a:r>
             <a:endParaRPr lang="en-US" altLang="ja-JP" dirty="0"/>
           </a:p>
-          <a:p>
-            <a:pPr marL="285750" indent="-285750">
-              <a:buFont typeface="Wingdings" pitchFamily="2" charset="2"/>
-              <a:buChar char="Ø"/>
-            </a:pPr>
+        </p:txBody>
+      </p:sp>
+      <p:sp>
+        <p:nvSpPr>
+          <p:cNvPr id="9" name="テキスト ボックス 8">
+            <a:extLst>
+              <a:ext uri="{FF2B5EF4-FFF2-40B4-BE49-F238E27FC236}">
+                <a16:creationId xmlns:a16="http://schemas.microsoft.com/office/drawing/2014/main" id="{F89577F0-2089-00FE-EA03-21ED65B32693}"/>
+              </a:ext>
+            </a:extLst>
+          </p:cNvPr>
+          <p:cNvSpPr txBox="1"/>
+          <p:nvPr/>
+        </p:nvSpPr>
+        <p:spPr>
+          <a:xfrm>
+            <a:off x="892405" y="3638517"/>
+            <a:ext cx="4108817" cy="369332"/>
+          </a:xfrm>
+          <a:prstGeom prst="rect">
+            <a:avLst/>
+          </a:prstGeom>
+          <a:noFill/>
+          <a:ln>
+            <a:solidFill>
+              <a:schemeClr val="tx1"/>
+            </a:solidFill>
+          </a:ln>
+        </p:spPr>
+        <p:txBody>
+          <a:bodyPr wrap="none" rtlCol="0" anchor="ctr">
+            <a:spAutoFit/>
+          </a:bodyPr>
+          <a:lstStyle/>
+          <a:p>
+            <a:r>
+              <a:rPr lang="ja-JP" altLang="en-US" dirty="0"/>
+              <a:t>研究課題名・本文および地名抽出結果</a:t>
+            </a:r>
+            <a:endParaRPr lang="en-US" altLang="ja-JP" dirty="0"/>
+          </a:p>
+        </p:txBody>
+      </p:sp>
+      <p:sp>
+        <p:nvSpPr>
+          <p:cNvPr id="10" name="テキスト ボックス 9">
+            <a:extLst>
+              <a:ext uri="{FF2B5EF4-FFF2-40B4-BE49-F238E27FC236}">
+                <a16:creationId xmlns:a16="http://schemas.microsoft.com/office/drawing/2014/main" id="{32B48DCF-93FC-2971-C8C3-F07C62E80660}"/>
+              </a:ext>
+            </a:extLst>
+          </p:cNvPr>
+          <p:cNvSpPr txBox="1"/>
+          <p:nvPr/>
+        </p:nvSpPr>
+        <p:spPr>
+          <a:xfrm>
+            <a:off x="784202" y="4371065"/>
+            <a:ext cx="4325223" cy="369332"/>
+          </a:xfrm>
+          <a:prstGeom prst="rect">
+            <a:avLst/>
+          </a:prstGeom>
+          <a:noFill/>
+          <a:ln>
+            <a:solidFill>
+              <a:schemeClr val="tx1"/>
+            </a:solidFill>
+          </a:ln>
+        </p:spPr>
+        <p:txBody>
+          <a:bodyPr wrap="none" rtlCol="0" anchor="ctr">
+            <a:spAutoFit/>
+          </a:bodyPr>
+          <a:lstStyle/>
+          <a:p>
+            <a:r>
+              <a:rPr lang="en-US" altLang="ja-JP" dirty="0"/>
+              <a:t>AI</a:t>
+            </a:r>
+            <a:r>
+              <a:rPr lang="ja-JP" altLang="en-US" dirty="0"/>
+              <a:t>、人による地名抽出に対する判定結果</a:t>
+            </a:r>
+            <a:endParaRPr lang="en-US" altLang="ja-JP" dirty="0"/>
+          </a:p>
+        </p:txBody>
+      </p:sp>
+      <p:sp>
+        <p:nvSpPr>
+          <p:cNvPr id="12" name="テキスト ボックス 11">
+            <a:extLst>
+              <a:ext uri="{FF2B5EF4-FFF2-40B4-BE49-F238E27FC236}">
+                <a16:creationId xmlns:a16="http://schemas.microsoft.com/office/drawing/2014/main" id="{E1C3C056-DB92-8A69-40B4-0B7693A57EB5}"/>
+              </a:ext>
+            </a:extLst>
+          </p:cNvPr>
+          <p:cNvSpPr txBox="1"/>
+          <p:nvPr/>
+        </p:nvSpPr>
+        <p:spPr>
+          <a:xfrm>
+            <a:off x="3103267" y="3213854"/>
+            <a:ext cx="870751" cy="369332"/>
+          </a:xfrm>
+          <a:prstGeom prst="rect">
+            <a:avLst/>
+          </a:prstGeom>
+          <a:noFill/>
+        </p:spPr>
+        <p:txBody>
+          <a:bodyPr wrap="none" rtlCol="0">
+            <a:spAutoFit/>
+          </a:bodyPr>
+          <a:lstStyle/>
+          <a:p>
+            <a:r>
+              <a:rPr kumimoji="1" lang="en-US" altLang="ja-JP"/>
+              <a:t>n=200</a:t>
+            </a:r>
+            <a:endParaRPr kumimoji="1" lang="ja-JP" altLang="en-US"/>
+          </a:p>
+        </p:txBody>
+      </p:sp>
+      <p:sp>
+        <p:nvSpPr>
+          <p:cNvPr id="13" name="テキスト ボックス 12">
+            <a:extLst>
+              <a:ext uri="{FF2B5EF4-FFF2-40B4-BE49-F238E27FC236}">
+                <a16:creationId xmlns:a16="http://schemas.microsoft.com/office/drawing/2014/main" id="{69A38594-91FB-000C-4611-09AD2E102CDF}"/>
+              </a:ext>
+            </a:extLst>
+          </p:cNvPr>
+          <p:cNvSpPr txBox="1"/>
+          <p:nvPr/>
+        </p:nvSpPr>
+        <p:spPr>
+          <a:xfrm>
+            <a:off x="1167319" y="5103613"/>
+            <a:ext cx="3558988" cy="369332"/>
+          </a:xfrm>
+          <a:prstGeom prst="rect">
+            <a:avLst/>
+          </a:prstGeom>
+          <a:noFill/>
+          <a:ln>
+            <a:solidFill>
+              <a:schemeClr val="tx1"/>
+            </a:solidFill>
+          </a:ln>
+        </p:spPr>
+        <p:txBody>
+          <a:bodyPr wrap="none" rtlCol="0">
+            <a:spAutoFit/>
+          </a:bodyPr>
+          <a:lstStyle/>
+          <a:p>
+            <a:r>
+              <a:rPr lang="en-US" altLang="ja-JP" dirty="0"/>
+              <a:t>2 AI</a:t>
+            </a:r>
+            <a:r>
+              <a:rPr lang="ja-JP" altLang="en-US" dirty="0"/>
+              <a:t>、</a:t>
+            </a:r>
+            <a:r>
+              <a:rPr lang="en-US" altLang="ja-JP" dirty="0"/>
+              <a:t>3 </a:t>
+            </a:r>
+            <a:r>
+              <a:rPr lang="ja-JP" altLang="en-US" dirty="0"/>
+              <a:t>名による判定結果を選抜</a:t>
+            </a:r>
+            <a:endParaRPr lang="en-US" altLang="ja-JP" dirty="0"/>
+          </a:p>
+        </p:txBody>
+      </p:sp>
+      <p:sp>
+        <p:nvSpPr>
+          <p:cNvPr id="17" name="テキスト ボックス 16">
+            <a:extLst>
+              <a:ext uri="{FF2B5EF4-FFF2-40B4-BE49-F238E27FC236}">
+                <a16:creationId xmlns:a16="http://schemas.microsoft.com/office/drawing/2014/main" id="{0DB18FA9-66C9-A4BF-0B34-3A705D79ED9C}"/>
+              </a:ext>
+            </a:extLst>
+          </p:cNvPr>
+          <p:cNvSpPr txBox="1"/>
+          <p:nvPr/>
+        </p:nvSpPr>
+        <p:spPr>
+          <a:xfrm>
+            <a:off x="3103267" y="4678950"/>
+            <a:ext cx="998991" cy="369332"/>
+          </a:xfrm>
+          <a:prstGeom prst="rect">
+            <a:avLst/>
+          </a:prstGeom>
+          <a:noFill/>
+        </p:spPr>
+        <p:txBody>
+          <a:bodyPr wrap="none" rtlCol="0">
+            <a:spAutoFit/>
+          </a:bodyPr>
+          <a:lstStyle/>
+          <a:p>
+            <a:r>
+              <a:rPr kumimoji="1" lang="en-US" altLang="ja-JP"/>
+              <a:t>n=1200</a:t>
+            </a:r>
+            <a:endParaRPr kumimoji="1" lang="ja-JP" altLang="en-US"/>
+          </a:p>
+        </p:txBody>
+      </p:sp>
+      <p:sp>
+        <p:nvSpPr>
+          <p:cNvPr id="18" name="テキスト ボックス 17">
+            <a:extLst>
+              <a:ext uri="{FF2B5EF4-FFF2-40B4-BE49-F238E27FC236}">
+                <a16:creationId xmlns:a16="http://schemas.microsoft.com/office/drawing/2014/main" id="{DC038396-2409-3E57-A5A4-ADDB31A3F81E}"/>
+              </a:ext>
+            </a:extLst>
+          </p:cNvPr>
+          <p:cNvSpPr txBox="1"/>
+          <p:nvPr/>
+        </p:nvSpPr>
+        <p:spPr>
+          <a:xfrm>
+            <a:off x="3103266" y="5411498"/>
+            <a:ext cx="870751" cy="369332"/>
+          </a:xfrm>
+          <a:prstGeom prst="rect">
+            <a:avLst/>
+          </a:prstGeom>
+          <a:noFill/>
+        </p:spPr>
+        <p:txBody>
+          <a:bodyPr wrap="none" rtlCol="0">
+            <a:spAutoFit/>
+          </a:bodyPr>
+          <a:lstStyle/>
+          <a:p>
+            <a:r>
+              <a:rPr kumimoji="1" lang="en-US" altLang="ja-JP"/>
+              <a:t>n=495</a:t>
+            </a:r>
+          </a:p>
+        </p:txBody>
+      </p:sp>
+      <p:sp>
+        <p:nvSpPr>
+          <p:cNvPr id="19" name="テキスト ボックス 18">
+            <a:extLst>
+              <a:ext uri="{FF2B5EF4-FFF2-40B4-BE49-F238E27FC236}">
+                <a16:creationId xmlns:a16="http://schemas.microsoft.com/office/drawing/2014/main" id="{789180A8-A51B-BD41-8770-60FBEF30712F}"/>
+              </a:ext>
+            </a:extLst>
+          </p:cNvPr>
+          <p:cNvSpPr txBox="1"/>
+          <p:nvPr/>
+        </p:nvSpPr>
+        <p:spPr>
+          <a:xfrm>
+            <a:off x="2946813" y="5678743"/>
+            <a:ext cx="2428870" cy="369332"/>
+          </a:xfrm>
+          <a:prstGeom prst="rect">
+            <a:avLst/>
+          </a:prstGeom>
+          <a:noFill/>
+        </p:spPr>
+        <p:txBody>
+          <a:bodyPr wrap="none" rtlCol="0">
+            <a:spAutoFit/>
+          </a:bodyPr>
+          <a:lstStyle/>
+          <a:p>
             <a:r>
               <a:rPr lang="ja-JP" altLang="en-US"/>
-              <a:t>曖昧性解決において</a:t>
-            </a:r>
-            <a:r>
-              <a:rPr kumimoji="1" lang="ja-JP" altLang="en-US"/>
-              <a:t>一般的な</a:t>
-            </a:r>
-            <a:r>
-              <a:rPr kumimoji="1" lang="en-US" altLang="ja-JP" dirty="0"/>
-              <a:t>LLM</a:t>
+              <a:t>（</a:t>
+            </a:r>
+            <a:r>
+              <a:rPr lang="en-US" altLang="ja-JP"/>
+              <a:t>99</a:t>
             </a:r>
             <a:r>
               <a:rPr lang="ja-JP" altLang="en-US"/>
-              <a:t>が用いられはじめたのはごく最近</a:t>
+              <a:t>報告書</a:t>
+            </a:r>
+            <a:r>
+              <a:rPr lang="en-US" altLang="ja-JP"/>
+              <a:t> x 5</a:t>
+            </a:r>
+            <a:r>
+              <a:rPr lang="ja-JP" altLang="en-US"/>
+              <a:t>判定）</a:t>
+            </a:r>
+            <a:endParaRPr kumimoji="1" lang="en-US" altLang="ja-JP"/>
+          </a:p>
+        </p:txBody>
+      </p:sp>
+      <p:cxnSp>
+        <p:nvCxnSpPr>
+          <p:cNvPr id="21" name="直線コネクタ 20">
+            <a:extLst>
+              <a:ext uri="{FF2B5EF4-FFF2-40B4-BE49-F238E27FC236}">
+                <a16:creationId xmlns:a16="http://schemas.microsoft.com/office/drawing/2014/main" id="{30156B95-4ECD-9152-E110-735989CE0A84}"/>
+              </a:ext>
+            </a:extLst>
+          </p:cNvPr>
+          <p:cNvCxnSpPr>
+            <a:stCxn id="3" idx="2"/>
+            <a:endCxn id="4" idx="0"/>
+          </p:cNvCxnSpPr>
+          <p:nvPr/>
+        </p:nvCxnSpPr>
+        <p:spPr>
+          <a:xfrm>
+            <a:off x="2946813" y="1077657"/>
+            <a:ext cx="1" cy="363216"/>
+          </a:xfrm>
+          <a:prstGeom prst="line">
+            <a:avLst/>
+          </a:prstGeom>
+        </p:spPr>
+        <p:style>
+          <a:lnRef idx="2">
+            <a:schemeClr val="dk1"/>
+          </a:lnRef>
+          <a:fillRef idx="0">
+            <a:schemeClr val="dk1"/>
+          </a:fillRef>
+          <a:effectRef idx="1">
+            <a:schemeClr val="dk1"/>
+          </a:effectRef>
+          <a:fontRef idx="minor">
+            <a:schemeClr val="tx1"/>
+          </a:fontRef>
+        </p:style>
+      </p:cxnSp>
+      <p:cxnSp>
+        <p:nvCxnSpPr>
+          <p:cNvPr id="23" name="直線コネクタ 22">
+            <a:extLst>
+              <a:ext uri="{FF2B5EF4-FFF2-40B4-BE49-F238E27FC236}">
+                <a16:creationId xmlns:a16="http://schemas.microsoft.com/office/drawing/2014/main" id="{56F3E1CC-92BA-CA38-599C-064D6BA98C5D}"/>
+              </a:ext>
+            </a:extLst>
+          </p:cNvPr>
+          <p:cNvCxnSpPr>
+            <a:stCxn id="4" idx="2"/>
+            <a:endCxn id="7" idx="0"/>
+          </p:cNvCxnSpPr>
+          <p:nvPr/>
+        </p:nvCxnSpPr>
+        <p:spPr>
+          <a:xfrm>
+            <a:off x="2946814" y="1810205"/>
+            <a:ext cx="0" cy="363216"/>
+          </a:xfrm>
+          <a:prstGeom prst="line">
+            <a:avLst/>
+          </a:prstGeom>
+        </p:spPr>
+        <p:style>
+          <a:lnRef idx="2">
+            <a:schemeClr val="dk1"/>
+          </a:lnRef>
+          <a:fillRef idx="0">
+            <a:schemeClr val="dk1"/>
+          </a:fillRef>
+          <a:effectRef idx="1">
+            <a:schemeClr val="dk1"/>
+          </a:effectRef>
+          <a:fontRef idx="minor">
+            <a:schemeClr val="tx1"/>
+          </a:fontRef>
+        </p:style>
+      </p:cxnSp>
+      <p:cxnSp>
+        <p:nvCxnSpPr>
+          <p:cNvPr id="25" name="直線コネクタ 24">
+            <a:extLst>
+              <a:ext uri="{FF2B5EF4-FFF2-40B4-BE49-F238E27FC236}">
+                <a16:creationId xmlns:a16="http://schemas.microsoft.com/office/drawing/2014/main" id="{49002F55-4D49-BD09-DBCE-6BB2C828947F}"/>
+              </a:ext>
+            </a:extLst>
+          </p:cNvPr>
+          <p:cNvCxnSpPr>
+            <a:stCxn id="7" idx="2"/>
+            <a:endCxn id="8" idx="0"/>
+          </p:cNvCxnSpPr>
+          <p:nvPr/>
+        </p:nvCxnSpPr>
+        <p:spPr>
+          <a:xfrm>
+            <a:off x="2946814" y="2542753"/>
+            <a:ext cx="0" cy="363216"/>
+          </a:xfrm>
+          <a:prstGeom prst="line">
+            <a:avLst/>
+          </a:prstGeom>
+        </p:spPr>
+        <p:style>
+          <a:lnRef idx="2">
+            <a:schemeClr val="dk1"/>
+          </a:lnRef>
+          <a:fillRef idx="0">
+            <a:schemeClr val="dk1"/>
+          </a:fillRef>
+          <a:effectRef idx="1">
+            <a:schemeClr val="dk1"/>
+          </a:effectRef>
+          <a:fontRef idx="minor">
+            <a:schemeClr val="tx1"/>
+          </a:fontRef>
+        </p:style>
+      </p:cxnSp>
+      <p:cxnSp>
+        <p:nvCxnSpPr>
+          <p:cNvPr id="26" name="直線コネクタ 25">
+            <a:extLst>
+              <a:ext uri="{FF2B5EF4-FFF2-40B4-BE49-F238E27FC236}">
+                <a16:creationId xmlns:a16="http://schemas.microsoft.com/office/drawing/2014/main" id="{A3FB6594-FF6C-A8BC-C53A-719D46560A30}"/>
+              </a:ext>
+            </a:extLst>
+          </p:cNvPr>
+          <p:cNvCxnSpPr>
+            <a:cxnSpLocks/>
+            <a:stCxn id="8" idx="2"/>
+            <a:endCxn id="9" idx="0"/>
+          </p:cNvCxnSpPr>
+          <p:nvPr/>
+        </p:nvCxnSpPr>
+        <p:spPr>
+          <a:xfrm>
+            <a:off x="2946814" y="3275301"/>
+            <a:ext cx="0" cy="363216"/>
+          </a:xfrm>
+          <a:prstGeom prst="line">
+            <a:avLst/>
+          </a:prstGeom>
+        </p:spPr>
+        <p:style>
+          <a:lnRef idx="2">
+            <a:schemeClr val="dk1"/>
+          </a:lnRef>
+          <a:fillRef idx="0">
+            <a:schemeClr val="dk1"/>
+          </a:fillRef>
+          <a:effectRef idx="1">
+            <a:schemeClr val="dk1"/>
+          </a:effectRef>
+          <a:fontRef idx="minor">
+            <a:schemeClr val="tx1"/>
+          </a:fontRef>
+        </p:style>
+      </p:cxnSp>
+      <p:cxnSp>
+        <p:nvCxnSpPr>
+          <p:cNvPr id="29" name="直線コネクタ 28">
+            <a:extLst>
+              <a:ext uri="{FF2B5EF4-FFF2-40B4-BE49-F238E27FC236}">
+                <a16:creationId xmlns:a16="http://schemas.microsoft.com/office/drawing/2014/main" id="{80A92EC8-4485-8E05-D2FF-4ACB6682DD13}"/>
+              </a:ext>
+            </a:extLst>
+          </p:cNvPr>
+          <p:cNvCxnSpPr>
+            <a:cxnSpLocks/>
+            <a:stCxn id="9" idx="2"/>
+            <a:endCxn id="10" idx="0"/>
+          </p:cNvCxnSpPr>
+          <p:nvPr/>
+        </p:nvCxnSpPr>
+        <p:spPr>
+          <a:xfrm>
+            <a:off x="2946814" y="4007849"/>
+            <a:ext cx="0" cy="363216"/>
+          </a:xfrm>
+          <a:prstGeom prst="line">
+            <a:avLst/>
+          </a:prstGeom>
+        </p:spPr>
+        <p:style>
+          <a:lnRef idx="2">
+            <a:schemeClr val="dk1"/>
+          </a:lnRef>
+          <a:fillRef idx="0">
+            <a:schemeClr val="dk1"/>
+          </a:fillRef>
+          <a:effectRef idx="1">
+            <a:schemeClr val="dk1"/>
+          </a:effectRef>
+          <a:fontRef idx="minor">
+            <a:schemeClr val="tx1"/>
+          </a:fontRef>
+        </p:style>
+      </p:cxnSp>
+      <p:cxnSp>
+        <p:nvCxnSpPr>
+          <p:cNvPr id="32" name="直線コネクタ 31">
+            <a:extLst>
+              <a:ext uri="{FF2B5EF4-FFF2-40B4-BE49-F238E27FC236}">
+                <a16:creationId xmlns:a16="http://schemas.microsoft.com/office/drawing/2014/main" id="{D1C9201D-8E52-69F1-829D-A5264D734145}"/>
+              </a:ext>
+            </a:extLst>
+          </p:cNvPr>
+          <p:cNvCxnSpPr>
+            <a:cxnSpLocks/>
+            <a:stCxn id="10" idx="2"/>
+            <a:endCxn id="13" idx="0"/>
+          </p:cNvCxnSpPr>
+          <p:nvPr/>
+        </p:nvCxnSpPr>
+        <p:spPr>
+          <a:xfrm flipH="1">
+            <a:off x="2946813" y="4740397"/>
+            <a:ext cx="1" cy="363216"/>
+          </a:xfrm>
+          <a:prstGeom prst="line">
+            <a:avLst/>
+          </a:prstGeom>
+        </p:spPr>
+        <p:style>
+          <a:lnRef idx="2">
+            <a:schemeClr val="dk1"/>
+          </a:lnRef>
+          <a:fillRef idx="0">
+            <a:schemeClr val="dk1"/>
+          </a:fillRef>
+          <a:effectRef idx="1">
+            <a:schemeClr val="dk1"/>
+          </a:effectRef>
+          <a:fontRef idx="minor">
+            <a:schemeClr val="tx1"/>
+          </a:fontRef>
+        </p:style>
+      </p:cxnSp>
+      <p:sp>
+        <p:nvSpPr>
+          <p:cNvPr id="35" name="テキスト ボックス 34">
+            <a:extLst>
+              <a:ext uri="{FF2B5EF4-FFF2-40B4-BE49-F238E27FC236}">
+                <a16:creationId xmlns:a16="http://schemas.microsoft.com/office/drawing/2014/main" id="{29C9CE49-B4EE-88F2-97BF-161E83E4CD9C}"/>
+              </a:ext>
+            </a:extLst>
+          </p:cNvPr>
+          <p:cNvSpPr txBox="1"/>
+          <p:nvPr/>
+        </p:nvSpPr>
+        <p:spPr>
+          <a:xfrm>
+            <a:off x="1301492" y="1868756"/>
+            <a:ext cx="1723549" cy="276999"/>
+          </a:xfrm>
+          <a:prstGeom prst="rect">
+            <a:avLst/>
+          </a:prstGeom>
+          <a:noFill/>
+        </p:spPr>
+        <p:txBody>
+          <a:bodyPr wrap="none" rtlCol="0">
+            <a:spAutoFit/>
+          </a:bodyPr>
+          <a:lstStyle/>
+          <a:p>
+            <a:r>
+              <a:rPr kumimoji="1" lang="ja-JP" altLang="en-US" sz="1200"/>
+              <a:t>ランダムサンプリング</a:t>
+            </a:r>
+          </a:p>
+        </p:txBody>
+      </p:sp>
+      <p:sp>
+        <p:nvSpPr>
+          <p:cNvPr id="36" name="テキスト ボックス 35">
+            <a:extLst>
+              <a:ext uri="{FF2B5EF4-FFF2-40B4-BE49-F238E27FC236}">
+                <a16:creationId xmlns:a16="http://schemas.microsoft.com/office/drawing/2014/main" id="{C6B897F6-20E5-015E-DD53-352FFDEF0FBC}"/>
+              </a:ext>
+            </a:extLst>
+          </p:cNvPr>
+          <p:cNvSpPr txBox="1"/>
+          <p:nvPr/>
+        </p:nvSpPr>
+        <p:spPr>
+          <a:xfrm>
+            <a:off x="1301492" y="2582804"/>
+            <a:ext cx="1723549" cy="276999"/>
+          </a:xfrm>
+          <a:prstGeom prst="rect">
+            <a:avLst/>
+          </a:prstGeom>
+          <a:noFill/>
+        </p:spPr>
+        <p:txBody>
+          <a:bodyPr wrap="none" rtlCol="0">
+            <a:spAutoFit/>
+          </a:bodyPr>
+          <a:lstStyle/>
+          <a:p>
+            <a:r>
+              <a:rPr kumimoji="1" lang="ja-JP" altLang="en-US" sz="1200"/>
+              <a:t>ランダムサンプリング</a:t>
+            </a:r>
+          </a:p>
+        </p:txBody>
+      </p:sp>
+      <p:sp>
+        <p:nvSpPr>
+          <p:cNvPr id="37" name="テキスト ボックス 36">
+            <a:extLst>
+              <a:ext uri="{FF2B5EF4-FFF2-40B4-BE49-F238E27FC236}">
+                <a16:creationId xmlns:a16="http://schemas.microsoft.com/office/drawing/2014/main" id="{C123585A-FEBD-F0DA-5D6F-396CDC39E3B3}"/>
+              </a:ext>
+            </a:extLst>
+          </p:cNvPr>
+          <p:cNvSpPr txBox="1"/>
+          <p:nvPr/>
+        </p:nvSpPr>
+        <p:spPr>
+          <a:xfrm>
+            <a:off x="1917045" y="3333852"/>
+            <a:ext cx="1107996" cy="276999"/>
+          </a:xfrm>
+          <a:prstGeom prst="rect">
+            <a:avLst/>
+          </a:prstGeom>
+          <a:noFill/>
+        </p:spPr>
+        <p:txBody>
+          <a:bodyPr wrap="none" rtlCol="0">
+            <a:spAutoFit/>
+          </a:bodyPr>
+          <a:lstStyle/>
+          <a:p>
+            <a:r>
+              <a:rPr lang="ja-JP" altLang="en-US" sz="1200"/>
+              <a:t>固有表現抽出</a:t>
+            </a:r>
+            <a:endParaRPr kumimoji="1" lang="ja-JP" altLang="en-US" sz="1200"/>
+          </a:p>
+        </p:txBody>
+      </p:sp>
+      <p:sp>
+        <p:nvSpPr>
+          <p:cNvPr id="38" name="テキスト ボックス 37">
+            <a:extLst>
+              <a:ext uri="{FF2B5EF4-FFF2-40B4-BE49-F238E27FC236}">
+                <a16:creationId xmlns:a16="http://schemas.microsoft.com/office/drawing/2014/main" id="{B27C02FB-E947-3DBE-BEEB-E6AE50AC33DC}"/>
+              </a:ext>
+            </a:extLst>
+          </p:cNvPr>
+          <p:cNvSpPr txBox="1"/>
+          <p:nvPr/>
+        </p:nvSpPr>
+        <p:spPr>
+          <a:xfrm>
+            <a:off x="1405687" y="4050957"/>
+            <a:ext cx="1619354" cy="276999"/>
+          </a:xfrm>
+          <a:prstGeom prst="rect">
+            <a:avLst/>
+          </a:prstGeom>
+          <a:noFill/>
+        </p:spPr>
+        <p:txBody>
+          <a:bodyPr wrap="none" rtlCol="0">
+            <a:spAutoFit/>
+          </a:bodyPr>
+          <a:lstStyle/>
+          <a:p>
+            <a:r>
+              <a:rPr kumimoji="1" lang="en-US" altLang="ja-JP" sz="1200"/>
+              <a:t>3 AI</a:t>
+            </a:r>
+            <a:r>
+              <a:rPr kumimoji="1" lang="ja-JP" altLang="en-US" sz="1200"/>
+              <a:t>と</a:t>
+            </a:r>
+            <a:r>
+              <a:rPr kumimoji="1" lang="en-US" altLang="ja-JP" sz="1200"/>
+              <a:t>3</a:t>
+            </a:r>
+            <a:r>
+              <a:rPr kumimoji="1" lang="ja-JP" altLang="en-US" sz="1200"/>
+              <a:t>名による判定</a:t>
+            </a:r>
+          </a:p>
+        </p:txBody>
+      </p:sp>
+      <p:sp>
+        <p:nvSpPr>
+          <p:cNvPr id="39" name="テキスト ボックス 38">
+            <a:extLst>
+              <a:ext uri="{FF2B5EF4-FFF2-40B4-BE49-F238E27FC236}">
+                <a16:creationId xmlns:a16="http://schemas.microsoft.com/office/drawing/2014/main" id="{6C859D4A-5B10-9425-3EF2-3241A55B330C}"/>
+              </a:ext>
+            </a:extLst>
+          </p:cNvPr>
+          <p:cNvSpPr txBox="1"/>
+          <p:nvPr/>
+        </p:nvSpPr>
+        <p:spPr>
+          <a:xfrm>
+            <a:off x="1490647" y="4791014"/>
+            <a:ext cx="1534394" cy="276999"/>
+          </a:xfrm>
+          <a:prstGeom prst="rect">
+            <a:avLst/>
+          </a:prstGeom>
+          <a:noFill/>
+        </p:spPr>
+        <p:txBody>
+          <a:bodyPr wrap="none" rtlCol="0">
+            <a:spAutoFit/>
+          </a:bodyPr>
+          <a:lstStyle/>
+          <a:p>
+            <a:r>
+              <a:rPr lang="en-US" altLang="ja-JP" sz="1200"/>
+              <a:t>1</a:t>
+            </a:r>
+            <a:r>
+              <a:rPr kumimoji="1" lang="en-US" altLang="ja-JP" sz="1200"/>
+              <a:t> AI</a:t>
+            </a:r>
+            <a:r>
+              <a:rPr kumimoji="1" lang="ja-JP" altLang="en-US" sz="1200"/>
+              <a:t>の判定を対象外</a:t>
+            </a:r>
+          </a:p>
+        </p:txBody>
+      </p:sp>
+      <p:sp>
+        <p:nvSpPr>
+          <p:cNvPr id="40" name="テキスト ボックス 39">
+            <a:extLst>
+              <a:ext uri="{FF2B5EF4-FFF2-40B4-BE49-F238E27FC236}">
+                <a16:creationId xmlns:a16="http://schemas.microsoft.com/office/drawing/2014/main" id="{9E908830-F2F3-3057-F8BB-D959F4674191}"/>
+              </a:ext>
+            </a:extLst>
+          </p:cNvPr>
+          <p:cNvSpPr txBox="1"/>
+          <p:nvPr/>
+        </p:nvSpPr>
+        <p:spPr>
+          <a:xfrm>
+            <a:off x="2277399" y="6088715"/>
+            <a:ext cx="1338828" cy="369332"/>
+          </a:xfrm>
+          <a:prstGeom prst="rect">
+            <a:avLst/>
+          </a:prstGeom>
+          <a:noFill/>
+          <a:ln>
+            <a:solidFill>
+              <a:schemeClr val="tx1"/>
+            </a:solidFill>
+          </a:ln>
+        </p:spPr>
+        <p:txBody>
+          <a:bodyPr wrap="none" rtlCol="0">
+            <a:spAutoFit/>
+          </a:bodyPr>
+          <a:lstStyle/>
+          <a:p>
+            <a:r>
+              <a:rPr lang="ja-JP" altLang="en-US" dirty="0"/>
+              <a:t>地名の決定</a:t>
             </a:r>
             <a:endParaRPr lang="en-US" altLang="ja-JP" dirty="0"/>
           </a:p>
-          <a:p>
-            <a:pPr marL="285750" indent="-285750">
-              <a:buFont typeface="Wingdings" pitchFamily="2" charset="2"/>
-              <a:buChar char="Ø"/>
-            </a:pPr>
+        </p:txBody>
+      </p:sp>
+      <p:cxnSp>
+        <p:nvCxnSpPr>
+          <p:cNvPr id="42" name="直線コネクタ 41">
+            <a:extLst>
+              <a:ext uri="{FF2B5EF4-FFF2-40B4-BE49-F238E27FC236}">
+                <a16:creationId xmlns:a16="http://schemas.microsoft.com/office/drawing/2014/main" id="{295B1CD3-3B9B-D7B5-8EDB-BD5C4216A288}"/>
+              </a:ext>
+            </a:extLst>
+          </p:cNvPr>
+          <p:cNvCxnSpPr>
+            <a:stCxn id="13" idx="2"/>
+            <a:endCxn id="40" idx="0"/>
+          </p:cNvCxnSpPr>
+          <p:nvPr/>
+        </p:nvCxnSpPr>
+        <p:spPr>
+          <a:xfrm>
+            <a:off x="2946813" y="5472945"/>
+            <a:ext cx="0" cy="615770"/>
+          </a:xfrm>
+          <a:prstGeom prst="line">
+            <a:avLst/>
+          </a:prstGeom>
+        </p:spPr>
+        <p:style>
+          <a:lnRef idx="2">
+            <a:schemeClr val="dk1"/>
+          </a:lnRef>
+          <a:fillRef idx="0">
+            <a:schemeClr val="dk1"/>
+          </a:fillRef>
+          <a:effectRef idx="1">
+            <a:schemeClr val="dk1"/>
+          </a:effectRef>
+          <a:fontRef idx="minor">
+            <a:schemeClr val="tx1"/>
+          </a:fontRef>
+        </p:style>
+      </p:cxnSp>
+      <p:sp>
+        <p:nvSpPr>
+          <p:cNvPr id="43" name="テキスト ボックス 42">
+            <a:extLst>
+              <a:ext uri="{FF2B5EF4-FFF2-40B4-BE49-F238E27FC236}">
+                <a16:creationId xmlns:a16="http://schemas.microsoft.com/office/drawing/2014/main" id="{A5FE4797-1CA8-53C0-69E7-FC5ED9495741}"/>
+              </a:ext>
+            </a:extLst>
+          </p:cNvPr>
+          <p:cNvSpPr txBox="1"/>
+          <p:nvPr/>
+        </p:nvSpPr>
+        <p:spPr>
+          <a:xfrm>
+            <a:off x="2350976" y="5626353"/>
+            <a:ext cx="646331" cy="276999"/>
+          </a:xfrm>
+          <a:prstGeom prst="rect">
+            <a:avLst/>
+          </a:prstGeom>
+          <a:noFill/>
+        </p:spPr>
+        <p:txBody>
+          <a:bodyPr wrap="none" rtlCol="0">
+            <a:spAutoFit/>
+          </a:bodyPr>
+          <a:lstStyle/>
+          <a:p>
+            <a:r>
+              <a:rPr kumimoji="1" lang="ja-JP" altLang="en-US" sz="1200"/>
+              <a:t>多数決</a:t>
+            </a:r>
+          </a:p>
+        </p:txBody>
+      </p:sp>
+      <p:sp>
+        <p:nvSpPr>
+          <p:cNvPr id="46" name="テキスト ボックス 45">
+            <a:extLst>
+              <a:ext uri="{FF2B5EF4-FFF2-40B4-BE49-F238E27FC236}">
+                <a16:creationId xmlns:a16="http://schemas.microsoft.com/office/drawing/2014/main" id="{DE99B3DA-7EFF-84DC-119C-EE3965C33116}"/>
+              </a:ext>
+            </a:extLst>
+          </p:cNvPr>
+          <p:cNvSpPr txBox="1"/>
+          <p:nvPr/>
+        </p:nvSpPr>
+        <p:spPr>
+          <a:xfrm>
+            <a:off x="8016240" y="1338244"/>
+            <a:ext cx="2492990" cy="1754326"/>
+          </a:xfrm>
+          <a:prstGeom prst="rect">
+            <a:avLst/>
+          </a:prstGeom>
+          <a:noFill/>
+          <a:ln>
+            <a:solidFill>
+              <a:schemeClr val="dk1"/>
+            </a:solidFill>
+          </a:ln>
+        </p:spPr>
+        <p:txBody>
+          <a:bodyPr wrap="none" rtlCol="0">
+            <a:spAutoFit/>
+          </a:bodyPr>
+          <a:lstStyle/>
+          <a:p>
+            <a:r>
+              <a:rPr kumimoji="1" lang="ja-JP" altLang="en-US"/>
+              <a:t>修正の程度の差</a:t>
+            </a:r>
+            <a:endParaRPr kumimoji="1" lang="en-US" altLang="ja-JP"/>
+          </a:p>
+          <a:p>
             <a:r>
               <a:rPr lang="ja-JP" altLang="en-US"/>
-              <a:t>地名と地名以外を含む幅広い固有表現の曖昧性解決も行われている</a:t>
-            </a:r>
-            <a:endParaRPr lang="en-US" altLang="ja-JP" dirty="0"/>
-          </a:p>
-          <a:p>
-            <a:pPr marL="285750" indent="-285750">
-              <a:buFont typeface="Wingdings" pitchFamily="2" charset="2"/>
-              <a:buChar char="Ø"/>
-            </a:pPr>
-            <a:r>
-              <a:rPr kumimoji="1" lang="ja-JP" altLang="en-US"/>
-              <a:t>日本語における事例はほぼ見られない</a:t>
-            </a:r>
-            <a:endParaRPr kumimoji="1" lang="en-US" altLang="ja-JP" dirty="0"/>
-          </a:p>
-        </p:txBody>
-      </p:sp>
+              <a:t>・判定者による</a:t>
+            </a:r>
+            <a:endParaRPr lang="en-US" altLang="ja-JP"/>
+          </a:p>
+          <a:p>
+            <a:r>
+              <a:rPr lang="ja-JP" altLang="en-US"/>
+              <a:t>　　・距離行列</a:t>
+            </a:r>
+            <a:endParaRPr lang="en-US" altLang="ja-JP"/>
+          </a:p>
+          <a:p>
+            <a:r>
+              <a:rPr lang="ja-JP" altLang="en-US"/>
+              <a:t>　　・クラスタリング</a:t>
+            </a:r>
+            <a:endParaRPr lang="en-US" altLang="ja-JP"/>
+          </a:p>
+          <a:p>
+            <a:r>
+              <a:rPr kumimoji="1" lang="ja-JP" altLang="en-US"/>
+              <a:t>・大学ごと</a:t>
+            </a:r>
+            <a:endParaRPr kumimoji="1" lang="en-US" altLang="ja-JP"/>
+          </a:p>
+          <a:p>
+            <a:r>
+              <a:rPr lang="ja-JP" altLang="en-US"/>
+              <a:t>　　・検定</a:t>
+            </a:r>
+            <a:endParaRPr kumimoji="1" lang="ja-JP" altLang="en-US"/>
+          </a:p>
+        </p:txBody>
+      </p:sp>
+      <p:sp>
+        <p:nvSpPr>
+          <p:cNvPr id="48" name="テキスト ボックス 47">
+            <a:extLst>
+              <a:ext uri="{FF2B5EF4-FFF2-40B4-BE49-F238E27FC236}">
+                <a16:creationId xmlns:a16="http://schemas.microsoft.com/office/drawing/2014/main" id="{0402A917-F530-F38F-A7F5-55EF0BA1801A}"/>
+              </a:ext>
+            </a:extLst>
+          </p:cNvPr>
+          <p:cNvSpPr txBox="1"/>
+          <p:nvPr/>
+        </p:nvSpPr>
+        <p:spPr>
+          <a:xfrm>
+            <a:off x="8016240" y="4491713"/>
+            <a:ext cx="2723823" cy="923330"/>
+          </a:xfrm>
+          <a:prstGeom prst="rect">
+            <a:avLst/>
+          </a:prstGeom>
+          <a:noFill/>
+          <a:ln>
+            <a:solidFill>
+              <a:schemeClr val="dk1"/>
+            </a:solidFill>
+          </a:ln>
+        </p:spPr>
+        <p:txBody>
+          <a:bodyPr wrap="none" rtlCol="0">
+            <a:spAutoFit/>
+          </a:bodyPr>
+          <a:lstStyle/>
+          <a:p>
+            <a:r>
+              <a:rPr lang="ja-JP" altLang="en-US"/>
+              <a:t>出現（決定）地名の確認</a:t>
+            </a:r>
+            <a:endParaRPr lang="en-US" altLang="ja-JP"/>
+          </a:p>
+          <a:p>
+            <a:r>
+              <a:rPr kumimoji="1" lang="ja-JP" altLang="en-US"/>
+              <a:t>・地名の例</a:t>
+            </a:r>
+            <a:endParaRPr kumimoji="1" lang="en-US" altLang="ja-JP"/>
+          </a:p>
+          <a:p>
+            <a:r>
+              <a:rPr lang="ja-JP" altLang="en-US"/>
+              <a:t>・大学ごとの嗜好</a:t>
+            </a:r>
+            <a:endParaRPr kumimoji="1" lang="ja-JP" altLang="en-US"/>
+          </a:p>
+        </p:txBody>
+      </p:sp>
+      <p:cxnSp>
+        <p:nvCxnSpPr>
+          <p:cNvPr id="50" name="カギ線コネクタ 49">
+            <a:extLst>
+              <a:ext uri="{FF2B5EF4-FFF2-40B4-BE49-F238E27FC236}">
+                <a16:creationId xmlns:a16="http://schemas.microsoft.com/office/drawing/2014/main" id="{A28C7C5C-E306-C684-ACDB-E39ACC1F3FAB}"/>
+              </a:ext>
+            </a:extLst>
+          </p:cNvPr>
+          <p:cNvCxnSpPr>
+            <a:stCxn id="13" idx="3"/>
+            <a:endCxn id="46" idx="1"/>
+          </p:cNvCxnSpPr>
+          <p:nvPr/>
+        </p:nvCxnSpPr>
+        <p:spPr>
+          <a:xfrm flipV="1">
+            <a:off x="4726307" y="2215407"/>
+            <a:ext cx="3289933" cy="3072872"/>
+          </a:xfrm>
+          <a:prstGeom prst="bentConnector3">
+            <a:avLst/>
+          </a:prstGeom>
+          <a:ln>
+            <a:solidFill>
+              <a:schemeClr val="tx1"/>
+            </a:solidFill>
+          </a:ln>
+        </p:spPr>
+        <p:style>
+          <a:lnRef idx="2">
+            <a:schemeClr val="accent1"/>
+          </a:lnRef>
+          <a:fillRef idx="0">
+            <a:schemeClr val="accent1"/>
+          </a:fillRef>
+          <a:effectRef idx="1">
+            <a:schemeClr val="accent1"/>
+          </a:effectRef>
+          <a:fontRef idx="minor">
+            <a:schemeClr val="tx1"/>
+          </a:fontRef>
+        </p:style>
+      </p:cxnSp>
+      <p:cxnSp>
+        <p:nvCxnSpPr>
+          <p:cNvPr id="52" name="カギ線コネクタ 51">
+            <a:extLst>
+              <a:ext uri="{FF2B5EF4-FFF2-40B4-BE49-F238E27FC236}">
+                <a16:creationId xmlns:a16="http://schemas.microsoft.com/office/drawing/2014/main" id="{6D9D6582-DB29-F9A2-2367-7F6BF897D1FB}"/>
+              </a:ext>
+            </a:extLst>
+          </p:cNvPr>
+          <p:cNvCxnSpPr>
+            <a:stCxn id="40" idx="3"/>
+            <a:endCxn id="48" idx="1"/>
+          </p:cNvCxnSpPr>
+          <p:nvPr/>
+        </p:nvCxnSpPr>
+        <p:spPr>
+          <a:xfrm flipV="1">
+            <a:off x="3616227" y="4953378"/>
+            <a:ext cx="4400013" cy="1320003"/>
+          </a:xfrm>
+          <a:prstGeom prst="bentConnector3">
+            <a:avLst>
+              <a:gd name="adj1" fmla="val 80942"/>
+            </a:avLst>
+          </a:prstGeom>
+          <a:ln>
+            <a:solidFill>
+              <a:schemeClr val="tx1"/>
+            </a:solidFill>
+          </a:ln>
+        </p:spPr>
+        <p:style>
+          <a:lnRef idx="2">
+            <a:schemeClr val="accent1"/>
+          </a:lnRef>
+          <a:fillRef idx="0">
+            <a:schemeClr val="accent1"/>
+          </a:fillRef>
+          <a:effectRef idx="1">
+            <a:schemeClr val="accent1"/>
+          </a:effectRef>
+          <a:fontRef idx="minor">
+            <a:schemeClr val="tx1"/>
+          </a:fontRef>
+        </p:style>
+      </p:cxnSp>
     </p:spTree>
     <p:extLst>
       <p:ext uri="{BB962C8B-B14F-4D97-AF65-F5344CB8AC3E}">
-        <p14:creationId xmlns:p14="http://schemas.microsoft.com/office/powerpoint/2010/main" val="2513616949"/>
+        <p14:creationId xmlns:p14="http://schemas.microsoft.com/office/powerpoint/2010/main" val="1515609798"/>
+      </p:ext>
+    </p:extLst>
+  </p:cSld>
+  <p:clrMapOvr>
+    <a:masterClrMapping/>
+  </p:clrMapOvr>
+</p:sld>
+</file>
+
+<file path=ppt/slides/slide8.xml><?xml version="1.0" encoding="utf-8"?>
+<p:sld xmlns:a="http://schemas.openxmlformats.org/drawingml/2006/main" xmlns:r="http://schemas.openxmlformats.org/officeDocument/2006/relationships" xmlns:p="http://schemas.openxmlformats.org/presentationml/2006/main">
+  <p:cSld>
+    <p:spTree>
+      <p:nvGrpSpPr>
+        <p:cNvPr id="1" name="">
+          <a:extLst>
+            <a:ext uri="{FF2B5EF4-FFF2-40B4-BE49-F238E27FC236}">
+              <a16:creationId xmlns:a16="http://schemas.microsoft.com/office/drawing/2014/main" id="{DC0D387A-1453-95D2-ECE4-F0F5846A713A}"/>
+            </a:ext>
+          </a:extLst>
+        </p:cNvPr>
+        <p:cNvGrpSpPr/>
+        <p:nvPr/>
+      </p:nvGrpSpPr>
+      <p:grpSpPr>
+        <a:xfrm>
+          <a:off x="0" y="0"/>
+          <a:ext cx="0" cy="0"/>
+          <a:chOff x="0" y="0"/>
+          <a:chExt cx="0" cy="0"/>
+        </a:xfrm>
+      </p:grpSpPr>
+      <p:sp>
+        <p:nvSpPr>
+          <p:cNvPr id="2" name="タイトル 1">
+            <a:extLst>
+              <a:ext uri="{FF2B5EF4-FFF2-40B4-BE49-F238E27FC236}">
+                <a16:creationId xmlns:a16="http://schemas.microsoft.com/office/drawing/2014/main" id="{5B2EEC0A-3EFA-7A7C-9D24-A9AAFD07EE0F}"/>
+              </a:ext>
+            </a:extLst>
+          </p:cNvPr>
+          <p:cNvSpPr>
+            <a:spLocks noGrp="1"/>
+          </p:cNvSpPr>
+          <p:nvPr>
+            <p:ph type="title"/>
+          </p:nvPr>
+        </p:nvSpPr>
+        <p:spPr>
+          <a:xfrm>
+            <a:off x="0" y="1"/>
+            <a:ext cx="12192000" cy="577516"/>
+          </a:xfrm>
+          <a:solidFill>
+            <a:schemeClr val="bg1">
+              <a:lumMod val="85000"/>
+            </a:schemeClr>
+          </a:solidFill>
+        </p:spPr>
+        <p:txBody>
+          <a:bodyPr>
+            <a:normAutofit fontScale="90000"/>
+          </a:bodyPr>
+          <a:lstStyle/>
+          <a:p>
+            <a:r>
+              <a:rPr kumimoji="1" lang="ja-JP" altLang="en-US" sz="3600"/>
+              <a:t>マテリアル・方法（</a:t>
+            </a:r>
+            <a:r>
+              <a:rPr kumimoji="1" lang="en-US" altLang="ja-JP" sz="3600"/>
+              <a:t>JSON</a:t>
+            </a:r>
+            <a:r>
+              <a:rPr kumimoji="1" lang="ja-JP" altLang="en-US" sz="3600"/>
+              <a:t>形式の例）</a:t>
+            </a:r>
+          </a:p>
+        </p:txBody>
+      </p:sp>
+    </p:spTree>
+    <p:extLst>
+      <p:ext uri="{BB962C8B-B14F-4D97-AF65-F5344CB8AC3E}">
+        <p14:creationId xmlns:p14="http://schemas.microsoft.com/office/powerpoint/2010/main" val="2951289915"/>
+      </p:ext>
+    </p:extLst>
+  </p:cSld>
+  <p:clrMapOvr>
+    <a:masterClrMapping/>
+  </p:clrMapOvr>
+</p:sld>
+</file>
+
+<file path=ppt/slides/slide9.xml><?xml version="1.0" encoding="utf-8"?>
+<p:sld xmlns:a="http://schemas.openxmlformats.org/drawingml/2006/main" xmlns:r="http://schemas.openxmlformats.org/officeDocument/2006/relationships" xmlns:p="http://schemas.openxmlformats.org/presentationml/2006/main">
+  <p:cSld>
+    <p:spTree>
+      <p:nvGrpSpPr>
+        <p:cNvPr id="1" name="">
+          <a:extLst>
+            <a:ext uri="{FF2B5EF4-FFF2-40B4-BE49-F238E27FC236}">
+              <a16:creationId xmlns:a16="http://schemas.microsoft.com/office/drawing/2014/main" id="{27B622E3-1D88-097D-0343-32872DBECF48}"/>
+            </a:ext>
+          </a:extLst>
+        </p:cNvPr>
+        <p:cNvGrpSpPr/>
+        <p:nvPr/>
+      </p:nvGrpSpPr>
+      <p:grpSpPr>
+        <a:xfrm>
+          <a:off x="0" y="0"/>
+          <a:ext cx="0" cy="0"/>
+          <a:chOff x="0" y="0"/>
+          <a:chExt cx="0" cy="0"/>
+        </a:xfrm>
+      </p:grpSpPr>
+      <p:sp>
+        <p:nvSpPr>
+          <p:cNvPr id="2" name="タイトル 1">
+            <a:extLst>
+              <a:ext uri="{FF2B5EF4-FFF2-40B4-BE49-F238E27FC236}">
+                <a16:creationId xmlns:a16="http://schemas.microsoft.com/office/drawing/2014/main" id="{B62EDC01-EC4F-BEDC-7426-C76D07DBBBC9}"/>
+              </a:ext>
+            </a:extLst>
+          </p:cNvPr>
+          <p:cNvSpPr>
+            <a:spLocks noGrp="1"/>
+          </p:cNvSpPr>
+          <p:nvPr>
+            <p:ph type="title"/>
+          </p:nvPr>
+        </p:nvSpPr>
+        <p:spPr>
+          <a:xfrm>
+            <a:off x="0" y="1"/>
+            <a:ext cx="12192000" cy="577516"/>
+          </a:xfrm>
+          <a:solidFill>
+            <a:schemeClr val="bg1">
+              <a:lumMod val="85000"/>
+            </a:schemeClr>
+          </a:solidFill>
+        </p:spPr>
+        <p:txBody>
+          <a:bodyPr>
+            <a:normAutofit fontScale="90000"/>
+          </a:bodyPr>
+          <a:lstStyle/>
+          <a:p>
+            <a:r>
+              <a:rPr kumimoji="1" lang="ja-JP" altLang="en-US" sz="3600"/>
+              <a:t>マテリアル・方法（</a:t>
+            </a:r>
+            <a:r>
+              <a:rPr lang="ja-JP" altLang="en-US" sz="3600"/>
+              <a:t>プロンプト</a:t>
+            </a:r>
+            <a:r>
+              <a:rPr kumimoji="1" lang="ja-JP" altLang="en-US" sz="3600"/>
+              <a:t>）</a:t>
+            </a:r>
+          </a:p>
+        </p:txBody>
+      </p:sp>
+    </p:spTree>
+    <p:extLst>
+      <p:ext uri="{BB962C8B-B14F-4D97-AF65-F5344CB8AC3E}">
+        <p14:creationId xmlns:p14="http://schemas.microsoft.com/office/powerpoint/2010/main" val="1609540031"/>
       </p:ext>
     </p:extLst>
   </p:cSld>

--- a/jsik2026taikai.pptx
+++ b/jsik2026taikai.pptx
@@ -10,12 +10,12 @@
     <p:sldId id="303" r:id="rId4"/>
     <p:sldId id="304" r:id="rId5"/>
     <p:sldId id="306" r:id="rId6"/>
-    <p:sldId id="305" r:id="rId7"/>
-    <p:sldId id="307" r:id="rId8"/>
-    <p:sldId id="308" r:id="rId9"/>
-    <p:sldId id="309" r:id="rId10"/>
-    <p:sldId id="310" r:id="rId11"/>
-    <p:sldId id="311" r:id="rId12"/>
+    <p:sldId id="313" r:id="rId7"/>
+    <p:sldId id="305" r:id="rId8"/>
+    <p:sldId id="307" r:id="rId9"/>
+    <p:sldId id="308" r:id="rId10"/>
+    <p:sldId id="309" r:id="rId11"/>
+    <p:sldId id="310" r:id="rId12"/>
     <p:sldId id="312" r:id="rId13"/>
   </p:sldIdLst>
   <p:sldSz cx="12192000" cy="6858000"/>
@@ -270,7 +270,7 @@
           <a:p>
             <a:fld id="{716789AD-CAC3-AD41-B5C9-BF5C62A1889D}" type="datetimeFigureOut">
               <a:rPr kumimoji="1" lang="ja-JP" altLang="en-US" smtClean="0"/>
-              <a:t>2026/4/21</a:t>
+              <a:t>2026/4/27</a:t>
             </a:fld>
             <a:endParaRPr kumimoji="1" lang="ja-JP" altLang="en-US"/>
           </a:p>
@@ -500,7 +500,7 @@
           <a:p>
             <a:fld id="{716789AD-CAC3-AD41-B5C9-BF5C62A1889D}" type="datetimeFigureOut">
               <a:rPr kumimoji="1" lang="ja-JP" altLang="en-US" smtClean="0"/>
-              <a:t>2026/4/21</a:t>
+              <a:t>2026/4/27</a:t>
             </a:fld>
             <a:endParaRPr kumimoji="1" lang="ja-JP" altLang="en-US"/>
           </a:p>
@@ -740,7 +740,7 @@
           <a:p>
             <a:fld id="{716789AD-CAC3-AD41-B5C9-BF5C62A1889D}" type="datetimeFigureOut">
               <a:rPr kumimoji="1" lang="ja-JP" altLang="en-US" smtClean="0"/>
-              <a:t>2026/4/21</a:t>
+              <a:t>2026/4/27</a:t>
             </a:fld>
             <a:endParaRPr kumimoji="1" lang="ja-JP" altLang="en-US"/>
           </a:p>
@@ -970,7 +970,7 @@
           <a:p>
             <a:fld id="{716789AD-CAC3-AD41-B5C9-BF5C62A1889D}" type="datetimeFigureOut">
               <a:rPr kumimoji="1" lang="ja-JP" altLang="en-US" smtClean="0"/>
-              <a:t>2026/4/21</a:t>
+              <a:t>2026/4/27</a:t>
             </a:fld>
             <a:endParaRPr kumimoji="1" lang="ja-JP" altLang="en-US"/>
           </a:p>
@@ -1245,7 +1245,7 @@
           <a:p>
             <a:fld id="{716789AD-CAC3-AD41-B5C9-BF5C62A1889D}" type="datetimeFigureOut">
               <a:rPr kumimoji="1" lang="ja-JP" altLang="en-US" smtClean="0"/>
-              <a:t>2026/4/21</a:t>
+              <a:t>2026/4/27</a:t>
             </a:fld>
             <a:endParaRPr kumimoji="1" lang="ja-JP" altLang="en-US"/>
           </a:p>
@@ -1574,7 +1574,7 @@
           <a:p>
             <a:fld id="{716789AD-CAC3-AD41-B5C9-BF5C62A1889D}" type="datetimeFigureOut">
               <a:rPr kumimoji="1" lang="ja-JP" altLang="en-US" smtClean="0"/>
-              <a:t>2026/4/21</a:t>
+              <a:t>2026/4/27</a:t>
             </a:fld>
             <a:endParaRPr kumimoji="1" lang="ja-JP" altLang="en-US"/>
           </a:p>
@@ -2050,7 +2050,7 @@
           <a:p>
             <a:fld id="{716789AD-CAC3-AD41-B5C9-BF5C62A1889D}" type="datetimeFigureOut">
               <a:rPr kumimoji="1" lang="ja-JP" altLang="en-US" smtClean="0"/>
-              <a:t>2026/4/21</a:t>
+              <a:t>2026/4/27</a:t>
             </a:fld>
             <a:endParaRPr kumimoji="1" lang="ja-JP" altLang="en-US"/>
           </a:p>
@@ -2191,7 +2191,7 @@
           <a:p>
             <a:fld id="{716789AD-CAC3-AD41-B5C9-BF5C62A1889D}" type="datetimeFigureOut">
               <a:rPr kumimoji="1" lang="ja-JP" altLang="en-US" smtClean="0"/>
-              <a:t>2026/4/21</a:t>
+              <a:t>2026/4/27</a:t>
             </a:fld>
             <a:endParaRPr kumimoji="1" lang="ja-JP" altLang="en-US"/>
           </a:p>
@@ -2304,7 +2304,7 @@
           <a:p>
             <a:fld id="{716789AD-CAC3-AD41-B5C9-BF5C62A1889D}" type="datetimeFigureOut">
               <a:rPr kumimoji="1" lang="ja-JP" altLang="en-US" smtClean="0"/>
-              <a:t>2026/4/21</a:t>
+              <a:t>2026/4/27</a:t>
             </a:fld>
             <a:endParaRPr kumimoji="1" lang="ja-JP" altLang="en-US"/>
           </a:p>
@@ -2647,7 +2647,7 @@
           <a:p>
             <a:fld id="{716789AD-CAC3-AD41-B5C9-BF5C62A1889D}" type="datetimeFigureOut">
               <a:rPr kumimoji="1" lang="ja-JP" altLang="en-US" smtClean="0"/>
-              <a:t>2026/4/21</a:t>
+              <a:t>2026/4/27</a:t>
             </a:fld>
             <a:endParaRPr kumimoji="1" lang="ja-JP" altLang="en-US"/>
           </a:p>
@@ -2935,7 +2935,7 @@
           <a:p>
             <a:fld id="{716789AD-CAC3-AD41-B5C9-BF5C62A1889D}" type="datetimeFigureOut">
               <a:rPr kumimoji="1" lang="ja-JP" altLang="en-US" smtClean="0"/>
-              <a:t>2026/4/21</a:t>
+              <a:t>2026/4/27</a:t>
             </a:fld>
             <a:endParaRPr kumimoji="1" lang="ja-JP" altLang="en-US"/>
           </a:p>
@@ -3208,7 +3208,7 @@
           <a:p>
             <a:fld id="{716789AD-CAC3-AD41-B5C9-BF5C62A1889D}" type="datetimeFigureOut">
               <a:rPr kumimoji="1" lang="ja-JP" altLang="en-US" smtClean="0"/>
-              <a:t>2026/4/21</a:t>
+              <a:t>2026/4/27</a:t>
             </a:fld>
             <a:endParaRPr kumimoji="1" lang="ja-JP" altLang="en-US"/>
           </a:p>
@@ -3889,7 +3889,7 @@
         <p:cNvPr id="1" name="">
           <a:extLst>
             <a:ext uri="{FF2B5EF4-FFF2-40B4-BE49-F238E27FC236}">
-              <a16:creationId xmlns:a16="http://schemas.microsoft.com/office/drawing/2014/main" id="{B41F33F5-0DFD-B6B1-3D10-353348B2241A}"/>
+              <a16:creationId xmlns:a16="http://schemas.microsoft.com/office/drawing/2014/main" id="{27B622E3-1D88-097D-0343-32872DBECF48}"/>
             </a:ext>
           </a:extLst>
         </p:cNvPr>
@@ -3909,7 +3909,7 @@
           <p:cNvPr id="2" name="タイトル 1">
             <a:extLst>
               <a:ext uri="{FF2B5EF4-FFF2-40B4-BE49-F238E27FC236}">
-                <a16:creationId xmlns:a16="http://schemas.microsoft.com/office/drawing/2014/main" id="{F3E65BD0-3870-7275-2979-ADFDF5B91F29}"/>
+                <a16:creationId xmlns:a16="http://schemas.microsoft.com/office/drawing/2014/main" id="{B62EDC01-EC4F-BEDC-7426-C76D07DBBBC9}"/>
               </a:ext>
             </a:extLst>
           </p:cNvPr>
@@ -3939,23 +3939,351 @@
           <a:p>
             <a:r>
               <a:rPr kumimoji="1" lang="ja-JP" altLang="en-US" sz="3600"/>
-              <a:t>マテリアル・方法（使用した</a:t>
-            </a:r>
-            <a:r>
-              <a:rPr kumimoji="1" lang="en-US" altLang="ja-JP" sz="3600"/>
-              <a:t>AI</a:t>
+              <a:t>マテリアル・方法（</a:t>
+            </a:r>
+            <a:r>
+              <a:rPr lang="ja-JP" altLang="en-US" sz="3600"/>
+              <a:t>プロンプト</a:t>
             </a:r>
             <a:r>
               <a:rPr kumimoji="1" lang="ja-JP" altLang="en-US" sz="3600"/>
-              <a:t>・条件）</a:t>
-            </a:r>
+              <a:t>）</a:t>
+            </a:r>
+          </a:p>
+        </p:txBody>
+      </p:sp>
+      <p:sp>
+        <p:nvSpPr>
+          <p:cNvPr id="3" name="テキスト ボックス 2">
+            <a:extLst>
+              <a:ext uri="{FF2B5EF4-FFF2-40B4-BE49-F238E27FC236}">
+                <a16:creationId xmlns:a16="http://schemas.microsoft.com/office/drawing/2014/main" id="{E338ACB1-AAC0-8369-EA96-CBA6FD444B9D}"/>
+              </a:ext>
+            </a:extLst>
+          </p:cNvPr>
+          <p:cNvSpPr txBox="1"/>
+          <p:nvPr/>
+        </p:nvSpPr>
+        <p:spPr>
+          <a:xfrm>
+            <a:off x="0" y="1720840"/>
+            <a:ext cx="12192000" cy="3416320"/>
+          </a:xfrm>
+          <a:prstGeom prst="rect">
+            <a:avLst/>
+          </a:prstGeom>
+          <a:noFill/>
+        </p:spPr>
+        <p:txBody>
+          <a:bodyPr wrap="square" rtlCol="0">
+            <a:spAutoFit/>
+          </a:bodyPr>
+          <a:lstStyle/>
+          <a:p>
+            <a:r>
+              <a:rPr lang="ja-JP" altLang="en-US"/>
+              <a:t>添付のデータに対して以下の作業を行って下さい。</a:t>
+            </a:r>
+          </a:p>
+          <a:p>
+            <a:r>
+              <a:rPr lang="ja-JP" altLang="en-US"/>
+              <a:t> </a:t>
+            </a:r>
+          </a:p>
+          <a:p>
+            <a:r>
+              <a:rPr lang="ja-JP" altLang="en-US"/>
+              <a:t> </a:t>
+            </a:r>
+            <a:r>
+              <a:rPr lang="en-US" altLang="ja-JP" dirty="0"/>
+              <a:t>- </a:t>
+            </a:r>
+            <a:r>
+              <a:rPr lang="ja-JP" altLang="en-US"/>
+              <a:t>概要 </a:t>
+            </a:r>
+            <a:r>
+              <a:rPr lang="en-US" altLang="ja-JP" dirty="0"/>
+              <a:t>: </a:t>
+            </a:r>
+            <a:r>
+              <a:rPr lang="ja-JP" altLang="en-US"/>
+              <a:t>地名候補を地名であるか判定する。</a:t>
+            </a:r>
+          </a:p>
+          <a:p>
+            <a:r>
+              <a:rPr lang="ja-JP" altLang="en-US"/>
+              <a:t> </a:t>
+            </a:r>
+            <a:r>
+              <a:rPr lang="en-US" altLang="ja-JP" dirty="0"/>
+              <a:t>- </a:t>
+            </a:r>
+            <a:r>
+              <a:rPr lang="ja-JP" altLang="en-US"/>
+              <a:t>入力データ形式 </a:t>
+            </a:r>
+            <a:r>
+              <a:rPr lang="en-US" altLang="ja-JP" dirty="0"/>
+              <a:t>: </a:t>
+            </a:r>
+            <a:r>
+              <a:rPr lang="en" altLang="ja-JP" dirty="0" err="1"/>
+              <a:t>json</a:t>
+            </a:r>
+            <a:r>
+              <a:rPr lang="ja-JP" altLang="en-US"/>
+              <a:t>形式、</a:t>
+            </a:r>
+            <a:r>
+              <a:rPr lang="en-US" altLang="ja-JP" dirty="0"/>
+              <a:t>4 </a:t>
+            </a:r>
+            <a:r>
+              <a:rPr lang="ja-JP" altLang="en-US"/>
+              <a:t>つの要素から成る。各要素はさらに配列である可能性がある。</a:t>
+            </a:r>
+          </a:p>
+          <a:p>
+            <a:r>
+              <a:rPr lang="ja-JP" altLang="en-US"/>
+              <a:t> </a:t>
+            </a:r>
+            <a:r>
+              <a:rPr lang="en-US" altLang="ja-JP" dirty="0"/>
+              <a:t>- </a:t>
+            </a:r>
+            <a:r>
+              <a:rPr lang="ja-JP" altLang="en-US"/>
+              <a:t>入力データの各要素の説明 </a:t>
+            </a:r>
+            <a:r>
+              <a:rPr lang="en-US" altLang="ja-JP" dirty="0"/>
+              <a:t>: </a:t>
+            </a:r>
+          </a:p>
+          <a:p>
+            <a:r>
+              <a:rPr lang="en-US" altLang="ja-JP" dirty="0"/>
+              <a:t>  - </a:t>
+            </a:r>
+            <a:r>
+              <a:rPr lang="ja-JP" altLang="en-US"/>
+              <a:t>第</a:t>
+            </a:r>
+            <a:r>
+              <a:rPr lang="en-US" altLang="ja-JP" dirty="0"/>
+              <a:t>1</a:t>
+            </a:r>
+            <a:r>
+              <a:rPr lang="ja-JP" altLang="en-US"/>
+              <a:t>要素 </a:t>
+            </a:r>
+            <a:r>
+              <a:rPr lang="en-US" altLang="ja-JP" dirty="0"/>
+              <a:t>: </a:t>
+            </a:r>
+            <a:r>
+              <a:rPr lang="ja-JP" altLang="en-US"/>
+              <a:t>無視して良い</a:t>
+            </a:r>
+          </a:p>
+          <a:p>
+            <a:r>
+              <a:rPr lang="ja-JP" altLang="en-US"/>
+              <a:t>  </a:t>
+            </a:r>
+            <a:r>
+              <a:rPr lang="en-US" altLang="ja-JP" dirty="0"/>
+              <a:t>- </a:t>
+            </a:r>
+            <a:r>
+              <a:rPr lang="ja-JP" altLang="en-US"/>
+              <a:t>第</a:t>
+            </a:r>
+            <a:r>
+              <a:rPr lang="en-US" altLang="ja-JP" dirty="0"/>
+              <a:t>2</a:t>
+            </a:r>
+            <a:r>
+              <a:rPr lang="ja-JP" altLang="en-US"/>
+              <a:t>要素 </a:t>
+            </a:r>
+            <a:r>
+              <a:rPr lang="en-US" altLang="ja-JP" dirty="0"/>
+              <a:t>: </a:t>
+            </a:r>
+            <a:r>
+              <a:rPr lang="ja-JP" altLang="en-US"/>
+              <a:t>第</a:t>
+            </a:r>
+            <a:r>
+              <a:rPr lang="en-US" altLang="ja-JP" dirty="0"/>
+              <a:t>4</a:t>
+            </a:r>
+            <a:r>
+              <a:rPr lang="ja-JP" altLang="en-US"/>
+              <a:t>要素から抽出された地名候補</a:t>
+            </a:r>
+          </a:p>
+          <a:p>
+            <a:r>
+              <a:rPr lang="ja-JP" altLang="en-US"/>
+              <a:t>  </a:t>
+            </a:r>
+            <a:r>
+              <a:rPr lang="en-US" altLang="ja-JP" dirty="0"/>
+              <a:t>- </a:t>
+            </a:r>
+            <a:r>
+              <a:rPr lang="ja-JP" altLang="en-US"/>
+              <a:t>第</a:t>
+            </a:r>
+            <a:r>
+              <a:rPr lang="en-US" altLang="ja-JP" dirty="0"/>
+              <a:t>3</a:t>
+            </a:r>
+            <a:r>
+              <a:rPr lang="ja-JP" altLang="en-US"/>
+              <a:t>要素 </a:t>
+            </a:r>
+            <a:r>
+              <a:rPr lang="en-US" altLang="ja-JP" dirty="0"/>
+              <a:t>: </a:t>
+            </a:r>
+            <a:r>
+              <a:rPr lang="ja-JP" altLang="en-US"/>
+              <a:t>無視して良い</a:t>
+            </a:r>
+          </a:p>
+          <a:p>
+            <a:r>
+              <a:rPr lang="ja-JP" altLang="en-US"/>
+              <a:t>  </a:t>
+            </a:r>
+            <a:r>
+              <a:rPr lang="en-US" altLang="ja-JP" dirty="0"/>
+              <a:t>- </a:t>
+            </a:r>
+            <a:r>
+              <a:rPr lang="ja-JP" altLang="en-US"/>
+              <a:t>第</a:t>
+            </a:r>
+            <a:r>
+              <a:rPr lang="en-US" altLang="ja-JP" dirty="0"/>
+              <a:t>4</a:t>
+            </a:r>
+            <a:r>
+              <a:rPr lang="ja-JP" altLang="en-US"/>
+              <a:t>要素 </a:t>
+            </a:r>
+            <a:r>
+              <a:rPr lang="en-US" altLang="ja-JP" dirty="0"/>
+              <a:t>: </a:t>
+            </a:r>
+            <a:r>
+              <a:rPr lang="ja-JP" altLang="en-US"/>
+              <a:t>文章 （配列）</a:t>
+            </a:r>
+          </a:p>
+          <a:p>
+            <a:r>
+              <a:rPr lang="en-US" altLang="ja-JP" dirty="0"/>
+              <a:t>- </a:t>
+            </a:r>
+            <a:r>
+              <a:rPr lang="ja-JP" altLang="en-US"/>
+              <a:t>行ってほしい作業 </a:t>
+            </a:r>
+            <a:r>
+              <a:rPr lang="en-US" altLang="ja-JP" dirty="0"/>
+              <a:t>: </a:t>
+            </a:r>
+            <a:r>
+              <a:rPr lang="en" altLang="ja-JP" dirty="0" err="1"/>
+              <a:t>json</a:t>
+            </a:r>
+            <a:r>
+              <a:rPr lang="ja-JP" altLang="en-US"/>
+              <a:t>の第</a:t>
+            </a:r>
+            <a:r>
+              <a:rPr lang="en-US" altLang="ja-JP" dirty="0"/>
+              <a:t>2</a:t>
+            </a:r>
+            <a:r>
+              <a:rPr lang="ja-JP" altLang="en-US"/>
+              <a:t>要素の各地名候補が地名であるかを、第</a:t>
+            </a:r>
+            <a:r>
+              <a:rPr lang="en-US" altLang="ja-JP" dirty="0"/>
+              <a:t>4</a:t>
+            </a:r>
+            <a:r>
+              <a:rPr lang="ja-JP" altLang="en-US"/>
+              <a:t>要素の文脈から判定してほしい。</a:t>
+            </a:r>
+          </a:p>
+          <a:p>
+            <a:r>
+              <a:rPr lang="en-US" altLang="ja-JP" dirty="0"/>
+              <a:t>- </a:t>
+            </a:r>
+            <a:r>
+              <a:rPr lang="ja-JP" altLang="en-US"/>
+              <a:t>出力データ形式 （判定結果） </a:t>
+            </a:r>
+            <a:r>
+              <a:rPr lang="en-US" altLang="ja-JP" dirty="0"/>
+              <a:t>: </a:t>
+            </a:r>
+            <a:r>
+              <a:rPr lang="ja-JP" altLang="en-US"/>
+              <a:t>第</a:t>
+            </a:r>
+            <a:r>
+              <a:rPr lang="en-US" altLang="ja-JP" dirty="0"/>
+              <a:t>2</a:t>
+            </a:r>
+            <a:r>
+              <a:rPr lang="ja-JP" altLang="en-US"/>
+              <a:t>要素のみを次のように出力する </a:t>
+            </a:r>
+            <a:r>
+              <a:rPr lang="en-US" altLang="ja-JP" dirty="0"/>
+              <a:t>: </a:t>
+            </a:r>
+            <a:r>
+              <a:rPr lang="ja-JP" altLang="en-US"/>
+              <a:t>第</a:t>
+            </a:r>
+            <a:r>
+              <a:rPr lang="en-US" altLang="ja-JP" dirty="0"/>
+              <a:t>2</a:t>
+            </a:r>
+            <a:r>
+              <a:rPr lang="ja-JP" altLang="en-US"/>
+              <a:t>要素の地名候補が地名であればそのまま残し、そうでない場合は</a:t>
+            </a:r>
+            <a:r>
+              <a:rPr lang="en-US" altLang="ja-JP" dirty="0"/>
+              <a:t>0</a:t>
+            </a:r>
+            <a:r>
+              <a:rPr lang="ja-JP" altLang="en-US"/>
+              <a:t>に置きかえたもの。</a:t>
+            </a:r>
+            <a:endParaRPr kumimoji="1" lang="ja-JP" altLang="en-US"/>
           </a:p>
         </p:txBody>
       </p:sp>
     </p:spTree>
     <p:extLst>
       <p:ext uri="{BB962C8B-B14F-4D97-AF65-F5344CB8AC3E}">
-        <p14:creationId xmlns:p14="http://schemas.microsoft.com/office/powerpoint/2010/main" val="3135446820"/>
+        <p14:creationId xmlns:p14="http://schemas.microsoft.com/office/powerpoint/2010/main" val="1609540031"/>
       </p:ext>
     </p:extLst>
   </p:cSld>
@@ -3973,7 +4301,7 @@
         <p:cNvPr id="1" name="">
           <a:extLst>
             <a:ext uri="{FF2B5EF4-FFF2-40B4-BE49-F238E27FC236}">
-              <a16:creationId xmlns:a16="http://schemas.microsoft.com/office/drawing/2014/main" id="{373619AB-32C7-75F1-1F08-4BAC9A1F6472}"/>
+              <a16:creationId xmlns:a16="http://schemas.microsoft.com/office/drawing/2014/main" id="{B41F33F5-0DFD-B6B1-3D10-353348B2241A}"/>
             </a:ext>
           </a:extLst>
         </p:cNvPr>
@@ -3993,7 +4321,7 @@
           <p:cNvPr id="2" name="タイトル 1">
             <a:extLst>
               <a:ext uri="{FF2B5EF4-FFF2-40B4-BE49-F238E27FC236}">
-                <a16:creationId xmlns:a16="http://schemas.microsoft.com/office/drawing/2014/main" id="{16978B4D-32B0-B54D-8A68-CBEF7CEB4EDA}"/>
+                <a16:creationId xmlns:a16="http://schemas.microsoft.com/office/drawing/2014/main" id="{F3E65BD0-3870-7275-2979-ADFDF5B91F29}"/>
               </a:ext>
             </a:extLst>
           </p:cNvPr>
@@ -4023,7 +4351,15 @@
           <a:p>
             <a:r>
               <a:rPr kumimoji="1" lang="ja-JP" altLang="en-US" sz="3600"/>
-              <a:t>マテリアル・方法（人への作業依頼）</a:t>
+              <a:t>マテリアル・方法（使用した</a:t>
+            </a:r>
+            <a:r>
+              <a:rPr kumimoji="1" lang="en-US" altLang="ja-JP" sz="3600" dirty="0"/>
+              <a:t>AI</a:t>
+            </a:r>
+            <a:r>
+              <a:rPr kumimoji="1" lang="ja-JP" altLang="en-US" sz="3600"/>
+              <a:t>・人への依頼条件等）</a:t>
             </a:r>
           </a:p>
         </p:txBody>
@@ -4031,7 +4367,7 @@
     </p:spTree>
     <p:extLst>
       <p:ext uri="{BB962C8B-B14F-4D97-AF65-F5344CB8AC3E}">
-        <p14:creationId xmlns:p14="http://schemas.microsoft.com/office/powerpoint/2010/main" val="687444550"/>
+        <p14:creationId xmlns:p14="http://schemas.microsoft.com/office/powerpoint/2010/main" val="3135446820"/>
       </p:ext>
     </p:extLst>
   </p:cSld>
@@ -8071,7 +8407,15 @@
             </a:r>
             <a:r>
               <a:rPr kumimoji="1" lang="ja-JP" altLang="en-US" sz="3600"/>
-              <a:t>研究</a:t>
+              <a:t>研究（</a:t>
+            </a:r>
+            <a:r>
+              <a:rPr kumimoji="1" lang="en-US" altLang="ja-JP" sz="3600" dirty="0"/>
+              <a:t>1</a:t>
+            </a:r>
+            <a:r>
+              <a:rPr kumimoji="1" lang="ja-JP" altLang="en-US" sz="3600"/>
+              <a:t>）</a:t>
             </a:r>
           </a:p>
         </p:txBody>
@@ -8091,7 +8435,7 @@
         <p:spPr>
           <a:xfrm>
             <a:off x="0" y="577517"/>
-            <a:ext cx="12192000" cy="3970318"/>
+            <a:ext cx="12192000" cy="6186309"/>
           </a:xfrm>
           <a:prstGeom prst="rect">
             <a:avLst/>
@@ -8110,17 +8454,7 @@
             </a:pPr>
             <a:r>
               <a:rPr lang="en" altLang="ja-JP" dirty="0"/>
-              <a:t>Toponym resolution leveraging lightweight and open-source large language models and geo-knowledge. 2024.  (</a:t>
-            </a:r>
-            <a:r>
-              <a:rPr lang="en" altLang="ja-JP" dirty="0">
-                <a:hlinkClick r:id="rId2"/>
-              </a:rPr>
-              <a:t>https://www.tandfonline.com/doi/full/10.1080/13658816.2024.2405182</a:t>
-            </a:r>
-            <a:r>
-              <a:rPr lang="en" altLang="ja-JP" dirty="0"/>
-              <a:t>)</a:t>
+              <a:t>Toponym resolution leveraging lightweight and open-source large language models and geo-knowledge. 2024.  (https://www.tandfonline.com/doi/full/10.1080/13658816.2024.2405182)</a:t>
             </a:r>
           </a:p>
           <a:p>
@@ -8174,17 +8508,21 @@
               <a:buChar char="•"/>
             </a:pPr>
             <a:r>
-              <a:rPr lang="en" altLang="ja-JP" dirty="0"/>
-              <a:t>Collective Named Entity Disambiguation using Graph Ranking and Clique Partitioning Approaches. 2014. (</a:t>
-            </a:r>
-            <a:r>
-              <a:rPr lang="en" altLang="ja-JP" dirty="0">
-                <a:hlinkClick r:id="rId3"/>
+              <a:rPr lang="ja-JP" altLang="en-US"/>
+              <a:t>固有表現抽出における大規模言語モデルを用いた自動アノテーション</a:t>
+            </a:r>
+            <a:r>
+              <a:rPr lang="en-US" altLang="ja-JP" dirty="0"/>
+              <a:t>. 2024. (</a:t>
+            </a:r>
+            <a:r>
+              <a:rPr lang="en-US" altLang="ja-JP" dirty="0">
+                <a:hlinkClick r:id="rId2"/>
               </a:rPr>
-              <a:t>https://aclanthology.org/C14-1147.pdf</a:t>
-            </a:r>
-            <a:r>
-              <a:rPr lang="en" altLang="ja-JP" dirty="0"/>
+              <a:t>https://www.anlp.jp/proceedings/annual_meeting/2024/pdf_dir/C8-5.pdf</a:t>
+            </a:r>
+            <a:r>
+              <a:rPr lang="en-US" altLang="ja-JP" dirty="0"/>
               <a:t>)</a:t>
             </a:r>
           </a:p>
@@ -8195,13 +8533,43 @@
             </a:pPr>
             <a:r>
               <a:rPr lang="en-US" altLang="ja-JP" dirty="0"/>
-              <a:t>Knowledge Base</a:t>
+              <a:t>LLM</a:t>
             </a:r>
             <a:r>
               <a:rPr lang="ja-JP" altLang="en-US"/>
-              <a:t>（辞書）を利用</a:t>
+              <a:t>のみよる</a:t>
+            </a:r>
+            <a:r>
+              <a:rPr lang="en-US" altLang="ja-JP" dirty="0"/>
+              <a:t>NER</a:t>
+            </a:r>
+            <a:r>
+              <a:rPr lang="ja-JP" altLang="en-US"/>
+              <a:t>へのチャレンジ</a:t>
             </a:r>
             <a:endParaRPr lang="en-US" altLang="ja-JP" dirty="0"/>
+          </a:p>
+          <a:p>
+            <a:pPr marL="285750" indent="-285750">
+              <a:buFont typeface="Arial" panose="020B0604020202020204" pitchFamily="34" charset="0"/>
+              <a:buChar char="•"/>
+            </a:pPr>
+            <a:r>
+              <a:rPr lang="ja-JP" altLang="en-US"/>
+              <a:t>歴史災害史料からの自動地名抽出に向けた自然言語処理システムの性能評価</a:t>
+            </a:r>
+            <a:r>
+              <a:rPr lang="en-US" altLang="ja-JP" dirty="0"/>
+              <a:t>. 2023. (https://</a:t>
+            </a:r>
+            <a:r>
+              <a:rPr lang="en-US" altLang="ja-JP" dirty="0" err="1"/>
+              <a:t>ipsj.ixsq.nii.ac.jp</a:t>
+            </a:r>
+            <a:r>
+              <a:rPr lang="en-US" altLang="ja-JP" dirty="0"/>
+              <a:t>/record/231338/files/IPSJ-CH2023003.pdf)</a:t>
+            </a:r>
           </a:p>
           <a:p>
             <a:pPr marL="742950" lvl="1" indent="-285750">
@@ -8210,7 +8578,15 @@
             </a:pPr>
             <a:r>
               <a:rPr lang="ja-JP" altLang="en-US"/>
-              <a:t>グラフ構造を解析（ノードが地名）</a:t>
+              <a:t>固有表現抽出と</a:t>
+            </a:r>
+            <a:r>
+              <a:rPr lang="en-US" altLang="ja-JP" dirty="0"/>
+              <a:t>LLM</a:t>
+            </a:r>
+            <a:r>
+              <a:rPr lang="ja-JP" altLang="en-US"/>
+              <a:t>に対して評価（連結利用は行なっていない）</a:t>
             </a:r>
             <a:endParaRPr lang="en-US" altLang="ja-JP" dirty="0"/>
           </a:p>
@@ -8221,15 +8597,7 @@
             </a:pPr>
             <a:r>
               <a:rPr lang="ja-JP" altLang="en-US"/>
-              <a:t>既存</a:t>
-            </a:r>
-            <a:r>
-              <a:rPr lang="en-US" altLang="ja-JP" dirty="0"/>
-              <a:t>LLM</a:t>
-            </a:r>
-            <a:r>
-              <a:rPr lang="ja-JP" altLang="en-US"/>
-              <a:t>を利用しない</a:t>
+              <a:t>「正解」に対する正答の評価</a:t>
             </a:r>
             <a:endParaRPr lang="en-US" altLang="ja-JP" dirty="0"/>
           </a:p>
@@ -8240,19 +8608,21 @@
             </a:pPr>
             <a:r>
               <a:rPr lang="ja-JP" altLang="en-US"/>
-              <a:t>歴史災害史料からの自動地名抽出に向けた自然言語処理システムの性能評価</a:t>
+              <a:t>郷土に残存する江戸期古記録の機械可読化を目的とした市民参加および機械学習による固有表現抽出</a:t>
             </a:r>
             <a:r>
               <a:rPr lang="en-US" altLang="ja-JP" dirty="0"/>
-              <a:t>. 2023. (https://</a:t>
-            </a:r>
-            <a:r>
-              <a:rPr lang="en-US" altLang="ja-JP" dirty="0" err="1"/>
-              <a:t>ipsj.ixsq.nii.ac.jp</a:t>
+              <a:t>. 2022. (</a:t>
+            </a:r>
+            <a:r>
+              <a:rPr lang="en-US" altLang="ja-JP" dirty="0">
+                <a:hlinkClick r:id="rId3"/>
+              </a:rPr>
+              <a:t>https://ir.library.osaka-u.ac.jp/repo/ouka/all/93281/IPSJ-JNL_63_2_310.pdf</a:t>
             </a:r>
             <a:r>
               <a:rPr lang="en-US" altLang="ja-JP" dirty="0"/>
-              <a:t>/record/231338/files/IPSJ-CH2023003.pdf)</a:t>
+              <a:t>)</a:t>
             </a:r>
           </a:p>
           <a:p>
@@ -8262,15 +8632,7 @@
             </a:pPr>
             <a:r>
               <a:rPr lang="ja-JP" altLang="en-US"/>
-              <a:t>固有表現抽出と</a:t>
-            </a:r>
-            <a:r>
-              <a:rPr lang="en-US" altLang="ja-JP" dirty="0"/>
-              <a:t>LLM</a:t>
-            </a:r>
-            <a:r>
-              <a:rPr lang="ja-JP" altLang="en-US"/>
-              <a:t>に対して評価（連結利用は行なっていない）</a:t>
+              <a:t>人と機械学習による混成方法</a:t>
             </a:r>
             <a:endParaRPr lang="en-US" altLang="ja-JP" dirty="0"/>
           </a:p>
@@ -8280,133 +8642,90 @@
               <a:buChar char="•"/>
             </a:pPr>
             <a:r>
+              <a:rPr lang="en-US" altLang="ja-JP" dirty="0"/>
+              <a:t>LLM</a:t>
+            </a:r>
+            <a:r>
               <a:rPr lang="ja-JP" altLang="en-US"/>
-              <a:t>「正解」に対する正答の評価</a:t>
+              <a:t>を用いない独自ディープラーニング</a:t>
             </a:r>
             <a:endParaRPr lang="en-US" altLang="ja-JP" dirty="0"/>
           </a:p>
-        </p:txBody>
-      </p:sp>
-      <p:sp>
-        <p:nvSpPr>
-          <p:cNvPr id="3" name="テキスト ボックス 2">
-            <a:extLst>
-              <a:ext uri="{FF2B5EF4-FFF2-40B4-BE49-F238E27FC236}">
-                <a16:creationId xmlns:a16="http://schemas.microsoft.com/office/drawing/2014/main" id="{AACCC8C1-61CC-DBD3-10A4-7D171D5FF268}"/>
-              </a:ext>
-            </a:extLst>
-          </p:cNvPr>
-          <p:cNvSpPr txBox="1"/>
-          <p:nvPr/>
-        </p:nvSpPr>
-        <p:spPr>
-          <a:xfrm>
-            <a:off x="0" y="4803155"/>
-            <a:ext cx="12192000" cy="1754326"/>
-          </a:xfrm>
-          <a:prstGeom prst="rect">
-            <a:avLst/>
-          </a:prstGeom>
-          <a:noFill/>
-        </p:spPr>
-        <p:txBody>
-          <a:bodyPr wrap="square" rtlCol="0">
-            <a:spAutoFit/>
-          </a:bodyPr>
-          <a:lstStyle/>
+          <a:p>
+            <a:pPr marL="742950" lvl="1" indent="-285750">
+              <a:buFont typeface="Arial" panose="020B0604020202020204" pitchFamily="34" charset="0"/>
+              <a:buChar char="•"/>
+            </a:pPr>
+            <a:r>
+              <a:rPr lang="ja-JP" altLang="en-US"/>
+              <a:t>手法としては本研究に最も近い</a:t>
+            </a:r>
+            <a:endParaRPr lang="en-US" altLang="ja-JP" dirty="0"/>
+          </a:p>
           <a:p>
             <a:pPr marL="285750" indent="-285750">
-              <a:buFont typeface="Wingdings" pitchFamily="2" charset="2"/>
-              <a:buChar char="Ø"/>
+              <a:buFont typeface="Arial" panose="020B0604020202020204" pitchFamily="34" charset="0"/>
+              <a:buChar char="•"/>
             </a:pPr>
             <a:r>
-              <a:rPr kumimoji="1" lang="ja-JP" altLang="en-US"/>
-              <a:t>海外では地名から地理的な位置を特定する研究は典型的（</a:t>
-            </a:r>
-            <a:r>
-              <a:rPr kumimoji="1" lang="en-US" altLang="ja-JP" dirty="0"/>
-              <a:t>toponym</a:t>
-            </a:r>
-            <a:r>
-              <a:rPr kumimoji="1" lang="ja-JP" altLang="en-US"/>
-              <a:t>）</a:t>
+              <a:rPr lang="en" altLang="ja-JP" dirty="0"/>
+              <a:t>Collective Named Entity Disambiguation using Graph Ranking and Clique Partitioning Approaches. 2014. (</a:t>
+            </a:r>
+            <a:r>
+              <a:rPr lang="en" altLang="ja-JP" dirty="0">
+                <a:hlinkClick r:id="rId4"/>
+              </a:rPr>
+              <a:t>https://aclanthology.org/C14-1147.pdf</a:t>
+            </a:r>
+            <a:r>
+              <a:rPr lang="en" altLang="ja-JP" dirty="0"/>
+              <a:t>)</a:t>
+            </a:r>
+          </a:p>
+          <a:p>
+            <a:pPr marL="742950" lvl="1" indent="-285750">
+              <a:buFont typeface="Arial" panose="020B0604020202020204" pitchFamily="34" charset="0"/>
+              <a:buChar char="•"/>
+            </a:pPr>
+            <a:r>
+              <a:rPr lang="en-US" altLang="ja-JP" dirty="0"/>
+              <a:t>Knowledge Base</a:t>
+            </a:r>
+            <a:r>
+              <a:rPr lang="ja-JP" altLang="en-US"/>
+              <a:t>（辞書）を利用</a:t>
             </a:r>
             <a:endParaRPr lang="en-US" altLang="ja-JP" dirty="0"/>
           </a:p>
           <a:p>
-            <a:pPr marL="285750" indent="-285750">
-              <a:buFont typeface="Wingdings" pitchFamily="2" charset="2"/>
-              <a:buChar char="Ø"/>
+            <a:pPr marL="742950" lvl="1" indent="-285750">
+              <a:buFont typeface="Arial" panose="020B0604020202020204" pitchFamily="34" charset="0"/>
+              <a:buChar char="•"/>
             </a:pPr>
             <a:r>
-              <a:rPr kumimoji="1" lang="ja-JP" altLang="en-US"/>
-              <a:t>曖昧性解決においても地理情報と結びつけて行うものがほとんど</a:t>
-            </a:r>
-            <a:endParaRPr kumimoji="1" lang="en-US" altLang="ja-JP" dirty="0"/>
-          </a:p>
-          <a:p>
-            <a:pPr marL="285750" indent="-285750">
-              <a:buFont typeface="Wingdings" pitchFamily="2" charset="2"/>
-              <a:buChar char="Ø"/>
+              <a:rPr lang="ja-JP" altLang="en-US"/>
+              <a:t>グラフ構造を解析（ノードが地名）</a:t>
+            </a:r>
+            <a:endParaRPr lang="en-US" altLang="ja-JP" dirty="0"/>
+          </a:p>
+          <a:p>
+            <a:pPr marL="742950" lvl="1" indent="-285750">
+              <a:buFont typeface="Arial" panose="020B0604020202020204" pitchFamily="34" charset="0"/>
+              <a:buChar char="•"/>
             </a:pPr>
             <a:r>
               <a:rPr lang="ja-JP" altLang="en-US"/>
-              <a:t>地理情報を利用しない曖昧性解決においては、近年には独自</a:t>
+              <a:t>既存</a:t>
             </a:r>
             <a:r>
               <a:rPr lang="en-US" altLang="ja-JP" dirty="0"/>
-              <a:t>NN</a:t>
+              <a:t>LLM</a:t>
             </a:r>
             <a:r>
               <a:rPr lang="ja-JP" altLang="en-US"/>
-              <a:t>開発によるものが見受けられる</a:t>
+              <a:t>を利用しない</a:t>
             </a:r>
             <a:endParaRPr lang="en-US" altLang="ja-JP" dirty="0"/>
-          </a:p>
-          <a:p>
-            <a:pPr marL="285750" indent="-285750">
-              <a:buFont typeface="Wingdings" pitchFamily="2" charset="2"/>
-              <a:buChar char="Ø"/>
-            </a:pPr>
-            <a:r>
-              <a:rPr lang="ja-JP" altLang="en-US"/>
-              <a:t>曖昧性解決において</a:t>
-            </a:r>
-            <a:r>
-              <a:rPr kumimoji="1" lang="ja-JP" altLang="en-US"/>
-              <a:t>一般的な</a:t>
-            </a:r>
-            <a:r>
-              <a:rPr kumimoji="1" lang="en-US" altLang="ja-JP" dirty="0"/>
-              <a:t>LLM</a:t>
-            </a:r>
-            <a:r>
-              <a:rPr lang="ja-JP" altLang="en-US"/>
-              <a:t>が用いられはじめたのはごく最近</a:t>
-            </a:r>
-            <a:endParaRPr lang="en-US" altLang="ja-JP" dirty="0"/>
-          </a:p>
-          <a:p>
-            <a:pPr marL="285750" indent="-285750">
-              <a:buFont typeface="Wingdings" pitchFamily="2" charset="2"/>
-              <a:buChar char="Ø"/>
-            </a:pPr>
-            <a:r>
-              <a:rPr lang="ja-JP" altLang="en-US"/>
-              <a:t>地名と地名以外を含む幅広い固有表現の曖昧性解決も行われている</a:t>
-            </a:r>
-            <a:endParaRPr lang="en-US" altLang="ja-JP" dirty="0"/>
-          </a:p>
-          <a:p>
-            <a:pPr marL="285750" indent="-285750">
-              <a:buFont typeface="Wingdings" pitchFamily="2" charset="2"/>
-              <a:buChar char="Ø"/>
-            </a:pPr>
-            <a:r>
-              <a:rPr kumimoji="1" lang="ja-JP" altLang="en-US"/>
-              <a:t>日本語における事例はほぼ見られない</a:t>
-            </a:r>
-            <a:endParaRPr kumimoji="1" lang="en-US" altLang="ja-JP" dirty="0"/>
           </a:p>
         </p:txBody>
       </p:sp>
@@ -8424,6 +8743,362 @@
 </file>
 
 <file path=ppt/slides/slide6.xml><?xml version="1.0" encoding="utf-8"?>
+<p:sld xmlns:a="http://schemas.openxmlformats.org/drawingml/2006/main" xmlns:r="http://schemas.openxmlformats.org/officeDocument/2006/relationships" xmlns:p="http://schemas.openxmlformats.org/presentationml/2006/main">
+  <p:cSld>
+    <p:spTree>
+      <p:nvGrpSpPr>
+        <p:cNvPr id="1" name="">
+          <a:extLst>
+            <a:ext uri="{FF2B5EF4-FFF2-40B4-BE49-F238E27FC236}">
+              <a16:creationId xmlns:a16="http://schemas.microsoft.com/office/drawing/2014/main" id="{F7C24F9E-3F09-C08E-EB47-DE59F5A4D8AF}"/>
+            </a:ext>
+          </a:extLst>
+        </p:cNvPr>
+        <p:cNvGrpSpPr/>
+        <p:nvPr/>
+      </p:nvGrpSpPr>
+      <p:grpSpPr>
+        <a:xfrm>
+          <a:off x="0" y="0"/>
+          <a:ext cx="0" cy="0"/>
+          <a:chOff x="0" y="0"/>
+          <a:chExt cx="0" cy="0"/>
+        </a:xfrm>
+      </p:grpSpPr>
+      <p:sp>
+        <p:nvSpPr>
+          <p:cNvPr id="2" name="タイトル 1">
+            <a:extLst>
+              <a:ext uri="{FF2B5EF4-FFF2-40B4-BE49-F238E27FC236}">
+                <a16:creationId xmlns:a16="http://schemas.microsoft.com/office/drawing/2014/main" id="{D74EB11D-EFD8-8D35-040C-6F65EFF3F86C}"/>
+              </a:ext>
+            </a:extLst>
+          </p:cNvPr>
+          <p:cNvSpPr>
+            <a:spLocks noGrp="1"/>
+          </p:cNvSpPr>
+          <p:nvPr>
+            <p:ph type="title"/>
+          </p:nvPr>
+        </p:nvSpPr>
+        <p:spPr>
+          <a:xfrm>
+            <a:off x="0" y="1"/>
+            <a:ext cx="12192000" cy="577516"/>
+          </a:xfrm>
+          <a:solidFill>
+            <a:schemeClr val="bg1">
+              <a:lumMod val="85000"/>
+            </a:schemeClr>
+          </a:solidFill>
+        </p:spPr>
+        <p:txBody>
+          <a:bodyPr>
+            <a:normAutofit fontScale="90000"/>
+          </a:bodyPr>
+          <a:lstStyle/>
+          <a:p>
+            <a:r>
+              <a:rPr lang="ja-JP" altLang="en-US" sz="3600"/>
+              <a:t>関連</a:t>
+            </a:r>
+            <a:r>
+              <a:rPr kumimoji="1" lang="ja-JP" altLang="en-US" sz="3600"/>
+              <a:t>研究（</a:t>
+            </a:r>
+            <a:r>
+              <a:rPr lang="en-US" altLang="ja-JP" sz="3600" dirty="0"/>
+              <a:t>2</a:t>
+            </a:r>
+            <a:r>
+              <a:rPr kumimoji="1" lang="ja-JP" altLang="en-US" sz="3600"/>
+              <a:t>）</a:t>
+            </a:r>
+          </a:p>
+        </p:txBody>
+      </p:sp>
+      <p:sp>
+        <p:nvSpPr>
+          <p:cNvPr id="5" name="テキスト ボックス 4">
+            <a:extLst>
+              <a:ext uri="{FF2B5EF4-FFF2-40B4-BE49-F238E27FC236}">
+                <a16:creationId xmlns:a16="http://schemas.microsoft.com/office/drawing/2014/main" id="{EF54C506-1C32-91B0-EC44-EF52233526FE}"/>
+              </a:ext>
+            </a:extLst>
+          </p:cNvPr>
+          <p:cNvSpPr txBox="1"/>
+          <p:nvPr/>
+        </p:nvSpPr>
+        <p:spPr>
+          <a:xfrm>
+            <a:off x="0" y="577517"/>
+            <a:ext cx="12192000" cy="2308324"/>
+          </a:xfrm>
+          <a:prstGeom prst="rect">
+            <a:avLst/>
+          </a:prstGeom>
+          <a:noFill/>
+        </p:spPr>
+        <p:txBody>
+          <a:bodyPr wrap="square" rtlCol="0">
+            <a:spAutoFit/>
+          </a:bodyPr>
+          <a:lstStyle/>
+          <a:p>
+            <a:pPr marL="285750" indent="-285750">
+              <a:buFont typeface="Arial" panose="020B0604020202020204" pitchFamily="34" charset="0"/>
+              <a:buChar char="•"/>
+            </a:pPr>
+            <a:r>
+              <a:rPr lang="ja-JP" altLang="en-US"/>
+              <a:t>固有表現抽出手法を用いたレストラン属性情報の自動認識</a:t>
+            </a:r>
+            <a:r>
+              <a:rPr lang="en-US" altLang="ja-JP" dirty="0"/>
+              <a:t>. 2006. (</a:t>
+            </a:r>
+            <a:r>
+              <a:rPr lang="en-US" altLang="ja-JP" dirty="0">
+                <a:hlinkClick r:id="rId2"/>
+              </a:rPr>
+              <a:t>https://nlp.cs.nyu.edu/sekine/papers/skeiji_nlp06.pdf</a:t>
+            </a:r>
+            <a:r>
+              <a:rPr lang="en-US" altLang="ja-JP" dirty="0"/>
+              <a:t>)</a:t>
+            </a:r>
+          </a:p>
+          <a:p>
+            <a:pPr marL="742950" lvl="1" indent="-285750">
+              <a:buFont typeface="Arial" panose="020B0604020202020204" pitchFamily="34" charset="0"/>
+              <a:buChar char="•"/>
+            </a:pPr>
+            <a:r>
+              <a:rPr lang="en-US" altLang="ja-JP" dirty="0"/>
+              <a:t>SVM</a:t>
+            </a:r>
+            <a:r>
+              <a:rPr lang="ja-JP" altLang="en-US"/>
+              <a:t>を利用</a:t>
+            </a:r>
+            <a:endParaRPr lang="en-US" altLang="ja-JP" dirty="0"/>
+          </a:p>
+          <a:p>
+            <a:pPr marL="285750" indent="-285750">
+              <a:buFont typeface="Arial" panose="020B0604020202020204" pitchFamily="34" charset="0"/>
+              <a:buChar char="•"/>
+            </a:pPr>
+            <a:r>
+              <a:rPr lang="ja-JP" altLang="en-US"/>
+              <a:t>検索結果を地域で整理する百科事典テキスト検索のための地名情報抽出法</a:t>
+            </a:r>
+            <a:r>
+              <a:rPr lang="en" altLang="ja-JP" dirty="0"/>
+              <a:t>. 2002.     (</a:t>
+            </a:r>
+            <a:r>
+              <a:rPr lang="en-US" altLang="ja-JP" dirty="0">
+                <a:hlinkClick r:id="rId3"/>
+              </a:rPr>
+              <a:t>https://kanadas.com/search-papers/extract2.pdf</a:t>
+            </a:r>
+            <a:r>
+              <a:rPr lang="en" altLang="ja-JP" dirty="0"/>
+              <a:t>)</a:t>
+            </a:r>
+          </a:p>
+          <a:p>
+            <a:pPr marL="742950" lvl="1" indent="-285750">
+              <a:buFont typeface="Arial" panose="020B0604020202020204" pitchFamily="34" charset="0"/>
+              <a:buChar char="•"/>
+            </a:pPr>
+            <a:r>
+              <a:rPr lang="ja-JP" altLang="en-US">
+                <a:solidFill>
+                  <a:srgbClr val="333333"/>
+                </a:solidFill>
+                <a:latin typeface="Hiragino Kaku Gothic ProN"/>
+              </a:rPr>
+              <a:t>大規模な百科事典データを利用</a:t>
+            </a:r>
+            <a:endParaRPr lang="en-US" altLang="ja-JP" dirty="0"/>
+          </a:p>
+          <a:p>
+            <a:pPr marL="742950" lvl="1" indent="-285750">
+              <a:buFont typeface="Arial" panose="020B0604020202020204" pitchFamily="34" charset="0"/>
+              <a:buChar char="•"/>
+            </a:pPr>
+            <a:r>
+              <a:rPr lang="ja-JP" altLang="en-US">
+                <a:solidFill>
+                  <a:srgbClr val="333333"/>
+                </a:solidFill>
+                <a:latin typeface="Hiragino Kaku Gothic ProN"/>
+              </a:rPr>
+              <a:t>ルールベース・辞書ベース</a:t>
+            </a:r>
+            <a:endParaRPr lang="en-US" altLang="ja-JP" dirty="0">
+              <a:solidFill>
+                <a:srgbClr val="333333"/>
+              </a:solidFill>
+              <a:latin typeface="Hiragino Kaku Gothic ProN"/>
+            </a:endParaRPr>
+          </a:p>
+          <a:p>
+            <a:pPr marL="742950" lvl="1" indent="-285750">
+              <a:buFont typeface="Arial" panose="020B0604020202020204" pitchFamily="34" charset="0"/>
+              <a:buChar char="•"/>
+            </a:pPr>
+            <a:r>
+              <a:rPr lang="ja-JP" altLang="en-US">
+                <a:solidFill>
+                  <a:srgbClr val="333333"/>
+                </a:solidFill>
+                <a:latin typeface="Hiragino Kaku Gothic ProN"/>
+              </a:rPr>
+              <a:t>機械学習を用いていない</a:t>
+            </a:r>
+            <a:endParaRPr lang="en-US" altLang="ja-JP" dirty="0"/>
+          </a:p>
+        </p:txBody>
+      </p:sp>
+      <p:sp>
+        <p:nvSpPr>
+          <p:cNvPr id="3" name="テキスト ボックス 2">
+            <a:extLst>
+              <a:ext uri="{FF2B5EF4-FFF2-40B4-BE49-F238E27FC236}">
+                <a16:creationId xmlns:a16="http://schemas.microsoft.com/office/drawing/2014/main" id="{753B2B7B-2EF3-8A48-2C6E-B6E35F666F68}"/>
+              </a:ext>
+            </a:extLst>
+          </p:cNvPr>
+          <p:cNvSpPr txBox="1"/>
+          <p:nvPr/>
+        </p:nvSpPr>
+        <p:spPr>
+          <a:xfrm>
+            <a:off x="0" y="3644206"/>
+            <a:ext cx="12192000" cy="1754326"/>
+          </a:xfrm>
+          <a:prstGeom prst="rect">
+            <a:avLst/>
+          </a:prstGeom>
+          <a:noFill/>
+        </p:spPr>
+        <p:txBody>
+          <a:bodyPr wrap="square" rtlCol="0">
+            <a:spAutoFit/>
+          </a:bodyPr>
+          <a:lstStyle/>
+          <a:p>
+            <a:pPr marL="285750" indent="-285750">
+              <a:buFont typeface="Wingdings" pitchFamily="2" charset="2"/>
+              <a:buChar char="Ø"/>
+            </a:pPr>
+            <a:r>
+              <a:rPr kumimoji="1" lang="ja-JP" altLang="en-US"/>
+              <a:t>海外では地名から地理的な位置を特定する研究は典型的（</a:t>
+            </a:r>
+            <a:r>
+              <a:rPr kumimoji="1" lang="en-US" altLang="ja-JP" dirty="0"/>
+              <a:t>toponym</a:t>
+            </a:r>
+            <a:r>
+              <a:rPr kumimoji="1" lang="ja-JP" altLang="en-US"/>
+              <a:t>）</a:t>
+            </a:r>
+            <a:endParaRPr lang="en-US" altLang="ja-JP" dirty="0"/>
+          </a:p>
+          <a:p>
+            <a:pPr marL="285750" indent="-285750">
+              <a:buFont typeface="Wingdings" pitchFamily="2" charset="2"/>
+              <a:buChar char="Ø"/>
+            </a:pPr>
+            <a:r>
+              <a:rPr kumimoji="1" lang="ja-JP" altLang="en-US"/>
+              <a:t>曖昧性解決においても地理情報と結びつけて行うものがほとんど</a:t>
+            </a:r>
+            <a:endParaRPr kumimoji="1" lang="en-US" altLang="ja-JP" dirty="0"/>
+          </a:p>
+          <a:p>
+            <a:pPr marL="285750" indent="-285750">
+              <a:buFont typeface="Wingdings" pitchFamily="2" charset="2"/>
+              <a:buChar char="Ø"/>
+            </a:pPr>
+            <a:r>
+              <a:rPr lang="ja-JP" altLang="en-US"/>
+              <a:t>地理情報を利用しない曖昧性解決においては、近年には独自</a:t>
+            </a:r>
+            <a:r>
+              <a:rPr lang="en-US" altLang="ja-JP" dirty="0"/>
+              <a:t>NN</a:t>
+            </a:r>
+            <a:r>
+              <a:rPr lang="ja-JP" altLang="en-US"/>
+              <a:t>開発によるものが見受けられる</a:t>
+            </a:r>
+            <a:endParaRPr lang="en-US" altLang="ja-JP" dirty="0"/>
+          </a:p>
+          <a:p>
+            <a:pPr marL="285750" indent="-285750">
+              <a:buFont typeface="Wingdings" pitchFamily="2" charset="2"/>
+              <a:buChar char="Ø"/>
+            </a:pPr>
+            <a:r>
+              <a:rPr lang="ja-JP" altLang="en-US"/>
+              <a:t>曖昧性解決において</a:t>
+            </a:r>
+            <a:r>
+              <a:rPr kumimoji="1" lang="ja-JP" altLang="en-US"/>
+              <a:t>一般的な</a:t>
+            </a:r>
+            <a:r>
+              <a:rPr kumimoji="1" lang="en-US" altLang="ja-JP" dirty="0"/>
+              <a:t>LLM</a:t>
+            </a:r>
+            <a:r>
+              <a:rPr lang="ja-JP" altLang="en-US"/>
+              <a:t>が用いられはじめたのはごく最近</a:t>
+            </a:r>
+            <a:endParaRPr lang="en-US" altLang="ja-JP" dirty="0"/>
+          </a:p>
+          <a:p>
+            <a:pPr marL="285750" indent="-285750">
+              <a:buFont typeface="Wingdings" pitchFamily="2" charset="2"/>
+              <a:buChar char="Ø"/>
+            </a:pPr>
+            <a:r>
+              <a:rPr lang="ja-JP" altLang="en-US"/>
+              <a:t>地名と地名以外を含む幅広い固有表現の曖昧性解決も行われている</a:t>
+            </a:r>
+            <a:endParaRPr lang="en-US" altLang="ja-JP" dirty="0"/>
+          </a:p>
+          <a:p>
+            <a:pPr marL="285750" indent="-285750">
+              <a:buFont typeface="Wingdings" pitchFamily="2" charset="2"/>
+              <a:buChar char="Ø"/>
+            </a:pPr>
+            <a:r>
+              <a:rPr kumimoji="1" lang="ja-JP" altLang="en-US"/>
+              <a:t>日本語における事例はほぼ見られないが、古くは辞書ベース・ルールベース</a:t>
+            </a:r>
+            <a:endParaRPr kumimoji="1" lang="en-US" altLang="ja-JP" dirty="0"/>
+          </a:p>
+        </p:txBody>
+      </p:sp>
+    </p:spTree>
+    <p:extLst>
+      <p:ext uri="{BB962C8B-B14F-4D97-AF65-F5344CB8AC3E}">
+        <p14:creationId xmlns:p14="http://schemas.microsoft.com/office/powerpoint/2010/main" val="1521976614"/>
+      </p:ext>
+    </p:extLst>
+  </p:cSld>
+  <p:clrMapOvr>
+    <a:masterClrMapping/>
+  </p:clrMapOvr>
+</p:sld>
+</file>
+
+<file path=ppt/slides/slide7.xml><?xml version="1.0" encoding="utf-8"?>
 <p:sld xmlns:a="http://schemas.openxmlformats.org/drawingml/2006/main" xmlns:r="http://schemas.openxmlformats.org/officeDocument/2006/relationships" xmlns:p="http://schemas.openxmlformats.org/presentationml/2006/main">
   <p:cSld>
     <p:spTree>
@@ -8599,7 +9274,7 @@
 </p:sld>
 </file>
 
-<file path=ppt/slides/slide7.xml><?xml version="1.0" encoding="utf-8"?>
+<file path=ppt/slides/slide8.xml><?xml version="1.0" encoding="utf-8"?>
 <p:sld xmlns:a="http://schemas.openxmlformats.org/drawingml/2006/main" xmlns:r="http://schemas.openxmlformats.org/officeDocument/2006/relationships" xmlns:p="http://schemas.openxmlformats.org/presentationml/2006/main">
   <p:cSld>
     <p:spTree>
@@ -9970,7 +10645,7 @@
 </p:sld>
 </file>
 
-<file path=ppt/slides/slide8.xml><?xml version="1.0" encoding="utf-8"?>
+<file path=ppt/slides/slide9.xml><?xml version="1.0" encoding="utf-8"?>
 <p:sld xmlns:a="http://schemas.openxmlformats.org/drawingml/2006/main" xmlns:r="http://schemas.openxmlformats.org/officeDocument/2006/relationships" xmlns:p="http://schemas.openxmlformats.org/presentationml/2006/main">
   <p:cSld>
     <p:spTree>
@@ -10045,90 +10720,6 @@
     <p:extLst>
       <p:ext uri="{BB962C8B-B14F-4D97-AF65-F5344CB8AC3E}">
         <p14:creationId xmlns:p14="http://schemas.microsoft.com/office/powerpoint/2010/main" val="2951289915"/>
-      </p:ext>
-    </p:extLst>
-  </p:cSld>
-  <p:clrMapOvr>
-    <a:masterClrMapping/>
-  </p:clrMapOvr>
-</p:sld>
-</file>
-
-<file path=ppt/slides/slide9.xml><?xml version="1.0" encoding="utf-8"?>
-<p:sld xmlns:a="http://schemas.openxmlformats.org/drawingml/2006/main" xmlns:r="http://schemas.openxmlformats.org/officeDocument/2006/relationships" xmlns:p="http://schemas.openxmlformats.org/presentationml/2006/main">
-  <p:cSld>
-    <p:spTree>
-      <p:nvGrpSpPr>
-        <p:cNvPr id="1" name="">
-          <a:extLst>
-            <a:ext uri="{FF2B5EF4-FFF2-40B4-BE49-F238E27FC236}">
-              <a16:creationId xmlns:a16="http://schemas.microsoft.com/office/drawing/2014/main" id="{27B622E3-1D88-097D-0343-32872DBECF48}"/>
-            </a:ext>
-          </a:extLst>
-        </p:cNvPr>
-        <p:cNvGrpSpPr/>
-        <p:nvPr/>
-      </p:nvGrpSpPr>
-      <p:grpSpPr>
-        <a:xfrm>
-          <a:off x="0" y="0"/>
-          <a:ext cx="0" cy="0"/>
-          <a:chOff x="0" y="0"/>
-          <a:chExt cx="0" cy="0"/>
-        </a:xfrm>
-      </p:grpSpPr>
-      <p:sp>
-        <p:nvSpPr>
-          <p:cNvPr id="2" name="タイトル 1">
-            <a:extLst>
-              <a:ext uri="{FF2B5EF4-FFF2-40B4-BE49-F238E27FC236}">
-                <a16:creationId xmlns:a16="http://schemas.microsoft.com/office/drawing/2014/main" id="{B62EDC01-EC4F-BEDC-7426-C76D07DBBBC9}"/>
-              </a:ext>
-            </a:extLst>
-          </p:cNvPr>
-          <p:cNvSpPr>
-            <a:spLocks noGrp="1"/>
-          </p:cNvSpPr>
-          <p:nvPr>
-            <p:ph type="title"/>
-          </p:nvPr>
-        </p:nvSpPr>
-        <p:spPr>
-          <a:xfrm>
-            <a:off x="0" y="1"/>
-            <a:ext cx="12192000" cy="577516"/>
-          </a:xfrm>
-          <a:solidFill>
-            <a:schemeClr val="bg1">
-              <a:lumMod val="85000"/>
-            </a:schemeClr>
-          </a:solidFill>
-        </p:spPr>
-        <p:txBody>
-          <a:bodyPr>
-            <a:normAutofit fontScale="90000"/>
-          </a:bodyPr>
-          <a:lstStyle/>
-          <a:p>
-            <a:r>
-              <a:rPr kumimoji="1" lang="ja-JP" altLang="en-US" sz="3600"/>
-              <a:t>マテリアル・方法（</a:t>
-            </a:r>
-            <a:r>
-              <a:rPr lang="ja-JP" altLang="en-US" sz="3600"/>
-              <a:t>プロンプト</a:t>
-            </a:r>
-            <a:r>
-              <a:rPr kumimoji="1" lang="ja-JP" altLang="en-US" sz="3600"/>
-              <a:t>）</a:t>
-            </a:r>
-          </a:p>
-        </p:txBody>
-      </p:sp>
-    </p:spTree>
-    <p:extLst>
-      <p:ext uri="{BB962C8B-B14F-4D97-AF65-F5344CB8AC3E}">
-        <p14:creationId xmlns:p14="http://schemas.microsoft.com/office/powerpoint/2010/main" val="1609540031"/>
       </p:ext>
     </p:extLst>
   </p:cSld>

--- a/jsik2026taikai.pptx
+++ b/jsik2026taikai.pptx
@@ -13,8 +13,8 @@
     <p:sldId id="313" r:id="rId7"/>
     <p:sldId id="305" r:id="rId8"/>
     <p:sldId id="307" r:id="rId9"/>
-    <p:sldId id="308" r:id="rId10"/>
-    <p:sldId id="309" r:id="rId11"/>
+    <p:sldId id="309" r:id="rId10"/>
+    <p:sldId id="308" r:id="rId11"/>
     <p:sldId id="310" r:id="rId12"/>
     <p:sldId id="312" r:id="rId13"/>
   </p:sldIdLst>
@@ -3889,7 +3889,7 @@
         <p:cNvPr id="1" name="">
           <a:extLst>
             <a:ext uri="{FF2B5EF4-FFF2-40B4-BE49-F238E27FC236}">
-              <a16:creationId xmlns:a16="http://schemas.microsoft.com/office/drawing/2014/main" id="{27B622E3-1D88-097D-0343-32872DBECF48}"/>
+              <a16:creationId xmlns:a16="http://schemas.microsoft.com/office/drawing/2014/main" id="{DC0D387A-1453-95D2-ECE4-F0F5846A713A}"/>
             </a:ext>
           </a:extLst>
         </p:cNvPr>
@@ -3909,7 +3909,7 @@
           <p:cNvPr id="2" name="タイトル 1">
             <a:extLst>
               <a:ext uri="{FF2B5EF4-FFF2-40B4-BE49-F238E27FC236}">
-                <a16:creationId xmlns:a16="http://schemas.microsoft.com/office/drawing/2014/main" id="{B62EDC01-EC4F-BEDC-7426-C76D07DBBBC9}"/>
+                <a16:creationId xmlns:a16="http://schemas.microsoft.com/office/drawing/2014/main" id="{5B2EEC0A-3EFA-7A7C-9D24-A9AAFD07EE0F}"/>
               </a:ext>
             </a:extLst>
           </p:cNvPr>
@@ -3942,22 +3942,22 @@
               <a:t>マテリアル・方法（</a:t>
             </a:r>
             <a:r>
-              <a:rPr lang="ja-JP" altLang="en-US" sz="3600"/>
-              <a:t>プロンプト</a:t>
+              <a:rPr kumimoji="1" lang="en-US" altLang="ja-JP" sz="3600"/>
+              <a:t>JSON</a:t>
             </a:r>
             <a:r>
               <a:rPr kumimoji="1" lang="ja-JP" altLang="en-US" sz="3600"/>
-              <a:t>）</a:t>
-            </a:r>
-          </a:p>
-        </p:txBody>
-      </p:sp>
-      <p:sp>
-        <p:nvSpPr>
-          <p:cNvPr id="3" name="テキスト ボックス 2">
-            <a:extLst>
-              <a:ext uri="{FF2B5EF4-FFF2-40B4-BE49-F238E27FC236}">
-                <a16:creationId xmlns:a16="http://schemas.microsoft.com/office/drawing/2014/main" id="{E338ACB1-AAC0-8369-EA96-CBA6FD444B9D}"/>
+              <a:t>形式の例）</a:t>
+            </a:r>
+          </a:p>
+        </p:txBody>
+      </p:sp>
+      <p:sp>
+        <p:nvSpPr>
+          <p:cNvPr id="4" name="テキスト ボックス 3">
+            <a:extLst>
+              <a:ext uri="{FF2B5EF4-FFF2-40B4-BE49-F238E27FC236}">
+                <a16:creationId xmlns:a16="http://schemas.microsoft.com/office/drawing/2014/main" id="{605A0A9E-028F-F0D6-C3A3-7E6D8D398283}"/>
               </a:ext>
             </a:extLst>
           </p:cNvPr>
@@ -3966,8 +3966,8 @@
         </p:nvSpPr>
         <p:spPr>
           <a:xfrm>
-            <a:off x="0" y="1720840"/>
-            <a:ext cx="12192000" cy="3416320"/>
+            <a:off x="1" y="1128588"/>
+            <a:ext cx="12191999" cy="3693319"/>
           </a:xfrm>
           <a:prstGeom prst="rect">
             <a:avLst/>
@@ -3981,309 +3981,824 @@
           <a:lstStyle/>
           <a:p>
             <a:r>
-              <a:rPr lang="ja-JP" altLang="en-US"/>
-              <a:t>添付のデータに対して以下の作業を行って下さい。</a:t>
-            </a:r>
-          </a:p>
-          <a:p>
-            <a:r>
-              <a:rPr lang="ja-JP" altLang="en-US"/>
-              <a:t> </a:t>
-            </a:r>
-          </a:p>
-          <a:p>
-            <a:r>
-              <a:rPr lang="ja-JP" altLang="en-US"/>
-              <a:t> </a:t>
-            </a:r>
-            <a:r>
-              <a:rPr lang="en-US" altLang="ja-JP" dirty="0"/>
-              <a:t>- </a:t>
-            </a:r>
-            <a:r>
-              <a:rPr lang="ja-JP" altLang="en-US"/>
-              <a:t>概要 </a:t>
-            </a:r>
-            <a:r>
-              <a:rPr lang="en-US" altLang="ja-JP" dirty="0"/>
-              <a:t>: </a:t>
-            </a:r>
-            <a:r>
-              <a:rPr lang="ja-JP" altLang="en-US"/>
-              <a:t>地名候補を地名であるか判定する。</a:t>
-            </a:r>
-          </a:p>
-          <a:p>
-            <a:r>
-              <a:rPr lang="ja-JP" altLang="en-US"/>
-              <a:t> </a:t>
-            </a:r>
-            <a:r>
-              <a:rPr lang="en-US" altLang="ja-JP" dirty="0"/>
-              <a:t>- </a:t>
-            </a:r>
-            <a:r>
-              <a:rPr lang="ja-JP" altLang="en-US"/>
-              <a:t>入力データ形式 </a:t>
-            </a:r>
-            <a:r>
-              <a:rPr lang="en-US" altLang="ja-JP" dirty="0"/>
-              <a:t>: </a:t>
-            </a:r>
-            <a:r>
-              <a:rPr lang="en" altLang="ja-JP" dirty="0" err="1"/>
-              <a:t>json</a:t>
-            </a:r>
-            <a:r>
-              <a:rPr lang="ja-JP" altLang="en-US"/>
-              <a:t>形式、</a:t>
-            </a:r>
-            <a:r>
-              <a:rPr lang="en-US" altLang="ja-JP" dirty="0"/>
-              <a:t>4 </a:t>
-            </a:r>
-            <a:r>
-              <a:rPr lang="ja-JP" altLang="en-US"/>
-              <a:t>つの要素から成る。各要素はさらに配列である可能性がある。</a:t>
-            </a:r>
-          </a:p>
-          <a:p>
-            <a:r>
-              <a:rPr lang="ja-JP" altLang="en-US"/>
-              <a:t> </a:t>
-            </a:r>
-            <a:r>
-              <a:rPr lang="en-US" altLang="ja-JP" dirty="0"/>
-              <a:t>- </a:t>
-            </a:r>
-            <a:r>
-              <a:rPr lang="ja-JP" altLang="en-US"/>
-              <a:t>入力データの各要素の説明 </a:t>
-            </a:r>
-            <a:r>
-              <a:rPr lang="en-US" altLang="ja-JP" dirty="0"/>
-              <a:t>: </a:t>
-            </a:r>
-          </a:p>
-          <a:p>
-            <a:r>
-              <a:rPr lang="en-US" altLang="ja-JP" dirty="0"/>
-              <a:t>  - </a:t>
-            </a:r>
-            <a:r>
-              <a:rPr lang="ja-JP" altLang="en-US"/>
-              <a:t>第</a:t>
-            </a:r>
-            <a:r>
-              <a:rPr lang="en-US" altLang="ja-JP" dirty="0"/>
+              <a:rPr lang="en-US" altLang="ja-JP"/>
+              <a:t>[</a:t>
+            </a:r>
+            <a:r>
+              <a:rPr lang="en-US" altLang="ja-JP">
+                <a:highlight>
+                  <a:srgbClr val="808080"/>
+                </a:highlight>
+              </a:rPr>
+              <a:t>["</a:t>
+            </a:r>
+            <a:r>
+              <a:rPr lang="ja-JP" altLang="en-US">
+                <a:highlight>
+                  <a:srgbClr val="808080"/>
+                </a:highlight>
+              </a:rPr>
+              <a:t>成</a:t>
+            </a:r>
+            <a:r>
+              <a:rPr lang="en-US" altLang="ja-JP">
+                <a:highlight>
+                  <a:srgbClr val="808080"/>
+                </a:highlight>
+              </a:rPr>
+              <a:t>","</a:t>
+            </a:r>
+            <a:r>
+              <a:rPr lang="ja-JP" altLang="en-US">
+                <a:highlight>
+                  <a:srgbClr val="808080"/>
+                </a:highlight>
+              </a:rPr>
+              <a:t>成</a:t>
+            </a:r>
+            <a:r>
+              <a:rPr lang="en-US" altLang="ja-JP">
+                <a:highlight>
+                  <a:srgbClr val="808080"/>
+                </a:highlight>
+              </a:rPr>
+              <a:t>"]</a:t>
+            </a:r>
+            <a:r>
+              <a:rPr lang="en-US" altLang="ja-JP"/>
+              <a:t>,</a:t>
+            </a:r>
+            <a:r>
+              <a:rPr lang="en-US" altLang="ja-JP" u="sng"/>
+              <a:t>["</a:t>
+            </a:r>
+            <a:r>
+              <a:rPr lang="ja-JP" altLang="en-US" u="sng"/>
+              <a:t>成</a:t>
+            </a:r>
+            <a:r>
+              <a:rPr lang="en-US" altLang="ja-JP" u="sng"/>
+              <a:t>","</a:t>
+            </a:r>
+            <a:r>
+              <a:rPr lang="ja-JP" altLang="en-US" u="sng"/>
+              <a:t>成</a:t>
+            </a:r>
+            <a:r>
+              <a:rPr lang="en-US" altLang="ja-JP" u="sng"/>
+              <a:t>"]</a:t>
+            </a:r>
+            <a:r>
+              <a:rPr lang="en-US" altLang="ja-JP"/>
+              <a:t>,</a:t>
+            </a:r>
+            <a:r>
+              <a:rPr lang="en-US" altLang="ja-JP">
+                <a:highlight>
+                  <a:srgbClr val="808080"/>
+                </a:highlight>
+              </a:rPr>
+              <a:t>"</a:t>
+            </a:r>
+            <a:r>
+              <a:rPr lang="ja-JP" altLang="en-US">
+                <a:highlight>
+                  <a:srgbClr val="808080"/>
+                </a:highlight>
+              </a:rPr>
+              <a:t>情報通信工学 </a:t>
+            </a:r>
+            <a:r>
+              <a:rPr lang="en-US" altLang="ja-JP">
+                <a:highlight>
+                  <a:srgbClr val="808080"/>
+                </a:highlight>
+              </a:rPr>
+              <a:t>/ </a:t>
+            </a:r>
+            <a:r>
+              <a:rPr lang="ja-JP" altLang="en-US">
+                <a:highlight>
+                  <a:srgbClr val="808080"/>
+                </a:highlight>
+              </a:rPr>
+              <a:t>電気電子工学 </a:t>
+            </a:r>
+            <a:r>
+              <a:rPr lang="en-US" altLang="ja-JP">
+                <a:highlight>
+                  <a:srgbClr val="808080"/>
+                </a:highlight>
+              </a:rPr>
+              <a:t>/ </a:t>
+            </a:r>
+            <a:r>
+              <a:rPr lang="ja-JP" altLang="en-US">
+                <a:highlight>
+                  <a:srgbClr val="808080"/>
+                </a:highlight>
+              </a:rPr>
+              <a:t>工学</a:t>
+            </a:r>
+            <a:r>
+              <a:rPr lang="en-US" altLang="ja-JP">
+                <a:highlight>
+                  <a:srgbClr val="808080"/>
+                </a:highlight>
+              </a:rPr>
+              <a:t>"</a:t>
+            </a:r>
+            <a:r>
+              <a:rPr lang="en-US" altLang="ja-JP"/>
+              <a:t>,["</a:t>
+            </a:r>
+            <a:r>
+              <a:rPr lang="ja-JP" altLang="en-US"/>
+              <a:t>高品質極薄</a:t>
+            </a:r>
+            <a:r>
+              <a:rPr lang="en" altLang="ja-JP"/>
+              <a:t>Si</a:t>
+            </a:r>
+            <a:r>
+              <a:rPr lang="ja-JP" altLang="en-US"/>
+              <a:t>系絶縁膜の低温形成と機能評価に関する研究</a:t>
+            </a:r>
+            <a:r>
+              <a:rPr lang="en-US" altLang="ja-JP"/>
+              <a:t>","09650363"," ","</a:t>
+            </a:r>
+            <a:r>
+              <a:rPr lang="ja-JP" altLang="en-US"/>
+              <a:t>本研究では、高活性なプラズマの生成が容易に実現できる</a:t>
+            </a:r>
+            <a:r>
+              <a:rPr lang="en" altLang="ja-JP"/>
+              <a:t>ECR(Electron Cyclotron Resonance)</a:t>
+            </a:r>
+            <a:r>
+              <a:rPr lang="ja-JP" altLang="en-US"/>
+              <a:t>マイクロ波プラズマと</a:t>
+            </a:r>
+            <a:r>
+              <a:rPr lang="en" altLang="ja-JP"/>
+              <a:t>Si</a:t>
+            </a:r>
+            <a:r>
+              <a:rPr lang="ja-JP" altLang="en-US"/>
+              <a:t>ターゲットからのスパッタリングを組み合わせた</a:t>
+            </a:r>
+            <a:r>
+              <a:rPr lang="en" altLang="ja-JP"/>
+              <a:t>ECR</a:t>
+            </a:r>
+            <a:r>
+              <a:rPr lang="ja-JP" altLang="en-US"/>
+              <a:t>スパッタ法を用いて、</a:t>
+            </a:r>
+            <a:r>
+              <a:rPr lang="en" altLang="ja-JP"/>
+              <a:t>Si</a:t>
+            </a:r>
+            <a:r>
+              <a:rPr lang="ja-JP" altLang="en-US"/>
+              <a:t>系絶縁膜を低温で堆積するプロセス技術を確立し、堆積された膜の機能性を発現させることを目的としている。この研究で得られた成果は、以下の通りである。 </a:t>
+            </a:r>
+            <a:r>
+              <a:rPr lang="en-US" altLang="ja-JP"/>
+              <a:t>(1) </a:t>
+            </a:r>
+            <a:r>
+              <a:rPr lang="ja-JP" altLang="en-US"/>
+              <a:t>プラズマ条件を最適化</a:t>
+            </a:r>
+          </a:p>
+          <a:p>
+            <a:r>
+              <a:rPr lang="ja-JP" altLang="en-US"/>
+              <a:t>することにより、</a:t>
+            </a:r>
+            <a:r>
+              <a:rPr lang="en-US" altLang="ja-JP"/>
+              <a:t>130℃</a:t>
+            </a:r>
+            <a:r>
+              <a:rPr lang="ja-JP" altLang="en-US"/>
+              <a:t>の低温で成膜速度</a:t>
+            </a:r>
+            <a:r>
+              <a:rPr lang="en-US" altLang="ja-JP"/>
+              <a:t>23</a:t>
+            </a:r>
+            <a:r>
+              <a:rPr lang="en" altLang="ja-JP"/>
+              <a:t>nm/min</a:t>
+            </a:r>
+            <a:r>
+              <a:rPr lang="ja-JP" altLang="en"/>
+              <a:t>、</a:t>
+            </a:r>
+            <a:r>
+              <a:rPr lang="ja-JP" altLang="en-US"/>
+              <a:t>絶縁破壊電界</a:t>
+            </a:r>
+            <a:r>
+              <a:rPr lang="en-US" altLang="ja-JP"/>
+              <a:t>10</a:t>
+            </a:r>
+            <a:r>
+              <a:rPr lang="en" altLang="ja-JP"/>
+              <a:t>MV/cm</a:t>
+            </a:r>
+            <a:r>
+              <a:rPr lang="ja-JP" altLang="en-US"/>
+              <a:t>を有する</a:t>
+            </a:r>
+            <a:r>
+              <a:rPr lang="en" altLang="ja-JP"/>
+              <a:t>Si</a:t>
+            </a:r>
+            <a:r>
+              <a:rPr lang="ja-JP" altLang="en-US"/>
+              <a:t>酸化</a:t>
+            </a:r>
+          </a:p>
+          <a:p>
+            <a:r>
+              <a:rPr lang="ja-JP" altLang="en-US"/>
+              <a:t>膜を形成する技術を確立した。 </a:t>
+            </a:r>
+            <a:r>
+              <a:rPr lang="en-US" altLang="ja-JP"/>
+              <a:t>(2) </a:t>
+            </a:r>
+            <a:r>
+              <a:rPr lang="en" altLang="ja-JP"/>
+              <a:t>Si</a:t>
+            </a:r>
+            <a:r>
+              <a:rPr lang="ja-JP" altLang="en-US"/>
+              <a:t>酸化膜堆積前にプラズマ酸化処理を行い、それに</a:t>
+            </a:r>
+          </a:p>
+          <a:p>
+            <a:r>
+              <a:rPr lang="ja-JP" altLang="en-US"/>
+              <a:t>続く</a:t>
+            </a:r>
+            <a:r>
+              <a:rPr lang="en-US" altLang="ja-JP"/>
+              <a:t>130℃</a:t>
+            </a:r>
+            <a:r>
+              <a:rPr lang="ja-JP" altLang="en-US"/>
+              <a:t>での低温堆積と</a:t>
+            </a:r>
+            <a:r>
+              <a:rPr lang="en-US" altLang="ja-JP"/>
+              <a:t>450℃</a:t>
+            </a:r>
+            <a:r>
+              <a:rPr lang="ja-JP" altLang="en-US"/>
+              <a:t>でのアニールにより、</a:t>
+            </a:r>
+            <a:r>
+              <a:rPr lang="en-US" altLang="ja-JP"/>
+              <a:t>9</a:t>
+            </a:r>
+            <a:r>
+              <a:rPr lang="en" altLang="ja-JP"/>
+              <a:t>nm</a:t>
+            </a:r>
+            <a:r>
+              <a:rPr lang="ja-JP" altLang="en-US"/>
+              <a:t>の極薄</a:t>
+            </a:r>
+            <a:r>
+              <a:rPr lang="en" altLang="ja-JP"/>
+              <a:t>Si</a:t>
+            </a:r>
+            <a:r>
+              <a:rPr lang="ja-JP" altLang="en-US"/>
+              <a:t>酸化膜の低温形成プロセ</a:t>
+            </a:r>
+          </a:p>
+          <a:p>
+            <a:r>
+              <a:rPr lang="ja-JP" altLang="en-US"/>
+              <a:t>スを確立した。この</a:t>
+            </a:r>
+            <a:r>
+              <a:rPr lang="en" altLang="ja-JP"/>
+              <a:t>Si</a:t>
+            </a:r>
+            <a:r>
+              <a:rPr lang="ja-JP" altLang="en-US"/>
+              <a:t>酸化膜は、絶縁破壊電界</a:t>
+            </a:r>
+            <a:r>
+              <a:rPr lang="en-US" altLang="ja-JP"/>
+              <a:t>9</a:t>
+            </a:r>
+            <a:r>
+              <a:rPr lang="en" altLang="ja-JP"/>
+              <a:t>MV/cm</a:t>
+            </a:r>
+            <a:r>
+              <a:rPr lang="ja-JP" altLang="en"/>
+              <a:t>、</a:t>
+            </a:r>
+            <a:r>
+              <a:rPr lang="ja-JP" altLang="en-US"/>
+              <a:t>界面準位密度</a:t>
+            </a:r>
+            <a:r>
+              <a:rPr lang="en-US" altLang="ja-JP"/>
               <a:t>1</a:t>
             </a:r>
             <a:r>
-              <a:rPr lang="ja-JP" altLang="en-US"/>
-              <a:t>要素 </a:t>
-            </a:r>
-            <a:r>
-              <a:rPr lang="en-US" altLang="ja-JP" dirty="0"/>
-              <a:t>: </a:t>
-            </a:r>
-            <a:r>
-              <a:rPr lang="ja-JP" altLang="en-US"/>
-              <a:t>無視して良い</a:t>
-            </a:r>
-          </a:p>
-          <a:p>
-            <a:r>
-              <a:rPr lang="ja-JP" altLang="en-US"/>
-              <a:t>  </a:t>
-            </a:r>
-            <a:r>
-              <a:rPr lang="en-US" altLang="ja-JP" dirty="0"/>
-              <a:t>- </a:t>
-            </a:r>
-            <a:r>
-              <a:rPr lang="ja-JP" altLang="en-US"/>
-              <a:t>第</a:t>
-            </a:r>
-            <a:r>
-              <a:rPr lang="en-US" altLang="ja-JP" dirty="0"/>
-              <a:t>2</a:t>
-            </a:r>
-            <a:r>
-              <a:rPr lang="ja-JP" altLang="en-US"/>
-              <a:t>要素 </a:t>
-            </a:r>
-            <a:r>
-              <a:rPr lang="en-US" altLang="ja-JP" dirty="0"/>
-              <a:t>: </a:t>
-            </a:r>
-            <a:r>
-              <a:rPr lang="ja-JP" altLang="en-US"/>
-              <a:t>第</a:t>
-            </a:r>
-            <a:r>
-              <a:rPr lang="en-US" altLang="ja-JP" dirty="0"/>
-              <a:t>4</a:t>
-            </a:r>
-            <a:r>
-              <a:rPr lang="ja-JP" altLang="en-US"/>
-              <a:t>要素から抽出された地名候補</a:t>
-            </a:r>
-          </a:p>
-          <a:p>
-            <a:r>
-              <a:rPr lang="ja-JP" altLang="en-US"/>
-              <a:t>  </a:t>
-            </a:r>
-            <a:r>
-              <a:rPr lang="en-US" altLang="ja-JP" dirty="0"/>
-              <a:t>- </a:t>
-            </a:r>
-            <a:r>
-              <a:rPr lang="ja-JP" altLang="en-US"/>
-              <a:t>第</a:t>
-            </a:r>
-            <a:r>
-              <a:rPr lang="en-US" altLang="ja-JP" dirty="0"/>
-              <a:t>3</a:t>
-            </a:r>
-            <a:r>
-              <a:rPr lang="ja-JP" altLang="en-US"/>
-              <a:t>要素 </a:t>
-            </a:r>
-            <a:r>
-              <a:rPr lang="en-US" altLang="ja-JP" dirty="0"/>
-              <a:t>: </a:t>
-            </a:r>
-            <a:r>
-              <a:rPr lang="ja-JP" altLang="en-US"/>
-              <a:t>無視して良い</a:t>
-            </a:r>
-          </a:p>
-          <a:p>
-            <a:r>
-              <a:rPr lang="ja-JP" altLang="en-US"/>
-              <a:t>  </a:t>
-            </a:r>
-            <a:r>
-              <a:rPr lang="en-US" altLang="ja-JP" dirty="0"/>
-              <a:t>- </a:t>
-            </a:r>
-            <a:r>
-              <a:rPr lang="ja-JP" altLang="en-US"/>
-              <a:t>第</a:t>
-            </a:r>
-            <a:r>
-              <a:rPr lang="en-US" altLang="ja-JP" dirty="0"/>
-              <a:t>4</a:t>
-            </a:r>
-            <a:r>
-              <a:rPr lang="ja-JP" altLang="en-US"/>
-              <a:t>要素 </a:t>
-            </a:r>
-            <a:r>
-              <a:rPr lang="en-US" altLang="ja-JP" dirty="0"/>
-              <a:t>: </a:t>
-            </a:r>
-            <a:r>
-              <a:rPr lang="ja-JP" altLang="en-US"/>
-              <a:t>文章 （配列）</a:t>
-            </a:r>
-          </a:p>
-          <a:p>
-            <a:r>
-              <a:rPr lang="en-US" altLang="ja-JP" dirty="0"/>
-              <a:t>- </a:t>
-            </a:r>
-            <a:r>
-              <a:rPr lang="ja-JP" altLang="en-US"/>
-              <a:t>行ってほしい作業 </a:t>
-            </a:r>
-            <a:r>
-              <a:rPr lang="en-US" altLang="ja-JP" dirty="0"/>
-              <a:t>: </a:t>
-            </a:r>
-            <a:r>
-              <a:rPr lang="en" altLang="ja-JP" dirty="0" err="1"/>
-              <a:t>json</a:t>
-            </a:r>
-            <a:r>
-              <a:rPr lang="ja-JP" altLang="en-US"/>
-              <a:t>の第</a:t>
-            </a:r>
-            <a:r>
-              <a:rPr lang="en-US" altLang="ja-JP" dirty="0"/>
-              <a:t>2</a:t>
-            </a:r>
-            <a:r>
-              <a:rPr lang="ja-JP" altLang="en-US"/>
-              <a:t>要素の各地名候補が地名であるかを、第</a:t>
-            </a:r>
-            <a:r>
-              <a:rPr lang="en-US" altLang="ja-JP" dirty="0"/>
-              <a:t>4</a:t>
-            </a:r>
-            <a:r>
-              <a:rPr lang="ja-JP" altLang="en-US"/>
-              <a:t>要素の文脈から判定してほしい。</a:t>
-            </a:r>
-          </a:p>
-          <a:p>
-            <a:r>
-              <a:rPr lang="en-US" altLang="ja-JP" dirty="0"/>
-              <a:t>- </a:t>
-            </a:r>
-            <a:r>
-              <a:rPr lang="ja-JP" altLang="en-US"/>
-              <a:t>出力データ形式 （判定結果） </a:t>
-            </a:r>
-            <a:r>
-              <a:rPr lang="en-US" altLang="ja-JP" dirty="0"/>
-              <a:t>: </a:t>
-            </a:r>
-            <a:r>
-              <a:rPr lang="ja-JP" altLang="en-US"/>
-              <a:t>第</a:t>
-            </a:r>
-            <a:r>
-              <a:rPr lang="en-US" altLang="ja-JP" dirty="0"/>
-              <a:t>2</a:t>
-            </a:r>
-            <a:r>
-              <a:rPr lang="ja-JP" altLang="en-US"/>
-              <a:t>要素のみを次のように出力する </a:t>
-            </a:r>
-            <a:r>
-              <a:rPr lang="en-US" altLang="ja-JP" dirty="0"/>
-              <a:t>: </a:t>
-            </a:r>
-            <a:r>
-              <a:rPr lang="ja-JP" altLang="en-US"/>
-              <a:t>第</a:t>
-            </a:r>
-            <a:r>
-              <a:rPr lang="en-US" altLang="ja-JP" dirty="0"/>
-              <a:t>2</a:t>
-            </a:r>
-            <a:r>
-              <a:rPr lang="ja-JP" altLang="en-US"/>
-              <a:t>要素の地名候補が地名であればそのまま残し、そうでない場合は</a:t>
-            </a:r>
-            <a:r>
-              <a:rPr lang="en-US" altLang="ja-JP" dirty="0"/>
+              <a:rPr lang="en" altLang="ja-JP"/>
+              <a:t>x10^&lt;11&gt;cm^&lt;-2&gt;eV^&lt;-1&gt;</a:t>
+            </a:r>
+            <a:r>
+              <a:rPr lang="ja-JP" altLang="en-US"/>
+              <a:t>以下、固定電荷密度</a:t>
+            </a:r>
+            <a:r>
+              <a:rPr lang="en-US" altLang="ja-JP"/>
+              <a:t>1</a:t>
+            </a:r>
+            <a:r>
+              <a:rPr lang="en" altLang="ja-JP"/>
+              <a:t>x10^&lt;11&gt;cm^&lt;-2&gt;</a:t>
+            </a:r>
+            <a:r>
+              <a:rPr lang="ja-JP" altLang="en-US"/>
+              <a:t>以下の機能を有する。 </a:t>
+            </a:r>
+            <a:r>
+              <a:rPr lang="en-US" altLang="ja-JP"/>
+              <a:t>(3) </a:t>
+            </a:r>
+            <a:r>
+              <a:rPr lang="ja-JP" altLang="en-US"/>
+              <a:t>酸素と窒素の混合プラズマを用いてプラズマ条件を最適化することにより、</a:t>
+            </a:r>
+            <a:r>
+              <a:rPr lang="en-US" altLang="ja-JP"/>
+              <a:t>130℃</a:t>
+            </a:r>
+            <a:r>
+              <a:rPr lang="ja-JP" altLang="en-US"/>
+              <a:t>の低温で、絶縁破壊電界</a:t>
+            </a:r>
+            <a:r>
+              <a:rPr lang="en-US" altLang="ja-JP"/>
+              <a:t>13</a:t>
+            </a:r>
+            <a:r>
+              <a:rPr lang="en" altLang="ja-JP"/>
+              <a:t>MV/cm</a:t>
+            </a:r>
+            <a:r>
+              <a:rPr lang="ja-JP" altLang="en-US"/>
+              <a:t>を有する</a:t>
+            </a:r>
+            <a:r>
+              <a:rPr lang="en" altLang="ja-JP"/>
+              <a:t>Si</a:t>
+            </a:r>
+            <a:r>
+              <a:rPr lang="ja-JP" altLang="en-US"/>
+              <a:t>酸窒化膜が形成できることを明らかにした。 </a:t>
+            </a:r>
+            <a:r>
+              <a:rPr lang="en-US" altLang="ja-JP"/>
+              <a:t>(4) </a:t>
+            </a:r>
+            <a:r>
+              <a:rPr lang="ja-JP" altLang="en-US"/>
+              <a:t>緻密な</a:t>
+            </a:r>
+            <a:r>
+              <a:rPr lang="en" altLang="ja-JP"/>
+              <a:t>SiN</a:t>
+            </a:r>
+            <a:r>
+              <a:rPr lang="ja-JP" altLang="en-US"/>
+              <a:t>膜が</a:t>
+            </a:r>
+            <a:r>
+              <a:rPr lang="en" altLang="ja-JP"/>
+              <a:t>ECR</a:t>
+            </a:r>
+            <a:r>
+              <a:rPr lang="ja-JP" altLang="en-US"/>
+              <a:t>スパッター法を用いて室温で堆積された。この窒化膜は、屈折率、赤外吸収、化学エッチングレイト等の特性は高温</a:t>
+            </a:r>
+            <a:r>
+              <a:rPr lang="en" altLang="ja-JP"/>
+              <a:t>CVD</a:t>
+            </a:r>
+            <a:r>
+              <a:rPr lang="ja-JP" altLang="en-US"/>
+              <a:t>で成膜したものと同等であることが明らかとなった。</a:t>
+            </a:r>
+            <a:r>
+              <a:rPr lang="en-US" altLang="ja-JP"/>
+              <a:t>"," "," "]]</a:t>
+            </a:r>
+          </a:p>
+        </p:txBody>
+      </p:sp>
+      <p:sp>
+        <p:nvSpPr>
+          <p:cNvPr id="5" name="テキスト ボックス 4">
+            <a:extLst>
+              <a:ext uri="{FF2B5EF4-FFF2-40B4-BE49-F238E27FC236}">
+                <a16:creationId xmlns:a16="http://schemas.microsoft.com/office/drawing/2014/main" id="{9C24996B-F6F7-4C7A-D224-CBE1D5484A48}"/>
+              </a:ext>
+            </a:extLst>
+          </p:cNvPr>
+          <p:cNvSpPr txBox="1"/>
+          <p:nvPr/>
+        </p:nvSpPr>
+        <p:spPr>
+          <a:xfrm>
+            <a:off x="-1" y="577517"/>
+            <a:ext cx="843501" cy="369332"/>
+          </a:xfrm>
+          <a:prstGeom prst="rect">
+            <a:avLst/>
+          </a:prstGeom>
+          <a:noFill/>
+        </p:spPr>
+        <p:txBody>
+          <a:bodyPr wrap="none" rtlCol="0">
+            <a:spAutoFit/>
+          </a:bodyPr>
+          <a:lstStyle/>
+          <a:p>
+            <a:r>
+              <a:rPr kumimoji="1" lang="en-US" altLang="ja-JP" b="1"/>
+              <a:t>Input:</a:t>
+            </a:r>
+            <a:endParaRPr kumimoji="1" lang="ja-JP" altLang="en-US" b="1"/>
+          </a:p>
+        </p:txBody>
+      </p:sp>
+      <p:sp>
+        <p:nvSpPr>
+          <p:cNvPr id="6" name="テキスト ボックス 5">
+            <a:extLst>
+              <a:ext uri="{FF2B5EF4-FFF2-40B4-BE49-F238E27FC236}">
+                <a16:creationId xmlns:a16="http://schemas.microsoft.com/office/drawing/2014/main" id="{D998F3A7-0629-53CA-682F-82B5E7A90C5E}"/>
+              </a:ext>
+            </a:extLst>
+          </p:cNvPr>
+          <p:cNvSpPr txBox="1"/>
+          <p:nvPr/>
+        </p:nvSpPr>
+        <p:spPr>
+          <a:xfrm>
+            <a:off x="0" y="4988381"/>
+            <a:ext cx="2880917" cy="369332"/>
+          </a:xfrm>
+          <a:prstGeom prst="rect">
+            <a:avLst/>
+          </a:prstGeom>
+          <a:noFill/>
+        </p:spPr>
+        <p:txBody>
+          <a:bodyPr wrap="none" rtlCol="0">
+            <a:spAutoFit/>
+          </a:bodyPr>
+          <a:lstStyle/>
+          <a:p>
+            <a:r>
+              <a:rPr lang="en-US" altLang="ja-JP" b="1"/>
+              <a:t>Out</a:t>
+            </a:r>
+            <a:r>
+              <a:rPr kumimoji="1" lang="en-US" altLang="ja-JP" b="1"/>
+              <a:t>put</a:t>
+            </a:r>
+            <a:r>
+              <a:rPr kumimoji="1" lang="ja-JP" altLang="en-US" b="1"/>
+              <a:t>（想定する形式）</a:t>
+            </a:r>
+            <a:r>
+              <a:rPr kumimoji="1" lang="en-US" altLang="ja-JP" b="1"/>
+              <a:t>:</a:t>
+            </a:r>
+            <a:endParaRPr kumimoji="1" lang="ja-JP" altLang="en-US" b="1"/>
+          </a:p>
+        </p:txBody>
+      </p:sp>
+      <p:sp>
+        <p:nvSpPr>
+          <p:cNvPr id="7" name="テキスト ボックス 6">
+            <a:extLst>
+              <a:ext uri="{FF2B5EF4-FFF2-40B4-BE49-F238E27FC236}">
+                <a16:creationId xmlns:a16="http://schemas.microsoft.com/office/drawing/2014/main" id="{25003854-6FEC-4B77-4547-707EDD47058A}"/>
+              </a:ext>
+            </a:extLst>
+          </p:cNvPr>
+          <p:cNvSpPr txBox="1"/>
+          <p:nvPr/>
+        </p:nvSpPr>
+        <p:spPr>
+          <a:xfrm>
+            <a:off x="-1" y="5357713"/>
+            <a:ext cx="971741" cy="369332"/>
+          </a:xfrm>
+          <a:prstGeom prst="rect">
+            <a:avLst/>
+          </a:prstGeom>
+          <a:noFill/>
+        </p:spPr>
+        <p:txBody>
+          <a:bodyPr wrap="none" rtlCol="0">
+            <a:spAutoFit/>
+          </a:bodyPr>
+          <a:lstStyle/>
+          <a:p>
+            <a:r>
+              <a:rPr lang="en-US" altLang="ja-JP"/>
+              <a:t>["</a:t>
+            </a:r>
+            <a:r>
+              <a:rPr lang="ja-JP" altLang="en-US"/>
+              <a:t>成</a:t>
+            </a:r>
+            <a:r>
+              <a:rPr lang="en-US" altLang="ja-JP"/>
+              <a:t>",0]</a:t>
+            </a:r>
+            <a:endParaRPr kumimoji="1" lang="ja-JP" altLang="en-US"/>
+          </a:p>
+        </p:txBody>
+      </p:sp>
+      <p:sp>
+        <p:nvSpPr>
+          <p:cNvPr id="8" name="テキスト ボックス 7">
+            <a:extLst>
+              <a:ext uri="{FF2B5EF4-FFF2-40B4-BE49-F238E27FC236}">
+                <a16:creationId xmlns:a16="http://schemas.microsoft.com/office/drawing/2014/main" id="{DA8703AE-573B-9728-A3C3-997C4B6E8C7F}"/>
+              </a:ext>
+            </a:extLst>
+          </p:cNvPr>
+          <p:cNvSpPr txBox="1"/>
+          <p:nvPr/>
+        </p:nvSpPr>
+        <p:spPr>
+          <a:xfrm>
+            <a:off x="1856114" y="6034822"/>
+            <a:ext cx="3057247" cy="307777"/>
+          </a:xfrm>
+          <a:prstGeom prst="rect">
+            <a:avLst/>
+          </a:prstGeom>
+          <a:noFill/>
+        </p:spPr>
+        <p:txBody>
+          <a:bodyPr wrap="none" rtlCol="0">
+            <a:spAutoFit/>
+          </a:bodyPr>
+          <a:lstStyle/>
+          <a:p>
+            <a:r>
+              <a:rPr kumimoji="1" lang="ja-JP" altLang="en-US" sz="1400"/>
+              <a:t>地名と判定したものはそのまま残す</a:t>
+            </a:r>
+          </a:p>
+        </p:txBody>
+      </p:sp>
+      <p:sp>
+        <p:nvSpPr>
+          <p:cNvPr id="9" name="テキスト ボックス 8">
+            <a:extLst>
+              <a:ext uri="{FF2B5EF4-FFF2-40B4-BE49-F238E27FC236}">
+                <a16:creationId xmlns:a16="http://schemas.microsoft.com/office/drawing/2014/main" id="{6E3ED00A-3E53-034E-8909-DCE8C51D38E8}"/>
+              </a:ext>
+            </a:extLst>
+          </p:cNvPr>
+          <p:cNvSpPr txBox="1"/>
+          <p:nvPr/>
+        </p:nvSpPr>
+        <p:spPr>
+          <a:xfrm>
+            <a:off x="1669936" y="5727045"/>
+            <a:ext cx="3695242" cy="307777"/>
+          </a:xfrm>
+          <a:prstGeom prst="rect">
+            <a:avLst/>
+          </a:prstGeom>
+          <a:noFill/>
+        </p:spPr>
+        <p:txBody>
+          <a:bodyPr wrap="none" rtlCol="0">
+            <a:spAutoFit/>
+          </a:bodyPr>
+          <a:lstStyle/>
+          <a:p>
+            <a:r>
+              <a:rPr kumimoji="1" lang="ja-JP" altLang="en-US" sz="1400"/>
+              <a:t>地名でないと判定したものは</a:t>
+            </a:r>
+            <a:r>
+              <a:rPr kumimoji="1" lang="en-US" altLang="ja-JP" sz="1400"/>
               <a:t>0</a:t>
             </a:r>
             <a:r>
-              <a:rPr lang="ja-JP" altLang="en-US"/>
-              <a:t>に置きかえたもの。</a:t>
-            </a:r>
-            <a:endParaRPr kumimoji="1" lang="ja-JP" altLang="en-US"/>
-          </a:p>
-        </p:txBody>
-      </p:sp>
+              <a:rPr kumimoji="1" lang="ja-JP" altLang="en-US" sz="1400"/>
+              <a:t>に置き換える</a:t>
+            </a:r>
+          </a:p>
+        </p:txBody>
+      </p:sp>
+      <p:sp>
+        <p:nvSpPr>
+          <p:cNvPr id="10" name="テキスト ボックス 9">
+            <a:extLst>
+              <a:ext uri="{FF2B5EF4-FFF2-40B4-BE49-F238E27FC236}">
+                <a16:creationId xmlns:a16="http://schemas.microsoft.com/office/drawing/2014/main" id="{B16125B5-381B-C4FD-2940-07DA429F3706}"/>
+              </a:ext>
+            </a:extLst>
+          </p:cNvPr>
+          <p:cNvSpPr txBox="1"/>
+          <p:nvPr/>
+        </p:nvSpPr>
+        <p:spPr>
+          <a:xfrm>
+            <a:off x="2660822" y="820811"/>
+            <a:ext cx="1447832" cy="307777"/>
+          </a:xfrm>
+          <a:prstGeom prst="rect">
+            <a:avLst/>
+          </a:prstGeom>
+          <a:noFill/>
+        </p:spPr>
+        <p:txBody>
+          <a:bodyPr wrap="none" rtlCol="0">
+            <a:spAutoFit/>
+          </a:bodyPr>
+          <a:lstStyle/>
+          <a:p>
+            <a:r>
+              <a:rPr kumimoji="1" lang="en-US" altLang="ja-JP" sz="1400"/>
+              <a:t>NER</a:t>
+            </a:r>
+            <a:r>
+              <a:rPr kumimoji="1" lang="ja-JP" altLang="en-US" sz="1400"/>
+              <a:t>による抽出</a:t>
+            </a:r>
+          </a:p>
+        </p:txBody>
+      </p:sp>
+      <p:cxnSp>
+        <p:nvCxnSpPr>
+          <p:cNvPr id="12" name="カギ線コネクタ 11">
+            <a:extLst>
+              <a:ext uri="{FF2B5EF4-FFF2-40B4-BE49-F238E27FC236}">
+                <a16:creationId xmlns:a16="http://schemas.microsoft.com/office/drawing/2014/main" id="{4CC0870C-CAFC-BCD1-A478-9144D0E96817}"/>
+              </a:ext>
+            </a:extLst>
+          </p:cNvPr>
+          <p:cNvCxnSpPr>
+            <a:stCxn id="10" idx="1"/>
+          </p:cNvCxnSpPr>
+          <p:nvPr/>
+        </p:nvCxnSpPr>
+        <p:spPr>
+          <a:xfrm rot="10800000" flipV="1">
+            <a:off x="1856114" y="974700"/>
+            <a:ext cx="804708" cy="153888"/>
+          </a:xfrm>
+          <a:prstGeom prst="bentConnector3">
+            <a:avLst>
+              <a:gd name="adj1" fmla="val 100162"/>
+            </a:avLst>
+          </a:prstGeom>
+          <a:ln w="12700">
+            <a:solidFill>
+              <a:schemeClr val="tx1"/>
+            </a:solidFill>
+            <a:tailEnd type="triangle"/>
+          </a:ln>
+        </p:spPr>
+        <p:style>
+          <a:lnRef idx="2">
+            <a:schemeClr val="accent1"/>
+          </a:lnRef>
+          <a:fillRef idx="0">
+            <a:schemeClr val="accent1"/>
+          </a:fillRef>
+          <a:effectRef idx="1">
+            <a:schemeClr val="accent1"/>
+          </a:effectRef>
+          <a:fontRef idx="minor">
+            <a:schemeClr val="tx1"/>
+          </a:fontRef>
+        </p:style>
+      </p:cxnSp>
+      <p:cxnSp>
+        <p:nvCxnSpPr>
+          <p:cNvPr id="15" name="カギ線コネクタ 14">
+            <a:extLst>
+              <a:ext uri="{FF2B5EF4-FFF2-40B4-BE49-F238E27FC236}">
+                <a16:creationId xmlns:a16="http://schemas.microsoft.com/office/drawing/2014/main" id="{BC8931FA-6C64-64C4-5D8D-9F0DD8164590}"/>
+              </a:ext>
+            </a:extLst>
+          </p:cNvPr>
+          <p:cNvCxnSpPr>
+            <a:stCxn id="9" idx="1"/>
+          </p:cNvCxnSpPr>
+          <p:nvPr/>
+        </p:nvCxnSpPr>
+        <p:spPr>
+          <a:xfrm rot="10800000">
+            <a:off x="706582" y="5727046"/>
+            <a:ext cx="963354" cy="153889"/>
+          </a:xfrm>
+          <a:prstGeom prst="bentConnector3">
+            <a:avLst>
+              <a:gd name="adj1" fmla="val 99616"/>
+            </a:avLst>
+          </a:prstGeom>
+          <a:ln w="12700">
+            <a:solidFill>
+              <a:schemeClr val="tx1"/>
+            </a:solidFill>
+            <a:tailEnd type="triangle"/>
+          </a:ln>
+        </p:spPr>
+        <p:style>
+          <a:lnRef idx="2">
+            <a:schemeClr val="accent1"/>
+          </a:lnRef>
+          <a:fillRef idx="0">
+            <a:schemeClr val="accent1"/>
+          </a:fillRef>
+          <a:effectRef idx="1">
+            <a:schemeClr val="accent1"/>
+          </a:effectRef>
+          <a:fontRef idx="minor">
+            <a:schemeClr val="tx1"/>
+          </a:fontRef>
+        </p:style>
+      </p:cxnSp>
+      <p:cxnSp>
+        <p:nvCxnSpPr>
+          <p:cNvPr id="18" name="カギ線コネクタ 17">
+            <a:extLst>
+              <a:ext uri="{FF2B5EF4-FFF2-40B4-BE49-F238E27FC236}">
+                <a16:creationId xmlns:a16="http://schemas.microsoft.com/office/drawing/2014/main" id="{B64DC262-5C37-8FCC-BC2B-71EB33CC94EE}"/>
+              </a:ext>
+            </a:extLst>
+          </p:cNvPr>
+          <p:cNvCxnSpPr>
+            <a:cxnSpLocks/>
+            <a:stCxn id="8" idx="1"/>
+          </p:cNvCxnSpPr>
+          <p:nvPr/>
+        </p:nvCxnSpPr>
+        <p:spPr>
+          <a:xfrm rot="10800000">
+            <a:off x="396974" y="5727045"/>
+            <a:ext cx="1459140" cy="461666"/>
+          </a:xfrm>
+          <a:prstGeom prst="bentConnector3">
+            <a:avLst>
+              <a:gd name="adj1" fmla="val 99849"/>
+            </a:avLst>
+          </a:prstGeom>
+          <a:ln w="12700">
+            <a:solidFill>
+              <a:schemeClr val="tx1"/>
+            </a:solidFill>
+            <a:tailEnd type="triangle"/>
+          </a:ln>
+        </p:spPr>
+        <p:style>
+          <a:lnRef idx="2">
+            <a:schemeClr val="accent1"/>
+          </a:lnRef>
+          <a:fillRef idx="0">
+            <a:schemeClr val="accent1"/>
+          </a:fillRef>
+          <a:effectRef idx="1">
+            <a:schemeClr val="accent1"/>
+          </a:effectRef>
+          <a:fontRef idx="minor">
+            <a:schemeClr val="tx1"/>
+          </a:fontRef>
+        </p:style>
+      </p:cxnSp>
     </p:spTree>
     <p:extLst>
       <p:ext uri="{BB962C8B-B14F-4D97-AF65-F5344CB8AC3E}">
-        <p14:creationId xmlns:p14="http://schemas.microsoft.com/office/powerpoint/2010/main" val="1609540031"/>
+        <p14:creationId xmlns:p14="http://schemas.microsoft.com/office/powerpoint/2010/main" val="2951289915"/>
       </p:ext>
     </p:extLst>
   </p:cSld>
@@ -4364,6 +4879,316 @@
           </a:p>
         </p:txBody>
       </p:sp>
+      <p:sp>
+        <p:nvSpPr>
+          <p:cNvPr id="3" name="テキスト ボックス 2">
+            <a:extLst>
+              <a:ext uri="{FF2B5EF4-FFF2-40B4-BE49-F238E27FC236}">
+                <a16:creationId xmlns:a16="http://schemas.microsoft.com/office/drawing/2014/main" id="{8BA2003B-4A17-493F-5A7F-053901E11698}"/>
+              </a:ext>
+            </a:extLst>
+          </p:cNvPr>
+          <p:cNvSpPr txBox="1"/>
+          <p:nvPr/>
+        </p:nvSpPr>
+        <p:spPr>
+          <a:xfrm>
+            <a:off x="509156" y="748143"/>
+            <a:ext cx="1931939" cy="1200329"/>
+          </a:xfrm>
+          <a:prstGeom prst="rect">
+            <a:avLst/>
+          </a:prstGeom>
+          <a:noFill/>
+        </p:spPr>
+        <p:txBody>
+          <a:bodyPr wrap="none" rtlCol="0">
+            <a:spAutoFit/>
+          </a:bodyPr>
+          <a:lstStyle/>
+          <a:p>
+            <a:r>
+              <a:rPr kumimoji="1" lang="en-US" altLang="ja-JP"/>
+              <a:t>AI</a:t>
+            </a:r>
+          </a:p>
+          <a:p>
+            <a:pPr marL="285750" indent="-285750">
+              <a:buFont typeface="Arial" panose="020B0604020202020204" pitchFamily="34" charset="0"/>
+              <a:buChar char="•"/>
+            </a:pPr>
+            <a:r>
+              <a:rPr lang="en-US" altLang="ja-JP"/>
+              <a:t>Gemma3 (4b)</a:t>
+            </a:r>
+          </a:p>
+          <a:p>
+            <a:pPr marL="285750" indent="-285750">
+              <a:buFont typeface="Arial" panose="020B0604020202020204" pitchFamily="34" charset="0"/>
+              <a:buChar char="•"/>
+            </a:pPr>
+            <a:r>
+              <a:rPr kumimoji="1" lang="en-US" altLang="ja-JP"/>
+              <a:t>Llama3 (8b)</a:t>
+            </a:r>
+          </a:p>
+          <a:p>
+            <a:pPr marL="285750" indent="-285750">
+              <a:buFont typeface="Arial" panose="020B0604020202020204" pitchFamily="34" charset="0"/>
+              <a:buChar char="•"/>
+            </a:pPr>
+            <a:r>
+              <a:rPr lang="en-US" altLang="ja-JP"/>
+              <a:t>Qwen3 (32b)</a:t>
+            </a:r>
+            <a:endParaRPr kumimoji="1" lang="ja-JP" altLang="en-US"/>
+          </a:p>
+        </p:txBody>
+      </p:sp>
+      <p:sp>
+        <p:nvSpPr>
+          <p:cNvPr id="4" name="テキスト ボックス 3">
+            <a:extLst>
+              <a:ext uri="{FF2B5EF4-FFF2-40B4-BE49-F238E27FC236}">
+                <a16:creationId xmlns:a16="http://schemas.microsoft.com/office/drawing/2014/main" id="{617ACA11-B918-E0C8-A874-3C29FCFB4845}"/>
+              </a:ext>
+            </a:extLst>
+          </p:cNvPr>
+          <p:cNvSpPr txBox="1"/>
+          <p:nvPr/>
+        </p:nvSpPr>
+        <p:spPr>
+          <a:xfrm>
+            <a:off x="509156" y="2421076"/>
+            <a:ext cx="832279" cy="646331"/>
+          </a:xfrm>
+          <a:prstGeom prst="rect">
+            <a:avLst/>
+          </a:prstGeom>
+          <a:noFill/>
+        </p:spPr>
+        <p:txBody>
+          <a:bodyPr wrap="none" rtlCol="0">
+            <a:spAutoFit/>
+          </a:bodyPr>
+          <a:lstStyle/>
+          <a:p>
+            <a:r>
+              <a:rPr kumimoji="1" lang="ja-JP" altLang="en-US"/>
+              <a:t>人</a:t>
+            </a:r>
+            <a:endParaRPr kumimoji="1" lang="en-US" altLang="ja-JP"/>
+          </a:p>
+          <a:p>
+            <a:pPr marL="285750" indent="-285750">
+              <a:buFont typeface="Arial" panose="020B0604020202020204" pitchFamily="34" charset="0"/>
+              <a:buChar char="•"/>
+            </a:pPr>
+            <a:r>
+              <a:rPr lang="en-US" altLang="ja-JP"/>
+              <a:t>3</a:t>
+            </a:r>
+            <a:r>
+              <a:rPr lang="ja-JP" altLang="en-US"/>
+              <a:t>名</a:t>
+            </a:r>
+            <a:endParaRPr kumimoji="1" lang="ja-JP" altLang="en-US"/>
+          </a:p>
+        </p:txBody>
+      </p:sp>
+      <p:sp>
+        <p:nvSpPr>
+          <p:cNvPr id="5" name="テキスト ボックス 4">
+            <a:extLst>
+              <a:ext uri="{FF2B5EF4-FFF2-40B4-BE49-F238E27FC236}">
+                <a16:creationId xmlns:a16="http://schemas.microsoft.com/office/drawing/2014/main" id="{4B44D2CF-9DD3-943A-F884-1C2A76866132}"/>
+              </a:ext>
+            </a:extLst>
+          </p:cNvPr>
+          <p:cNvSpPr txBox="1"/>
+          <p:nvPr/>
+        </p:nvSpPr>
+        <p:spPr>
+          <a:xfrm>
+            <a:off x="4070933" y="1064612"/>
+            <a:ext cx="7367723" cy="646331"/>
+          </a:xfrm>
+          <a:prstGeom prst="rect">
+            <a:avLst/>
+          </a:prstGeom>
+          <a:noFill/>
+        </p:spPr>
+        <p:txBody>
+          <a:bodyPr wrap="none" rtlCol="0">
+            <a:spAutoFit/>
+          </a:bodyPr>
+          <a:lstStyle/>
+          <a:p>
+            <a:pPr marL="285750" indent="-285750">
+              <a:buFont typeface="Arial" panose="020B0604020202020204" pitchFamily="34" charset="0"/>
+              <a:buChar char="•"/>
+            </a:pPr>
+            <a:r>
+              <a:rPr kumimoji="1" lang="ja-JP" altLang="en-US"/>
+              <a:t>ローカル環境（</a:t>
+            </a:r>
+            <a:r>
+              <a:rPr kumimoji="1" lang="en-US" altLang="ja-JP"/>
+              <a:t>Ollama</a:t>
+            </a:r>
+            <a:r>
+              <a:rPr kumimoji="1" lang="ja-JP" altLang="en-US"/>
+              <a:t>）による</a:t>
+            </a:r>
+            <a:r>
+              <a:rPr kumimoji="1" lang="en-US" altLang="ja-JP"/>
+              <a:t>1</a:t>
+            </a:r>
+            <a:r>
+              <a:rPr kumimoji="1" lang="ja-JP" altLang="en-US"/>
+              <a:t>ドキュメント</a:t>
+            </a:r>
+            <a:r>
+              <a:rPr kumimoji="1" lang="en-US" altLang="ja-JP"/>
+              <a:t>/1</a:t>
+            </a:r>
+            <a:r>
+              <a:rPr kumimoji="1" lang="ja-JP" altLang="en-US"/>
+              <a:t>クエリー</a:t>
+            </a:r>
+            <a:r>
+              <a:rPr kumimoji="1" lang="en-US" altLang="ja-JP"/>
+              <a:t>/1</a:t>
+            </a:r>
+            <a:r>
+              <a:rPr kumimoji="1" lang="ja-JP" altLang="en-US"/>
+              <a:t>回のみ</a:t>
+            </a:r>
+            <a:endParaRPr kumimoji="1" lang="en-US" altLang="ja-JP"/>
+          </a:p>
+          <a:p>
+            <a:pPr marL="285750" indent="-285750">
+              <a:buFont typeface="Arial" panose="020B0604020202020204" pitchFamily="34" charset="0"/>
+              <a:buChar char="•"/>
+            </a:pPr>
+            <a:r>
+              <a:rPr lang="ja-JP" altLang="en-US"/>
+              <a:t>総計</a:t>
+            </a:r>
+            <a:r>
+              <a:rPr lang="en-US" altLang="ja-JP"/>
+              <a:t>600</a:t>
+            </a:r>
+            <a:r>
+              <a:rPr lang="ja-JP" altLang="en-US"/>
+              <a:t>クエリー</a:t>
+            </a:r>
+            <a:endParaRPr kumimoji="1" lang="ja-JP" altLang="en-US"/>
+          </a:p>
+        </p:txBody>
+      </p:sp>
+      <p:sp>
+        <p:nvSpPr>
+          <p:cNvPr id="7" name="テキスト ボックス 6">
+            <a:extLst>
+              <a:ext uri="{FF2B5EF4-FFF2-40B4-BE49-F238E27FC236}">
+                <a16:creationId xmlns:a16="http://schemas.microsoft.com/office/drawing/2014/main" id="{CACC1BA4-62B7-33A4-8398-8AC85962F4AC}"/>
+              </a:ext>
+            </a:extLst>
+          </p:cNvPr>
+          <p:cNvSpPr txBox="1"/>
+          <p:nvPr/>
+        </p:nvSpPr>
+        <p:spPr>
+          <a:xfrm>
+            <a:off x="4070933" y="2605742"/>
+            <a:ext cx="4166525" cy="923330"/>
+          </a:xfrm>
+          <a:prstGeom prst="rect">
+            <a:avLst/>
+          </a:prstGeom>
+          <a:noFill/>
+        </p:spPr>
+        <p:txBody>
+          <a:bodyPr wrap="none" rtlCol="0">
+            <a:spAutoFit/>
+          </a:bodyPr>
+          <a:lstStyle/>
+          <a:p>
+            <a:pPr marL="285750" indent="-285750">
+              <a:buFont typeface="Arial" panose="020B0604020202020204" pitchFamily="34" charset="0"/>
+              <a:buChar char="•"/>
+            </a:pPr>
+            <a:r>
+              <a:rPr lang="ja-JP" altLang="en-US"/>
+              <a:t>期限付き</a:t>
+            </a:r>
+            <a:endParaRPr lang="en-US" altLang="ja-JP"/>
+          </a:p>
+          <a:p>
+            <a:pPr marL="285750" indent="-285750">
+              <a:buFont typeface="Arial" panose="020B0604020202020204" pitchFamily="34" charset="0"/>
+              <a:buChar char="•"/>
+            </a:pPr>
+            <a:r>
+              <a:rPr lang="ja-JP" altLang="en-US"/>
+              <a:t>再提出化</a:t>
+            </a:r>
+            <a:endParaRPr lang="en-US" altLang="ja-JP"/>
+          </a:p>
+          <a:p>
+            <a:pPr marL="285750" indent="-285750">
+              <a:buFont typeface="Arial" panose="020B0604020202020204" pitchFamily="34" charset="0"/>
+              <a:buChar char="•"/>
+            </a:pPr>
+            <a:r>
+              <a:rPr kumimoji="1" lang="ja-JP" altLang="en-US"/>
+              <a:t>合議を妨げない（質問にも答える）</a:t>
+            </a:r>
+          </a:p>
+        </p:txBody>
+      </p:sp>
+      <p:cxnSp>
+        <p:nvCxnSpPr>
+          <p:cNvPr id="9" name="直線コネクタ 8">
+            <a:extLst>
+              <a:ext uri="{FF2B5EF4-FFF2-40B4-BE49-F238E27FC236}">
+                <a16:creationId xmlns:a16="http://schemas.microsoft.com/office/drawing/2014/main" id="{F970DDBE-3199-7B47-68A9-2540185EDC56}"/>
+              </a:ext>
+            </a:extLst>
+          </p:cNvPr>
+          <p:cNvCxnSpPr/>
+          <p:nvPr/>
+        </p:nvCxnSpPr>
+        <p:spPr>
+          <a:xfrm>
+            <a:off x="301336" y="2119745"/>
+            <a:ext cx="11523519" cy="0"/>
+          </a:xfrm>
+          <a:prstGeom prst="line">
+            <a:avLst/>
+          </a:prstGeom>
+          <a:ln w="12700">
+            <a:solidFill>
+              <a:schemeClr val="tx1"/>
+            </a:solidFill>
+          </a:ln>
+        </p:spPr>
+        <p:style>
+          <a:lnRef idx="2">
+            <a:schemeClr val="accent1"/>
+          </a:lnRef>
+          <a:fillRef idx="0">
+            <a:schemeClr val="accent1"/>
+          </a:fillRef>
+          <a:effectRef idx="1">
+            <a:schemeClr val="accent1"/>
+          </a:effectRef>
+          <a:fontRef idx="minor">
+            <a:schemeClr val="tx1"/>
+          </a:fontRef>
+        </p:style>
+      </p:cxnSp>
     </p:spTree>
     <p:extLst>
       <p:ext uri="{BB962C8B-B14F-4D97-AF65-F5344CB8AC3E}">
@@ -10653,7 +11478,7 @@
         <p:cNvPr id="1" name="">
           <a:extLst>
             <a:ext uri="{FF2B5EF4-FFF2-40B4-BE49-F238E27FC236}">
-              <a16:creationId xmlns:a16="http://schemas.microsoft.com/office/drawing/2014/main" id="{DC0D387A-1453-95D2-ECE4-F0F5846A713A}"/>
+              <a16:creationId xmlns:a16="http://schemas.microsoft.com/office/drawing/2014/main" id="{27B622E3-1D88-097D-0343-32872DBECF48}"/>
             </a:ext>
           </a:extLst>
         </p:cNvPr>
@@ -10673,7 +11498,7 @@
           <p:cNvPr id="2" name="タイトル 1">
             <a:extLst>
               <a:ext uri="{FF2B5EF4-FFF2-40B4-BE49-F238E27FC236}">
-                <a16:creationId xmlns:a16="http://schemas.microsoft.com/office/drawing/2014/main" id="{5B2EEC0A-3EFA-7A7C-9D24-A9AAFD07EE0F}"/>
+                <a16:creationId xmlns:a16="http://schemas.microsoft.com/office/drawing/2014/main" id="{B62EDC01-EC4F-BEDC-7426-C76D07DBBBC9}"/>
               </a:ext>
             </a:extLst>
           </p:cNvPr>
@@ -10706,20 +11531,348 @@
               <a:t>マテリアル・方法（</a:t>
             </a:r>
             <a:r>
-              <a:rPr kumimoji="1" lang="en-US" altLang="ja-JP" sz="3600"/>
-              <a:t>JSON</a:t>
+              <a:rPr lang="ja-JP" altLang="en-US" sz="3600"/>
+              <a:t>プロンプト</a:t>
             </a:r>
             <a:r>
               <a:rPr kumimoji="1" lang="ja-JP" altLang="en-US" sz="3600"/>
-              <a:t>形式の例）</a:t>
-            </a:r>
+              <a:t>）</a:t>
+            </a:r>
+          </a:p>
+        </p:txBody>
+      </p:sp>
+      <p:sp>
+        <p:nvSpPr>
+          <p:cNvPr id="3" name="テキスト ボックス 2">
+            <a:extLst>
+              <a:ext uri="{FF2B5EF4-FFF2-40B4-BE49-F238E27FC236}">
+                <a16:creationId xmlns:a16="http://schemas.microsoft.com/office/drawing/2014/main" id="{E338ACB1-AAC0-8369-EA96-CBA6FD444B9D}"/>
+              </a:ext>
+            </a:extLst>
+          </p:cNvPr>
+          <p:cNvSpPr txBox="1"/>
+          <p:nvPr/>
+        </p:nvSpPr>
+        <p:spPr>
+          <a:xfrm>
+            <a:off x="0" y="1720840"/>
+            <a:ext cx="12192000" cy="3416320"/>
+          </a:xfrm>
+          <a:prstGeom prst="rect">
+            <a:avLst/>
+          </a:prstGeom>
+          <a:noFill/>
+        </p:spPr>
+        <p:txBody>
+          <a:bodyPr wrap="square" rtlCol="0">
+            <a:spAutoFit/>
+          </a:bodyPr>
+          <a:lstStyle/>
+          <a:p>
+            <a:r>
+              <a:rPr lang="ja-JP" altLang="en-US"/>
+              <a:t>添付のデータに対して以下の作業を行って下さい。</a:t>
+            </a:r>
+          </a:p>
+          <a:p>
+            <a:r>
+              <a:rPr lang="ja-JP" altLang="en-US"/>
+              <a:t> </a:t>
+            </a:r>
+          </a:p>
+          <a:p>
+            <a:r>
+              <a:rPr lang="ja-JP" altLang="en-US"/>
+              <a:t> </a:t>
+            </a:r>
+            <a:r>
+              <a:rPr lang="en-US" altLang="ja-JP" dirty="0"/>
+              <a:t>- </a:t>
+            </a:r>
+            <a:r>
+              <a:rPr lang="ja-JP" altLang="en-US"/>
+              <a:t>概要 </a:t>
+            </a:r>
+            <a:r>
+              <a:rPr lang="en-US" altLang="ja-JP" dirty="0"/>
+              <a:t>: </a:t>
+            </a:r>
+            <a:r>
+              <a:rPr lang="ja-JP" altLang="en-US"/>
+              <a:t>地名候補を地名であるか判定する。</a:t>
+            </a:r>
+          </a:p>
+          <a:p>
+            <a:r>
+              <a:rPr lang="ja-JP" altLang="en-US"/>
+              <a:t> </a:t>
+            </a:r>
+            <a:r>
+              <a:rPr lang="en-US" altLang="ja-JP" dirty="0"/>
+              <a:t>- </a:t>
+            </a:r>
+            <a:r>
+              <a:rPr lang="ja-JP" altLang="en-US"/>
+              <a:t>入力データ形式 </a:t>
+            </a:r>
+            <a:r>
+              <a:rPr lang="en-US" altLang="ja-JP" dirty="0"/>
+              <a:t>: </a:t>
+            </a:r>
+            <a:r>
+              <a:rPr lang="en" altLang="ja-JP" dirty="0" err="1"/>
+              <a:t>json</a:t>
+            </a:r>
+            <a:r>
+              <a:rPr lang="ja-JP" altLang="en-US"/>
+              <a:t>形式、</a:t>
+            </a:r>
+            <a:r>
+              <a:rPr lang="en-US" altLang="ja-JP" dirty="0"/>
+              <a:t>4 </a:t>
+            </a:r>
+            <a:r>
+              <a:rPr lang="ja-JP" altLang="en-US"/>
+              <a:t>つの要素から成る。各要素はさらに配列である可能性がある。</a:t>
+            </a:r>
+          </a:p>
+          <a:p>
+            <a:r>
+              <a:rPr lang="ja-JP" altLang="en-US"/>
+              <a:t> </a:t>
+            </a:r>
+            <a:r>
+              <a:rPr lang="en-US" altLang="ja-JP" dirty="0"/>
+              <a:t>- </a:t>
+            </a:r>
+            <a:r>
+              <a:rPr lang="ja-JP" altLang="en-US"/>
+              <a:t>入力データの各要素の説明 </a:t>
+            </a:r>
+            <a:r>
+              <a:rPr lang="en-US" altLang="ja-JP" dirty="0"/>
+              <a:t>: </a:t>
+            </a:r>
+          </a:p>
+          <a:p>
+            <a:r>
+              <a:rPr lang="en-US" altLang="ja-JP" dirty="0"/>
+              <a:t>  - </a:t>
+            </a:r>
+            <a:r>
+              <a:rPr lang="ja-JP" altLang="en-US"/>
+              <a:t>第</a:t>
+            </a:r>
+            <a:r>
+              <a:rPr lang="en-US" altLang="ja-JP" dirty="0"/>
+              <a:t>1</a:t>
+            </a:r>
+            <a:r>
+              <a:rPr lang="ja-JP" altLang="en-US"/>
+              <a:t>要素 </a:t>
+            </a:r>
+            <a:r>
+              <a:rPr lang="en-US" altLang="ja-JP" dirty="0"/>
+              <a:t>: </a:t>
+            </a:r>
+            <a:r>
+              <a:rPr lang="ja-JP" altLang="en-US"/>
+              <a:t>無視して良い</a:t>
+            </a:r>
+          </a:p>
+          <a:p>
+            <a:r>
+              <a:rPr lang="ja-JP" altLang="en-US"/>
+              <a:t>  </a:t>
+            </a:r>
+            <a:r>
+              <a:rPr lang="en-US" altLang="ja-JP" dirty="0"/>
+              <a:t>- </a:t>
+            </a:r>
+            <a:r>
+              <a:rPr lang="ja-JP" altLang="en-US"/>
+              <a:t>第</a:t>
+            </a:r>
+            <a:r>
+              <a:rPr lang="en-US" altLang="ja-JP" dirty="0"/>
+              <a:t>2</a:t>
+            </a:r>
+            <a:r>
+              <a:rPr lang="ja-JP" altLang="en-US"/>
+              <a:t>要素 </a:t>
+            </a:r>
+            <a:r>
+              <a:rPr lang="en-US" altLang="ja-JP" dirty="0"/>
+              <a:t>: </a:t>
+            </a:r>
+            <a:r>
+              <a:rPr lang="ja-JP" altLang="en-US"/>
+              <a:t>第</a:t>
+            </a:r>
+            <a:r>
+              <a:rPr lang="en-US" altLang="ja-JP" dirty="0"/>
+              <a:t>4</a:t>
+            </a:r>
+            <a:r>
+              <a:rPr lang="ja-JP" altLang="en-US"/>
+              <a:t>要素から抽出された地名候補</a:t>
+            </a:r>
+          </a:p>
+          <a:p>
+            <a:r>
+              <a:rPr lang="ja-JP" altLang="en-US"/>
+              <a:t>  </a:t>
+            </a:r>
+            <a:r>
+              <a:rPr lang="en-US" altLang="ja-JP" dirty="0"/>
+              <a:t>- </a:t>
+            </a:r>
+            <a:r>
+              <a:rPr lang="ja-JP" altLang="en-US"/>
+              <a:t>第</a:t>
+            </a:r>
+            <a:r>
+              <a:rPr lang="en-US" altLang="ja-JP" dirty="0"/>
+              <a:t>3</a:t>
+            </a:r>
+            <a:r>
+              <a:rPr lang="ja-JP" altLang="en-US"/>
+              <a:t>要素 </a:t>
+            </a:r>
+            <a:r>
+              <a:rPr lang="en-US" altLang="ja-JP" dirty="0"/>
+              <a:t>: </a:t>
+            </a:r>
+            <a:r>
+              <a:rPr lang="ja-JP" altLang="en-US"/>
+              <a:t>無視して良い</a:t>
+            </a:r>
+          </a:p>
+          <a:p>
+            <a:r>
+              <a:rPr lang="ja-JP" altLang="en-US"/>
+              <a:t>  </a:t>
+            </a:r>
+            <a:r>
+              <a:rPr lang="en-US" altLang="ja-JP" dirty="0"/>
+              <a:t>- </a:t>
+            </a:r>
+            <a:r>
+              <a:rPr lang="ja-JP" altLang="en-US"/>
+              <a:t>第</a:t>
+            </a:r>
+            <a:r>
+              <a:rPr lang="en-US" altLang="ja-JP" dirty="0"/>
+              <a:t>4</a:t>
+            </a:r>
+            <a:r>
+              <a:rPr lang="ja-JP" altLang="en-US"/>
+              <a:t>要素 </a:t>
+            </a:r>
+            <a:r>
+              <a:rPr lang="en-US" altLang="ja-JP" dirty="0"/>
+              <a:t>: </a:t>
+            </a:r>
+            <a:r>
+              <a:rPr lang="ja-JP" altLang="en-US"/>
+              <a:t>文章 （配列）</a:t>
+            </a:r>
+          </a:p>
+          <a:p>
+            <a:r>
+              <a:rPr lang="en-US" altLang="ja-JP" dirty="0"/>
+              <a:t>- </a:t>
+            </a:r>
+            <a:r>
+              <a:rPr lang="ja-JP" altLang="en-US"/>
+              <a:t>行ってほしい作業 </a:t>
+            </a:r>
+            <a:r>
+              <a:rPr lang="en-US" altLang="ja-JP" dirty="0"/>
+              <a:t>: </a:t>
+            </a:r>
+            <a:r>
+              <a:rPr lang="en" altLang="ja-JP" dirty="0" err="1"/>
+              <a:t>json</a:t>
+            </a:r>
+            <a:r>
+              <a:rPr lang="ja-JP" altLang="en-US"/>
+              <a:t>の第</a:t>
+            </a:r>
+            <a:r>
+              <a:rPr lang="en-US" altLang="ja-JP" dirty="0"/>
+              <a:t>2</a:t>
+            </a:r>
+            <a:r>
+              <a:rPr lang="ja-JP" altLang="en-US"/>
+              <a:t>要素の各地名候補が地名であるかを、第</a:t>
+            </a:r>
+            <a:r>
+              <a:rPr lang="en-US" altLang="ja-JP" dirty="0"/>
+              <a:t>4</a:t>
+            </a:r>
+            <a:r>
+              <a:rPr lang="ja-JP" altLang="en-US"/>
+              <a:t>要素の文脈から判定してほしい。</a:t>
+            </a:r>
+          </a:p>
+          <a:p>
+            <a:r>
+              <a:rPr lang="en-US" altLang="ja-JP" dirty="0"/>
+              <a:t>- </a:t>
+            </a:r>
+            <a:r>
+              <a:rPr lang="ja-JP" altLang="en-US"/>
+              <a:t>出力データ形式 （判定結果） </a:t>
+            </a:r>
+            <a:r>
+              <a:rPr lang="en-US" altLang="ja-JP" dirty="0"/>
+              <a:t>: </a:t>
+            </a:r>
+            <a:r>
+              <a:rPr lang="ja-JP" altLang="en-US"/>
+              <a:t>第</a:t>
+            </a:r>
+            <a:r>
+              <a:rPr lang="en-US" altLang="ja-JP" dirty="0"/>
+              <a:t>2</a:t>
+            </a:r>
+            <a:r>
+              <a:rPr lang="ja-JP" altLang="en-US"/>
+              <a:t>要素のみを次のように出力する </a:t>
+            </a:r>
+            <a:r>
+              <a:rPr lang="en-US" altLang="ja-JP" dirty="0"/>
+              <a:t>: </a:t>
+            </a:r>
+            <a:r>
+              <a:rPr lang="ja-JP" altLang="en-US"/>
+              <a:t>第</a:t>
+            </a:r>
+            <a:r>
+              <a:rPr lang="en-US" altLang="ja-JP" dirty="0"/>
+              <a:t>2</a:t>
+            </a:r>
+            <a:r>
+              <a:rPr lang="ja-JP" altLang="en-US"/>
+              <a:t>要素の地名候補が地名であればそのまま残し、そうでない場合は</a:t>
+            </a:r>
+            <a:r>
+              <a:rPr lang="en-US" altLang="ja-JP" dirty="0"/>
+              <a:t>0</a:t>
+            </a:r>
+            <a:r>
+              <a:rPr lang="ja-JP" altLang="en-US"/>
+              <a:t>に置きかえたもの。</a:t>
+            </a:r>
+            <a:endParaRPr kumimoji="1" lang="ja-JP" altLang="en-US"/>
           </a:p>
         </p:txBody>
       </p:sp>
     </p:spTree>
     <p:extLst>
       <p:ext uri="{BB962C8B-B14F-4D97-AF65-F5344CB8AC3E}">
-        <p14:creationId xmlns:p14="http://schemas.microsoft.com/office/powerpoint/2010/main" val="2951289915"/>
+        <p14:creationId xmlns:p14="http://schemas.microsoft.com/office/powerpoint/2010/main" val="1609540031"/>
       </p:ext>
     </p:extLst>
   </p:cSld>

--- a/jsik2026taikai.pptx
+++ b/jsik2026taikai.pptx
@@ -17,6 +17,9 @@
     <p:sldId id="308" r:id="rId11"/>
     <p:sldId id="310" r:id="rId12"/>
     <p:sldId id="312" r:id="rId13"/>
+    <p:sldId id="314" r:id="rId14"/>
+    <p:sldId id="315" r:id="rId15"/>
+    <p:sldId id="316" r:id="rId16"/>
   </p:sldIdLst>
   <p:sldSz cx="12192000" cy="6858000"/>
   <p:notesSz cx="6858000" cy="9144000"/>
@@ -5148,47 +5151,6 @@
           </a:p>
         </p:txBody>
       </p:sp>
-      <p:cxnSp>
-        <p:nvCxnSpPr>
-          <p:cNvPr id="9" name="直線コネクタ 8">
-            <a:extLst>
-              <a:ext uri="{FF2B5EF4-FFF2-40B4-BE49-F238E27FC236}">
-                <a16:creationId xmlns:a16="http://schemas.microsoft.com/office/drawing/2014/main" id="{F970DDBE-3199-7B47-68A9-2540185EDC56}"/>
-              </a:ext>
-            </a:extLst>
-          </p:cNvPr>
-          <p:cNvCxnSpPr/>
-          <p:nvPr/>
-        </p:nvCxnSpPr>
-        <p:spPr>
-          <a:xfrm>
-            <a:off x="301336" y="2119745"/>
-            <a:ext cx="11523519" cy="0"/>
-          </a:xfrm>
-          <a:prstGeom prst="line">
-            <a:avLst/>
-          </a:prstGeom>
-          <a:ln w="12700">
-            <a:solidFill>
-              <a:schemeClr val="tx1"/>
-            </a:solidFill>
-          </a:ln>
-        </p:spPr>
-        <p:style>
-          <a:lnRef idx="2">
-            <a:schemeClr val="accent1"/>
-          </a:lnRef>
-          <a:fillRef idx="0">
-            <a:schemeClr val="accent1"/>
-          </a:fillRef>
-          <a:effectRef idx="1">
-            <a:schemeClr val="accent1"/>
-          </a:effectRef>
-          <a:fontRef idx="minor">
-            <a:schemeClr val="tx1"/>
-          </a:fontRef>
-        </p:style>
-      </p:cxnSp>
     </p:spTree>
     <p:extLst>
       <p:ext uri="{BB962C8B-B14F-4D97-AF65-F5344CB8AC3E}">
@@ -5262,7 +5224,308 @@
               <a:rPr lang="ja-JP" altLang="en-US" sz="3600"/>
               <a:t>結果</a:t>
             </a:r>
+            <a:r>
+              <a:rPr lang="en-US" altLang="ja-JP" sz="3600" dirty="0">
+                <a:sym typeface="Wingdings" pitchFamily="2" charset="2"/>
+              </a:rPr>
+              <a:t>(</a:t>
+            </a:r>
+            <a:r>
+              <a:rPr lang="ja-JP" altLang="en-US" sz="3600">
+                <a:sym typeface="Wingdings" pitchFamily="2" charset="2"/>
+              </a:rPr>
+              <a:t>出力形式</a:t>
+            </a:r>
+            <a:r>
+              <a:rPr lang="en-US" altLang="ja-JP" sz="3600" dirty="0">
+                <a:sym typeface="Wingdings" pitchFamily="2" charset="2"/>
+              </a:rPr>
+              <a:t>)</a:t>
+            </a:r>
             <a:endParaRPr kumimoji="1" lang="ja-JP" altLang="en-US" sz="3600"/>
+          </a:p>
+        </p:txBody>
+      </p:sp>
+      <p:sp>
+        <p:nvSpPr>
+          <p:cNvPr id="3" name="テキスト ボックス 2">
+            <a:extLst>
+              <a:ext uri="{FF2B5EF4-FFF2-40B4-BE49-F238E27FC236}">
+                <a16:creationId xmlns:a16="http://schemas.microsoft.com/office/drawing/2014/main" id="{894164B1-D474-E3FC-7257-909A1AB306A4}"/>
+              </a:ext>
+            </a:extLst>
+          </p:cNvPr>
+          <p:cNvSpPr txBox="1"/>
+          <p:nvPr/>
+        </p:nvSpPr>
+        <p:spPr>
+          <a:xfrm>
+            <a:off x="0" y="659218"/>
+            <a:ext cx="415498" cy="369332"/>
+          </a:xfrm>
+          <a:prstGeom prst="rect">
+            <a:avLst/>
+          </a:prstGeom>
+          <a:noFill/>
+        </p:spPr>
+        <p:txBody>
+          <a:bodyPr wrap="none" rtlCol="0">
+            <a:spAutoFit/>
+          </a:bodyPr>
+          <a:lstStyle/>
+          <a:p>
+            <a:r>
+              <a:rPr kumimoji="1" lang="ja-JP" altLang="en-US"/>
+              <a:t>例</a:t>
+            </a:r>
+          </a:p>
+        </p:txBody>
+      </p:sp>
+      <p:sp>
+        <p:nvSpPr>
+          <p:cNvPr id="4" name="テキスト ボックス 3">
+            <a:extLst>
+              <a:ext uri="{FF2B5EF4-FFF2-40B4-BE49-F238E27FC236}">
+                <a16:creationId xmlns:a16="http://schemas.microsoft.com/office/drawing/2014/main" id="{FC06577E-2F77-7735-50C1-68CC47C14494}"/>
+              </a:ext>
+            </a:extLst>
+          </p:cNvPr>
+          <p:cNvSpPr txBox="1"/>
+          <p:nvPr/>
+        </p:nvSpPr>
+        <p:spPr>
+          <a:xfrm>
+            <a:off x="415498" y="1158947"/>
+            <a:ext cx="401072" cy="369332"/>
+          </a:xfrm>
+          <a:prstGeom prst="rect">
+            <a:avLst/>
+          </a:prstGeom>
+          <a:noFill/>
+        </p:spPr>
+        <p:txBody>
+          <a:bodyPr wrap="none" rtlCol="0">
+            <a:spAutoFit/>
+          </a:bodyPr>
+          <a:lstStyle/>
+          <a:p>
+            <a:r>
+              <a:rPr kumimoji="1" lang="en-US" altLang="ja-JP" dirty="0"/>
+              <a:t>AI</a:t>
+            </a:r>
+            <a:endParaRPr kumimoji="1" lang="ja-JP" altLang="en-US"/>
+          </a:p>
+        </p:txBody>
+      </p:sp>
+      <p:sp>
+        <p:nvSpPr>
+          <p:cNvPr id="5" name="テキスト ボックス 4">
+            <a:extLst>
+              <a:ext uri="{FF2B5EF4-FFF2-40B4-BE49-F238E27FC236}">
+                <a16:creationId xmlns:a16="http://schemas.microsoft.com/office/drawing/2014/main" id="{3A73C75A-2EF1-6DA6-18DF-828AF9836FCC}"/>
+              </a:ext>
+            </a:extLst>
+          </p:cNvPr>
+          <p:cNvSpPr txBox="1"/>
+          <p:nvPr/>
+        </p:nvSpPr>
+        <p:spPr>
+          <a:xfrm>
+            <a:off x="401072" y="2181075"/>
+            <a:ext cx="415498" cy="369332"/>
+          </a:xfrm>
+          <a:prstGeom prst="rect">
+            <a:avLst/>
+          </a:prstGeom>
+          <a:noFill/>
+        </p:spPr>
+        <p:txBody>
+          <a:bodyPr wrap="none" rtlCol="0">
+            <a:spAutoFit/>
+          </a:bodyPr>
+          <a:lstStyle/>
+          <a:p>
+            <a:r>
+              <a:rPr kumimoji="1" lang="ja-JP" altLang="en-US"/>
+              <a:t>人</a:t>
+            </a:r>
+          </a:p>
+        </p:txBody>
+      </p:sp>
+      <p:sp>
+        <p:nvSpPr>
+          <p:cNvPr id="6" name="テキスト ボックス 5">
+            <a:extLst>
+              <a:ext uri="{FF2B5EF4-FFF2-40B4-BE49-F238E27FC236}">
+                <a16:creationId xmlns:a16="http://schemas.microsoft.com/office/drawing/2014/main" id="{14B1E202-4DFE-F8A0-1B36-6DF757469BAB}"/>
+              </a:ext>
+            </a:extLst>
+          </p:cNvPr>
+          <p:cNvSpPr txBox="1"/>
+          <p:nvPr/>
+        </p:nvSpPr>
+        <p:spPr>
+          <a:xfrm>
+            <a:off x="0" y="3518266"/>
+            <a:ext cx="1800493" cy="369332"/>
+          </a:xfrm>
+          <a:prstGeom prst="rect">
+            <a:avLst/>
+          </a:prstGeom>
+          <a:noFill/>
+        </p:spPr>
+        <p:txBody>
+          <a:bodyPr wrap="none" rtlCol="0">
+            <a:spAutoFit/>
+          </a:bodyPr>
+          <a:lstStyle/>
+          <a:p>
+            <a:r>
+              <a:rPr kumimoji="1" lang="ja-JP" altLang="en-US"/>
+              <a:t>正しい</a:t>
+            </a:r>
+            <a:r>
+              <a:rPr lang="ja-JP" altLang="en-US"/>
+              <a:t>出力</a:t>
+            </a:r>
+            <a:r>
+              <a:rPr kumimoji="1" lang="ja-JP" altLang="en-US"/>
+              <a:t>形式</a:t>
+            </a:r>
+          </a:p>
+        </p:txBody>
+      </p:sp>
+      <p:pic>
+        <p:nvPicPr>
+          <p:cNvPr id="8" name="図 7" descr="テーブル&#10;&#10;AI 生成コンテンツは誤りを含む可能性があります。">
+            <a:extLst>
+              <a:ext uri="{FF2B5EF4-FFF2-40B4-BE49-F238E27FC236}">
+                <a16:creationId xmlns:a16="http://schemas.microsoft.com/office/drawing/2014/main" id="{D72BBDDA-5F1E-2F80-C09A-5478507D6089}"/>
+              </a:ext>
+            </a:extLst>
+          </p:cNvPr>
+          <p:cNvPicPr>
+            <a:picLocks noChangeAspect="1"/>
+          </p:cNvPicPr>
+          <p:nvPr/>
+        </p:nvPicPr>
+        <p:blipFill>
+          <a:blip r:embed="rId2"/>
+          <a:stretch>
+            <a:fillRect/>
+          </a:stretch>
+        </p:blipFill>
+        <p:spPr>
+          <a:xfrm>
+            <a:off x="1819734" y="4285032"/>
+            <a:ext cx="3448883" cy="2152697"/>
+          </a:xfrm>
+          <a:prstGeom prst="rect">
+            <a:avLst/>
+          </a:prstGeom>
+        </p:spPr>
+      </p:pic>
+      <p:sp>
+        <p:nvSpPr>
+          <p:cNvPr id="9" name="テキスト ボックス 8">
+            <a:extLst>
+              <a:ext uri="{FF2B5EF4-FFF2-40B4-BE49-F238E27FC236}">
+                <a16:creationId xmlns:a16="http://schemas.microsoft.com/office/drawing/2014/main" id="{4A694241-9C1C-E104-F33E-F94EE9286E7C}"/>
+              </a:ext>
+            </a:extLst>
+          </p:cNvPr>
+          <p:cNvSpPr txBox="1"/>
+          <p:nvPr/>
+        </p:nvSpPr>
+        <p:spPr>
+          <a:xfrm>
+            <a:off x="5629739" y="5381479"/>
+            <a:ext cx="5328703" cy="369332"/>
+          </a:xfrm>
+          <a:prstGeom prst="rect">
+            <a:avLst/>
+          </a:prstGeom>
+          <a:noFill/>
+        </p:spPr>
+        <p:txBody>
+          <a:bodyPr wrap="none" rtlCol="0">
+            <a:spAutoFit/>
+          </a:bodyPr>
+          <a:lstStyle/>
+          <a:p>
+            <a:r>
+              <a:rPr lang="en-US" altLang="ja-JP" dirty="0"/>
+              <a:t>2</a:t>
+            </a:r>
+            <a:r>
+              <a:rPr kumimoji="1" lang="en-US" altLang="ja-JP" dirty="0"/>
+              <a:t> AI</a:t>
+            </a:r>
+            <a:r>
+              <a:rPr kumimoji="1" lang="ja-JP" altLang="en-US"/>
+              <a:t>、</a:t>
+            </a:r>
+            <a:r>
+              <a:rPr lang="en-US" altLang="ja-JP" dirty="0"/>
+              <a:t>3</a:t>
+            </a:r>
+            <a:r>
+              <a:rPr kumimoji="1" lang="en-US" altLang="ja-JP" dirty="0"/>
+              <a:t> Humans</a:t>
+            </a:r>
+            <a:r>
+              <a:rPr kumimoji="1" lang="ja-JP" altLang="en-US"/>
+              <a:t>ですべて正しい出力形式</a:t>
+            </a:r>
+            <a:r>
+              <a:rPr kumimoji="1" lang="en-US" altLang="ja-JP" dirty="0"/>
+              <a:t>: 99/200</a:t>
+            </a:r>
+            <a:endParaRPr kumimoji="1" lang="ja-JP" altLang="en-US"/>
+          </a:p>
+        </p:txBody>
+      </p:sp>
+      <p:sp>
+        <p:nvSpPr>
+          <p:cNvPr id="10" name="右中かっこ 9">
+            <a:extLst>
+              <a:ext uri="{FF2B5EF4-FFF2-40B4-BE49-F238E27FC236}">
+                <a16:creationId xmlns:a16="http://schemas.microsoft.com/office/drawing/2014/main" id="{886B1773-12DE-15E2-D36D-4FE5087320A8}"/>
+              </a:ext>
+            </a:extLst>
+          </p:cNvPr>
+          <p:cNvSpPr/>
+          <p:nvPr/>
+        </p:nvSpPr>
+        <p:spPr>
+          <a:xfrm>
+            <a:off x="5369434" y="4784652"/>
+            <a:ext cx="159488" cy="1562986"/>
+          </a:xfrm>
+          <a:prstGeom prst="rightBrace">
+            <a:avLst/>
+          </a:prstGeom>
+        </p:spPr>
+        <p:style>
+          <a:lnRef idx="2">
+            <a:schemeClr val="dk1"/>
+          </a:lnRef>
+          <a:fillRef idx="0">
+            <a:schemeClr val="dk1"/>
+          </a:fillRef>
+          <a:effectRef idx="1">
+            <a:schemeClr val="dk1"/>
+          </a:effectRef>
+          <a:fontRef idx="minor">
+            <a:schemeClr val="tx1"/>
+          </a:fontRef>
+        </p:style>
+        <p:txBody>
+          <a:bodyPr rtlCol="0" anchor="ctr"/>
+          <a:lstStyle/>
+          <a:p>
+            <a:pPr algn="ctr"/>
+            <a:endParaRPr kumimoji="1" lang="ja-JP" altLang="en-US"/>
           </a:p>
         </p:txBody>
       </p:sp>
@@ -5270,6 +5533,737 @@
     <p:extLst>
       <p:ext uri="{BB962C8B-B14F-4D97-AF65-F5344CB8AC3E}">
         <p14:creationId xmlns:p14="http://schemas.microsoft.com/office/powerpoint/2010/main" val="2630796194"/>
+      </p:ext>
+    </p:extLst>
+  </p:cSld>
+  <p:clrMapOvr>
+    <a:masterClrMapping/>
+  </p:clrMapOvr>
+</p:sld>
+</file>
+
+<file path=ppt/slides/slide13.xml><?xml version="1.0" encoding="utf-8"?>
+<p:sld xmlns:a="http://schemas.openxmlformats.org/drawingml/2006/main" xmlns:r="http://schemas.openxmlformats.org/officeDocument/2006/relationships" xmlns:p="http://schemas.openxmlformats.org/presentationml/2006/main">
+  <p:cSld>
+    <p:spTree>
+      <p:nvGrpSpPr>
+        <p:cNvPr id="1" name="">
+          <a:extLst>
+            <a:ext uri="{FF2B5EF4-FFF2-40B4-BE49-F238E27FC236}">
+              <a16:creationId xmlns:a16="http://schemas.microsoft.com/office/drawing/2014/main" id="{56EE6244-9A34-EC2A-4310-7E87182039BA}"/>
+            </a:ext>
+          </a:extLst>
+        </p:cNvPr>
+        <p:cNvGrpSpPr/>
+        <p:nvPr/>
+      </p:nvGrpSpPr>
+      <p:grpSpPr>
+        <a:xfrm>
+          <a:off x="0" y="0"/>
+          <a:ext cx="0" cy="0"/>
+          <a:chOff x="0" y="0"/>
+          <a:chExt cx="0" cy="0"/>
+        </a:xfrm>
+      </p:grpSpPr>
+      <p:sp>
+        <p:nvSpPr>
+          <p:cNvPr id="2" name="タイトル 1">
+            <a:extLst>
+              <a:ext uri="{FF2B5EF4-FFF2-40B4-BE49-F238E27FC236}">
+                <a16:creationId xmlns:a16="http://schemas.microsoft.com/office/drawing/2014/main" id="{40212067-B735-0117-8F23-1F98EC4ED3CF}"/>
+              </a:ext>
+            </a:extLst>
+          </p:cNvPr>
+          <p:cNvSpPr>
+            <a:spLocks noGrp="1"/>
+          </p:cNvSpPr>
+          <p:nvPr>
+            <p:ph type="title"/>
+          </p:nvPr>
+        </p:nvSpPr>
+        <p:spPr>
+          <a:xfrm>
+            <a:off x="0" y="1"/>
+            <a:ext cx="12192000" cy="577516"/>
+          </a:xfrm>
+          <a:solidFill>
+            <a:schemeClr val="bg1">
+              <a:lumMod val="85000"/>
+            </a:schemeClr>
+          </a:solidFill>
+        </p:spPr>
+        <p:txBody>
+          <a:bodyPr>
+            <a:normAutofit fontScale="90000"/>
+          </a:bodyPr>
+          <a:lstStyle/>
+          <a:p>
+            <a:r>
+              <a:rPr lang="ja-JP" altLang="en-US" sz="3600"/>
+              <a:t>結果</a:t>
+            </a:r>
+            <a:r>
+              <a:rPr lang="en-US" altLang="ja-JP" sz="3600" dirty="0">
+                <a:sym typeface="Wingdings" pitchFamily="2" charset="2"/>
+              </a:rPr>
+              <a:t>(</a:t>
+            </a:r>
+            <a:r>
+              <a:rPr lang="ja-JP" altLang="en-US" sz="3600">
+                <a:sym typeface="Wingdings" pitchFamily="2" charset="2"/>
+              </a:rPr>
+              <a:t>判定結果の差異と修正数</a:t>
+            </a:r>
+            <a:r>
+              <a:rPr lang="en-US" altLang="ja-JP" sz="3600" dirty="0">
+                <a:sym typeface="Wingdings" pitchFamily="2" charset="2"/>
+              </a:rPr>
+              <a:t>)</a:t>
+            </a:r>
+            <a:endParaRPr kumimoji="1" lang="ja-JP" altLang="en-US" sz="3600"/>
+          </a:p>
+        </p:txBody>
+      </p:sp>
+      <p:sp>
+        <p:nvSpPr>
+          <p:cNvPr id="6" name="テキスト ボックス 5">
+            <a:extLst>
+              <a:ext uri="{FF2B5EF4-FFF2-40B4-BE49-F238E27FC236}">
+                <a16:creationId xmlns:a16="http://schemas.microsoft.com/office/drawing/2014/main" id="{2D787952-6C23-B1ED-AF55-06A1B7C1080B}"/>
+              </a:ext>
+            </a:extLst>
+          </p:cNvPr>
+          <p:cNvSpPr txBox="1"/>
+          <p:nvPr/>
+        </p:nvSpPr>
+        <p:spPr>
+          <a:xfrm>
+            <a:off x="0" y="577517"/>
+            <a:ext cx="1107996" cy="369332"/>
+          </a:xfrm>
+          <a:prstGeom prst="rect">
+            <a:avLst/>
+          </a:prstGeom>
+          <a:noFill/>
+        </p:spPr>
+        <p:txBody>
+          <a:bodyPr wrap="none" rtlCol="0">
+            <a:spAutoFit/>
+          </a:bodyPr>
+          <a:lstStyle/>
+          <a:p>
+            <a:r>
+              <a:rPr kumimoji="1" lang="ja-JP" altLang="en-US"/>
+              <a:t>距離行列</a:t>
+            </a:r>
+          </a:p>
+        </p:txBody>
+      </p:sp>
+      <p:sp>
+        <p:nvSpPr>
+          <p:cNvPr id="7" name="テキスト ボックス 6">
+            <a:extLst>
+              <a:ext uri="{FF2B5EF4-FFF2-40B4-BE49-F238E27FC236}">
+                <a16:creationId xmlns:a16="http://schemas.microsoft.com/office/drawing/2014/main" id="{0E23C7AA-B283-DF52-2C4B-A2EAADC313FA}"/>
+              </a:ext>
+            </a:extLst>
+          </p:cNvPr>
+          <p:cNvSpPr txBox="1"/>
+          <p:nvPr/>
+        </p:nvSpPr>
+        <p:spPr>
+          <a:xfrm>
+            <a:off x="5784111" y="580876"/>
+            <a:ext cx="1800493" cy="369332"/>
+          </a:xfrm>
+          <a:prstGeom prst="rect">
+            <a:avLst/>
+          </a:prstGeom>
+          <a:noFill/>
+        </p:spPr>
+        <p:txBody>
+          <a:bodyPr wrap="none" rtlCol="0">
+            <a:spAutoFit/>
+          </a:bodyPr>
+          <a:lstStyle/>
+          <a:p>
+            <a:r>
+              <a:rPr kumimoji="1" lang="ja-JP" altLang="en-US"/>
+              <a:t>デンドログラム</a:t>
+            </a:r>
+          </a:p>
+        </p:txBody>
+      </p:sp>
+      <p:sp>
+        <p:nvSpPr>
+          <p:cNvPr id="8" name="テキスト ボックス 7">
+            <a:extLst>
+              <a:ext uri="{FF2B5EF4-FFF2-40B4-BE49-F238E27FC236}">
+                <a16:creationId xmlns:a16="http://schemas.microsoft.com/office/drawing/2014/main" id="{51B18238-1C13-9BE2-E616-2968323132CF}"/>
+              </a:ext>
+            </a:extLst>
+          </p:cNvPr>
+          <p:cNvSpPr txBox="1"/>
+          <p:nvPr/>
+        </p:nvSpPr>
+        <p:spPr>
+          <a:xfrm>
+            <a:off x="0" y="4120115"/>
+            <a:ext cx="877163" cy="369332"/>
+          </a:xfrm>
+          <a:prstGeom prst="rect">
+            <a:avLst/>
+          </a:prstGeom>
+          <a:noFill/>
+        </p:spPr>
+        <p:txBody>
+          <a:bodyPr wrap="none" rtlCol="0">
+            <a:spAutoFit/>
+          </a:bodyPr>
+          <a:lstStyle/>
+          <a:p>
+            <a:r>
+              <a:rPr kumimoji="1" lang="ja-JP" altLang="en-US"/>
+              <a:t>修正数</a:t>
+            </a:r>
+          </a:p>
+        </p:txBody>
+      </p:sp>
+      <p:pic>
+        <p:nvPicPr>
+          <p:cNvPr id="10" name="図 9">
+            <a:extLst>
+              <a:ext uri="{FF2B5EF4-FFF2-40B4-BE49-F238E27FC236}">
+                <a16:creationId xmlns:a16="http://schemas.microsoft.com/office/drawing/2014/main" id="{AAE4ACF4-F71B-20D7-2C3B-A453526A7DD4}"/>
+              </a:ext>
+            </a:extLst>
+          </p:cNvPr>
+          <p:cNvPicPr>
+            <a:picLocks noChangeAspect="1"/>
+          </p:cNvPicPr>
+          <p:nvPr/>
+        </p:nvPicPr>
+        <p:blipFill>
+          <a:blip r:embed="rId2"/>
+          <a:stretch>
+            <a:fillRect/>
+          </a:stretch>
+        </p:blipFill>
+        <p:spPr>
+          <a:xfrm>
+            <a:off x="712323" y="4720854"/>
+            <a:ext cx="4726608" cy="499729"/>
+          </a:xfrm>
+          <a:prstGeom prst="rect">
+            <a:avLst/>
+          </a:prstGeom>
+        </p:spPr>
+      </p:pic>
+      <p:pic>
+        <p:nvPicPr>
+          <p:cNvPr id="12" name="図 11" descr="メーター, 時計 が含まれている画像&#10;&#10;AI 生成コンテンツは誤りを含む可能性があります。">
+            <a:extLst>
+              <a:ext uri="{FF2B5EF4-FFF2-40B4-BE49-F238E27FC236}">
+                <a16:creationId xmlns:a16="http://schemas.microsoft.com/office/drawing/2014/main" id="{2B88651D-097E-DED4-A318-74896D807C73}"/>
+              </a:ext>
+            </a:extLst>
+          </p:cNvPr>
+          <p:cNvPicPr>
+            <a:picLocks noChangeAspect="1"/>
+          </p:cNvPicPr>
+          <p:nvPr/>
+        </p:nvPicPr>
+        <p:blipFill>
+          <a:blip r:embed="rId3"/>
+          <a:stretch>
+            <a:fillRect/>
+          </a:stretch>
+        </p:blipFill>
+        <p:spPr>
+          <a:xfrm>
+            <a:off x="712323" y="1416023"/>
+            <a:ext cx="4725492" cy="1888813"/>
+          </a:xfrm>
+          <a:prstGeom prst="rect">
+            <a:avLst/>
+          </a:prstGeom>
+        </p:spPr>
+      </p:pic>
+      <p:pic>
+        <p:nvPicPr>
+          <p:cNvPr id="14" name="図 13" descr="グラフ, 箱ひげ図&#10;&#10;AI 生成コンテンツは誤りを含む可能性があります。">
+            <a:extLst>
+              <a:ext uri="{FF2B5EF4-FFF2-40B4-BE49-F238E27FC236}">
+                <a16:creationId xmlns:a16="http://schemas.microsoft.com/office/drawing/2014/main" id="{77269A51-CD74-5EDD-F0E4-05EA8C6D3257}"/>
+              </a:ext>
+            </a:extLst>
+          </p:cNvPr>
+          <p:cNvPicPr>
+            <a:picLocks noChangeAspect="1"/>
+          </p:cNvPicPr>
+          <p:nvPr/>
+        </p:nvPicPr>
+        <p:blipFill>
+          <a:blip r:embed="rId4"/>
+          <a:stretch>
+            <a:fillRect/>
+          </a:stretch>
+        </p:blipFill>
+        <p:spPr>
+          <a:xfrm>
+            <a:off x="6096000" y="1416023"/>
+            <a:ext cx="5021432" cy="3560014"/>
+          </a:xfrm>
+          <a:prstGeom prst="rect">
+            <a:avLst/>
+          </a:prstGeom>
+        </p:spPr>
+      </p:pic>
+      <p:sp>
+        <p:nvSpPr>
+          <p:cNvPr id="15" name="テキスト ボックス 14">
+            <a:extLst>
+              <a:ext uri="{FF2B5EF4-FFF2-40B4-BE49-F238E27FC236}">
+                <a16:creationId xmlns:a16="http://schemas.microsoft.com/office/drawing/2014/main" id="{BB282FCA-EF3C-B3E0-9815-A27DC76DE8B9}"/>
+              </a:ext>
+            </a:extLst>
+          </p:cNvPr>
+          <p:cNvSpPr txBox="1"/>
+          <p:nvPr/>
+        </p:nvSpPr>
+        <p:spPr>
+          <a:xfrm>
+            <a:off x="0" y="5791316"/>
+            <a:ext cx="11085086" cy="369332"/>
+          </a:xfrm>
+          <a:prstGeom prst="rect">
+            <a:avLst/>
+          </a:prstGeom>
+          <a:noFill/>
+        </p:spPr>
+        <p:txBody>
+          <a:bodyPr wrap="none" rtlCol="0">
+            <a:spAutoFit/>
+          </a:bodyPr>
+          <a:lstStyle/>
+          <a:p>
+            <a:r>
+              <a:rPr kumimoji="1" lang="en-US" altLang="ja-JP" dirty="0"/>
+              <a:t>※</a:t>
+            </a:r>
+            <a:r>
+              <a:rPr kumimoji="1" lang="ja-JP" altLang="en-US"/>
+              <a:t>距離行列の</a:t>
+            </a:r>
+            <a:r>
+              <a:rPr kumimoji="1" lang="en-US" altLang="ja-JP" dirty="0"/>
+              <a:t>1</a:t>
+            </a:r>
+            <a:r>
+              <a:rPr lang="ja-JP" altLang="en-US"/>
+              <a:t>行目と修正数は同じになるはずであるが異なっている</a:t>
+            </a:r>
+            <a:r>
+              <a:rPr lang="en-US" altLang="ja-JP" dirty="0"/>
+              <a:t> -&gt; AI</a:t>
+            </a:r>
+            <a:r>
+              <a:rPr lang="ja-JP" altLang="en-US"/>
+              <a:t>の地名出力が正しくない可能性</a:t>
+            </a:r>
+            <a:endParaRPr kumimoji="1" lang="ja-JP" altLang="en-US"/>
+          </a:p>
+        </p:txBody>
+      </p:sp>
+    </p:spTree>
+    <p:extLst>
+      <p:ext uri="{BB962C8B-B14F-4D97-AF65-F5344CB8AC3E}">
+        <p14:creationId xmlns:p14="http://schemas.microsoft.com/office/powerpoint/2010/main" val="2745369914"/>
+      </p:ext>
+    </p:extLst>
+  </p:cSld>
+  <p:clrMapOvr>
+    <a:masterClrMapping/>
+  </p:clrMapOvr>
+</p:sld>
+</file>
+
+<file path=ppt/slides/slide14.xml><?xml version="1.0" encoding="utf-8"?>
+<p:sld xmlns:a="http://schemas.openxmlformats.org/drawingml/2006/main" xmlns:r="http://schemas.openxmlformats.org/officeDocument/2006/relationships" xmlns:p="http://schemas.openxmlformats.org/presentationml/2006/main">
+  <p:cSld>
+    <p:spTree>
+      <p:nvGrpSpPr>
+        <p:cNvPr id="1" name="">
+          <a:extLst>
+            <a:ext uri="{FF2B5EF4-FFF2-40B4-BE49-F238E27FC236}">
+              <a16:creationId xmlns:a16="http://schemas.microsoft.com/office/drawing/2014/main" id="{AED8D62E-7672-10C0-1DEC-EDB2FF491E46}"/>
+            </a:ext>
+          </a:extLst>
+        </p:cNvPr>
+        <p:cNvGrpSpPr/>
+        <p:nvPr/>
+      </p:nvGrpSpPr>
+      <p:grpSpPr>
+        <a:xfrm>
+          <a:off x="0" y="0"/>
+          <a:ext cx="0" cy="0"/>
+          <a:chOff x="0" y="0"/>
+          <a:chExt cx="0" cy="0"/>
+        </a:xfrm>
+      </p:grpSpPr>
+      <p:sp>
+        <p:nvSpPr>
+          <p:cNvPr id="2" name="タイトル 1">
+            <a:extLst>
+              <a:ext uri="{FF2B5EF4-FFF2-40B4-BE49-F238E27FC236}">
+                <a16:creationId xmlns:a16="http://schemas.microsoft.com/office/drawing/2014/main" id="{77F84360-FCF2-0E3F-4081-10F21F6C268F}"/>
+              </a:ext>
+            </a:extLst>
+          </p:cNvPr>
+          <p:cNvSpPr>
+            <a:spLocks noGrp="1"/>
+          </p:cNvSpPr>
+          <p:nvPr>
+            <p:ph type="title"/>
+          </p:nvPr>
+        </p:nvSpPr>
+        <p:spPr>
+          <a:xfrm>
+            <a:off x="0" y="1"/>
+            <a:ext cx="12192000" cy="577516"/>
+          </a:xfrm>
+          <a:solidFill>
+            <a:schemeClr val="bg1">
+              <a:lumMod val="85000"/>
+            </a:schemeClr>
+          </a:solidFill>
+        </p:spPr>
+        <p:txBody>
+          <a:bodyPr>
+            <a:normAutofit fontScale="90000"/>
+          </a:bodyPr>
+          <a:lstStyle/>
+          <a:p>
+            <a:r>
+              <a:rPr lang="ja-JP" altLang="en-US" sz="3600"/>
+              <a:t>結果</a:t>
+            </a:r>
+            <a:r>
+              <a:rPr lang="en-US" altLang="ja-JP" sz="3600" dirty="0">
+                <a:sym typeface="Wingdings" pitchFamily="2" charset="2"/>
+              </a:rPr>
+              <a:t>(</a:t>
+            </a:r>
+            <a:r>
+              <a:rPr lang="ja-JP" altLang="en-US" sz="3600">
+                <a:sym typeface="Wingdings" pitchFamily="2" charset="2"/>
+              </a:rPr>
+              <a:t>修正の程度</a:t>
+            </a:r>
+            <a:r>
+              <a:rPr lang="en-US" altLang="ja-JP" sz="3600" dirty="0">
+                <a:sym typeface="Wingdings" pitchFamily="2" charset="2"/>
+              </a:rPr>
+              <a:t>)</a:t>
+            </a:r>
+            <a:endParaRPr kumimoji="1" lang="ja-JP" altLang="en-US" sz="3600"/>
+          </a:p>
+        </p:txBody>
+      </p:sp>
+      <p:sp>
+        <p:nvSpPr>
+          <p:cNvPr id="6" name="テキスト ボックス 5">
+            <a:extLst>
+              <a:ext uri="{FF2B5EF4-FFF2-40B4-BE49-F238E27FC236}">
+                <a16:creationId xmlns:a16="http://schemas.microsoft.com/office/drawing/2014/main" id="{AAB8FA77-ECE3-FA99-0528-781EEFE280EF}"/>
+              </a:ext>
+            </a:extLst>
+          </p:cNvPr>
+          <p:cNvSpPr txBox="1"/>
+          <p:nvPr/>
+        </p:nvSpPr>
+        <p:spPr>
+          <a:xfrm>
+            <a:off x="6096000" y="591508"/>
+            <a:ext cx="5006499" cy="369332"/>
+          </a:xfrm>
+          <a:prstGeom prst="rect">
+            <a:avLst/>
+          </a:prstGeom>
+          <a:noFill/>
+        </p:spPr>
+        <p:txBody>
+          <a:bodyPr wrap="none" rtlCol="0">
+            <a:spAutoFit/>
+          </a:bodyPr>
+          <a:lstStyle/>
+          <a:p>
+            <a:r>
+              <a:rPr lang="ja-JP" altLang="en-US"/>
+              <a:t>大学間の修正の程度</a:t>
+            </a:r>
+            <a:r>
+              <a:rPr lang="en-US" altLang="ja-JP" dirty="0"/>
+              <a:t>(1</a:t>
+            </a:r>
+            <a:r>
+              <a:rPr lang="ja-JP" altLang="en-US"/>
+              <a:t>報告書あたり平均</a:t>
+            </a:r>
+            <a:r>
+              <a:rPr lang="en-US" altLang="ja-JP" dirty="0"/>
+              <a:t>4</a:t>
+            </a:r>
+            <a:r>
+              <a:rPr lang="ja-JP" altLang="en-US"/>
+              <a:t>箇所</a:t>
+            </a:r>
+            <a:r>
+              <a:rPr lang="en-US" altLang="ja-JP" dirty="0"/>
+              <a:t>)</a:t>
+            </a:r>
+            <a:endParaRPr kumimoji="1" lang="ja-JP" altLang="en-US"/>
+          </a:p>
+        </p:txBody>
+      </p:sp>
+      <p:pic>
+        <p:nvPicPr>
+          <p:cNvPr id="4" name="図 3" descr="グラフ, ヒストグラム&#10;&#10;AI 生成コンテンツは誤りを含む可能性があります。">
+            <a:extLst>
+              <a:ext uri="{FF2B5EF4-FFF2-40B4-BE49-F238E27FC236}">
+                <a16:creationId xmlns:a16="http://schemas.microsoft.com/office/drawing/2014/main" id="{94BDDD15-C338-A91B-1AF5-1957977D3FDD}"/>
+              </a:ext>
+            </a:extLst>
+          </p:cNvPr>
+          <p:cNvPicPr>
+            <a:picLocks noChangeAspect="1"/>
+          </p:cNvPicPr>
+          <p:nvPr/>
+        </p:nvPicPr>
+        <p:blipFill>
+          <a:blip r:embed="rId2"/>
+          <a:stretch>
+            <a:fillRect/>
+          </a:stretch>
+        </p:blipFill>
+        <p:spPr>
+          <a:xfrm>
+            <a:off x="6453964" y="1270363"/>
+            <a:ext cx="5522457" cy="4086818"/>
+          </a:xfrm>
+          <a:prstGeom prst="rect">
+            <a:avLst/>
+          </a:prstGeom>
+        </p:spPr>
+      </p:pic>
+      <p:sp>
+        <p:nvSpPr>
+          <p:cNvPr id="5" name="テキスト ボックス 4">
+            <a:extLst>
+              <a:ext uri="{FF2B5EF4-FFF2-40B4-BE49-F238E27FC236}">
+                <a16:creationId xmlns:a16="http://schemas.microsoft.com/office/drawing/2014/main" id="{BA7DD02A-8930-AFE2-7956-30FACE1DBBA5}"/>
+              </a:ext>
+            </a:extLst>
+          </p:cNvPr>
+          <p:cNvSpPr txBox="1"/>
+          <p:nvPr/>
+        </p:nvSpPr>
+        <p:spPr>
+          <a:xfrm>
+            <a:off x="0" y="612222"/>
+            <a:ext cx="3185487" cy="369332"/>
+          </a:xfrm>
+          <a:prstGeom prst="rect">
+            <a:avLst/>
+          </a:prstGeom>
+          <a:noFill/>
+        </p:spPr>
+        <p:txBody>
+          <a:bodyPr wrap="none" rtlCol="0">
+            <a:spAutoFit/>
+          </a:bodyPr>
+          <a:lstStyle/>
+          <a:p>
+            <a:r>
+              <a:rPr kumimoji="1" lang="ja-JP" altLang="en-US"/>
+              <a:t>大学別の適正な出力形式の数</a:t>
+            </a:r>
+          </a:p>
+        </p:txBody>
+      </p:sp>
+      <p:pic>
+        <p:nvPicPr>
+          <p:cNvPr id="11" name="図 10" descr="テキスト&#10;&#10;AI 生成コンテンツは誤りを含む可能性があります。">
+            <a:extLst>
+              <a:ext uri="{FF2B5EF4-FFF2-40B4-BE49-F238E27FC236}">
+                <a16:creationId xmlns:a16="http://schemas.microsoft.com/office/drawing/2014/main" id="{7A49BFC5-538B-4E65-DD3C-5DB2E0E5B7E5}"/>
+              </a:ext>
+            </a:extLst>
+          </p:cNvPr>
+          <p:cNvPicPr>
+            <a:picLocks noChangeAspect="1"/>
+          </p:cNvPicPr>
+          <p:nvPr/>
+        </p:nvPicPr>
+        <p:blipFill>
+          <a:blip r:embed="rId3"/>
+          <a:stretch>
+            <a:fillRect/>
+          </a:stretch>
+        </p:blipFill>
+        <p:spPr>
+          <a:xfrm>
+            <a:off x="296360" y="1270363"/>
+            <a:ext cx="2889127" cy="2183261"/>
+          </a:xfrm>
+          <a:prstGeom prst="rect">
+            <a:avLst/>
+          </a:prstGeom>
+        </p:spPr>
+      </p:pic>
+      <p:sp>
+        <p:nvSpPr>
+          <p:cNvPr id="13" name="テキスト ボックス 12">
+            <a:extLst>
+              <a:ext uri="{FF2B5EF4-FFF2-40B4-BE49-F238E27FC236}">
+                <a16:creationId xmlns:a16="http://schemas.microsoft.com/office/drawing/2014/main" id="{DFEDC0C1-D712-3518-075D-AEF3C45834F0}"/>
+              </a:ext>
+            </a:extLst>
+          </p:cNvPr>
+          <p:cNvSpPr txBox="1"/>
+          <p:nvPr/>
+        </p:nvSpPr>
+        <p:spPr>
+          <a:xfrm>
+            <a:off x="7584777" y="5433748"/>
+            <a:ext cx="3260829" cy="307777"/>
+          </a:xfrm>
+          <a:prstGeom prst="rect">
+            <a:avLst/>
+          </a:prstGeom>
+          <a:noFill/>
+        </p:spPr>
+        <p:txBody>
+          <a:bodyPr wrap="none" rtlCol="0">
+            <a:spAutoFit/>
+          </a:bodyPr>
+          <a:lstStyle/>
+          <a:p>
+            <a:r>
+              <a:rPr lang="en" altLang="ja-JP" sz="1400" dirty="0"/>
+              <a:t>Kruskal-Wallis</a:t>
+            </a:r>
+            <a:r>
+              <a:rPr lang="ja-JP" altLang="en-US" sz="1400"/>
+              <a:t>法による検定</a:t>
+            </a:r>
+            <a:r>
+              <a:rPr lang="en-US" altLang="ja-JP" sz="1400" dirty="0"/>
+              <a:t>: P=0.029</a:t>
+            </a:r>
+            <a:endParaRPr lang="ja-JP" altLang="en-US" sz="1400"/>
+          </a:p>
+        </p:txBody>
+      </p:sp>
+    </p:spTree>
+    <p:extLst>
+      <p:ext uri="{BB962C8B-B14F-4D97-AF65-F5344CB8AC3E}">
+        <p14:creationId xmlns:p14="http://schemas.microsoft.com/office/powerpoint/2010/main" val="360602994"/>
+      </p:ext>
+    </p:extLst>
+  </p:cSld>
+  <p:clrMapOvr>
+    <a:masterClrMapping/>
+  </p:clrMapOvr>
+</p:sld>
+</file>
+
+<file path=ppt/slides/slide15.xml><?xml version="1.0" encoding="utf-8"?>
+<p:sld xmlns:a="http://schemas.openxmlformats.org/drawingml/2006/main" xmlns:r="http://schemas.openxmlformats.org/officeDocument/2006/relationships" xmlns:p="http://schemas.openxmlformats.org/presentationml/2006/main">
+  <p:cSld>
+    <p:spTree>
+      <p:nvGrpSpPr>
+        <p:cNvPr id="1" name="">
+          <a:extLst>
+            <a:ext uri="{FF2B5EF4-FFF2-40B4-BE49-F238E27FC236}">
+              <a16:creationId xmlns:a16="http://schemas.microsoft.com/office/drawing/2014/main" id="{EFAD9E6F-3BE1-24B5-5230-E8569C565982}"/>
+            </a:ext>
+          </a:extLst>
+        </p:cNvPr>
+        <p:cNvGrpSpPr/>
+        <p:nvPr/>
+      </p:nvGrpSpPr>
+      <p:grpSpPr>
+        <a:xfrm>
+          <a:off x="0" y="0"/>
+          <a:ext cx="0" cy="0"/>
+          <a:chOff x="0" y="0"/>
+          <a:chExt cx="0" cy="0"/>
+        </a:xfrm>
+      </p:grpSpPr>
+      <p:sp>
+        <p:nvSpPr>
+          <p:cNvPr id="2" name="タイトル 1">
+            <a:extLst>
+              <a:ext uri="{FF2B5EF4-FFF2-40B4-BE49-F238E27FC236}">
+                <a16:creationId xmlns:a16="http://schemas.microsoft.com/office/drawing/2014/main" id="{8AC87057-C932-90B2-F7E7-6BA387992F48}"/>
+              </a:ext>
+            </a:extLst>
+          </p:cNvPr>
+          <p:cNvSpPr>
+            <a:spLocks noGrp="1"/>
+          </p:cNvSpPr>
+          <p:nvPr>
+            <p:ph type="title"/>
+          </p:nvPr>
+        </p:nvSpPr>
+        <p:spPr>
+          <a:xfrm>
+            <a:off x="0" y="1"/>
+            <a:ext cx="12192000" cy="577516"/>
+          </a:xfrm>
+          <a:solidFill>
+            <a:schemeClr val="bg1">
+              <a:lumMod val="85000"/>
+            </a:schemeClr>
+          </a:solidFill>
+        </p:spPr>
+        <p:txBody>
+          <a:bodyPr>
+            <a:normAutofit fontScale="90000"/>
+          </a:bodyPr>
+          <a:lstStyle/>
+          <a:p>
+            <a:r>
+              <a:rPr lang="ja-JP" altLang="en-US" sz="3600"/>
+              <a:t>結果</a:t>
+            </a:r>
+            <a:r>
+              <a:rPr lang="en-US" altLang="ja-JP" sz="3600" dirty="0">
+                <a:sym typeface="Wingdings" pitchFamily="2" charset="2"/>
+              </a:rPr>
+              <a:t>(</a:t>
+            </a:r>
+            <a:r>
+              <a:rPr lang="ja-JP" altLang="en-US" sz="3600">
+                <a:sym typeface="Wingdings" pitchFamily="2" charset="2"/>
+              </a:rPr>
+              <a:t>出現した地名</a:t>
+            </a:r>
+            <a:r>
+              <a:rPr lang="en-US" altLang="ja-JP" sz="3600" dirty="0">
+                <a:sym typeface="Wingdings" pitchFamily="2" charset="2"/>
+              </a:rPr>
+              <a:t>)</a:t>
+            </a:r>
+            <a:endParaRPr kumimoji="1" lang="ja-JP" altLang="en-US" sz="3600"/>
+          </a:p>
+        </p:txBody>
+      </p:sp>
+    </p:spTree>
+    <p:extLst>
+      <p:ext uri="{BB962C8B-B14F-4D97-AF65-F5344CB8AC3E}">
+        <p14:creationId xmlns:p14="http://schemas.microsoft.com/office/powerpoint/2010/main" val="2082332962"/>
       </p:ext>
     </p:extLst>
   </p:cSld>
@@ -8976,7 +9970,7 @@
         <p:spPr>
           <a:xfrm>
             <a:off x="-1" y="577517"/>
-            <a:ext cx="12192000" cy="4801314"/>
+            <a:ext cx="12192000" cy="4524315"/>
           </a:xfrm>
           <a:prstGeom prst="rect">
             <a:avLst/>
@@ -8993,10 +9987,10 @@
               <a:rPr lang="ja-JP" altLang="en-US"/>
               <a:t>文書（特に日本語）からの固有表現の抽出・判定に関して、</a:t>
             </a:r>
-            <a:endParaRPr lang="en-US" altLang="ja-JP"/>
-          </a:p>
-          <a:p>
-            <a:endParaRPr lang="en-US" altLang="ja-JP" b="1"/>
+            <a:endParaRPr lang="en-US" altLang="ja-JP" dirty="0"/>
+          </a:p>
+          <a:p>
+            <a:endParaRPr lang="en-US" altLang="ja-JP" b="1" dirty="0"/>
           </a:p>
           <a:p>
             <a:r>
@@ -9022,7 +10016,7 @@
               <a:rPr lang="ja-JP" altLang="en-US"/>
               <a:t>「地名」、「人名」、「固有現象名」等にかかる記述の特定（形態素の特徴量が十分か・正しいか）</a:t>
             </a:r>
-            <a:endParaRPr lang="en-US" altLang="ja-JP"/>
+            <a:endParaRPr lang="en-US" altLang="ja-JP" dirty="0"/>
           </a:p>
           <a:p>
             <a:pPr marL="742950" lvl="1" indent="-285750">
@@ -9034,7 +10028,7 @@
               <a:t>例</a:t>
             </a:r>
             <a:r>
-              <a:rPr lang="en-US" altLang="ja-JP"/>
+              <a:rPr lang="en-US" altLang="ja-JP" dirty="0"/>
               <a:t>: </a:t>
             </a:r>
             <a:r>
@@ -9075,7 +10069,7 @@
               <a:t>クラス付与（従来の</a:t>
             </a:r>
             <a:r>
-              <a:rPr lang="en-US" altLang="ja-JP"/>
+              <a:rPr lang="en-US" altLang="ja-JP" dirty="0"/>
               <a:t>NER</a:t>
             </a:r>
             <a:r>
@@ -9109,17 +10103,6 @@
             <a:r>
               <a:rPr lang="ja-JP" altLang="en-US"/>
               <a:t>複数の同一の地名（ただし地理的な場所が異なる）の分離（曖昧性解決）</a:t>
-            </a:r>
-            <a:endParaRPr lang="en-US" altLang="ja-JP" dirty="0"/>
-          </a:p>
-          <a:p>
-            <a:pPr marL="285750" indent="-285750">
-              <a:buFont typeface="Arial" panose="020B0604020202020204" pitchFamily="34" charset="0"/>
-              <a:buChar char="•"/>
-            </a:pPr>
-            <a:r>
-              <a:rPr lang="ja-JP" altLang="en-US"/>
-              <a:t>複合名詞の一部としての地名をどのように判定するか</a:t>
             </a:r>
             <a:endParaRPr lang="en-US" altLang="ja-JP" dirty="0"/>
           </a:p>
@@ -10491,7 +11474,7 @@
         <p:spPr>
           <a:xfrm>
             <a:off x="3103267" y="3213854"/>
-            <a:ext cx="870751" cy="369332"/>
+            <a:ext cx="936475" cy="369332"/>
           </a:xfrm>
           <a:prstGeom prst="rect">
             <a:avLst/>
@@ -10505,8 +11488,8 @@
           <a:lstStyle/>
           <a:p>
             <a:r>
-              <a:rPr kumimoji="1" lang="en-US" altLang="ja-JP"/>
-              <a:t>n=200</a:t>
+              <a:rPr kumimoji="1" lang="en-US" altLang="ja-JP" dirty="0"/>
+              <a:t>n=200 </a:t>
             </a:r>
             <a:endParaRPr kumimoji="1" lang="ja-JP" altLang="en-US"/>
           </a:p>
@@ -10580,7 +11563,7 @@
         <p:spPr>
           <a:xfrm>
             <a:off x="3103267" y="4678950"/>
-            <a:ext cx="998991" cy="369332"/>
+            <a:ext cx="2212465" cy="369332"/>
           </a:xfrm>
           <a:prstGeom prst="rect">
             <a:avLst/>
@@ -10594,8 +11577,8 @@
           <a:lstStyle/>
           <a:p>
             <a:r>
-              <a:rPr kumimoji="1" lang="en-US" altLang="ja-JP"/>
-              <a:t>n=1200</a:t>
+              <a:rPr kumimoji="1" lang="en-US" altLang="ja-JP" dirty="0"/>
+              <a:t>n=1200 -&gt; n=1000</a:t>
             </a:r>
             <a:endParaRPr kumimoji="1" lang="ja-JP" altLang="en-US"/>
           </a:p>
@@ -10630,7 +11613,7 @@
           <a:lstStyle/>
           <a:p>
             <a:r>
-              <a:rPr kumimoji="1" lang="en-US" altLang="ja-JP"/>
+              <a:rPr kumimoji="1" lang="en-US" altLang="ja-JP" dirty="0"/>
               <a:t>n=495</a:t>
             </a:r>
           </a:p>
@@ -10651,7 +11634,7 @@
         <p:spPr>
           <a:xfrm>
             <a:off x="2946813" y="5678743"/>
-            <a:ext cx="2428870" cy="369332"/>
+            <a:ext cx="3982180" cy="369332"/>
           </a:xfrm>
           <a:prstGeom prst="rect">
             <a:avLst/>
@@ -10669,7 +11652,7 @@
               <a:t>（</a:t>
             </a:r>
             <a:r>
-              <a:rPr lang="en-US" altLang="ja-JP"/>
+              <a:rPr lang="en-US" altLang="ja-JP" dirty="0"/>
               <a:t>99</a:t>
             </a:r>
             <a:r>
@@ -10677,14 +11660,22 @@
               <a:t>報告書</a:t>
             </a:r>
             <a:r>
-              <a:rPr lang="en-US" altLang="ja-JP"/>
-              <a:t> x 5</a:t>
+              <a:rPr lang="en-US" altLang="ja-JP" dirty="0"/>
+              <a:t>(</a:t>
+            </a:r>
+            <a:r>
+              <a:rPr lang="ja-JP" altLang="en-US"/>
+              <a:t>判定箇所</a:t>
+            </a:r>
+            <a:r>
+              <a:rPr lang="en-US" altLang="ja-JP" dirty="0"/>
+              <a:t>:415) x 5</a:t>
             </a:r>
             <a:r>
               <a:rPr lang="ja-JP" altLang="en-US"/>
               <a:t>判定）</a:t>
             </a:r>
-            <a:endParaRPr kumimoji="1" lang="en-US" altLang="ja-JP"/>
+            <a:endParaRPr kumimoji="1" lang="en-US" altLang="ja-JP" dirty="0"/>
           </a:p>
         </p:txBody>
       </p:sp>
@@ -11045,7 +12036,7 @@
         </p:nvSpPr>
         <p:spPr>
           <a:xfrm>
-            <a:off x="1405687" y="4050957"/>
+            <a:off x="1375346" y="4073642"/>
             <a:ext cx="1619354" cy="276999"/>
           </a:xfrm>
           <a:prstGeom prst="rect">
@@ -11060,7 +12051,7 @@
           <a:lstStyle/>
           <a:p>
             <a:r>
-              <a:rPr kumimoji="1" lang="en-US" altLang="ja-JP" sz="1200"/>
+              <a:rPr kumimoji="1" lang="en-US" altLang="ja-JP" sz="1200" dirty="0"/>
               <a:t>3 AI</a:t>
             </a:r>
             <a:r>
@@ -11068,7 +12059,7 @@
               <a:t>と</a:t>
             </a:r>
             <a:r>
-              <a:rPr kumimoji="1" lang="en-US" altLang="ja-JP" sz="1200"/>
+              <a:rPr kumimoji="1" lang="en-US" altLang="ja-JP" sz="1200" dirty="0"/>
               <a:t>3</a:t>
             </a:r>
             <a:r>
@@ -11107,11 +12098,11 @@
           <a:lstStyle/>
           <a:p>
             <a:r>
-              <a:rPr lang="en-US" altLang="ja-JP" sz="1200"/>
+              <a:rPr lang="en-US" altLang="ja-JP" sz="1200" dirty="0"/>
               <a:t>1</a:t>
             </a:r>
             <a:r>
-              <a:rPr kumimoji="1" lang="en-US" altLang="ja-JP" sz="1200"/>
+              <a:rPr kumimoji="1" lang="en-US" altLang="ja-JP" sz="1200" dirty="0"/>
               <a:t> AI</a:t>
             </a:r>
             <a:r>
@@ -11215,7 +12206,7 @@
         </p:nvSpPr>
         <p:spPr>
           <a:xfrm>
-            <a:off x="2350976" y="5626353"/>
+            <a:off x="3602762" y="6340679"/>
             <a:ext cx="646331" cy="276999"/>
           </a:xfrm>
           <a:prstGeom prst="rect">
@@ -11457,6 +12448,52 @@
           </a:fontRef>
         </p:style>
       </p:cxnSp>
+      <p:sp>
+        <p:nvSpPr>
+          <p:cNvPr id="5" name="テキスト ボックス 4">
+            <a:extLst>
+              <a:ext uri="{FF2B5EF4-FFF2-40B4-BE49-F238E27FC236}">
+                <a16:creationId xmlns:a16="http://schemas.microsoft.com/office/drawing/2014/main" id="{92411725-8F54-F43D-A1EE-674FAF4384B9}"/>
+              </a:ext>
+            </a:extLst>
+          </p:cNvPr>
+          <p:cNvSpPr txBox="1"/>
+          <p:nvPr/>
+        </p:nvSpPr>
+        <p:spPr>
+          <a:xfrm>
+            <a:off x="1455380" y="5515739"/>
+            <a:ext cx="1569660" cy="461665"/>
+          </a:xfrm>
+          <a:prstGeom prst="rect">
+            <a:avLst/>
+          </a:prstGeom>
+          <a:noFill/>
+        </p:spPr>
+        <p:txBody>
+          <a:bodyPr wrap="none" rtlCol="0">
+            <a:spAutoFit/>
+          </a:bodyPr>
+          <a:lstStyle/>
+          <a:p>
+            <a:r>
+              <a:rPr kumimoji="1" lang="ja-JP" altLang="en-US" sz="1200"/>
+              <a:t>コード部分の抽出、</a:t>
+            </a:r>
+            <a:endParaRPr kumimoji="1" lang="en-US" altLang="ja-JP" sz="1200" dirty="0"/>
+          </a:p>
+          <a:p>
+            <a:r>
+              <a:rPr kumimoji="1" lang="en-US" altLang="ja-JP" sz="1200" dirty="0" err="1"/>
+              <a:t>jq</a:t>
+            </a:r>
+            <a:r>
+              <a:rPr kumimoji="1" lang="ja-JP" altLang="en-US" sz="1200"/>
+              <a:t>によるフィルター</a:t>
+            </a:r>
+          </a:p>
+        </p:txBody>
+      </p:sp>
     </p:spTree>
     <p:extLst>
       <p:ext uri="{BB962C8B-B14F-4D97-AF65-F5344CB8AC3E}">

--- a/jsik2026taikai.pptx
+++ b/jsik2026taikai.pptx
@@ -4,6 +4,9 @@
   <p:sldMasterIdLst>
     <p:sldMasterId id="2147483648" r:id="rId1"/>
   </p:sldMasterIdLst>
+  <p:notesMasterIdLst>
+    <p:notesMasterId r:id="rId18"/>
+  </p:notesMasterIdLst>
   <p:sldIdLst>
     <p:sldId id="256" r:id="rId2"/>
     <p:sldId id="296" r:id="rId3"/>
@@ -14,12 +17,13 @@
     <p:sldId id="305" r:id="rId8"/>
     <p:sldId id="307" r:id="rId9"/>
     <p:sldId id="309" r:id="rId10"/>
-    <p:sldId id="308" r:id="rId11"/>
-    <p:sldId id="310" r:id="rId12"/>
+    <p:sldId id="310" r:id="rId11"/>
+    <p:sldId id="308" r:id="rId12"/>
     <p:sldId id="312" r:id="rId13"/>
-    <p:sldId id="314" r:id="rId14"/>
-    <p:sldId id="315" r:id="rId15"/>
-    <p:sldId id="316" r:id="rId16"/>
+    <p:sldId id="317" r:id="rId14"/>
+    <p:sldId id="314" r:id="rId15"/>
+    <p:sldId id="315" r:id="rId16"/>
+    <p:sldId id="316" r:id="rId17"/>
   </p:sldIdLst>
   <p:sldSz cx="12192000" cy="6858000"/>
   <p:notesSz cx="6858000" cy="9144000"/>
@@ -126,6 +130,471 @@
 </p:presentation>
 </file>
 
+<file path=ppt/notesMasters/notesMaster1.xml><?xml version="1.0" encoding="utf-8"?>
+<p:notesMaster xmlns:a="http://schemas.openxmlformats.org/drawingml/2006/main" xmlns:r="http://schemas.openxmlformats.org/officeDocument/2006/relationships" xmlns:p="http://schemas.openxmlformats.org/presentationml/2006/main">
+  <p:cSld>
+    <p:bg>
+      <p:bgRef idx="1001">
+        <a:schemeClr val="bg1"/>
+      </p:bgRef>
+    </p:bg>
+    <p:spTree>
+      <p:nvGrpSpPr>
+        <p:cNvPr id="1" name=""/>
+        <p:cNvGrpSpPr/>
+        <p:nvPr/>
+      </p:nvGrpSpPr>
+      <p:grpSpPr>
+        <a:xfrm>
+          <a:off x="0" y="0"/>
+          <a:ext cx="0" cy="0"/>
+          <a:chOff x="0" y="0"/>
+          <a:chExt cx="0" cy="0"/>
+        </a:xfrm>
+      </p:grpSpPr>
+      <p:sp>
+        <p:nvSpPr>
+          <p:cNvPr id="2" name="ヘッダー プレースホルダー 1"/>
+          <p:cNvSpPr>
+            <a:spLocks noGrp="1"/>
+          </p:cNvSpPr>
+          <p:nvPr>
+            <p:ph type="hdr" sz="quarter"/>
+          </p:nvPr>
+        </p:nvSpPr>
+        <p:spPr>
+          <a:xfrm>
+            <a:off x="0" y="0"/>
+            <a:ext cx="2971800" cy="458788"/>
+          </a:xfrm>
+          <a:prstGeom prst="rect">
+            <a:avLst/>
+          </a:prstGeom>
+        </p:spPr>
+        <p:txBody>
+          <a:bodyPr vert="horz" lIns="91440" tIns="45720" rIns="91440" bIns="45720" rtlCol="0"/>
+          <a:lstStyle>
+            <a:lvl1pPr algn="l">
+              <a:defRPr sz="1200"/>
+            </a:lvl1pPr>
+          </a:lstStyle>
+          <a:p>
+            <a:endParaRPr kumimoji="1" lang="ja-JP" altLang="en-US"/>
+          </a:p>
+        </p:txBody>
+      </p:sp>
+      <p:sp>
+        <p:nvSpPr>
+          <p:cNvPr id="3" name="日付プレースホルダー 2"/>
+          <p:cNvSpPr>
+            <a:spLocks noGrp="1"/>
+          </p:cNvSpPr>
+          <p:nvPr>
+            <p:ph type="dt" idx="1"/>
+          </p:nvPr>
+        </p:nvSpPr>
+        <p:spPr>
+          <a:xfrm>
+            <a:off x="3884613" y="0"/>
+            <a:ext cx="2971800" cy="458788"/>
+          </a:xfrm>
+          <a:prstGeom prst="rect">
+            <a:avLst/>
+          </a:prstGeom>
+        </p:spPr>
+        <p:txBody>
+          <a:bodyPr vert="horz" lIns="91440" tIns="45720" rIns="91440" bIns="45720" rtlCol="0"/>
+          <a:lstStyle>
+            <a:lvl1pPr algn="r">
+              <a:defRPr sz="1200"/>
+            </a:lvl1pPr>
+          </a:lstStyle>
+          <a:p>
+            <a:fld id="{21858D78-C21E-6D4A-8EB0-1034401A7884}" type="datetimeFigureOut">
+              <a:rPr kumimoji="1" lang="ja-JP" altLang="en-US" smtClean="0"/>
+              <a:t>2026/4/28</a:t>
+            </a:fld>
+            <a:endParaRPr kumimoji="1" lang="ja-JP" altLang="en-US"/>
+          </a:p>
+        </p:txBody>
+      </p:sp>
+      <p:sp>
+        <p:nvSpPr>
+          <p:cNvPr id="4" name="スライド イメージ プレースホルダー 3"/>
+          <p:cNvSpPr>
+            <a:spLocks noGrp="1" noRot="1" noChangeAspect="1"/>
+          </p:cNvSpPr>
+          <p:nvPr>
+            <p:ph type="sldImg" idx="2"/>
+          </p:nvPr>
+        </p:nvSpPr>
+        <p:spPr>
+          <a:xfrm>
+            <a:off x="685800" y="1143000"/>
+            <a:ext cx="5486400" cy="3086100"/>
+          </a:xfrm>
+          <a:prstGeom prst="rect">
+            <a:avLst/>
+          </a:prstGeom>
+          <a:noFill/>
+          <a:ln w="12700">
+            <a:solidFill>
+              <a:prstClr val="black"/>
+            </a:solidFill>
+          </a:ln>
+        </p:spPr>
+        <p:txBody>
+          <a:bodyPr vert="horz" lIns="91440" tIns="45720" rIns="91440" bIns="45720" rtlCol="0" anchor="ctr"/>
+          <a:lstStyle/>
+          <a:p>
+            <a:endParaRPr lang="ja-JP" altLang="en-US"/>
+          </a:p>
+        </p:txBody>
+      </p:sp>
+      <p:sp>
+        <p:nvSpPr>
+          <p:cNvPr id="5" name="ノート プレースホルダー 4"/>
+          <p:cNvSpPr>
+            <a:spLocks noGrp="1"/>
+          </p:cNvSpPr>
+          <p:nvPr>
+            <p:ph type="body" sz="quarter" idx="3"/>
+          </p:nvPr>
+        </p:nvSpPr>
+        <p:spPr>
+          <a:xfrm>
+            <a:off x="685800" y="4400550"/>
+            <a:ext cx="5486400" cy="3600450"/>
+          </a:xfrm>
+          <a:prstGeom prst="rect">
+            <a:avLst/>
+          </a:prstGeom>
+        </p:spPr>
+        <p:txBody>
+          <a:bodyPr vert="horz" lIns="91440" tIns="45720" rIns="91440" bIns="45720" rtlCol="0"/>
+          <a:lstStyle/>
+          <a:p>
+            <a:pPr lvl="0"/>
+            <a:r>
+              <a:rPr kumimoji="1" lang="ja-JP" altLang="en-US"/>
+              <a:t>マスター テキストの書式設定</a:t>
+            </a:r>
+          </a:p>
+          <a:p>
+            <a:pPr lvl="1"/>
+            <a:r>
+              <a:rPr kumimoji="1" lang="ja-JP" altLang="en-US"/>
+              <a:t>第 </a:t>
+            </a:r>
+            <a:r>
+              <a:rPr kumimoji="1" lang="en-US" altLang="ja-JP"/>
+              <a:t>2 </a:t>
+            </a:r>
+            <a:r>
+              <a:rPr kumimoji="1" lang="ja-JP" altLang="en-US"/>
+              <a:t>レベル</a:t>
+            </a:r>
+          </a:p>
+          <a:p>
+            <a:pPr lvl="2"/>
+            <a:r>
+              <a:rPr kumimoji="1" lang="ja-JP" altLang="en-US"/>
+              <a:t>第 </a:t>
+            </a:r>
+            <a:r>
+              <a:rPr kumimoji="1" lang="en-US" altLang="ja-JP"/>
+              <a:t>3 </a:t>
+            </a:r>
+            <a:r>
+              <a:rPr kumimoji="1" lang="ja-JP" altLang="en-US"/>
+              <a:t>レベル</a:t>
+            </a:r>
+          </a:p>
+          <a:p>
+            <a:pPr lvl="3"/>
+            <a:r>
+              <a:rPr kumimoji="1" lang="ja-JP" altLang="en-US"/>
+              <a:t>第 </a:t>
+            </a:r>
+            <a:r>
+              <a:rPr kumimoji="1" lang="en-US" altLang="ja-JP"/>
+              <a:t>4 </a:t>
+            </a:r>
+            <a:r>
+              <a:rPr kumimoji="1" lang="ja-JP" altLang="en-US"/>
+              <a:t>レベル</a:t>
+            </a:r>
+          </a:p>
+          <a:p>
+            <a:pPr lvl="4"/>
+            <a:r>
+              <a:rPr kumimoji="1" lang="ja-JP" altLang="en-US"/>
+              <a:t>第 </a:t>
+            </a:r>
+            <a:r>
+              <a:rPr kumimoji="1" lang="en-US" altLang="ja-JP"/>
+              <a:t>5 </a:t>
+            </a:r>
+            <a:r>
+              <a:rPr kumimoji="1" lang="ja-JP" altLang="en-US"/>
+              <a:t>レベル</a:t>
+            </a:r>
+          </a:p>
+        </p:txBody>
+      </p:sp>
+      <p:sp>
+        <p:nvSpPr>
+          <p:cNvPr id="6" name="フッター プレースホルダー 5"/>
+          <p:cNvSpPr>
+            <a:spLocks noGrp="1"/>
+          </p:cNvSpPr>
+          <p:nvPr>
+            <p:ph type="ftr" sz="quarter" idx="4"/>
+          </p:nvPr>
+        </p:nvSpPr>
+        <p:spPr>
+          <a:xfrm>
+            <a:off x="0" y="8685213"/>
+            <a:ext cx="2971800" cy="458787"/>
+          </a:xfrm>
+          <a:prstGeom prst="rect">
+            <a:avLst/>
+          </a:prstGeom>
+        </p:spPr>
+        <p:txBody>
+          <a:bodyPr vert="horz" lIns="91440" tIns="45720" rIns="91440" bIns="45720" rtlCol="0" anchor="b"/>
+          <a:lstStyle>
+            <a:lvl1pPr algn="l">
+              <a:defRPr sz="1200"/>
+            </a:lvl1pPr>
+          </a:lstStyle>
+          <a:p>
+            <a:endParaRPr kumimoji="1" lang="ja-JP" altLang="en-US"/>
+          </a:p>
+        </p:txBody>
+      </p:sp>
+      <p:sp>
+        <p:nvSpPr>
+          <p:cNvPr id="7" name="スライド番号プレースホルダー 6"/>
+          <p:cNvSpPr>
+            <a:spLocks noGrp="1"/>
+          </p:cNvSpPr>
+          <p:nvPr>
+            <p:ph type="sldNum" sz="quarter" idx="5"/>
+          </p:nvPr>
+        </p:nvSpPr>
+        <p:spPr>
+          <a:xfrm>
+            <a:off x="3884613" y="8685213"/>
+            <a:ext cx="2971800" cy="458787"/>
+          </a:xfrm>
+          <a:prstGeom prst="rect">
+            <a:avLst/>
+          </a:prstGeom>
+        </p:spPr>
+        <p:txBody>
+          <a:bodyPr vert="horz" lIns="91440" tIns="45720" rIns="91440" bIns="45720" rtlCol="0" anchor="b"/>
+          <a:lstStyle>
+            <a:lvl1pPr algn="r">
+              <a:defRPr sz="1200"/>
+            </a:lvl1pPr>
+          </a:lstStyle>
+          <a:p>
+            <a:fld id="{AD21AD6E-4550-3C43-945D-BD5179E945F6}" type="slidenum">
+              <a:rPr kumimoji="1" lang="ja-JP" altLang="en-US" smtClean="0"/>
+              <a:t>‹#›</a:t>
+            </a:fld>
+            <a:endParaRPr kumimoji="1" lang="ja-JP" altLang="en-US"/>
+          </a:p>
+        </p:txBody>
+      </p:sp>
+    </p:spTree>
+    <p:extLst>
+      <p:ext uri="{BB962C8B-B14F-4D97-AF65-F5344CB8AC3E}">
+        <p14:creationId xmlns:p14="http://schemas.microsoft.com/office/powerpoint/2010/main" val="4253057043"/>
+      </p:ext>
+    </p:extLst>
+  </p:cSld>
+  <p:clrMap bg1="lt1" tx1="dk1" bg2="lt2" tx2="dk2" accent1="accent1" accent2="accent2" accent3="accent3" accent4="accent4" accent5="accent5" accent6="accent6" hlink="hlink" folHlink="folHlink"/>
+  <p:notesStyle>
+    <a:lvl1pPr marL="0" algn="l" defTabSz="914400" rtl="0" eaLnBrk="1" latinLnBrk="0" hangingPunct="1">
+      <a:defRPr kumimoji="1" sz="1200" kern="1200">
+        <a:solidFill>
+          <a:schemeClr val="tx1"/>
+        </a:solidFill>
+        <a:latin typeface="+mn-lt"/>
+        <a:ea typeface="+mn-ea"/>
+        <a:cs typeface="+mn-cs"/>
+      </a:defRPr>
+    </a:lvl1pPr>
+    <a:lvl2pPr marL="457200" algn="l" defTabSz="914400" rtl="0" eaLnBrk="1" latinLnBrk="0" hangingPunct="1">
+      <a:defRPr kumimoji="1" sz="1200" kern="1200">
+        <a:solidFill>
+          <a:schemeClr val="tx1"/>
+        </a:solidFill>
+        <a:latin typeface="+mn-lt"/>
+        <a:ea typeface="+mn-ea"/>
+        <a:cs typeface="+mn-cs"/>
+      </a:defRPr>
+    </a:lvl2pPr>
+    <a:lvl3pPr marL="914400" algn="l" defTabSz="914400" rtl="0" eaLnBrk="1" latinLnBrk="0" hangingPunct="1">
+      <a:defRPr kumimoji="1" sz="1200" kern="1200">
+        <a:solidFill>
+          <a:schemeClr val="tx1"/>
+        </a:solidFill>
+        <a:latin typeface="+mn-lt"/>
+        <a:ea typeface="+mn-ea"/>
+        <a:cs typeface="+mn-cs"/>
+      </a:defRPr>
+    </a:lvl3pPr>
+    <a:lvl4pPr marL="1371600" algn="l" defTabSz="914400" rtl="0" eaLnBrk="1" latinLnBrk="0" hangingPunct="1">
+      <a:defRPr kumimoji="1" sz="1200" kern="1200">
+        <a:solidFill>
+          <a:schemeClr val="tx1"/>
+        </a:solidFill>
+        <a:latin typeface="+mn-lt"/>
+        <a:ea typeface="+mn-ea"/>
+        <a:cs typeface="+mn-cs"/>
+      </a:defRPr>
+    </a:lvl4pPr>
+    <a:lvl5pPr marL="1828800" algn="l" defTabSz="914400" rtl="0" eaLnBrk="1" latinLnBrk="0" hangingPunct="1">
+      <a:defRPr kumimoji="1" sz="1200" kern="1200">
+        <a:solidFill>
+          <a:schemeClr val="tx1"/>
+        </a:solidFill>
+        <a:latin typeface="+mn-lt"/>
+        <a:ea typeface="+mn-ea"/>
+        <a:cs typeface="+mn-cs"/>
+      </a:defRPr>
+    </a:lvl5pPr>
+    <a:lvl6pPr marL="2286000" algn="l" defTabSz="914400" rtl="0" eaLnBrk="1" latinLnBrk="0" hangingPunct="1">
+      <a:defRPr kumimoji="1" sz="1200" kern="1200">
+        <a:solidFill>
+          <a:schemeClr val="tx1"/>
+        </a:solidFill>
+        <a:latin typeface="+mn-lt"/>
+        <a:ea typeface="+mn-ea"/>
+        <a:cs typeface="+mn-cs"/>
+      </a:defRPr>
+    </a:lvl6pPr>
+    <a:lvl7pPr marL="2743200" algn="l" defTabSz="914400" rtl="0" eaLnBrk="1" latinLnBrk="0" hangingPunct="1">
+      <a:defRPr kumimoji="1" sz="1200" kern="1200">
+        <a:solidFill>
+          <a:schemeClr val="tx1"/>
+        </a:solidFill>
+        <a:latin typeface="+mn-lt"/>
+        <a:ea typeface="+mn-ea"/>
+        <a:cs typeface="+mn-cs"/>
+      </a:defRPr>
+    </a:lvl7pPr>
+    <a:lvl8pPr marL="3200400" algn="l" defTabSz="914400" rtl="0" eaLnBrk="1" latinLnBrk="0" hangingPunct="1">
+      <a:defRPr kumimoji="1" sz="1200" kern="1200">
+        <a:solidFill>
+          <a:schemeClr val="tx1"/>
+        </a:solidFill>
+        <a:latin typeface="+mn-lt"/>
+        <a:ea typeface="+mn-ea"/>
+        <a:cs typeface="+mn-cs"/>
+      </a:defRPr>
+    </a:lvl8pPr>
+    <a:lvl9pPr marL="3657600" algn="l" defTabSz="914400" rtl="0" eaLnBrk="1" latinLnBrk="0" hangingPunct="1">
+      <a:defRPr kumimoji="1" sz="1200" kern="1200">
+        <a:solidFill>
+          <a:schemeClr val="tx1"/>
+        </a:solidFill>
+        <a:latin typeface="+mn-lt"/>
+        <a:ea typeface="+mn-ea"/>
+        <a:cs typeface="+mn-cs"/>
+      </a:defRPr>
+    </a:lvl9pPr>
+  </p:notesStyle>
+</p:notesMaster>
+</file>
+
+<file path=ppt/notesSlides/notesSlide1.xml><?xml version="1.0" encoding="utf-8"?>
+<p:notes xmlns:a="http://schemas.openxmlformats.org/drawingml/2006/main" xmlns:r="http://schemas.openxmlformats.org/officeDocument/2006/relationships" xmlns:p="http://schemas.openxmlformats.org/presentationml/2006/main">
+  <p:cSld>
+    <p:spTree>
+      <p:nvGrpSpPr>
+        <p:cNvPr id="1" name=""/>
+        <p:cNvGrpSpPr/>
+        <p:nvPr/>
+      </p:nvGrpSpPr>
+      <p:grpSpPr>
+        <a:xfrm>
+          <a:off x="0" y="0"/>
+          <a:ext cx="0" cy="0"/>
+          <a:chOff x="0" y="0"/>
+          <a:chExt cx="0" cy="0"/>
+        </a:xfrm>
+      </p:grpSpPr>
+      <p:sp>
+        <p:nvSpPr>
+          <p:cNvPr id="2" name="スライド イメージ プレースホルダー 1"/>
+          <p:cNvSpPr>
+            <a:spLocks noGrp="1" noRot="1" noChangeAspect="1"/>
+          </p:cNvSpPr>
+          <p:nvPr>
+            <p:ph type="sldImg"/>
+          </p:nvPr>
+        </p:nvSpPr>
+        <p:spPr/>
+      </p:sp>
+      <p:sp>
+        <p:nvSpPr>
+          <p:cNvPr id="3" name="ノート プレースホルダー 2"/>
+          <p:cNvSpPr>
+            <a:spLocks noGrp="1"/>
+          </p:cNvSpPr>
+          <p:nvPr>
+            <p:ph type="body" idx="1"/>
+          </p:nvPr>
+        </p:nvSpPr>
+        <p:spPr/>
+        <p:txBody>
+          <a:bodyPr/>
+          <a:lstStyle/>
+          <a:p>
+            <a:endParaRPr kumimoji="1" lang="ja-JP" altLang="en-US"/>
+          </a:p>
+        </p:txBody>
+      </p:sp>
+      <p:sp>
+        <p:nvSpPr>
+          <p:cNvPr id="4" name="スライド番号プレースホルダー 3"/>
+          <p:cNvSpPr>
+            <a:spLocks noGrp="1"/>
+          </p:cNvSpPr>
+          <p:nvPr>
+            <p:ph type="sldNum" sz="quarter" idx="5"/>
+          </p:nvPr>
+        </p:nvSpPr>
+        <p:spPr/>
+        <p:txBody>
+          <a:bodyPr/>
+          <a:lstStyle/>
+          <a:p>
+            <a:fld id="{AD21AD6E-4550-3C43-945D-BD5179E945F6}" type="slidenum">
+              <a:rPr kumimoji="1" lang="ja-JP" altLang="en-US" smtClean="0"/>
+              <a:t>13</a:t>
+            </a:fld>
+            <a:endParaRPr kumimoji="1" lang="ja-JP" altLang="en-US"/>
+          </a:p>
+        </p:txBody>
+      </p:sp>
+    </p:spTree>
+    <p:extLst>
+      <p:ext uri="{BB962C8B-B14F-4D97-AF65-F5344CB8AC3E}">
+        <p14:creationId xmlns:p14="http://schemas.microsoft.com/office/powerpoint/2010/main" val="3075617521"/>
+      </p:ext>
+    </p:extLst>
+  </p:cSld>
+  <p:clrMapOvr>
+    <a:masterClrMapping/>
+  </p:clrMapOvr>
+</p:notes>
+</file>
+
 <file path=ppt/slideLayouts/slideLayout1.xml><?xml version="1.0" encoding="utf-8"?>
 <p:sldLayout xmlns:a="http://schemas.openxmlformats.org/drawingml/2006/main" xmlns:r="http://schemas.openxmlformats.org/officeDocument/2006/relationships" xmlns:p="http://schemas.openxmlformats.org/presentationml/2006/main" type="title" preserve="1">
   <p:cSld name="タイトル スライド">
@@ -273,7 +742,7 @@
           <a:p>
             <a:fld id="{716789AD-CAC3-AD41-B5C9-BF5C62A1889D}" type="datetimeFigureOut">
               <a:rPr kumimoji="1" lang="ja-JP" altLang="en-US" smtClean="0"/>
-              <a:t>2026/4/27</a:t>
+              <a:t>2026/4/28</a:t>
             </a:fld>
             <a:endParaRPr kumimoji="1" lang="ja-JP" altLang="en-US"/>
           </a:p>
@@ -503,7 +972,7 @@
           <a:p>
             <a:fld id="{716789AD-CAC3-AD41-B5C9-BF5C62A1889D}" type="datetimeFigureOut">
               <a:rPr kumimoji="1" lang="ja-JP" altLang="en-US" smtClean="0"/>
-              <a:t>2026/4/27</a:t>
+              <a:t>2026/4/28</a:t>
             </a:fld>
             <a:endParaRPr kumimoji="1" lang="ja-JP" altLang="en-US"/>
           </a:p>
@@ -743,7 +1212,7 @@
           <a:p>
             <a:fld id="{716789AD-CAC3-AD41-B5C9-BF5C62A1889D}" type="datetimeFigureOut">
               <a:rPr kumimoji="1" lang="ja-JP" altLang="en-US" smtClean="0"/>
-              <a:t>2026/4/27</a:t>
+              <a:t>2026/4/28</a:t>
             </a:fld>
             <a:endParaRPr kumimoji="1" lang="ja-JP" altLang="en-US"/>
           </a:p>
@@ -973,7 +1442,7 @@
           <a:p>
             <a:fld id="{716789AD-CAC3-AD41-B5C9-BF5C62A1889D}" type="datetimeFigureOut">
               <a:rPr kumimoji="1" lang="ja-JP" altLang="en-US" smtClean="0"/>
-              <a:t>2026/4/27</a:t>
+              <a:t>2026/4/28</a:t>
             </a:fld>
             <a:endParaRPr kumimoji="1" lang="ja-JP" altLang="en-US"/>
           </a:p>
@@ -1248,7 +1717,7 @@
           <a:p>
             <a:fld id="{716789AD-CAC3-AD41-B5C9-BF5C62A1889D}" type="datetimeFigureOut">
               <a:rPr kumimoji="1" lang="ja-JP" altLang="en-US" smtClean="0"/>
-              <a:t>2026/4/27</a:t>
+              <a:t>2026/4/28</a:t>
             </a:fld>
             <a:endParaRPr kumimoji="1" lang="ja-JP" altLang="en-US"/>
           </a:p>
@@ -1577,7 +2046,7 @@
           <a:p>
             <a:fld id="{716789AD-CAC3-AD41-B5C9-BF5C62A1889D}" type="datetimeFigureOut">
               <a:rPr kumimoji="1" lang="ja-JP" altLang="en-US" smtClean="0"/>
-              <a:t>2026/4/27</a:t>
+              <a:t>2026/4/28</a:t>
             </a:fld>
             <a:endParaRPr kumimoji="1" lang="ja-JP" altLang="en-US"/>
           </a:p>
@@ -2053,7 +2522,7 @@
           <a:p>
             <a:fld id="{716789AD-CAC3-AD41-B5C9-BF5C62A1889D}" type="datetimeFigureOut">
               <a:rPr kumimoji="1" lang="ja-JP" altLang="en-US" smtClean="0"/>
-              <a:t>2026/4/27</a:t>
+              <a:t>2026/4/28</a:t>
             </a:fld>
             <a:endParaRPr kumimoji="1" lang="ja-JP" altLang="en-US"/>
           </a:p>
@@ -2194,7 +2663,7 @@
           <a:p>
             <a:fld id="{716789AD-CAC3-AD41-B5C9-BF5C62A1889D}" type="datetimeFigureOut">
               <a:rPr kumimoji="1" lang="ja-JP" altLang="en-US" smtClean="0"/>
-              <a:t>2026/4/27</a:t>
+              <a:t>2026/4/28</a:t>
             </a:fld>
             <a:endParaRPr kumimoji="1" lang="ja-JP" altLang="en-US"/>
           </a:p>
@@ -2307,7 +2776,7 @@
           <a:p>
             <a:fld id="{716789AD-CAC3-AD41-B5C9-BF5C62A1889D}" type="datetimeFigureOut">
               <a:rPr kumimoji="1" lang="ja-JP" altLang="en-US" smtClean="0"/>
-              <a:t>2026/4/27</a:t>
+              <a:t>2026/4/28</a:t>
             </a:fld>
             <a:endParaRPr kumimoji="1" lang="ja-JP" altLang="en-US"/>
           </a:p>
@@ -2650,7 +3119,7 @@
           <a:p>
             <a:fld id="{716789AD-CAC3-AD41-B5C9-BF5C62A1889D}" type="datetimeFigureOut">
               <a:rPr kumimoji="1" lang="ja-JP" altLang="en-US" smtClean="0"/>
-              <a:t>2026/4/27</a:t>
+              <a:t>2026/4/28</a:t>
             </a:fld>
             <a:endParaRPr kumimoji="1" lang="ja-JP" altLang="en-US"/>
           </a:p>
@@ -2938,7 +3407,7 @@
           <a:p>
             <a:fld id="{716789AD-CAC3-AD41-B5C9-BF5C62A1889D}" type="datetimeFigureOut">
               <a:rPr kumimoji="1" lang="ja-JP" altLang="en-US" smtClean="0"/>
-              <a:t>2026/4/27</a:t>
+              <a:t>2026/4/28</a:t>
             </a:fld>
             <a:endParaRPr kumimoji="1" lang="ja-JP" altLang="en-US"/>
           </a:p>
@@ -3211,7 +3680,7 @@
           <a:p>
             <a:fld id="{716789AD-CAC3-AD41-B5C9-BF5C62A1889D}" type="datetimeFigureOut">
               <a:rPr kumimoji="1" lang="ja-JP" altLang="en-US" smtClean="0"/>
-              <a:t>2026/4/27</a:t>
+              <a:t>2026/4/28</a:t>
             </a:fld>
             <a:endParaRPr kumimoji="1" lang="ja-JP" altLang="en-US"/>
           </a:p>
@@ -3892,7 +4361,7 @@
         <p:cNvPr id="1" name="">
           <a:extLst>
             <a:ext uri="{FF2B5EF4-FFF2-40B4-BE49-F238E27FC236}">
-              <a16:creationId xmlns:a16="http://schemas.microsoft.com/office/drawing/2014/main" id="{DC0D387A-1453-95D2-ECE4-F0F5846A713A}"/>
+              <a16:creationId xmlns:a16="http://schemas.microsoft.com/office/drawing/2014/main" id="{B41F33F5-0DFD-B6B1-3D10-353348B2241A}"/>
             </a:ext>
           </a:extLst>
         </p:cNvPr>
@@ -3912,7 +4381,7 @@
           <p:cNvPr id="2" name="タイトル 1">
             <a:extLst>
               <a:ext uri="{FF2B5EF4-FFF2-40B4-BE49-F238E27FC236}">
-                <a16:creationId xmlns:a16="http://schemas.microsoft.com/office/drawing/2014/main" id="{5B2EEC0A-3EFA-7A7C-9D24-A9AAFD07EE0F}"/>
+                <a16:creationId xmlns:a16="http://schemas.microsoft.com/office/drawing/2014/main" id="{F3E65BD0-3870-7275-2979-ADFDF5B91F29}"/>
               </a:ext>
             </a:extLst>
           </p:cNvPr>
@@ -3942,25 +4411,25 @@
           <a:p>
             <a:r>
               <a:rPr kumimoji="1" lang="ja-JP" altLang="en-US" sz="3600"/>
-              <a:t>マテリアル・方法（</a:t>
-            </a:r>
-            <a:r>
-              <a:rPr kumimoji="1" lang="en-US" altLang="ja-JP" sz="3600"/>
-              <a:t>JSON</a:t>
+              <a:t>マテリアル・方法（使用した</a:t>
+            </a:r>
+            <a:r>
+              <a:rPr kumimoji="1" lang="en-US" altLang="ja-JP" sz="3600" dirty="0"/>
+              <a:t>AI</a:t>
             </a:r>
             <a:r>
               <a:rPr kumimoji="1" lang="ja-JP" altLang="en-US" sz="3600"/>
-              <a:t>形式の例）</a:t>
-            </a:r>
-          </a:p>
-        </p:txBody>
-      </p:sp>
-      <p:sp>
-        <p:nvSpPr>
-          <p:cNvPr id="4" name="テキスト ボックス 3">
-            <a:extLst>
-              <a:ext uri="{FF2B5EF4-FFF2-40B4-BE49-F238E27FC236}">
-                <a16:creationId xmlns:a16="http://schemas.microsoft.com/office/drawing/2014/main" id="{605A0A9E-028F-F0D6-C3A3-7E6D8D398283}"/>
+              <a:t>・人への依頼条件等）</a:t>
+            </a:r>
+          </a:p>
+        </p:txBody>
+      </p:sp>
+      <p:sp>
+        <p:nvSpPr>
+          <p:cNvPr id="3" name="テキスト ボックス 2">
+            <a:extLst>
+              <a:ext uri="{FF2B5EF4-FFF2-40B4-BE49-F238E27FC236}">
+                <a16:creationId xmlns:a16="http://schemas.microsoft.com/office/drawing/2014/main" id="{8BA2003B-4A17-493F-5A7F-053901E11698}"/>
               </a:ext>
             </a:extLst>
           </p:cNvPr>
@@ -3969,467 +4438,8 @@
         </p:nvSpPr>
         <p:spPr>
           <a:xfrm>
-            <a:off x="1" y="1128588"/>
-            <a:ext cx="12191999" cy="3693319"/>
-          </a:xfrm>
-          <a:prstGeom prst="rect">
-            <a:avLst/>
-          </a:prstGeom>
-          <a:noFill/>
-        </p:spPr>
-        <p:txBody>
-          <a:bodyPr wrap="square" rtlCol="0">
-            <a:spAutoFit/>
-          </a:bodyPr>
-          <a:lstStyle/>
-          <a:p>
-            <a:r>
-              <a:rPr lang="en-US" altLang="ja-JP"/>
-              <a:t>[</a:t>
-            </a:r>
-            <a:r>
-              <a:rPr lang="en-US" altLang="ja-JP">
-                <a:highlight>
-                  <a:srgbClr val="808080"/>
-                </a:highlight>
-              </a:rPr>
-              <a:t>["</a:t>
-            </a:r>
-            <a:r>
-              <a:rPr lang="ja-JP" altLang="en-US">
-                <a:highlight>
-                  <a:srgbClr val="808080"/>
-                </a:highlight>
-              </a:rPr>
-              <a:t>成</a:t>
-            </a:r>
-            <a:r>
-              <a:rPr lang="en-US" altLang="ja-JP">
-                <a:highlight>
-                  <a:srgbClr val="808080"/>
-                </a:highlight>
-              </a:rPr>
-              <a:t>","</a:t>
-            </a:r>
-            <a:r>
-              <a:rPr lang="ja-JP" altLang="en-US">
-                <a:highlight>
-                  <a:srgbClr val="808080"/>
-                </a:highlight>
-              </a:rPr>
-              <a:t>成</a:t>
-            </a:r>
-            <a:r>
-              <a:rPr lang="en-US" altLang="ja-JP">
-                <a:highlight>
-                  <a:srgbClr val="808080"/>
-                </a:highlight>
-              </a:rPr>
-              <a:t>"]</a:t>
-            </a:r>
-            <a:r>
-              <a:rPr lang="en-US" altLang="ja-JP"/>
-              <a:t>,</a:t>
-            </a:r>
-            <a:r>
-              <a:rPr lang="en-US" altLang="ja-JP" u="sng"/>
-              <a:t>["</a:t>
-            </a:r>
-            <a:r>
-              <a:rPr lang="ja-JP" altLang="en-US" u="sng"/>
-              <a:t>成</a:t>
-            </a:r>
-            <a:r>
-              <a:rPr lang="en-US" altLang="ja-JP" u="sng"/>
-              <a:t>","</a:t>
-            </a:r>
-            <a:r>
-              <a:rPr lang="ja-JP" altLang="en-US" u="sng"/>
-              <a:t>成</a:t>
-            </a:r>
-            <a:r>
-              <a:rPr lang="en-US" altLang="ja-JP" u="sng"/>
-              <a:t>"]</a:t>
-            </a:r>
-            <a:r>
-              <a:rPr lang="en-US" altLang="ja-JP"/>
-              <a:t>,</a:t>
-            </a:r>
-            <a:r>
-              <a:rPr lang="en-US" altLang="ja-JP">
-                <a:highlight>
-                  <a:srgbClr val="808080"/>
-                </a:highlight>
-              </a:rPr>
-              <a:t>"</a:t>
-            </a:r>
-            <a:r>
-              <a:rPr lang="ja-JP" altLang="en-US">
-                <a:highlight>
-                  <a:srgbClr val="808080"/>
-                </a:highlight>
-              </a:rPr>
-              <a:t>情報通信工学 </a:t>
-            </a:r>
-            <a:r>
-              <a:rPr lang="en-US" altLang="ja-JP">
-                <a:highlight>
-                  <a:srgbClr val="808080"/>
-                </a:highlight>
-              </a:rPr>
-              <a:t>/ </a:t>
-            </a:r>
-            <a:r>
-              <a:rPr lang="ja-JP" altLang="en-US">
-                <a:highlight>
-                  <a:srgbClr val="808080"/>
-                </a:highlight>
-              </a:rPr>
-              <a:t>電気電子工学 </a:t>
-            </a:r>
-            <a:r>
-              <a:rPr lang="en-US" altLang="ja-JP">
-                <a:highlight>
-                  <a:srgbClr val="808080"/>
-                </a:highlight>
-              </a:rPr>
-              <a:t>/ </a:t>
-            </a:r>
-            <a:r>
-              <a:rPr lang="ja-JP" altLang="en-US">
-                <a:highlight>
-                  <a:srgbClr val="808080"/>
-                </a:highlight>
-              </a:rPr>
-              <a:t>工学</a:t>
-            </a:r>
-            <a:r>
-              <a:rPr lang="en-US" altLang="ja-JP">
-                <a:highlight>
-                  <a:srgbClr val="808080"/>
-                </a:highlight>
-              </a:rPr>
-              <a:t>"</a:t>
-            </a:r>
-            <a:r>
-              <a:rPr lang="en-US" altLang="ja-JP"/>
-              <a:t>,["</a:t>
-            </a:r>
-            <a:r>
-              <a:rPr lang="ja-JP" altLang="en-US"/>
-              <a:t>高品質極薄</a:t>
-            </a:r>
-            <a:r>
-              <a:rPr lang="en" altLang="ja-JP"/>
-              <a:t>Si</a:t>
-            </a:r>
-            <a:r>
-              <a:rPr lang="ja-JP" altLang="en-US"/>
-              <a:t>系絶縁膜の低温形成と機能評価に関する研究</a:t>
-            </a:r>
-            <a:r>
-              <a:rPr lang="en-US" altLang="ja-JP"/>
-              <a:t>","09650363"," ","</a:t>
-            </a:r>
-            <a:r>
-              <a:rPr lang="ja-JP" altLang="en-US"/>
-              <a:t>本研究では、高活性なプラズマの生成が容易に実現できる</a:t>
-            </a:r>
-            <a:r>
-              <a:rPr lang="en" altLang="ja-JP"/>
-              <a:t>ECR(Electron Cyclotron Resonance)</a:t>
-            </a:r>
-            <a:r>
-              <a:rPr lang="ja-JP" altLang="en-US"/>
-              <a:t>マイクロ波プラズマと</a:t>
-            </a:r>
-            <a:r>
-              <a:rPr lang="en" altLang="ja-JP"/>
-              <a:t>Si</a:t>
-            </a:r>
-            <a:r>
-              <a:rPr lang="ja-JP" altLang="en-US"/>
-              <a:t>ターゲットからのスパッタリングを組み合わせた</a:t>
-            </a:r>
-            <a:r>
-              <a:rPr lang="en" altLang="ja-JP"/>
-              <a:t>ECR</a:t>
-            </a:r>
-            <a:r>
-              <a:rPr lang="ja-JP" altLang="en-US"/>
-              <a:t>スパッタ法を用いて、</a:t>
-            </a:r>
-            <a:r>
-              <a:rPr lang="en" altLang="ja-JP"/>
-              <a:t>Si</a:t>
-            </a:r>
-            <a:r>
-              <a:rPr lang="ja-JP" altLang="en-US"/>
-              <a:t>系絶縁膜を低温で堆積するプロセス技術を確立し、堆積された膜の機能性を発現させることを目的としている。この研究で得られた成果は、以下の通りである。 </a:t>
-            </a:r>
-            <a:r>
-              <a:rPr lang="en-US" altLang="ja-JP"/>
-              <a:t>(1) </a:t>
-            </a:r>
-            <a:r>
-              <a:rPr lang="ja-JP" altLang="en-US"/>
-              <a:t>プラズマ条件を最適化</a:t>
-            </a:r>
-          </a:p>
-          <a:p>
-            <a:r>
-              <a:rPr lang="ja-JP" altLang="en-US"/>
-              <a:t>することにより、</a:t>
-            </a:r>
-            <a:r>
-              <a:rPr lang="en-US" altLang="ja-JP"/>
-              <a:t>130℃</a:t>
-            </a:r>
-            <a:r>
-              <a:rPr lang="ja-JP" altLang="en-US"/>
-              <a:t>の低温で成膜速度</a:t>
-            </a:r>
-            <a:r>
-              <a:rPr lang="en-US" altLang="ja-JP"/>
-              <a:t>23</a:t>
-            </a:r>
-            <a:r>
-              <a:rPr lang="en" altLang="ja-JP"/>
-              <a:t>nm/min</a:t>
-            </a:r>
-            <a:r>
-              <a:rPr lang="ja-JP" altLang="en"/>
-              <a:t>、</a:t>
-            </a:r>
-            <a:r>
-              <a:rPr lang="ja-JP" altLang="en-US"/>
-              <a:t>絶縁破壊電界</a:t>
-            </a:r>
-            <a:r>
-              <a:rPr lang="en-US" altLang="ja-JP"/>
-              <a:t>10</a:t>
-            </a:r>
-            <a:r>
-              <a:rPr lang="en" altLang="ja-JP"/>
-              <a:t>MV/cm</a:t>
-            </a:r>
-            <a:r>
-              <a:rPr lang="ja-JP" altLang="en-US"/>
-              <a:t>を有する</a:t>
-            </a:r>
-            <a:r>
-              <a:rPr lang="en" altLang="ja-JP"/>
-              <a:t>Si</a:t>
-            </a:r>
-            <a:r>
-              <a:rPr lang="ja-JP" altLang="en-US"/>
-              <a:t>酸化</a:t>
-            </a:r>
-          </a:p>
-          <a:p>
-            <a:r>
-              <a:rPr lang="ja-JP" altLang="en-US"/>
-              <a:t>膜を形成する技術を確立した。 </a:t>
-            </a:r>
-            <a:r>
-              <a:rPr lang="en-US" altLang="ja-JP"/>
-              <a:t>(2) </a:t>
-            </a:r>
-            <a:r>
-              <a:rPr lang="en" altLang="ja-JP"/>
-              <a:t>Si</a:t>
-            </a:r>
-            <a:r>
-              <a:rPr lang="ja-JP" altLang="en-US"/>
-              <a:t>酸化膜堆積前にプラズマ酸化処理を行い、それに</a:t>
-            </a:r>
-          </a:p>
-          <a:p>
-            <a:r>
-              <a:rPr lang="ja-JP" altLang="en-US"/>
-              <a:t>続く</a:t>
-            </a:r>
-            <a:r>
-              <a:rPr lang="en-US" altLang="ja-JP"/>
-              <a:t>130℃</a:t>
-            </a:r>
-            <a:r>
-              <a:rPr lang="ja-JP" altLang="en-US"/>
-              <a:t>での低温堆積と</a:t>
-            </a:r>
-            <a:r>
-              <a:rPr lang="en-US" altLang="ja-JP"/>
-              <a:t>450℃</a:t>
-            </a:r>
-            <a:r>
-              <a:rPr lang="ja-JP" altLang="en-US"/>
-              <a:t>でのアニールにより、</a:t>
-            </a:r>
-            <a:r>
-              <a:rPr lang="en-US" altLang="ja-JP"/>
-              <a:t>9</a:t>
-            </a:r>
-            <a:r>
-              <a:rPr lang="en" altLang="ja-JP"/>
-              <a:t>nm</a:t>
-            </a:r>
-            <a:r>
-              <a:rPr lang="ja-JP" altLang="en-US"/>
-              <a:t>の極薄</a:t>
-            </a:r>
-            <a:r>
-              <a:rPr lang="en" altLang="ja-JP"/>
-              <a:t>Si</a:t>
-            </a:r>
-            <a:r>
-              <a:rPr lang="ja-JP" altLang="en-US"/>
-              <a:t>酸化膜の低温形成プロセ</a:t>
-            </a:r>
-          </a:p>
-          <a:p>
-            <a:r>
-              <a:rPr lang="ja-JP" altLang="en-US"/>
-              <a:t>スを確立した。この</a:t>
-            </a:r>
-            <a:r>
-              <a:rPr lang="en" altLang="ja-JP"/>
-              <a:t>Si</a:t>
-            </a:r>
-            <a:r>
-              <a:rPr lang="ja-JP" altLang="en-US"/>
-              <a:t>酸化膜は、絶縁破壊電界</a:t>
-            </a:r>
-            <a:r>
-              <a:rPr lang="en-US" altLang="ja-JP"/>
-              <a:t>9</a:t>
-            </a:r>
-            <a:r>
-              <a:rPr lang="en" altLang="ja-JP"/>
-              <a:t>MV/cm</a:t>
-            </a:r>
-            <a:r>
-              <a:rPr lang="ja-JP" altLang="en"/>
-              <a:t>、</a:t>
-            </a:r>
-            <a:r>
-              <a:rPr lang="ja-JP" altLang="en-US"/>
-              <a:t>界面準位密度</a:t>
-            </a:r>
-            <a:r>
-              <a:rPr lang="en-US" altLang="ja-JP"/>
-              <a:t>1</a:t>
-            </a:r>
-            <a:r>
-              <a:rPr lang="en" altLang="ja-JP"/>
-              <a:t>x10^&lt;11&gt;cm^&lt;-2&gt;eV^&lt;-1&gt;</a:t>
-            </a:r>
-            <a:r>
-              <a:rPr lang="ja-JP" altLang="en-US"/>
-              <a:t>以下、固定電荷密度</a:t>
-            </a:r>
-            <a:r>
-              <a:rPr lang="en-US" altLang="ja-JP"/>
-              <a:t>1</a:t>
-            </a:r>
-            <a:r>
-              <a:rPr lang="en" altLang="ja-JP"/>
-              <a:t>x10^&lt;11&gt;cm^&lt;-2&gt;</a:t>
-            </a:r>
-            <a:r>
-              <a:rPr lang="ja-JP" altLang="en-US"/>
-              <a:t>以下の機能を有する。 </a:t>
-            </a:r>
-            <a:r>
-              <a:rPr lang="en-US" altLang="ja-JP"/>
-              <a:t>(3) </a:t>
-            </a:r>
-            <a:r>
-              <a:rPr lang="ja-JP" altLang="en-US"/>
-              <a:t>酸素と窒素の混合プラズマを用いてプラズマ条件を最適化することにより、</a:t>
-            </a:r>
-            <a:r>
-              <a:rPr lang="en-US" altLang="ja-JP"/>
-              <a:t>130℃</a:t>
-            </a:r>
-            <a:r>
-              <a:rPr lang="ja-JP" altLang="en-US"/>
-              <a:t>の低温で、絶縁破壊電界</a:t>
-            </a:r>
-            <a:r>
-              <a:rPr lang="en-US" altLang="ja-JP"/>
-              <a:t>13</a:t>
-            </a:r>
-            <a:r>
-              <a:rPr lang="en" altLang="ja-JP"/>
-              <a:t>MV/cm</a:t>
-            </a:r>
-            <a:r>
-              <a:rPr lang="ja-JP" altLang="en-US"/>
-              <a:t>を有する</a:t>
-            </a:r>
-            <a:r>
-              <a:rPr lang="en" altLang="ja-JP"/>
-              <a:t>Si</a:t>
-            </a:r>
-            <a:r>
-              <a:rPr lang="ja-JP" altLang="en-US"/>
-              <a:t>酸窒化膜が形成できることを明らかにした。 </a:t>
-            </a:r>
-            <a:r>
-              <a:rPr lang="en-US" altLang="ja-JP"/>
-              <a:t>(4) </a:t>
-            </a:r>
-            <a:r>
-              <a:rPr lang="ja-JP" altLang="en-US"/>
-              <a:t>緻密な</a:t>
-            </a:r>
-            <a:r>
-              <a:rPr lang="en" altLang="ja-JP"/>
-              <a:t>SiN</a:t>
-            </a:r>
-            <a:r>
-              <a:rPr lang="ja-JP" altLang="en-US"/>
-              <a:t>膜が</a:t>
-            </a:r>
-            <a:r>
-              <a:rPr lang="en" altLang="ja-JP"/>
-              <a:t>ECR</a:t>
-            </a:r>
-            <a:r>
-              <a:rPr lang="ja-JP" altLang="en-US"/>
-              <a:t>スパッター法を用いて室温で堆積された。この窒化膜は、屈折率、赤外吸収、化学エッチングレイト等の特性は高温</a:t>
-            </a:r>
-            <a:r>
-              <a:rPr lang="en" altLang="ja-JP"/>
-              <a:t>CVD</a:t>
-            </a:r>
-            <a:r>
-              <a:rPr lang="ja-JP" altLang="en-US"/>
-              <a:t>で成膜したものと同等であることが明らかとなった。</a:t>
-            </a:r>
-            <a:r>
-              <a:rPr lang="en-US" altLang="ja-JP"/>
-              <a:t>"," "," "]]</a:t>
-            </a:r>
-          </a:p>
-        </p:txBody>
-      </p:sp>
-      <p:sp>
-        <p:nvSpPr>
-          <p:cNvPr id="5" name="テキスト ボックス 4">
-            <a:extLst>
-              <a:ext uri="{FF2B5EF4-FFF2-40B4-BE49-F238E27FC236}">
-                <a16:creationId xmlns:a16="http://schemas.microsoft.com/office/drawing/2014/main" id="{9C24996B-F6F7-4C7A-D224-CBE1D5484A48}"/>
-              </a:ext>
-            </a:extLst>
-          </p:cNvPr>
-          <p:cNvSpPr txBox="1"/>
-          <p:nvPr/>
-        </p:nvSpPr>
-        <p:spPr>
-          <a:xfrm>
-            <a:off x="-1" y="577517"/>
-            <a:ext cx="843501" cy="369332"/>
+            <a:off x="509156" y="748143"/>
+            <a:ext cx="1931939" cy="1200329"/>
           </a:xfrm>
           <a:prstGeom prst="rect">
             <a:avLst/>
@@ -4443,19 +4453,49 @@
           <a:lstStyle/>
           <a:p>
             <a:r>
-              <a:rPr kumimoji="1" lang="en-US" altLang="ja-JP" b="1"/>
-              <a:t>Input:</a:t>
-            </a:r>
-            <a:endParaRPr kumimoji="1" lang="ja-JP" altLang="en-US" b="1"/>
-          </a:p>
-        </p:txBody>
-      </p:sp>
-      <p:sp>
-        <p:nvSpPr>
-          <p:cNvPr id="6" name="テキスト ボックス 5">
-            <a:extLst>
-              <a:ext uri="{FF2B5EF4-FFF2-40B4-BE49-F238E27FC236}">
-                <a16:creationId xmlns:a16="http://schemas.microsoft.com/office/drawing/2014/main" id="{D998F3A7-0629-53CA-682F-82B5E7A90C5E}"/>
+              <a:rPr kumimoji="1" lang="en-US" altLang="ja-JP"/>
+              <a:t>AI</a:t>
+            </a:r>
+          </a:p>
+          <a:p>
+            <a:pPr marL="285750" indent="-285750">
+              <a:buFont typeface="Arial" panose="020B0604020202020204" pitchFamily="34" charset="0"/>
+              <a:buChar char="•"/>
+            </a:pPr>
+            <a:r>
+              <a:rPr lang="en-US" altLang="ja-JP"/>
+              <a:t>Gemma3 (4b)</a:t>
+            </a:r>
+          </a:p>
+          <a:p>
+            <a:pPr marL="285750" indent="-285750">
+              <a:buFont typeface="Arial" panose="020B0604020202020204" pitchFamily="34" charset="0"/>
+              <a:buChar char="•"/>
+            </a:pPr>
+            <a:r>
+              <a:rPr kumimoji="1" lang="en-US" altLang="ja-JP"/>
+              <a:t>Llama3 (8b)</a:t>
+            </a:r>
+          </a:p>
+          <a:p>
+            <a:pPr marL="285750" indent="-285750">
+              <a:buFont typeface="Arial" panose="020B0604020202020204" pitchFamily="34" charset="0"/>
+              <a:buChar char="•"/>
+            </a:pPr>
+            <a:r>
+              <a:rPr lang="en-US" altLang="ja-JP"/>
+              <a:t>Qwen3 (32b)</a:t>
+            </a:r>
+            <a:endParaRPr kumimoji="1" lang="ja-JP" altLang="en-US"/>
+          </a:p>
+        </p:txBody>
+      </p:sp>
+      <p:sp>
+        <p:nvSpPr>
+          <p:cNvPr id="4" name="テキスト ボックス 3">
+            <a:extLst>
+              <a:ext uri="{FF2B5EF4-FFF2-40B4-BE49-F238E27FC236}">
+                <a16:creationId xmlns:a16="http://schemas.microsoft.com/office/drawing/2014/main" id="{617ACA11-B918-E0C8-A874-3C29FCFB4845}"/>
               </a:ext>
             </a:extLst>
           </p:cNvPr>
@@ -4464,8 +4504,8 @@
         </p:nvSpPr>
         <p:spPr>
           <a:xfrm>
-            <a:off x="0" y="4988381"/>
-            <a:ext cx="2880917" cy="369332"/>
+            <a:off x="509156" y="2421076"/>
+            <a:ext cx="832279" cy="646331"/>
           </a:xfrm>
           <a:prstGeom prst="rect">
             <a:avLst/>
@@ -4479,31 +4519,34 @@
           <a:lstStyle/>
           <a:p>
             <a:r>
-              <a:rPr lang="en-US" altLang="ja-JP" b="1"/>
-              <a:t>Out</a:t>
-            </a:r>
-            <a:r>
-              <a:rPr kumimoji="1" lang="en-US" altLang="ja-JP" b="1"/>
-              <a:t>put</a:t>
-            </a:r>
-            <a:r>
-              <a:rPr kumimoji="1" lang="ja-JP" altLang="en-US" b="1"/>
-              <a:t>（想定する形式）</a:t>
-            </a:r>
-            <a:r>
-              <a:rPr kumimoji="1" lang="en-US" altLang="ja-JP" b="1"/>
-              <a:t>:</a:t>
-            </a:r>
-            <a:endParaRPr kumimoji="1" lang="ja-JP" altLang="en-US" b="1"/>
-          </a:p>
-        </p:txBody>
-      </p:sp>
-      <p:sp>
-        <p:nvSpPr>
-          <p:cNvPr id="7" name="テキスト ボックス 6">
-            <a:extLst>
-              <a:ext uri="{FF2B5EF4-FFF2-40B4-BE49-F238E27FC236}">
-                <a16:creationId xmlns:a16="http://schemas.microsoft.com/office/drawing/2014/main" id="{25003854-6FEC-4B77-4547-707EDD47058A}"/>
+              <a:rPr kumimoji="1" lang="ja-JP" altLang="en-US"/>
+              <a:t>人</a:t>
+            </a:r>
+            <a:endParaRPr kumimoji="1" lang="en-US" altLang="ja-JP"/>
+          </a:p>
+          <a:p>
+            <a:pPr marL="285750" indent="-285750">
+              <a:buFont typeface="Arial" panose="020B0604020202020204" pitchFamily="34" charset="0"/>
+              <a:buChar char="•"/>
+            </a:pPr>
+            <a:r>
+              <a:rPr lang="en-US" altLang="ja-JP"/>
+              <a:t>3</a:t>
+            </a:r>
+            <a:r>
+              <a:rPr lang="ja-JP" altLang="en-US"/>
+              <a:t>名</a:t>
+            </a:r>
+            <a:endParaRPr kumimoji="1" lang="ja-JP" altLang="en-US"/>
+          </a:p>
+        </p:txBody>
+      </p:sp>
+      <p:sp>
+        <p:nvSpPr>
+          <p:cNvPr id="5" name="テキスト ボックス 4">
+            <a:extLst>
+              <a:ext uri="{FF2B5EF4-FFF2-40B4-BE49-F238E27FC236}">
+                <a16:creationId xmlns:a16="http://schemas.microsoft.com/office/drawing/2014/main" id="{4B44D2CF-9DD3-943A-F884-1C2A76866132}"/>
               </a:ext>
             </a:extLst>
           </p:cNvPr>
@@ -4512,8 +4555,8 @@
         </p:nvSpPr>
         <p:spPr>
           <a:xfrm>
-            <a:off x="-1" y="5357713"/>
-            <a:ext cx="971741" cy="369332"/>
+            <a:off x="4070933" y="1064612"/>
+            <a:ext cx="7367723" cy="646331"/>
           </a:xfrm>
           <a:prstGeom prst="rect">
             <a:avLst/>
@@ -4526,17 +4569,64 @@
           </a:bodyPr>
           <a:lstStyle/>
           <a:p>
+            <a:pPr marL="285750" indent="-285750">
+              <a:buFont typeface="Arial" panose="020B0604020202020204" pitchFamily="34" charset="0"/>
+              <a:buChar char="•"/>
+            </a:pPr>
+            <a:r>
+              <a:rPr kumimoji="1" lang="ja-JP" altLang="en-US"/>
+              <a:t>ローカル環境（</a:t>
+            </a:r>
+            <a:r>
+              <a:rPr kumimoji="1" lang="en-US" altLang="ja-JP"/>
+              <a:t>Ollama</a:t>
+            </a:r>
+            <a:r>
+              <a:rPr kumimoji="1" lang="ja-JP" altLang="en-US"/>
+              <a:t>）による</a:t>
+            </a:r>
+            <a:r>
+              <a:rPr kumimoji="1" lang="en-US" altLang="ja-JP"/>
+              <a:t>1</a:t>
+            </a:r>
+            <a:r>
+              <a:rPr kumimoji="1" lang="ja-JP" altLang="en-US"/>
+              <a:t>ドキュメント</a:t>
+            </a:r>
+            <a:r>
+              <a:rPr kumimoji="1" lang="en-US" altLang="ja-JP"/>
+              <a:t>/1</a:t>
+            </a:r>
+            <a:r>
+              <a:rPr kumimoji="1" lang="ja-JP" altLang="en-US"/>
+              <a:t>クエリー</a:t>
+            </a:r>
+            <a:r>
+              <a:rPr kumimoji="1" lang="en-US" altLang="ja-JP"/>
+              <a:t>/1</a:t>
+            </a:r>
+            <a:r>
+              <a:rPr kumimoji="1" lang="ja-JP" altLang="en-US"/>
+              <a:t>回のみ</a:t>
+            </a:r>
+            <a:endParaRPr kumimoji="1" lang="en-US" altLang="ja-JP"/>
+          </a:p>
+          <a:p>
+            <a:pPr marL="285750" indent="-285750">
+              <a:buFont typeface="Arial" panose="020B0604020202020204" pitchFamily="34" charset="0"/>
+              <a:buChar char="•"/>
+            </a:pPr>
+            <a:r>
+              <a:rPr lang="ja-JP" altLang="en-US"/>
+              <a:t>総計</a:t>
+            </a:r>
             <a:r>
               <a:rPr lang="en-US" altLang="ja-JP"/>
-              <a:t>["</a:t>
+              <a:t>600</a:t>
             </a:r>
             <a:r>
               <a:rPr lang="ja-JP" altLang="en-US"/>
-              <a:t>成</a:t>
-            </a:r>
-            <a:r>
-              <a:rPr lang="en-US" altLang="ja-JP"/>
-              <a:t>",0]</a:t>
+              <a:t>クエリー</a:t>
             </a:r>
             <a:endParaRPr kumimoji="1" lang="ja-JP" altLang="en-US"/>
           </a:p>
@@ -4544,10 +4634,10 @@
       </p:sp>
       <p:sp>
         <p:nvSpPr>
-          <p:cNvPr id="8" name="テキスト ボックス 7">
-            <a:extLst>
-              <a:ext uri="{FF2B5EF4-FFF2-40B4-BE49-F238E27FC236}">
-                <a16:creationId xmlns:a16="http://schemas.microsoft.com/office/drawing/2014/main" id="{DA8703AE-573B-9728-A3C3-997C4B6E8C7F}"/>
+          <p:cNvPr id="7" name="テキスト ボックス 6">
+            <a:extLst>
+              <a:ext uri="{FF2B5EF4-FFF2-40B4-BE49-F238E27FC236}">
+                <a16:creationId xmlns:a16="http://schemas.microsoft.com/office/drawing/2014/main" id="{CACC1BA4-62B7-33A4-8398-8AC85962F4AC}"/>
               </a:ext>
             </a:extLst>
           </p:cNvPr>
@@ -4556,8 +4646,8 @@
         </p:nvSpPr>
         <p:spPr>
           <a:xfrm>
-            <a:off x="1856114" y="6034822"/>
-            <a:ext cx="3057247" cy="307777"/>
+            <a:off x="4070933" y="2605742"/>
+            <a:ext cx="4166525" cy="923330"/>
           </a:xfrm>
           <a:prstGeom prst="rect">
             <a:avLst/>
@@ -4570,238 +4660,43 @@
           </a:bodyPr>
           <a:lstStyle/>
           <a:p>
-            <a:r>
-              <a:rPr kumimoji="1" lang="ja-JP" altLang="en-US" sz="1400"/>
-              <a:t>地名と判定したものはそのまま残す</a:t>
-            </a:r>
-          </a:p>
-        </p:txBody>
-      </p:sp>
-      <p:sp>
-        <p:nvSpPr>
-          <p:cNvPr id="9" name="テキスト ボックス 8">
-            <a:extLst>
-              <a:ext uri="{FF2B5EF4-FFF2-40B4-BE49-F238E27FC236}">
-                <a16:creationId xmlns:a16="http://schemas.microsoft.com/office/drawing/2014/main" id="{6E3ED00A-3E53-034E-8909-DCE8C51D38E8}"/>
-              </a:ext>
-            </a:extLst>
-          </p:cNvPr>
-          <p:cNvSpPr txBox="1"/>
-          <p:nvPr/>
-        </p:nvSpPr>
-        <p:spPr>
-          <a:xfrm>
-            <a:off x="1669936" y="5727045"/>
-            <a:ext cx="3695242" cy="307777"/>
-          </a:xfrm>
-          <a:prstGeom prst="rect">
-            <a:avLst/>
-          </a:prstGeom>
-          <a:noFill/>
-        </p:spPr>
-        <p:txBody>
-          <a:bodyPr wrap="none" rtlCol="0">
-            <a:spAutoFit/>
-          </a:bodyPr>
-          <a:lstStyle/>
-          <a:p>
-            <a:r>
-              <a:rPr kumimoji="1" lang="ja-JP" altLang="en-US" sz="1400"/>
-              <a:t>地名でないと判定したものは</a:t>
-            </a:r>
-            <a:r>
-              <a:rPr kumimoji="1" lang="en-US" altLang="ja-JP" sz="1400"/>
-              <a:t>0</a:t>
-            </a:r>
-            <a:r>
-              <a:rPr kumimoji="1" lang="ja-JP" altLang="en-US" sz="1400"/>
-              <a:t>に置き換える</a:t>
-            </a:r>
-          </a:p>
-        </p:txBody>
-      </p:sp>
-      <p:sp>
-        <p:nvSpPr>
-          <p:cNvPr id="10" name="テキスト ボックス 9">
-            <a:extLst>
-              <a:ext uri="{FF2B5EF4-FFF2-40B4-BE49-F238E27FC236}">
-                <a16:creationId xmlns:a16="http://schemas.microsoft.com/office/drawing/2014/main" id="{B16125B5-381B-C4FD-2940-07DA429F3706}"/>
-              </a:ext>
-            </a:extLst>
-          </p:cNvPr>
-          <p:cNvSpPr txBox="1"/>
-          <p:nvPr/>
-        </p:nvSpPr>
-        <p:spPr>
-          <a:xfrm>
-            <a:off x="2660822" y="820811"/>
-            <a:ext cx="1447832" cy="307777"/>
-          </a:xfrm>
-          <a:prstGeom prst="rect">
-            <a:avLst/>
-          </a:prstGeom>
-          <a:noFill/>
-        </p:spPr>
-        <p:txBody>
-          <a:bodyPr wrap="none" rtlCol="0">
-            <a:spAutoFit/>
-          </a:bodyPr>
-          <a:lstStyle/>
-          <a:p>
-            <a:r>
-              <a:rPr kumimoji="1" lang="en-US" altLang="ja-JP" sz="1400"/>
-              <a:t>NER</a:t>
-            </a:r>
-            <a:r>
-              <a:rPr kumimoji="1" lang="ja-JP" altLang="en-US" sz="1400"/>
-              <a:t>による抽出</a:t>
-            </a:r>
-          </a:p>
-        </p:txBody>
-      </p:sp>
-      <p:cxnSp>
-        <p:nvCxnSpPr>
-          <p:cNvPr id="12" name="カギ線コネクタ 11">
-            <a:extLst>
-              <a:ext uri="{FF2B5EF4-FFF2-40B4-BE49-F238E27FC236}">
-                <a16:creationId xmlns:a16="http://schemas.microsoft.com/office/drawing/2014/main" id="{4CC0870C-CAFC-BCD1-A478-9144D0E96817}"/>
-              </a:ext>
-            </a:extLst>
-          </p:cNvPr>
-          <p:cNvCxnSpPr>
-            <a:stCxn id="10" idx="1"/>
-          </p:cNvCxnSpPr>
-          <p:nvPr/>
-        </p:nvCxnSpPr>
-        <p:spPr>
-          <a:xfrm rot="10800000" flipV="1">
-            <a:off x="1856114" y="974700"/>
-            <a:ext cx="804708" cy="153888"/>
-          </a:xfrm>
-          <a:prstGeom prst="bentConnector3">
-            <a:avLst>
-              <a:gd name="adj1" fmla="val 100162"/>
-            </a:avLst>
-          </a:prstGeom>
-          <a:ln w="12700">
-            <a:solidFill>
-              <a:schemeClr val="tx1"/>
-            </a:solidFill>
-            <a:tailEnd type="triangle"/>
-          </a:ln>
-        </p:spPr>
-        <p:style>
-          <a:lnRef idx="2">
-            <a:schemeClr val="accent1"/>
-          </a:lnRef>
-          <a:fillRef idx="0">
-            <a:schemeClr val="accent1"/>
-          </a:fillRef>
-          <a:effectRef idx="1">
-            <a:schemeClr val="accent1"/>
-          </a:effectRef>
-          <a:fontRef idx="minor">
-            <a:schemeClr val="tx1"/>
-          </a:fontRef>
-        </p:style>
-      </p:cxnSp>
-      <p:cxnSp>
-        <p:nvCxnSpPr>
-          <p:cNvPr id="15" name="カギ線コネクタ 14">
-            <a:extLst>
-              <a:ext uri="{FF2B5EF4-FFF2-40B4-BE49-F238E27FC236}">
-                <a16:creationId xmlns:a16="http://schemas.microsoft.com/office/drawing/2014/main" id="{BC8931FA-6C64-64C4-5D8D-9F0DD8164590}"/>
-              </a:ext>
-            </a:extLst>
-          </p:cNvPr>
-          <p:cNvCxnSpPr>
-            <a:stCxn id="9" idx="1"/>
-          </p:cNvCxnSpPr>
-          <p:nvPr/>
-        </p:nvCxnSpPr>
-        <p:spPr>
-          <a:xfrm rot="10800000">
-            <a:off x="706582" y="5727046"/>
-            <a:ext cx="963354" cy="153889"/>
-          </a:xfrm>
-          <a:prstGeom prst="bentConnector3">
-            <a:avLst>
-              <a:gd name="adj1" fmla="val 99616"/>
-            </a:avLst>
-          </a:prstGeom>
-          <a:ln w="12700">
-            <a:solidFill>
-              <a:schemeClr val="tx1"/>
-            </a:solidFill>
-            <a:tailEnd type="triangle"/>
-          </a:ln>
-        </p:spPr>
-        <p:style>
-          <a:lnRef idx="2">
-            <a:schemeClr val="accent1"/>
-          </a:lnRef>
-          <a:fillRef idx="0">
-            <a:schemeClr val="accent1"/>
-          </a:fillRef>
-          <a:effectRef idx="1">
-            <a:schemeClr val="accent1"/>
-          </a:effectRef>
-          <a:fontRef idx="minor">
-            <a:schemeClr val="tx1"/>
-          </a:fontRef>
-        </p:style>
-      </p:cxnSp>
-      <p:cxnSp>
-        <p:nvCxnSpPr>
-          <p:cNvPr id="18" name="カギ線コネクタ 17">
-            <a:extLst>
-              <a:ext uri="{FF2B5EF4-FFF2-40B4-BE49-F238E27FC236}">
-                <a16:creationId xmlns:a16="http://schemas.microsoft.com/office/drawing/2014/main" id="{B64DC262-5C37-8FCC-BC2B-71EB33CC94EE}"/>
-              </a:ext>
-            </a:extLst>
-          </p:cNvPr>
-          <p:cNvCxnSpPr>
-            <a:cxnSpLocks/>
-            <a:stCxn id="8" idx="1"/>
-          </p:cNvCxnSpPr>
-          <p:nvPr/>
-        </p:nvCxnSpPr>
-        <p:spPr>
-          <a:xfrm rot="10800000">
-            <a:off x="396974" y="5727045"/>
-            <a:ext cx="1459140" cy="461666"/>
-          </a:xfrm>
-          <a:prstGeom prst="bentConnector3">
-            <a:avLst>
-              <a:gd name="adj1" fmla="val 99849"/>
-            </a:avLst>
-          </a:prstGeom>
-          <a:ln w="12700">
-            <a:solidFill>
-              <a:schemeClr val="tx1"/>
-            </a:solidFill>
-            <a:tailEnd type="triangle"/>
-          </a:ln>
-        </p:spPr>
-        <p:style>
-          <a:lnRef idx="2">
-            <a:schemeClr val="accent1"/>
-          </a:lnRef>
-          <a:fillRef idx="0">
-            <a:schemeClr val="accent1"/>
-          </a:fillRef>
-          <a:effectRef idx="1">
-            <a:schemeClr val="accent1"/>
-          </a:effectRef>
-          <a:fontRef idx="minor">
-            <a:schemeClr val="tx1"/>
-          </a:fontRef>
-        </p:style>
-      </p:cxnSp>
+            <a:pPr marL="285750" indent="-285750">
+              <a:buFont typeface="Arial" panose="020B0604020202020204" pitchFamily="34" charset="0"/>
+              <a:buChar char="•"/>
+            </a:pPr>
+            <a:r>
+              <a:rPr lang="ja-JP" altLang="en-US"/>
+              <a:t>期限付き</a:t>
+            </a:r>
+            <a:endParaRPr lang="en-US" altLang="ja-JP"/>
+          </a:p>
+          <a:p>
+            <a:pPr marL="285750" indent="-285750">
+              <a:buFont typeface="Arial" panose="020B0604020202020204" pitchFamily="34" charset="0"/>
+              <a:buChar char="•"/>
+            </a:pPr>
+            <a:r>
+              <a:rPr lang="ja-JP" altLang="en-US"/>
+              <a:t>再提出化</a:t>
+            </a:r>
+            <a:endParaRPr lang="en-US" altLang="ja-JP"/>
+          </a:p>
+          <a:p>
+            <a:pPr marL="285750" indent="-285750">
+              <a:buFont typeface="Arial" panose="020B0604020202020204" pitchFamily="34" charset="0"/>
+              <a:buChar char="•"/>
+            </a:pPr>
+            <a:r>
+              <a:rPr kumimoji="1" lang="ja-JP" altLang="en-US"/>
+              <a:t>合議を妨げない（質問にも答える）</a:t>
+            </a:r>
+          </a:p>
+        </p:txBody>
+      </p:sp>
     </p:spTree>
     <p:extLst>
       <p:ext uri="{BB962C8B-B14F-4D97-AF65-F5344CB8AC3E}">
-        <p14:creationId xmlns:p14="http://schemas.microsoft.com/office/powerpoint/2010/main" val="2951289915"/>
+        <p14:creationId xmlns:p14="http://schemas.microsoft.com/office/powerpoint/2010/main" val="3135446820"/>
       </p:ext>
     </p:extLst>
   </p:cSld>
@@ -4819,7 +4714,7 @@
         <p:cNvPr id="1" name="">
           <a:extLst>
             <a:ext uri="{FF2B5EF4-FFF2-40B4-BE49-F238E27FC236}">
-              <a16:creationId xmlns:a16="http://schemas.microsoft.com/office/drawing/2014/main" id="{B41F33F5-0DFD-B6B1-3D10-353348B2241A}"/>
+              <a16:creationId xmlns:a16="http://schemas.microsoft.com/office/drawing/2014/main" id="{DC0D387A-1453-95D2-ECE4-F0F5846A713A}"/>
             </a:ext>
           </a:extLst>
         </p:cNvPr>
@@ -4839,7 +4734,7 @@
           <p:cNvPr id="2" name="タイトル 1">
             <a:extLst>
               <a:ext uri="{FF2B5EF4-FFF2-40B4-BE49-F238E27FC236}">
-                <a16:creationId xmlns:a16="http://schemas.microsoft.com/office/drawing/2014/main" id="{F3E65BD0-3870-7275-2979-ADFDF5B91F29}"/>
+                <a16:creationId xmlns:a16="http://schemas.microsoft.com/office/drawing/2014/main" id="{5B2EEC0A-3EFA-7A7C-9D24-A9AAFD07EE0F}"/>
               </a:ext>
             </a:extLst>
           </p:cNvPr>
@@ -4869,25 +4764,25 @@
           <a:p>
             <a:r>
               <a:rPr kumimoji="1" lang="ja-JP" altLang="en-US" sz="3600"/>
-              <a:t>マテリアル・方法（使用した</a:t>
-            </a:r>
-            <a:r>
-              <a:rPr kumimoji="1" lang="en-US" altLang="ja-JP" sz="3600" dirty="0"/>
-              <a:t>AI</a:t>
+              <a:t>マテリアル・方法（</a:t>
+            </a:r>
+            <a:r>
+              <a:rPr kumimoji="1" lang="en-US" altLang="ja-JP" sz="3600"/>
+              <a:t>JSON</a:t>
             </a:r>
             <a:r>
               <a:rPr kumimoji="1" lang="ja-JP" altLang="en-US" sz="3600"/>
-              <a:t>・人への依頼条件等）</a:t>
-            </a:r>
-          </a:p>
-        </p:txBody>
-      </p:sp>
-      <p:sp>
-        <p:nvSpPr>
-          <p:cNvPr id="3" name="テキスト ボックス 2">
-            <a:extLst>
-              <a:ext uri="{FF2B5EF4-FFF2-40B4-BE49-F238E27FC236}">
-                <a16:creationId xmlns:a16="http://schemas.microsoft.com/office/drawing/2014/main" id="{8BA2003B-4A17-493F-5A7F-053901E11698}"/>
+              <a:t>形式の例）</a:t>
+            </a:r>
+          </a:p>
+        </p:txBody>
+      </p:sp>
+      <p:sp>
+        <p:nvSpPr>
+          <p:cNvPr id="4" name="テキスト ボックス 3">
+            <a:extLst>
+              <a:ext uri="{FF2B5EF4-FFF2-40B4-BE49-F238E27FC236}">
+                <a16:creationId xmlns:a16="http://schemas.microsoft.com/office/drawing/2014/main" id="{605A0A9E-028F-F0D6-C3A3-7E6D8D398283}"/>
               </a:ext>
             </a:extLst>
           </p:cNvPr>
@@ -4896,8 +4791,443 @@
         </p:nvSpPr>
         <p:spPr>
           <a:xfrm>
-            <a:off x="509156" y="748143"/>
-            <a:ext cx="1931939" cy="1200329"/>
+            <a:off x="1" y="1201740"/>
+            <a:ext cx="12045695" cy="3416320"/>
+          </a:xfrm>
+          <a:prstGeom prst="rect">
+            <a:avLst/>
+          </a:prstGeom>
+          <a:noFill/>
+        </p:spPr>
+        <p:txBody>
+          <a:bodyPr wrap="square" rtlCol="0">
+            <a:spAutoFit/>
+          </a:bodyPr>
+          <a:lstStyle/>
+          <a:p>
+            <a:r>
+              <a:rPr lang="en-US" altLang="ja-JP" dirty="0"/>
+              <a:t>[</a:t>
+            </a:r>
+            <a:r>
+              <a:rPr lang="en-US" altLang="ja-JP" dirty="0">
+                <a:highlight>
+                  <a:srgbClr val="808080"/>
+                </a:highlight>
+              </a:rPr>
+              <a:t>["</a:t>
+            </a:r>
+            <a:r>
+              <a:rPr lang="ja-JP" altLang="en-US">
+                <a:highlight>
+                  <a:srgbClr val="808080"/>
+                </a:highlight>
+              </a:rPr>
+              <a:t>成</a:t>
+            </a:r>
+            <a:r>
+              <a:rPr lang="en-US" altLang="ja-JP" dirty="0">
+                <a:highlight>
+                  <a:srgbClr val="808080"/>
+                </a:highlight>
+              </a:rPr>
+              <a:t>","</a:t>
+            </a:r>
+            <a:r>
+              <a:rPr lang="ja-JP" altLang="en-US">
+                <a:highlight>
+                  <a:srgbClr val="808080"/>
+                </a:highlight>
+              </a:rPr>
+              <a:t>成</a:t>
+            </a:r>
+            <a:r>
+              <a:rPr lang="en-US" altLang="ja-JP" dirty="0">
+                <a:highlight>
+                  <a:srgbClr val="808080"/>
+                </a:highlight>
+              </a:rPr>
+              <a:t>"]</a:t>
+            </a:r>
+            <a:r>
+              <a:rPr lang="en-US" altLang="ja-JP" dirty="0"/>
+              <a:t>,</a:t>
+            </a:r>
+            <a:r>
+              <a:rPr lang="en-US" altLang="ja-JP" u="sng" dirty="0"/>
+              <a:t>["</a:t>
+            </a:r>
+            <a:r>
+              <a:rPr lang="ja-JP" altLang="en-US" u="sng"/>
+              <a:t>成</a:t>
+            </a:r>
+            <a:r>
+              <a:rPr lang="en-US" altLang="ja-JP" u="sng" dirty="0"/>
+              <a:t>","</a:t>
+            </a:r>
+            <a:r>
+              <a:rPr lang="ja-JP" altLang="en-US" u="sng"/>
+              <a:t>成</a:t>
+            </a:r>
+            <a:r>
+              <a:rPr lang="en-US" altLang="ja-JP" u="sng" dirty="0"/>
+              <a:t>"]</a:t>
+            </a:r>
+            <a:r>
+              <a:rPr lang="en-US" altLang="ja-JP" dirty="0"/>
+              <a:t>,</a:t>
+            </a:r>
+            <a:r>
+              <a:rPr lang="en-US" altLang="ja-JP" dirty="0">
+                <a:highlight>
+                  <a:srgbClr val="808080"/>
+                </a:highlight>
+              </a:rPr>
+              <a:t>"</a:t>
+            </a:r>
+            <a:r>
+              <a:rPr lang="ja-JP" altLang="en-US">
+                <a:highlight>
+                  <a:srgbClr val="808080"/>
+                </a:highlight>
+              </a:rPr>
+              <a:t>情報通信工学 </a:t>
+            </a:r>
+            <a:r>
+              <a:rPr lang="en-US" altLang="ja-JP" dirty="0">
+                <a:highlight>
+                  <a:srgbClr val="808080"/>
+                </a:highlight>
+              </a:rPr>
+              <a:t>/ </a:t>
+            </a:r>
+            <a:r>
+              <a:rPr lang="ja-JP" altLang="en-US">
+                <a:highlight>
+                  <a:srgbClr val="808080"/>
+                </a:highlight>
+              </a:rPr>
+              <a:t>電気電子工学 </a:t>
+            </a:r>
+            <a:r>
+              <a:rPr lang="en-US" altLang="ja-JP" dirty="0">
+                <a:highlight>
+                  <a:srgbClr val="808080"/>
+                </a:highlight>
+              </a:rPr>
+              <a:t>/ </a:t>
+            </a:r>
+            <a:r>
+              <a:rPr lang="ja-JP" altLang="en-US">
+                <a:highlight>
+                  <a:srgbClr val="808080"/>
+                </a:highlight>
+              </a:rPr>
+              <a:t>工学</a:t>
+            </a:r>
+            <a:r>
+              <a:rPr lang="en-US" altLang="ja-JP" dirty="0">
+                <a:highlight>
+                  <a:srgbClr val="808080"/>
+                </a:highlight>
+              </a:rPr>
+              <a:t>"</a:t>
+            </a:r>
+            <a:r>
+              <a:rPr lang="en-US" altLang="ja-JP" dirty="0"/>
+              <a:t>,["</a:t>
+            </a:r>
+            <a:r>
+              <a:rPr lang="ja-JP" altLang="en-US"/>
+              <a:t>高品質極薄</a:t>
+            </a:r>
+            <a:r>
+              <a:rPr lang="en" altLang="ja-JP" dirty="0"/>
+              <a:t>Si</a:t>
+            </a:r>
+            <a:r>
+              <a:rPr lang="ja-JP" altLang="en-US"/>
+              <a:t>系絶縁膜の低温形成と機能評価に関する研究</a:t>
+            </a:r>
+            <a:r>
+              <a:rPr lang="en-US" altLang="ja-JP" dirty="0"/>
+              <a:t>","09650363"," ","</a:t>
+            </a:r>
+            <a:r>
+              <a:rPr lang="ja-JP" altLang="en-US"/>
+              <a:t>本研究では、高活性なプラズマの生成が容易に実現できる</a:t>
+            </a:r>
+            <a:r>
+              <a:rPr lang="en" altLang="ja-JP" dirty="0"/>
+              <a:t>ECR(Electron Cyclotron Resonance)</a:t>
+            </a:r>
+            <a:r>
+              <a:rPr lang="ja-JP" altLang="en-US"/>
+              <a:t>マイクロ波プラズマと</a:t>
+            </a:r>
+            <a:r>
+              <a:rPr lang="en" altLang="ja-JP" dirty="0"/>
+              <a:t>Si</a:t>
+            </a:r>
+            <a:r>
+              <a:rPr lang="ja-JP" altLang="en-US"/>
+              <a:t>ターゲットからのスパッタリングを組み合わせた</a:t>
+            </a:r>
+            <a:r>
+              <a:rPr lang="en" altLang="ja-JP" dirty="0"/>
+              <a:t>ECR</a:t>
+            </a:r>
+            <a:r>
+              <a:rPr lang="ja-JP" altLang="en-US"/>
+              <a:t>スパッタ法を用いて、</a:t>
+            </a:r>
+            <a:r>
+              <a:rPr lang="en" altLang="ja-JP" dirty="0"/>
+              <a:t>Si</a:t>
+            </a:r>
+            <a:r>
+              <a:rPr lang="ja-JP" altLang="en-US"/>
+              <a:t>系絶縁膜を低温で堆積するプロセス技術を確立し、堆積された膜の機能性を発現させることを目的としている。この研究で得られた成果は、以下の通りである。 </a:t>
+            </a:r>
+            <a:r>
+              <a:rPr lang="en-US" altLang="ja-JP" dirty="0"/>
+              <a:t>(1) </a:t>
+            </a:r>
+            <a:r>
+              <a:rPr lang="ja-JP" altLang="en-US"/>
+              <a:t>プラズマ条件を最適化することにより、</a:t>
+            </a:r>
+            <a:r>
+              <a:rPr lang="en-US" altLang="ja-JP" dirty="0"/>
+              <a:t>130℃</a:t>
+            </a:r>
+            <a:r>
+              <a:rPr lang="ja-JP" altLang="en-US"/>
+              <a:t>の低温で成膜速度</a:t>
+            </a:r>
+            <a:r>
+              <a:rPr lang="en-US" altLang="ja-JP" dirty="0"/>
+              <a:t>23</a:t>
+            </a:r>
+            <a:r>
+              <a:rPr lang="en" altLang="ja-JP" dirty="0"/>
+              <a:t>nm/min</a:t>
+            </a:r>
+            <a:r>
+              <a:rPr lang="ja-JP" altLang="en"/>
+              <a:t>、</a:t>
+            </a:r>
+            <a:r>
+              <a:rPr lang="ja-JP" altLang="en-US"/>
+              <a:t>絶縁破壊電界</a:t>
+            </a:r>
+            <a:r>
+              <a:rPr lang="en-US" altLang="ja-JP" dirty="0"/>
+              <a:t>10</a:t>
+            </a:r>
+            <a:r>
+              <a:rPr lang="en" altLang="ja-JP" dirty="0"/>
+              <a:t>MV/cm</a:t>
+            </a:r>
+            <a:r>
+              <a:rPr lang="ja-JP" altLang="en-US"/>
+              <a:t>を有する</a:t>
+            </a:r>
+            <a:r>
+              <a:rPr lang="en" altLang="ja-JP" dirty="0"/>
+              <a:t>Si</a:t>
+            </a:r>
+            <a:r>
+              <a:rPr lang="ja-JP" altLang="en-US"/>
+              <a:t>酸化膜を形成する技術を確立した。 </a:t>
+            </a:r>
+            <a:r>
+              <a:rPr lang="en-US" altLang="ja-JP" dirty="0"/>
+              <a:t>(2) </a:t>
+            </a:r>
+            <a:r>
+              <a:rPr lang="en" altLang="ja-JP" dirty="0"/>
+              <a:t>Si</a:t>
+            </a:r>
+            <a:r>
+              <a:rPr lang="ja-JP" altLang="en-US"/>
+              <a:t>酸化膜堆積前にプラズマ酸化処理を行い、それに続く</a:t>
+            </a:r>
+            <a:r>
+              <a:rPr lang="en-US" altLang="ja-JP" dirty="0"/>
+              <a:t>130℃</a:t>
+            </a:r>
+            <a:r>
+              <a:rPr lang="ja-JP" altLang="en-US"/>
+              <a:t>での低温堆積と</a:t>
+            </a:r>
+            <a:r>
+              <a:rPr lang="en-US" altLang="ja-JP" dirty="0"/>
+              <a:t>450℃</a:t>
+            </a:r>
+            <a:r>
+              <a:rPr lang="ja-JP" altLang="en-US"/>
+              <a:t>でのアニールにより、</a:t>
+            </a:r>
+            <a:r>
+              <a:rPr lang="en-US" altLang="ja-JP" dirty="0"/>
+              <a:t>9</a:t>
+            </a:r>
+            <a:r>
+              <a:rPr lang="en" altLang="ja-JP" dirty="0"/>
+              <a:t>nm</a:t>
+            </a:r>
+            <a:r>
+              <a:rPr lang="ja-JP" altLang="en-US"/>
+              <a:t>の極薄</a:t>
+            </a:r>
+            <a:r>
+              <a:rPr lang="en" altLang="ja-JP" dirty="0"/>
+              <a:t>Si</a:t>
+            </a:r>
+            <a:r>
+              <a:rPr lang="ja-JP" altLang="en-US"/>
+              <a:t>酸化膜の低温形成プロセスを確立した。この</a:t>
+            </a:r>
+            <a:r>
+              <a:rPr lang="en" altLang="ja-JP" dirty="0"/>
+              <a:t>Si</a:t>
+            </a:r>
+            <a:r>
+              <a:rPr lang="ja-JP" altLang="en-US"/>
+              <a:t>酸化膜は、絶縁破壊電界</a:t>
+            </a:r>
+            <a:r>
+              <a:rPr lang="en-US" altLang="ja-JP" dirty="0"/>
+              <a:t>9</a:t>
+            </a:r>
+            <a:r>
+              <a:rPr lang="en" altLang="ja-JP" dirty="0"/>
+              <a:t>MV/cm</a:t>
+            </a:r>
+            <a:r>
+              <a:rPr lang="ja-JP" altLang="en"/>
+              <a:t>、</a:t>
+            </a:r>
+            <a:r>
+              <a:rPr lang="ja-JP" altLang="en-US"/>
+              <a:t>界面準位密度</a:t>
+            </a:r>
+            <a:r>
+              <a:rPr lang="en-US" altLang="ja-JP" dirty="0"/>
+              <a:t>1</a:t>
+            </a:r>
+            <a:r>
+              <a:rPr lang="en" altLang="ja-JP" dirty="0"/>
+              <a:t>x10^&lt;11&gt;cm^&lt;-2&gt;eV^&lt;-1&gt;</a:t>
+            </a:r>
+            <a:r>
+              <a:rPr lang="ja-JP" altLang="en-US"/>
+              <a:t>以下、固定電荷密度</a:t>
+            </a:r>
+            <a:r>
+              <a:rPr lang="en-US" altLang="ja-JP" dirty="0"/>
+              <a:t>1</a:t>
+            </a:r>
+            <a:r>
+              <a:rPr lang="en" altLang="ja-JP" dirty="0"/>
+              <a:t>x10^&lt;11&gt;cm^&lt;-2&gt;</a:t>
+            </a:r>
+            <a:r>
+              <a:rPr lang="ja-JP" altLang="en-US"/>
+              <a:t>以下の機能を有する。 </a:t>
+            </a:r>
+            <a:r>
+              <a:rPr lang="en-US" altLang="ja-JP" dirty="0"/>
+              <a:t>(3) </a:t>
+            </a:r>
+            <a:r>
+              <a:rPr lang="ja-JP" altLang="en-US"/>
+              <a:t>酸素と窒素の混合プラズマを用いてプラズマ条件を最適化することにより、</a:t>
+            </a:r>
+            <a:r>
+              <a:rPr lang="en-US" altLang="ja-JP" dirty="0"/>
+              <a:t>130℃</a:t>
+            </a:r>
+            <a:r>
+              <a:rPr lang="ja-JP" altLang="en-US"/>
+              <a:t>の低温で、絶縁破壊電界</a:t>
+            </a:r>
+            <a:r>
+              <a:rPr lang="en-US" altLang="ja-JP" dirty="0"/>
+              <a:t>13</a:t>
+            </a:r>
+            <a:r>
+              <a:rPr lang="en" altLang="ja-JP" dirty="0"/>
+              <a:t>MV/cm</a:t>
+            </a:r>
+            <a:r>
+              <a:rPr lang="ja-JP" altLang="en-US"/>
+              <a:t>を有する</a:t>
+            </a:r>
+            <a:r>
+              <a:rPr lang="en" altLang="ja-JP" dirty="0"/>
+              <a:t>Si</a:t>
+            </a:r>
+            <a:r>
+              <a:rPr lang="ja-JP" altLang="en-US"/>
+              <a:t>酸窒化膜が形成できることを明らかにした。 </a:t>
+            </a:r>
+            <a:r>
+              <a:rPr lang="en-US" altLang="ja-JP" dirty="0"/>
+              <a:t>(4) </a:t>
+            </a:r>
+            <a:r>
+              <a:rPr lang="ja-JP" altLang="en-US"/>
+              <a:t>緻密な</a:t>
+            </a:r>
+            <a:r>
+              <a:rPr lang="en" altLang="ja-JP" dirty="0" err="1"/>
+              <a:t>SiN</a:t>
+            </a:r>
+            <a:r>
+              <a:rPr lang="ja-JP" altLang="en-US"/>
+              <a:t>膜が</a:t>
+            </a:r>
+            <a:r>
+              <a:rPr lang="en" altLang="ja-JP" dirty="0"/>
+              <a:t>ECR</a:t>
+            </a:r>
+            <a:r>
+              <a:rPr lang="ja-JP" altLang="en-US"/>
+              <a:t>スパッター法を用いて室温で堆積された。この窒化膜は、屈折率、赤外吸収、化学エッチングレイト等の特性は高温</a:t>
+            </a:r>
+            <a:r>
+              <a:rPr lang="en" altLang="ja-JP" dirty="0"/>
+              <a:t>CVD</a:t>
+            </a:r>
+            <a:r>
+              <a:rPr lang="ja-JP" altLang="en-US"/>
+              <a:t>で成膜したものと同等であることが明らかとなった。</a:t>
+            </a:r>
+            <a:r>
+              <a:rPr lang="en-US" altLang="ja-JP" dirty="0"/>
+              <a:t>"," "," "]]</a:t>
+            </a:r>
+          </a:p>
+        </p:txBody>
+      </p:sp>
+      <p:sp>
+        <p:nvSpPr>
+          <p:cNvPr id="5" name="テキスト ボックス 4">
+            <a:extLst>
+              <a:ext uri="{FF2B5EF4-FFF2-40B4-BE49-F238E27FC236}">
+                <a16:creationId xmlns:a16="http://schemas.microsoft.com/office/drawing/2014/main" id="{9C24996B-F6F7-4C7A-D224-CBE1D5484A48}"/>
+              </a:ext>
+            </a:extLst>
+          </p:cNvPr>
+          <p:cNvSpPr txBox="1"/>
+          <p:nvPr/>
+        </p:nvSpPr>
+        <p:spPr>
+          <a:xfrm>
+            <a:off x="-1" y="577517"/>
+            <a:ext cx="843501" cy="369332"/>
           </a:xfrm>
           <a:prstGeom prst="rect">
             <a:avLst/>
@@ -4911,49 +5241,19 @@
           <a:lstStyle/>
           <a:p>
             <a:r>
-              <a:rPr kumimoji="1" lang="en-US" altLang="ja-JP"/>
-              <a:t>AI</a:t>
-            </a:r>
-          </a:p>
-          <a:p>
-            <a:pPr marL="285750" indent="-285750">
-              <a:buFont typeface="Arial" panose="020B0604020202020204" pitchFamily="34" charset="0"/>
-              <a:buChar char="•"/>
-            </a:pPr>
-            <a:r>
-              <a:rPr lang="en-US" altLang="ja-JP"/>
-              <a:t>Gemma3 (4b)</a:t>
-            </a:r>
-          </a:p>
-          <a:p>
-            <a:pPr marL="285750" indent="-285750">
-              <a:buFont typeface="Arial" panose="020B0604020202020204" pitchFamily="34" charset="0"/>
-              <a:buChar char="•"/>
-            </a:pPr>
-            <a:r>
-              <a:rPr kumimoji="1" lang="en-US" altLang="ja-JP"/>
-              <a:t>Llama3 (8b)</a:t>
-            </a:r>
-          </a:p>
-          <a:p>
-            <a:pPr marL="285750" indent="-285750">
-              <a:buFont typeface="Arial" panose="020B0604020202020204" pitchFamily="34" charset="0"/>
-              <a:buChar char="•"/>
-            </a:pPr>
-            <a:r>
-              <a:rPr lang="en-US" altLang="ja-JP"/>
-              <a:t>Qwen3 (32b)</a:t>
-            </a:r>
-            <a:endParaRPr kumimoji="1" lang="ja-JP" altLang="en-US"/>
-          </a:p>
-        </p:txBody>
-      </p:sp>
-      <p:sp>
-        <p:nvSpPr>
-          <p:cNvPr id="4" name="テキスト ボックス 3">
-            <a:extLst>
-              <a:ext uri="{FF2B5EF4-FFF2-40B4-BE49-F238E27FC236}">
-                <a16:creationId xmlns:a16="http://schemas.microsoft.com/office/drawing/2014/main" id="{617ACA11-B918-E0C8-A874-3C29FCFB4845}"/>
+              <a:rPr kumimoji="1" lang="en-US" altLang="ja-JP" b="1"/>
+              <a:t>Input:</a:t>
+            </a:r>
+            <a:endParaRPr kumimoji="1" lang="ja-JP" altLang="en-US" b="1"/>
+          </a:p>
+        </p:txBody>
+      </p:sp>
+      <p:sp>
+        <p:nvSpPr>
+          <p:cNvPr id="6" name="テキスト ボックス 5">
+            <a:extLst>
+              <a:ext uri="{FF2B5EF4-FFF2-40B4-BE49-F238E27FC236}">
+                <a16:creationId xmlns:a16="http://schemas.microsoft.com/office/drawing/2014/main" id="{D998F3A7-0629-53CA-682F-82B5E7A90C5E}"/>
               </a:ext>
             </a:extLst>
           </p:cNvPr>
@@ -4962,8 +5262,8 @@
         </p:nvSpPr>
         <p:spPr>
           <a:xfrm>
-            <a:off x="509156" y="2421076"/>
-            <a:ext cx="832279" cy="646331"/>
+            <a:off x="0" y="4988381"/>
+            <a:ext cx="2880917" cy="369332"/>
           </a:xfrm>
           <a:prstGeom prst="rect">
             <a:avLst/>
@@ -4977,34 +5277,31 @@
           <a:lstStyle/>
           <a:p>
             <a:r>
-              <a:rPr kumimoji="1" lang="ja-JP" altLang="en-US"/>
-              <a:t>人</a:t>
-            </a:r>
-            <a:endParaRPr kumimoji="1" lang="en-US" altLang="ja-JP"/>
-          </a:p>
-          <a:p>
-            <a:pPr marL="285750" indent="-285750">
-              <a:buFont typeface="Arial" panose="020B0604020202020204" pitchFamily="34" charset="0"/>
-              <a:buChar char="•"/>
-            </a:pPr>
-            <a:r>
-              <a:rPr lang="en-US" altLang="ja-JP"/>
-              <a:t>3</a:t>
-            </a:r>
-            <a:r>
-              <a:rPr lang="ja-JP" altLang="en-US"/>
-              <a:t>名</a:t>
-            </a:r>
-            <a:endParaRPr kumimoji="1" lang="ja-JP" altLang="en-US"/>
-          </a:p>
-        </p:txBody>
-      </p:sp>
-      <p:sp>
-        <p:nvSpPr>
-          <p:cNvPr id="5" name="テキスト ボックス 4">
-            <a:extLst>
-              <a:ext uri="{FF2B5EF4-FFF2-40B4-BE49-F238E27FC236}">
-                <a16:creationId xmlns:a16="http://schemas.microsoft.com/office/drawing/2014/main" id="{4B44D2CF-9DD3-943A-F884-1C2A76866132}"/>
+              <a:rPr lang="en-US" altLang="ja-JP" b="1"/>
+              <a:t>Out</a:t>
+            </a:r>
+            <a:r>
+              <a:rPr kumimoji="1" lang="en-US" altLang="ja-JP" b="1"/>
+              <a:t>put</a:t>
+            </a:r>
+            <a:r>
+              <a:rPr kumimoji="1" lang="ja-JP" altLang="en-US" b="1"/>
+              <a:t>（想定する形式）</a:t>
+            </a:r>
+            <a:r>
+              <a:rPr kumimoji="1" lang="en-US" altLang="ja-JP" b="1"/>
+              <a:t>:</a:t>
+            </a:r>
+            <a:endParaRPr kumimoji="1" lang="ja-JP" altLang="en-US" b="1"/>
+          </a:p>
+        </p:txBody>
+      </p:sp>
+      <p:sp>
+        <p:nvSpPr>
+          <p:cNvPr id="7" name="テキスト ボックス 6">
+            <a:extLst>
+              <a:ext uri="{FF2B5EF4-FFF2-40B4-BE49-F238E27FC236}">
+                <a16:creationId xmlns:a16="http://schemas.microsoft.com/office/drawing/2014/main" id="{25003854-6FEC-4B77-4547-707EDD47058A}"/>
               </a:ext>
             </a:extLst>
           </p:cNvPr>
@@ -5013,8 +5310,8 @@
         </p:nvSpPr>
         <p:spPr>
           <a:xfrm>
-            <a:off x="4070933" y="1064612"/>
-            <a:ext cx="7367723" cy="646331"/>
+            <a:off x="-1" y="5357713"/>
+            <a:ext cx="971741" cy="369332"/>
           </a:xfrm>
           <a:prstGeom prst="rect">
             <a:avLst/>
@@ -5027,64 +5324,17 @@
           </a:bodyPr>
           <a:lstStyle/>
           <a:p>
-            <a:pPr marL="285750" indent="-285750">
-              <a:buFont typeface="Arial" panose="020B0604020202020204" pitchFamily="34" charset="0"/>
-              <a:buChar char="•"/>
-            </a:pPr>
-            <a:r>
-              <a:rPr kumimoji="1" lang="ja-JP" altLang="en-US"/>
-              <a:t>ローカル環境（</a:t>
-            </a:r>
-            <a:r>
-              <a:rPr kumimoji="1" lang="en-US" altLang="ja-JP"/>
-              <a:t>Ollama</a:t>
-            </a:r>
-            <a:r>
-              <a:rPr kumimoji="1" lang="ja-JP" altLang="en-US"/>
-              <a:t>）による</a:t>
-            </a:r>
-            <a:r>
-              <a:rPr kumimoji="1" lang="en-US" altLang="ja-JP"/>
-              <a:t>1</a:t>
-            </a:r>
-            <a:r>
-              <a:rPr kumimoji="1" lang="ja-JP" altLang="en-US"/>
-              <a:t>ドキュメント</a:t>
-            </a:r>
-            <a:r>
-              <a:rPr kumimoji="1" lang="en-US" altLang="ja-JP"/>
-              <a:t>/1</a:t>
-            </a:r>
-            <a:r>
-              <a:rPr kumimoji="1" lang="ja-JP" altLang="en-US"/>
-              <a:t>クエリー</a:t>
-            </a:r>
-            <a:r>
-              <a:rPr kumimoji="1" lang="en-US" altLang="ja-JP"/>
-              <a:t>/1</a:t>
-            </a:r>
-            <a:r>
-              <a:rPr kumimoji="1" lang="ja-JP" altLang="en-US"/>
-              <a:t>回のみ</a:t>
-            </a:r>
-            <a:endParaRPr kumimoji="1" lang="en-US" altLang="ja-JP"/>
-          </a:p>
-          <a:p>
-            <a:pPr marL="285750" indent="-285750">
-              <a:buFont typeface="Arial" panose="020B0604020202020204" pitchFamily="34" charset="0"/>
-              <a:buChar char="•"/>
-            </a:pPr>
+            <a:r>
+              <a:rPr lang="en-US" altLang="ja-JP"/>
+              <a:t>["</a:t>
+            </a:r>
             <a:r>
               <a:rPr lang="ja-JP" altLang="en-US"/>
-              <a:t>総計</a:t>
+              <a:t>成</a:t>
             </a:r>
             <a:r>
               <a:rPr lang="en-US" altLang="ja-JP"/>
-              <a:t>600</a:t>
-            </a:r>
-            <a:r>
-              <a:rPr lang="ja-JP" altLang="en-US"/>
-              <a:t>クエリー</a:t>
+              <a:t>",0]</a:t>
             </a:r>
             <a:endParaRPr kumimoji="1" lang="ja-JP" altLang="en-US"/>
           </a:p>
@@ -5092,10 +5342,10 @@
       </p:sp>
       <p:sp>
         <p:nvSpPr>
-          <p:cNvPr id="7" name="テキスト ボックス 6">
-            <a:extLst>
-              <a:ext uri="{FF2B5EF4-FFF2-40B4-BE49-F238E27FC236}">
-                <a16:creationId xmlns:a16="http://schemas.microsoft.com/office/drawing/2014/main" id="{CACC1BA4-62B7-33A4-8398-8AC85962F4AC}"/>
+          <p:cNvPr id="8" name="テキスト ボックス 7">
+            <a:extLst>
+              <a:ext uri="{FF2B5EF4-FFF2-40B4-BE49-F238E27FC236}">
+                <a16:creationId xmlns:a16="http://schemas.microsoft.com/office/drawing/2014/main" id="{DA8703AE-573B-9728-A3C3-997C4B6E8C7F}"/>
               </a:ext>
             </a:extLst>
           </p:cNvPr>
@@ -5104,8 +5354,8 @@
         </p:nvSpPr>
         <p:spPr>
           <a:xfrm>
-            <a:off x="4070933" y="2605742"/>
-            <a:ext cx="4166525" cy="923330"/>
+            <a:off x="1856114" y="6034822"/>
+            <a:ext cx="3057247" cy="307777"/>
           </a:xfrm>
           <a:prstGeom prst="rect">
             <a:avLst/>
@@ -5118,43 +5368,239 @@
           </a:bodyPr>
           <a:lstStyle/>
           <a:p>
-            <a:pPr marL="285750" indent="-285750">
-              <a:buFont typeface="Arial" panose="020B0604020202020204" pitchFamily="34" charset="0"/>
-              <a:buChar char="•"/>
-            </a:pPr>
-            <a:r>
-              <a:rPr lang="ja-JP" altLang="en-US"/>
-              <a:t>期限付き</a:t>
-            </a:r>
-            <a:endParaRPr lang="en-US" altLang="ja-JP"/>
-          </a:p>
-          <a:p>
-            <a:pPr marL="285750" indent="-285750">
-              <a:buFont typeface="Arial" panose="020B0604020202020204" pitchFamily="34" charset="0"/>
-              <a:buChar char="•"/>
-            </a:pPr>
-            <a:r>
-              <a:rPr lang="ja-JP" altLang="en-US"/>
-              <a:t>再提出化</a:t>
-            </a:r>
-            <a:endParaRPr lang="en-US" altLang="ja-JP"/>
-          </a:p>
-          <a:p>
-            <a:pPr marL="285750" indent="-285750">
-              <a:buFont typeface="Arial" panose="020B0604020202020204" pitchFamily="34" charset="0"/>
-              <a:buChar char="•"/>
-            </a:pPr>
-            <a:r>
-              <a:rPr kumimoji="1" lang="ja-JP" altLang="en-US"/>
-              <a:t>合議を妨げない（質問にも答える）</a:t>
-            </a:r>
-          </a:p>
-        </p:txBody>
-      </p:sp>
+            <a:r>
+              <a:rPr kumimoji="1" lang="ja-JP" altLang="en-US" sz="1400"/>
+              <a:t>地名と判定したものはそのまま残す</a:t>
+            </a:r>
+          </a:p>
+        </p:txBody>
+      </p:sp>
+      <p:sp>
+        <p:nvSpPr>
+          <p:cNvPr id="9" name="テキスト ボックス 8">
+            <a:extLst>
+              <a:ext uri="{FF2B5EF4-FFF2-40B4-BE49-F238E27FC236}">
+                <a16:creationId xmlns:a16="http://schemas.microsoft.com/office/drawing/2014/main" id="{6E3ED00A-3E53-034E-8909-DCE8C51D38E8}"/>
+              </a:ext>
+            </a:extLst>
+          </p:cNvPr>
+          <p:cNvSpPr txBox="1"/>
+          <p:nvPr/>
+        </p:nvSpPr>
+        <p:spPr>
+          <a:xfrm>
+            <a:off x="1669936" y="5727045"/>
+            <a:ext cx="3695242" cy="307777"/>
+          </a:xfrm>
+          <a:prstGeom prst="rect">
+            <a:avLst/>
+          </a:prstGeom>
+          <a:noFill/>
+        </p:spPr>
+        <p:txBody>
+          <a:bodyPr wrap="none" rtlCol="0">
+            <a:spAutoFit/>
+          </a:bodyPr>
+          <a:lstStyle/>
+          <a:p>
+            <a:r>
+              <a:rPr kumimoji="1" lang="ja-JP" altLang="en-US" sz="1400"/>
+              <a:t>地名でないと判定したものは</a:t>
+            </a:r>
+            <a:r>
+              <a:rPr kumimoji="1" lang="en-US" altLang="ja-JP" sz="1400"/>
+              <a:t>0</a:t>
+            </a:r>
+            <a:r>
+              <a:rPr kumimoji="1" lang="ja-JP" altLang="en-US" sz="1400"/>
+              <a:t>に置き換える</a:t>
+            </a:r>
+          </a:p>
+        </p:txBody>
+      </p:sp>
+      <p:sp>
+        <p:nvSpPr>
+          <p:cNvPr id="10" name="テキスト ボックス 9">
+            <a:extLst>
+              <a:ext uri="{FF2B5EF4-FFF2-40B4-BE49-F238E27FC236}">
+                <a16:creationId xmlns:a16="http://schemas.microsoft.com/office/drawing/2014/main" id="{B16125B5-381B-C4FD-2940-07DA429F3706}"/>
+              </a:ext>
+            </a:extLst>
+          </p:cNvPr>
+          <p:cNvSpPr txBox="1"/>
+          <p:nvPr/>
+        </p:nvSpPr>
+        <p:spPr>
+          <a:xfrm>
+            <a:off x="2660822" y="820811"/>
+            <a:ext cx="1806905" cy="307777"/>
+          </a:xfrm>
+          <a:prstGeom prst="rect">
+            <a:avLst/>
+          </a:prstGeom>
+          <a:noFill/>
+        </p:spPr>
+        <p:txBody>
+          <a:bodyPr wrap="none" rtlCol="0">
+            <a:spAutoFit/>
+          </a:bodyPr>
+          <a:lstStyle/>
+          <a:p>
+            <a:r>
+              <a:rPr kumimoji="1" lang="en-US" altLang="ja-JP" sz="1400" dirty="0"/>
+              <a:t>NER</a:t>
+            </a:r>
+            <a:r>
+              <a:rPr kumimoji="1" lang="ja-JP" altLang="en-US" sz="1400"/>
+              <a:t>による抽出結果</a:t>
+            </a:r>
+          </a:p>
+        </p:txBody>
+      </p:sp>
+      <p:cxnSp>
+        <p:nvCxnSpPr>
+          <p:cNvPr id="12" name="カギ線コネクタ 11">
+            <a:extLst>
+              <a:ext uri="{FF2B5EF4-FFF2-40B4-BE49-F238E27FC236}">
+                <a16:creationId xmlns:a16="http://schemas.microsoft.com/office/drawing/2014/main" id="{4CC0870C-CAFC-BCD1-A478-9144D0E96817}"/>
+              </a:ext>
+            </a:extLst>
+          </p:cNvPr>
+          <p:cNvCxnSpPr>
+            <a:cxnSpLocks/>
+            <a:stCxn id="10" idx="1"/>
+          </p:cNvCxnSpPr>
+          <p:nvPr/>
+        </p:nvCxnSpPr>
+        <p:spPr>
+          <a:xfrm rot="10800000" flipV="1">
+            <a:off x="1856114" y="974700"/>
+            <a:ext cx="804708" cy="227040"/>
+          </a:xfrm>
+          <a:prstGeom prst="bentConnector3">
+            <a:avLst>
+              <a:gd name="adj1" fmla="val 99620"/>
+            </a:avLst>
+          </a:prstGeom>
+          <a:ln w="12700">
+            <a:solidFill>
+              <a:schemeClr val="tx1"/>
+            </a:solidFill>
+            <a:tailEnd type="triangle"/>
+          </a:ln>
+        </p:spPr>
+        <p:style>
+          <a:lnRef idx="2">
+            <a:schemeClr val="accent1"/>
+          </a:lnRef>
+          <a:fillRef idx="0">
+            <a:schemeClr val="accent1"/>
+          </a:fillRef>
+          <a:effectRef idx="1">
+            <a:schemeClr val="accent1"/>
+          </a:effectRef>
+          <a:fontRef idx="minor">
+            <a:schemeClr val="tx1"/>
+          </a:fontRef>
+        </p:style>
+      </p:cxnSp>
+      <p:cxnSp>
+        <p:nvCxnSpPr>
+          <p:cNvPr id="15" name="カギ線コネクタ 14">
+            <a:extLst>
+              <a:ext uri="{FF2B5EF4-FFF2-40B4-BE49-F238E27FC236}">
+                <a16:creationId xmlns:a16="http://schemas.microsoft.com/office/drawing/2014/main" id="{BC8931FA-6C64-64C4-5D8D-9F0DD8164590}"/>
+              </a:ext>
+            </a:extLst>
+          </p:cNvPr>
+          <p:cNvCxnSpPr>
+            <a:stCxn id="9" idx="1"/>
+          </p:cNvCxnSpPr>
+          <p:nvPr/>
+        </p:nvCxnSpPr>
+        <p:spPr>
+          <a:xfrm rot="10800000">
+            <a:off x="706582" y="5727046"/>
+            <a:ext cx="963354" cy="153889"/>
+          </a:xfrm>
+          <a:prstGeom prst="bentConnector3">
+            <a:avLst>
+              <a:gd name="adj1" fmla="val 99616"/>
+            </a:avLst>
+          </a:prstGeom>
+          <a:ln w="12700">
+            <a:solidFill>
+              <a:schemeClr val="tx1"/>
+            </a:solidFill>
+            <a:tailEnd type="triangle"/>
+          </a:ln>
+        </p:spPr>
+        <p:style>
+          <a:lnRef idx="2">
+            <a:schemeClr val="accent1"/>
+          </a:lnRef>
+          <a:fillRef idx="0">
+            <a:schemeClr val="accent1"/>
+          </a:fillRef>
+          <a:effectRef idx="1">
+            <a:schemeClr val="accent1"/>
+          </a:effectRef>
+          <a:fontRef idx="minor">
+            <a:schemeClr val="tx1"/>
+          </a:fontRef>
+        </p:style>
+      </p:cxnSp>
+      <p:cxnSp>
+        <p:nvCxnSpPr>
+          <p:cNvPr id="18" name="カギ線コネクタ 17">
+            <a:extLst>
+              <a:ext uri="{FF2B5EF4-FFF2-40B4-BE49-F238E27FC236}">
+                <a16:creationId xmlns:a16="http://schemas.microsoft.com/office/drawing/2014/main" id="{B64DC262-5C37-8FCC-BC2B-71EB33CC94EE}"/>
+              </a:ext>
+            </a:extLst>
+          </p:cNvPr>
+          <p:cNvCxnSpPr>
+            <a:cxnSpLocks/>
+            <a:stCxn id="8" idx="1"/>
+          </p:cNvCxnSpPr>
+          <p:nvPr/>
+        </p:nvCxnSpPr>
+        <p:spPr>
+          <a:xfrm rot="10800000">
+            <a:off x="396974" y="5727045"/>
+            <a:ext cx="1459140" cy="461666"/>
+          </a:xfrm>
+          <a:prstGeom prst="bentConnector3">
+            <a:avLst>
+              <a:gd name="adj1" fmla="val 99849"/>
+            </a:avLst>
+          </a:prstGeom>
+          <a:ln w="12700">
+            <a:solidFill>
+              <a:schemeClr val="tx1"/>
+            </a:solidFill>
+            <a:tailEnd type="triangle"/>
+          </a:ln>
+        </p:spPr>
+        <p:style>
+          <a:lnRef idx="2">
+            <a:schemeClr val="accent1"/>
+          </a:lnRef>
+          <a:fillRef idx="0">
+            <a:schemeClr val="accent1"/>
+          </a:fillRef>
+          <a:effectRef idx="1">
+            <a:schemeClr val="accent1"/>
+          </a:effectRef>
+          <a:fontRef idx="minor">
+            <a:schemeClr val="tx1"/>
+          </a:fontRef>
+        </p:style>
+      </p:cxnSp>
     </p:spTree>
     <p:extLst>
       <p:ext uri="{BB962C8B-B14F-4D97-AF65-F5344CB8AC3E}">
-        <p14:creationId xmlns:p14="http://schemas.microsoft.com/office/powerpoint/2010/main" val="3135446820"/>
+        <p14:creationId xmlns:p14="http://schemas.microsoft.com/office/powerpoint/2010/main" val="2951289915"/>
       </p:ext>
     </p:extLst>
   </p:cSld>
@@ -5234,7 +5680,7 @@
               <a:rPr lang="ja-JP" altLang="en-US" sz="3600">
                 <a:sym typeface="Wingdings" pitchFamily="2" charset="2"/>
               </a:rPr>
-              <a:t>出力形式</a:t>
+              <a:t>出力の例</a:t>
             </a:r>
             <a:r>
               <a:rPr lang="en-US" altLang="ja-JP" sz="3600" dirty="0">
@@ -5283,10 +5729,10 @@
       </p:sp>
       <p:sp>
         <p:nvSpPr>
-          <p:cNvPr id="4" name="テキスト ボックス 3">
-            <a:extLst>
-              <a:ext uri="{FF2B5EF4-FFF2-40B4-BE49-F238E27FC236}">
-                <a16:creationId xmlns:a16="http://schemas.microsoft.com/office/drawing/2014/main" id="{FC06577E-2F77-7735-50C1-68CC47C14494}"/>
+          <p:cNvPr id="11" name="テキスト ボックス 10">
+            <a:extLst>
+              <a:ext uri="{FF2B5EF4-FFF2-40B4-BE49-F238E27FC236}">
+                <a16:creationId xmlns:a16="http://schemas.microsoft.com/office/drawing/2014/main" id="{17517DF6-6056-B8EC-F322-1EF5AC814C73}"/>
               </a:ext>
             </a:extLst>
           </p:cNvPr>
@@ -5295,13 +5741,18 @@
         </p:nvSpPr>
         <p:spPr>
           <a:xfrm>
-            <a:off x="415498" y="1158947"/>
-            <a:ext cx="401072" cy="369332"/>
+            <a:off x="8267699" y="6353084"/>
+            <a:ext cx="2877711" cy="307777"/>
           </a:xfrm>
           <a:prstGeom prst="rect">
             <a:avLst/>
           </a:prstGeom>
           <a:noFill/>
+          <a:ln>
+            <a:solidFill>
+              <a:schemeClr val="tx1"/>
+            </a:solidFill>
+          </a:ln>
         </p:spPr>
         <p:txBody>
           <a:bodyPr wrap="none" rtlCol="0">
@@ -5310,19 +5761,42 @@
           <a:lstStyle/>
           <a:p>
             <a:r>
-              <a:rPr kumimoji="1" lang="en-US" altLang="ja-JP" dirty="0"/>
-              <a:t>AI</a:t>
-            </a:r>
-            <a:endParaRPr kumimoji="1" lang="ja-JP" altLang="en-US"/>
-          </a:p>
-        </p:txBody>
-      </p:sp>
-      <p:sp>
-        <p:nvSpPr>
-          <p:cNvPr id="5" name="テキスト ボックス 4">
-            <a:extLst>
-              <a:ext uri="{FF2B5EF4-FFF2-40B4-BE49-F238E27FC236}">
-                <a16:creationId xmlns:a16="http://schemas.microsoft.com/office/drawing/2014/main" id="{3A73C75A-2EF1-6DA6-18DF-828AF9836FCC}"/>
+              <a:rPr lang="en-US" altLang="ja-JP" sz="1400" dirty="0"/>
+              <a:t>[0,0,"</a:t>
+            </a:r>
+            <a:r>
+              <a:rPr lang="ja-JP" altLang="en-US" sz="1400"/>
+              <a:t>岩手</a:t>
+            </a:r>
+            <a:r>
+              <a:rPr lang="en-US" altLang="ja-JP" sz="1400" dirty="0"/>
+              <a:t>","</a:t>
+            </a:r>
+            <a:r>
+              <a:rPr lang="ja-JP" altLang="en-US" sz="1400"/>
+              <a:t>大船渡</a:t>
+            </a:r>
+            <a:r>
+              <a:rPr lang="en-US" altLang="ja-JP" sz="1400" dirty="0"/>
+              <a:t>",0,0,"</a:t>
+            </a:r>
+            <a:r>
+              <a:rPr lang="ja-JP" altLang="en-US" sz="1400"/>
+              <a:t>長谷堂</a:t>
+            </a:r>
+            <a:r>
+              <a:rPr lang="en-US" altLang="ja-JP" sz="1400" dirty="0"/>
+              <a:t>"]</a:t>
+            </a:r>
+          </a:p>
+        </p:txBody>
+      </p:sp>
+      <p:sp>
+        <p:nvSpPr>
+          <p:cNvPr id="12" name="テキスト ボックス 11">
+            <a:extLst>
+              <a:ext uri="{FF2B5EF4-FFF2-40B4-BE49-F238E27FC236}">
+                <a16:creationId xmlns:a16="http://schemas.microsoft.com/office/drawing/2014/main" id="{0407629A-D96F-E05A-66F7-9DDBE16DCF75}"/>
               </a:ext>
             </a:extLst>
           </p:cNvPr>
@@ -5331,8 +5805,1052 @@
         </p:nvSpPr>
         <p:spPr>
           <a:xfrm>
-            <a:off x="401072" y="2181075"/>
-            <a:ext cx="415498" cy="369332"/>
+            <a:off x="278598" y="1028550"/>
+            <a:ext cx="3706473" cy="5632311"/>
+          </a:xfrm>
+          <a:prstGeom prst="rect">
+            <a:avLst/>
+          </a:prstGeom>
+          <a:noFill/>
+          <a:ln>
+            <a:solidFill>
+              <a:schemeClr val="tx1"/>
+            </a:solidFill>
+          </a:ln>
+        </p:spPr>
+        <p:txBody>
+          <a:bodyPr wrap="square" rtlCol="0">
+            <a:spAutoFit/>
+          </a:bodyPr>
+          <a:lstStyle/>
+          <a:p>
+            <a:r>
+              <a:rPr lang="en" altLang="ja-JP" sz="1200" dirty="0"/>
+              <a:t>Thinking...</a:t>
+            </a:r>
+          </a:p>
+          <a:p>
+            <a:r>
+              <a:rPr lang="en" altLang="ja-JP" sz="1200" dirty="0"/>
+              <a:t>Alright, let's tackle this problem. So, the user provided a JSON </a:t>
+            </a:r>
+          </a:p>
+          <a:p>
+            <a:endParaRPr lang="en" altLang="ja-JP" sz="1200" dirty="0"/>
+          </a:p>
+          <a:p>
+            <a:r>
+              <a:rPr lang="en-US" altLang="ja-JP" sz="1200" dirty="0"/>
+              <a:t>…</a:t>
+            </a:r>
+            <a:r>
+              <a:rPr lang="ja-JP" altLang="en-US" sz="1200"/>
+              <a:t>中略</a:t>
+            </a:r>
+            <a:r>
+              <a:rPr lang="en-US" altLang="ja-JP" sz="1200" dirty="0"/>
+              <a:t>…</a:t>
+            </a:r>
+            <a:br>
+              <a:rPr lang="en" altLang="ja-JP" sz="1200" dirty="0"/>
+            </a:br>
+            <a:endParaRPr lang="en" altLang="ja-JP" sz="1200" dirty="0"/>
+          </a:p>
+          <a:p>
+            <a:r>
+              <a:rPr lang="en" altLang="ja-JP" sz="1200" dirty="0"/>
+              <a:t>First, I need to parse the JSON. The second element in the first array is ["</a:t>
+            </a:r>
+            <a:r>
+              <a:rPr lang="ja-JP" altLang="en-US" sz="1200"/>
+              <a:t>徳島</a:t>
+            </a:r>
+            <a:r>
+              <a:rPr lang="en-US" altLang="ja-JP" sz="1200" dirty="0"/>
+              <a:t>","</a:t>
+            </a:r>
+            <a:r>
+              <a:rPr lang="ja-JP" altLang="en-US" sz="1200"/>
+              <a:t>日</a:t>
+            </a:r>
+            <a:r>
+              <a:rPr lang="en-US" altLang="ja-JP" sz="1200" dirty="0"/>
+              <a:t>"], </a:t>
+            </a:r>
+            <a:r>
+              <a:rPr lang="en" altLang="ja-JP" sz="1200" dirty="0"/>
+              <a:t>and in the second array, it's ["</a:t>
+            </a:r>
+            <a:r>
+              <a:rPr lang="ja-JP" altLang="en-US" sz="1200"/>
+              <a:t>英国</a:t>
+            </a:r>
+            <a:r>
+              <a:rPr lang="en-US" altLang="ja-JP" sz="1200" dirty="0"/>
+              <a:t>","</a:t>
+            </a:r>
+            <a:r>
+              <a:rPr lang="ja-JP" altLang="en-US" sz="1200"/>
+              <a:t>日本</a:t>
+            </a:r>
+            <a:r>
+              <a:rPr lang="en-US" altLang="ja-JP" sz="1200" dirty="0"/>
+              <a:t>","</a:t>
+            </a:r>
+            <a:r>
+              <a:rPr lang="ja-JP" altLang="en-US" sz="1200"/>
+              <a:t>伊根</a:t>
+            </a:r>
+            <a:r>
+              <a:rPr lang="en-US" altLang="ja-JP" sz="1200" dirty="0"/>
+              <a:t>","</a:t>
+            </a:r>
+            <a:r>
+              <a:rPr lang="ja-JP" altLang="en-US" sz="1200"/>
+              <a:t>徳島</a:t>
+            </a:r>
+            <a:r>
+              <a:rPr lang="en-US" altLang="ja-JP" sz="1200" dirty="0"/>
+              <a:t>","</a:t>
+            </a:r>
+            <a:r>
+              <a:rPr lang="ja-JP" altLang="en-US" sz="1200"/>
+              <a:t>日</a:t>
+            </a:r>
+            <a:r>
+              <a:rPr lang="en-US" altLang="ja-JP" sz="1200" dirty="0"/>
+              <a:t>","</a:t>
+            </a:r>
+            <a:r>
+              <a:rPr lang="ja-JP" altLang="en-US" sz="1200"/>
+              <a:t>英</a:t>
+            </a:r>
+            <a:r>
+              <a:rPr lang="en-US" altLang="ja-JP" sz="1200" dirty="0"/>
+              <a:t>"</a:t>
+            </a:r>
+          </a:p>
+          <a:p>
+            <a:endParaRPr lang="en" altLang="ja-JP" sz="1200" dirty="0"/>
+          </a:p>
+          <a:p>
+            <a:r>
+              <a:rPr lang="en-US" altLang="ja-JP" sz="1200" dirty="0"/>
+              <a:t>…</a:t>
+            </a:r>
+            <a:r>
+              <a:rPr lang="ja-JP" altLang="en-US" sz="1200"/>
+              <a:t>中略</a:t>
+            </a:r>
+            <a:r>
+              <a:rPr lang="en-US" altLang="ja-JP" sz="1200" dirty="0"/>
+              <a:t>…</a:t>
+            </a:r>
+            <a:br>
+              <a:rPr lang="en" altLang="ja-JP" sz="1200" dirty="0"/>
+            </a:br>
+            <a:endParaRPr lang="en" altLang="ja-JP" sz="1200" dirty="0"/>
+          </a:p>
+          <a:p>
+            <a:r>
+              <a:rPr lang="en" altLang="ja-JP" sz="1200" dirty="0"/>
+              <a:t>1. **</a:t>
+            </a:r>
+            <a:r>
+              <a:rPr lang="ja-JP" altLang="en-US" sz="1200"/>
+              <a:t>英国 </a:t>
+            </a:r>
+            <a:r>
+              <a:rPr lang="en-US" altLang="ja-JP" sz="1200" dirty="0"/>
+              <a:t>(</a:t>
+            </a:r>
+            <a:r>
+              <a:rPr lang="en" altLang="ja-JP" sz="1200" dirty="0"/>
+              <a:t>Britain/UK)**: This is a country name, so valid.</a:t>
+            </a:r>
+          </a:p>
+          <a:p>
+            <a:r>
+              <a:rPr lang="en" altLang="ja-JP" sz="1200" dirty="0"/>
+              <a:t>2. **</a:t>
+            </a:r>
+            <a:r>
+              <a:rPr lang="ja-JP" altLang="en-US" sz="1200"/>
+              <a:t>日本 </a:t>
+            </a:r>
+            <a:r>
+              <a:rPr lang="en-US" altLang="ja-JP" sz="1200" dirty="0"/>
+              <a:t>(</a:t>
+            </a:r>
+            <a:r>
+              <a:rPr lang="en" altLang="ja-JP" sz="1200" dirty="0"/>
+              <a:t>Japan)**: Valid country name.</a:t>
+            </a:r>
+          </a:p>
+          <a:p>
+            <a:r>
+              <a:rPr lang="en" altLang="ja-JP" sz="1200" dirty="0"/>
+              <a:t>3. **</a:t>
+            </a:r>
+            <a:r>
+              <a:rPr lang="ja-JP" altLang="en-US" sz="1200"/>
+              <a:t>伊根 </a:t>
+            </a:r>
+            <a:r>
+              <a:rPr lang="en-US" altLang="ja-JP" sz="1200" dirty="0"/>
+              <a:t>(</a:t>
+            </a:r>
+            <a:r>
+              <a:rPr lang="en" altLang="ja-JP" sz="1200" dirty="0" err="1"/>
+              <a:t>Igen</a:t>
+            </a:r>
+            <a:r>
+              <a:rPr lang="en" altLang="ja-JP" sz="1200" dirty="0"/>
+              <a:t>)**: This could be a place. There's a town called </a:t>
+            </a:r>
+            <a:r>
+              <a:rPr lang="en" altLang="ja-JP" sz="1200" dirty="0" err="1"/>
+              <a:t>Igen</a:t>
+            </a:r>
+            <a:r>
+              <a:rPr lang="en" altLang="ja-JP" sz="1200" dirty="0"/>
+              <a:t> in Kyoto, Japan. But need to check context. The</a:t>
+            </a:r>
+            <a:br>
+              <a:rPr lang="en" altLang="ja-JP" sz="1200" dirty="0"/>
+            </a:br>
+            <a:endParaRPr lang="en" altLang="ja-JP" sz="1200" dirty="0"/>
+          </a:p>
+          <a:p>
+            <a:r>
+              <a:rPr lang="en" altLang="ja-JP" sz="1200" dirty="0"/>
+              <a:t>...done thinking.</a:t>
+            </a:r>
+          </a:p>
+          <a:p>
+            <a:endParaRPr lang="en" altLang="ja-JP" sz="1200" dirty="0"/>
+          </a:p>
+          <a:p>
+            <a:r>
+              <a:rPr lang="en" altLang="ja-JP" sz="1200" dirty="0"/>
+              <a:t>```</a:t>
+            </a:r>
+            <a:r>
+              <a:rPr lang="en" altLang="ja-JP" sz="1200" dirty="0" err="1"/>
+              <a:t>json</a:t>
+            </a:r>
+            <a:endParaRPr lang="en" altLang="ja-JP" sz="1200" dirty="0"/>
+          </a:p>
+          <a:p>
+            <a:r>
+              <a:rPr lang="en" altLang="ja-JP" sz="1200" dirty="0"/>
+              <a:t>[</a:t>
+            </a:r>
+          </a:p>
+          <a:p>
+            <a:r>
+              <a:rPr lang="en" altLang="ja-JP" sz="1200" dirty="0"/>
+              <a:t>  ["</a:t>
+            </a:r>
+            <a:r>
+              <a:rPr lang="ja-JP" altLang="en-US" sz="1200"/>
+              <a:t>徳島</a:t>
+            </a:r>
+            <a:r>
+              <a:rPr lang="en-US" altLang="ja-JP" sz="1200" dirty="0"/>
+              <a:t>", 0],</a:t>
+            </a:r>
+          </a:p>
+          <a:p>
+            <a:r>
+              <a:rPr lang="en-US" altLang="ja-JP" sz="1200" dirty="0"/>
+              <a:t>  ["</a:t>
+            </a:r>
+            <a:r>
+              <a:rPr lang="ja-JP" altLang="en-US" sz="1200"/>
+              <a:t>英国</a:t>
+            </a:r>
+            <a:r>
+              <a:rPr lang="en-US" altLang="ja-JP" sz="1200" dirty="0"/>
+              <a:t>", "</a:t>
+            </a:r>
+            <a:r>
+              <a:rPr lang="ja-JP" altLang="en-US" sz="1200"/>
+              <a:t>日本</a:t>
+            </a:r>
+            <a:r>
+              <a:rPr lang="en-US" altLang="ja-JP" sz="1200" dirty="0"/>
+              <a:t>", 0, "</a:t>
+            </a:r>
+            <a:r>
+              <a:rPr lang="ja-JP" altLang="en-US" sz="1200"/>
+              <a:t>徳島</a:t>
+            </a:r>
+            <a:r>
+              <a:rPr lang="en-US" altLang="ja-JP" sz="1200" dirty="0"/>
+              <a:t>", 0, 0, "</a:t>
+            </a:r>
+            <a:r>
+              <a:rPr lang="ja-JP" altLang="en-US" sz="1200"/>
+              <a:t>英国</a:t>
+            </a:r>
+            <a:r>
+              <a:rPr lang="en-US" altLang="ja-JP" sz="1200" dirty="0"/>
+              <a:t>", "</a:t>
+            </a:r>
+            <a:r>
+              <a:rPr lang="ja-JP" altLang="en-US" sz="1200"/>
+              <a:t>日本</a:t>
+            </a:r>
+            <a:r>
+              <a:rPr lang="en-US" altLang="ja-JP" sz="1200" dirty="0"/>
+              <a:t>", "</a:t>
+            </a:r>
+            <a:r>
+              <a:rPr lang="ja-JP" altLang="en-US" sz="1200"/>
+              <a:t>ロンドン</a:t>
+            </a:r>
+            <a:r>
+              <a:rPr lang="en-US" altLang="ja-JP" sz="1200" dirty="0"/>
+              <a:t>", "</a:t>
+            </a:r>
+            <a:r>
+              <a:rPr lang="ja-JP" altLang="en-US" sz="1200"/>
+              <a:t>徳島</a:t>
+            </a:r>
+            <a:r>
+              <a:rPr lang="en-US" altLang="ja-JP" sz="1200" dirty="0"/>
+              <a:t>", "</a:t>
+            </a:r>
+            <a:r>
+              <a:rPr lang="ja-JP" altLang="en-US" sz="1200"/>
+              <a:t>徳島</a:t>
+            </a:r>
+            <a:r>
+              <a:rPr lang="en-US" altLang="ja-JP" sz="1200" dirty="0"/>
+              <a:t>", 0, "</a:t>
+            </a:r>
+            <a:r>
+              <a:rPr lang="ja-JP" altLang="en-US" sz="1200"/>
+              <a:t>日本</a:t>
+            </a:r>
+            <a:r>
+              <a:rPr lang="en-US" altLang="ja-JP" sz="1200" dirty="0"/>
+              <a:t>", 0, 0, 0, 0, "</a:t>
+            </a:r>
+            <a:r>
+              <a:rPr lang="ja-JP" altLang="en-US" sz="1200"/>
+              <a:t>日本</a:t>
+            </a:r>
+            <a:r>
+              <a:rPr lang="en-US" altLang="ja-JP" sz="1200" dirty="0"/>
+              <a:t>", "</a:t>
+            </a:r>
+            <a:r>
+              <a:rPr lang="ja-JP" altLang="en-US" sz="1200"/>
+              <a:t>徳島</a:t>
+            </a:r>
+            <a:r>
+              <a:rPr lang="en-US" altLang="ja-JP" sz="1200" dirty="0"/>
+              <a:t>"]</a:t>
+            </a:r>
+          </a:p>
+          <a:p>
+            <a:r>
+              <a:rPr lang="en-US" altLang="ja-JP" sz="1200" dirty="0"/>
+              <a:t>]</a:t>
+            </a:r>
+          </a:p>
+          <a:p>
+            <a:r>
+              <a:rPr lang="en-US" altLang="ja-JP" sz="1200" dirty="0"/>
+              <a:t>```</a:t>
+            </a:r>
+          </a:p>
+        </p:txBody>
+      </p:sp>
+      <p:sp>
+        <p:nvSpPr>
+          <p:cNvPr id="14" name="テキスト ボックス 13">
+            <a:extLst>
+              <a:ext uri="{FF2B5EF4-FFF2-40B4-BE49-F238E27FC236}">
+                <a16:creationId xmlns:a16="http://schemas.microsoft.com/office/drawing/2014/main" id="{837540C6-358C-F702-9D1A-A4875400F588}"/>
+              </a:ext>
+            </a:extLst>
+          </p:cNvPr>
+          <p:cNvSpPr txBox="1"/>
+          <p:nvPr/>
+        </p:nvSpPr>
+        <p:spPr>
+          <a:xfrm>
+            <a:off x="8267699" y="1030388"/>
+            <a:ext cx="3706473" cy="2308324"/>
+          </a:xfrm>
+          <a:prstGeom prst="rect">
+            <a:avLst/>
+          </a:prstGeom>
+          <a:noFill/>
+          <a:ln>
+            <a:solidFill>
+              <a:schemeClr val="tx1"/>
+            </a:solidFill>
+          </a:ln>
+        </p:spPr>
+        <p:txBody>
+          <a:bodyPr wrap="square" rtlCol="0">
+            <a:spAutoFit/>
+          </a:bodyPr>
+          <a:lstStyle/>
+          <a:p>
+            <a:r>
+              <a:rPr lang="en" altLang="ja-JP" sz="1200" dirty="0"/>
+              <a:t>Thinking...</a:t>
+            </a:r>
+          </a:p>
+          <a:p>
+            <a:r>
+              <a:rPr lang="en" altLang="ja-JP" sz="1200" dirty="0"/>
+              <a:t>Okay, let's tackle this problem step by step. The user provided a JSON structure with four elements, and they want me to determine</a:t>
+            </a:r>
+          </a:p>
+          <a:p>
+            <a:endParaRPr lang="en" altLang="ja-JP" sz="1200" dirty="0"/>
+          </a:p>
+          <a:p>
+            <a:r>
+              <a:rPr lang="en-US" altLang="ja-JP" sz="1200" dirty="0"/>
+              <a:t>…</a:t>
+            </a:r>
+            <a:r>
+              <a:rPr lang="ja-JP" altLang="en-US" sz="1200"/>
+              <a:t>中略</a:t>
+            </a:r>
+            <a:r>
+              <a:rPr lang="en-US" altLang="ja-JP" sz="1200" dirty="0"/>
+              <a:t>…</a:t>
+            </a:r>
+          </a:p>
+          <a:p>
+            <a:endParaRPr lang="en-US" altLang="ja-JP" sz="1200" dirty="0"/>
+          </a:p>
+          <a:p>
+            <a:r>
+              <a:rPr lang="en" altLang="ja-JP" sz="1200" dirty="0"/>
+              <a:t>user's example, perhaps the intended answer is ["</a:t>
+            </a:r>
+            <a:r>
+              <a:rPr lang="ja-JP" altLang="en-US" sz="1200"/>
+              <a:t>徳島</a:t>
+            </a:r>
+            <a:r>
+              <a:rPr lang="en-US" altLang="ja-JP" sz="1200" dirty="0"/>
+              <a:t>",0,0], </a:t>
+            </a:r>
+            <a:r>
+              <a:rPr lang="en" altLang="ja-JP" sz="1200" dirty="0"/>
+              <a:t>so I'll follow that.</a:t>
+            </a:r>
+          </a:p>
+          <a:p>
+            <a:r>
+              <a:rPr lang="en" altLang="ja-JP" sz="1200" dirty="0"/>
+              <a:t>...done thinking.</a:t>
+            </a:r>
+          </a:p>
+          <a:p>
+            <a:endParaRPr lang="en" altLang="ja-JP" sz="1200" dirty="0"/>
+          </a:p>
+          <a:p>
+            <a:r>
+              <a:rPr lang="en-US" altLang="ja-JP" sz="1200" dirty="0"/>
+              <a:t>["</a:t>
+            </a:r>
+            <a:r>
+              <a:rPr lang="ja-JP" altLang="en-US" sz="1200"/>
+              <a:t>徳島</a:t>
+            </a:r>
+            <a:r>
+              <a:rPr lang="en-US" altLang="ja-JP" sz="1200" dirty="0"/>
+              <a:t>",0,0]</a:t>
+            </a:r>
+          </a:p>
+        </p:txBody>
+      </p:sp>
+      <p:sp>
+        <p:nvSpPr>
+          <p:cNvPr id="15" name="テキスト ボックス 14">
+            <a:extLst>
+              <a:ext uri="{FF2B5EF4-FFF2-40B4-BE49-F238E27FC236}">
+                <a16:creationId xmlns:a16="http://schemas.microsoft.com/office/drawing/2014/main" id="{7E914248-EE16-983C-8613-A845B9A650DC}"/>
+              </a:ext>
+            </a:extLst>
+          </p:cNvPr>
+          <p:cNvSpPr txBox="1"/>
+          <p:nvPr/>
+        </p:nvSpPr>
+        <p:spPr>
+          <a:xfrm>
+            <a:off x="4280863" y="1028550"/>
+            <a:ext cx="3706473" cy="5632311"/>
+          </a:xfrm>
+          <a:prstGeom prst="rect">
+            <a:avLst/>
+          </a:prstGeom>
+          <a:noFill/>
+          <a:ln>
+            <a:solidFill>
+              <a:schemeClr val="tx1"/>
+            </a:solidFill>
+          </a:ln>
+        </p:spPr>
+        <p:txBody>
+          <a:bodyPr wrap="square" rtlCol="0">
+            <a:spAutoFit/>
+          </a:bodyPr>
+          <a:lstStyle/>
+          <a:p>
+            <a:r>
+              <a:rPr lang="en" altLang="ja-JP" sz="1200" dirty="0"/>
+              <a:t>Thinking...</a:t>
+            </a:r>
+          </a:p>
+          <a:p>
+            <a:endParaRPr kumimoji="1" lang="en-US" altLang="ja-JP" sz="1200" dirty="0"/>
+          </a:p>
+          <a:p>
+            <a:r>
+              <a:rPr lang="en-US" altLang="ja-JP" sz="1200" dirty="0"/>
+              <a:t>…</a:t>
+            </a:r>
+            <a:r>
+              <a:rPr lang="ja-JP" altLang="en-US" sz="1200"/>
+              <a:t>中略</a:t>
+            </a:r>
+            <a:r>
+              <a:rPr lang="en-US" altLang="ja-JP" sz="1200" dirty="0"/>
+              <a:t>…</a:t>
+            </a:r>
+          </a:p>
+          <a:p>
+            <a:endParaRPr kumimoji="1" lang="en-US" altLang="ja-JP" sz="1200" dirty="0"/>
+          </a:p>
+          <a:p>
+            <a:r>
+              <a:rPr lang="en" altLang="ja-JP" sz="1200" dirty="0"/>
+              <a:t>The user's input is:</a:t>
+            </a:r>
+          </a:p>
+          <a:p>
+            <a:endParaRPr lang="en" altLang="ja-JP" sz="1200" dirty="0"/>
+          </a:p>
+          <a:p>
+            <a:r>
+              <a:rPr lang="en" altLang="ja-JP" sz="1200" dirty="0"/>
+              <a:t>[</a:t>
+            </a:r>
+          </a:p>
+          <a:p>
+            <a:r>
+              <a:rPr lang="en" altLang="ja-JP" sz="1200" dirty="0"/>
+              <a:t>  ["</a:t>
+            </a:r>
+            <a:r>
+              <a:rPr lang="ja-JP" altLang="en-US" sz="1200"/>
+              <a:t>徳島</a:t>
+            </a:r>
+            <a:r>
+              <a:rPr lang="en-US" altLang="ja-JP" sz="1200" dirty="0"/>
+              <a:t>", 0, "</a:t>
+            </a:r>
+            <a:r>
+              <a:rPr lang="ja-JP" altLang="en-US" sz="1200"/>
+              <a:t>徳島</a:t>
+            </a:r>
+            <a:r>
+              <a:rPr lang="en-US" altLang="ja-JP" sz="1200" dirty="0"/>
+              <a:t>", "</a:t>
+            </a:r>
+            <a:r>
+              <a:rPr lang="ja-JP" altLang="en-US" sz="1200"/>
+              <a:t>徳島</a:t>
+            </a:r>
+            <a:r>
+              <a:rPr lang="en-US" altLang="ja-JP" sz="1200" dirty="0"/>
+              <a:t>"],</a:t>
+            </a:r>
+          </a:p>
+          <a:p>
+            <a:r>
+              <a:rPr lang="en-US" altLang="ja-JP" sz="1200" dirty="0"/>
+              <a:t>  ["</a:t>
+            </a:r>
+            <a:r>
+              <a:rPr lang="ja-JP" altLang="en-US" sz="1200"/>
+              <a:t>徳島</a:t>
+            </a:r>
+            <a:r>
+              <a:rPr lang="en-US" altLang="ja-JP" sz="1200" dirty="0"/>
+              <a:t>", "</a:t>
+            </a:r>
+            <a:r>
+              <a:rPr lang="ja-JP" altLang="en-US" sz="1200"/>
+              <a:t>ヘルシンキ</a:t>
+            </a:r>
+            <a:r>
+              <a:rPr lang="en-US" altLang="ja-JP" sz="1200" dirty="0"/>
+              <a:t>", "</a:t>
+            </a:r>
+            <a:r>
+              <a:rPr lang="ja-JP" altLang="en-US" sz="1200"/>
+              <a:t>徳島</a:t>
+            </a:r>
+            <a:r>
+              <a:rPr lang="en-US" altLang="ja-JP" sz="1200" dirty="0"/>
+              <a:t>", "</a:t>
+            </a:r>
+            <a:r>
+              <a:rPr lang="ja-JP" altLang="en-US" sz="1200"/>
+              <a:t>徳島</a:t>
+            </a:r>
+            <a:r>
+              <a:rPr lang="en-US" altLang="ja-JP" sz="1200" dirty="0"/>
+              <a:t>"],</a:t>
+            </a:r>
+          </a:p>
+          <a:p>
+            <a:r>
+              <a:rPr lang="en-US" altLang="ja-JP" sz="1200" dirty="0"/>
+              <a:t>  "</a:t>
+            </a:r>
+            <a:r>
+              <a:rPr lang="ja-JP" altLang="en-US" sz="1200"/>
+              <a:t>食生活学 </a:t>
+            </a:r>
+            <a:r>
+              <a:rPr lang="en-US" altLang="ja-JP" sz="1200" dirty="0"/>
+              <a:t>/ </a:t>
+            </a:r>
+            <a:r>
+              <a:rPr lang="ja-JP" altLang="en-US" sz="1200"/>
+              <a:t>生活科学 </a:t>
+            </a:r>
+            <a:r>
+              <a:rPr lang="en-US" altLang="ja-JP" sz="1200" dirty="0"/>
+              <a:t>/ </a:t>
+            </a:r>
+            <a:r>
+              <a:rPr lang="ja-JP" altLang="en-US" sz="1200"/>
+              <a:t>総合領域</a:t>
+            </a:r>
+            <a:r>
+              <a:rPr lang="en-US" altLang="ja-JP" sz="1200" dirty="0"/>
+              <a:t>",</a:t>
+            </a:r>
+          </a:p>
+          <a:p>
+            <a:r>
+              <a:rPr lang="en-US" altLang="ja-JP" sz="1200" dirty="0"/>
+              <a:t>  [</a:t>
+            </a:r>
+          </a:p>
+          <a:p>
+            <a:r>
+              <a:rPr lang="en-US" altLang="ja-JP" sz="1200" dirty="0"/>
+              <a:t>    "</a:t>
+            </a:r>
+            <a:r>
+              <a:rPr lang="ja-JP" altLang="en-US" sz="1200"/>
+              <a:t>多様性指向型タンパク質化学合成法開拓を基盤とする</a:t>
+            </a:r>
+            <a:r>
+              <a:rPr lang="ja-JP" altLang="en" sz="1200"/>
+              <a:t>ＣＸＣＬ１４</a:t>
+            </a:r>
+            <a:r>
+              <a:rPr lang="ja-JP" altLang="en-US" sz="1200"/>
+              <a:t>機能探索分子の創製</a:t>
+            </a:r>
+            <a:r>
+              <a:rPr lang="en-US" altLang="ja-JP" sz="1200" dirty="0"/>
+              <a:t>",</a:t>
+            </a:r>
+          </a:p>
+          <a:p>
+            <a:endParaRPr lang="en-US" altLang="ja-JP" sz="1200" dirty="0"/>
+          </a:p>
+          <a:p>
+            <a:r>
+              <a:rPr lang="en-US" altLang="ja-JP" sz="1200" dirty="0"/>
+              <a:t>…</a:t>
+            </a:r>
+            <a:r>
+              <a:rPr lang="ja-JP" altLang="en-US" sz="1200"/>
+              <a:t>中略</a:t>
+            </a:r>
+            <a:r>
+              <a:rPr lang="en-US" altLang="ja-JP" sz="1200" dirty="0"/>
+              <a:t>…</a:t>
+            </a:r>
+          </a:p>
+          <a:p>
+            <a:endParaRPr lang="en-US" altLang="ja-JP" sz="1200" dirty="0"/>
+          </a:p>
+          <a:p>
+            <a:r>
+              <a:rPr lang="en" altLang="ja-JP" sz="1200" dirty="0"/>
+              <a:t>### Step-by-Step Evaluation</a:t>
+            </a:r>
+          </a:p>
+          <a:p>
+            <a:r>
+              <a:rPr lang="en" altLang="ja-JP" sz="1200" dirty="0"/>
+              <a:t>#### First Array: </a:t>
+            </a:r>
+          </a:p>
+          <a:p>
+            <a:endParaRPr lang="en-US" altLang="ja-JP" sz="1200" dirty="0"/>
+          </a:p>
+          <a:p>
+            <a:r>
+              <a:rPr lang="en-US" altLang="ja-JP" sz="1200" dirty="0"/>
+              <a:t>…</a:t>
+            </a:r>
+            <a:r>
+              <a:rPr lang="ja-JP" altLang="en-US" sz="1200"/>
+              <a:t>中略</a:t>
+            </a:r>
+            <a:r>
+              <a:rPr lang="en-US" altLang="ja-JP" sz="1200" dirty="0"/>
+              <a:t>…</a:t>
+            </a:r>
+          </a:p>
+          <a:p>
+            <a:endParaRPr lang="en-US" altLang="ja-JP" sz="1200" dirty="0"/>
+          </a:p>
+          <a:p>
+            <a:r>
+              <a:rPr lang="en-US" altLang="ja-JP" sz="1200" dirty="0"/>
+              <a:t>---</a:t>
+            </a:r>
+          </a:p>
+          <a:p>
+            <a:endParaRPr lang="en-US" altLang="ja-JP" sz="1200" dirty="0"/>
+          </a:p>
+          <a:p>
+            <a:r>
+              <a:rPr lang="en" altLang="ja-JP" sz="1200" dirty="0"/>
+              <a:t>### Final Output</a:t>
+            </a:r>
+          </a:p>
+          <a:p>
+            <a:r>
+              <a:rPr lang="en" altLang="ja-JP" sz="1200" dirty="0"/>
+              <a:t>```</a:t>
+            </a:r>
+            <a:r>
+              <a:rPr lang="en" altLang="ja-JP" sz="1200" dirty="0" err="1"/>
+              <a:t>json</a:t>
+            </a:r>
+            <a:endParaRPr lang="en" altLang="ja-JP" sz="1200" dirty="0"/>
+          </a:p>
+          <a:p>
+            <a:r>
+              <a:rPr lang="en" altLang="ja-JP" sz="1200" dirty="0"/>
+              <a:t>[</a:t>
+            </a:r>
+          </a:p>
+          <a:p>
+            <a:r>
+              <a:rPr lang="en" altLang="ja-JP" sz="1200" dirty="0"/>
+              <a:t>  0,</a:t>
+            </a:r>
+          </a:p>
+          <a:p>
+            <a:r>
+              <a:rPr lang="en" altLang="ja-JP" sz="1200" dirty="0"/>
+              <a:t>  0</a:t>
+            </a:r>
+          </a:p>
+          <a:p>
+            <a:r>
+              <a:rPr lang="en" altLang="ja-JP" sz="1200" dirty="0"/>
+              <a:t>]</a:t>
+            </a:r>
+          </a:p>
+          <a:p>
+            <a:r>
+              <a:rPr lang="en" altLang="ja-JP" sz="1200" dirty="0"/>
+              <a:t>```</a:t>
+            </a:r>
+          </a:p>
+        </p:txBody>
+      </p:sp>
+      <p:sp>
+        <p:nvSpPr>
+          <p:cNvPr id="16" name="テキスト ボックス 15">
+            <a:extLst>
+              <a:ext uri="{FF2B5EF4-FFF2-40B4-BE49-F238E27FC236}">
+                <a16:creationId xmlns:a16="http://schemas.microsoft.com/office/drawing/2014/main" id="{20A36DE5-D5BA-007B-0CE0-E572109D8A54}"/>
+              </a:ext>
+            </a:extLst>
+          </p:cNvPr>
+          <p:cNvSpPr txBox="1"/>
+          <p:nvPr/>
+        </p:nvSpPr>
+        <p:spPr>
+          <a:xfrm>
+            <a:off x="8267698" y="3591889"/>
+            <a:ext cx="3706473" cy="2492990"/>
+          </a:xfrm>
+          <a:prstGeom prst="rect">
+            <a:avLst/>
+          </a:prstGeom>
+          <a:noFill/>
+          <a:ln>
+            <a:solidFill>
+              <a:schemeClr val="tx1"/>
+            </a:solidFill>
+          </a:ln>
+        </p:spPr>
+        <p:txBody>
+          <a:bodyPr wrap="square" rtlCol="0">
+            <a:spAutoFit/>
+          </a:bodyPr>
+          <a:lstStyle/>
+          <a:p>
+            <a:r>
+              <a:rPr lang="en" altLang="ja-JP" sz="1200" dirty="0"/>
+              <a:t>I'd be happy to help you with that!</a:t>
+            </a:r>
+          </a:p>
+          <a:p>
+            <a:endParaRPr lang="en" altLang="ja-JP" sz="1200" dirty="0"/>
+          </a:p>
+          <a:p>
+            <a:r>
+              <a:rPr lang="en-US" altLang="ja-JP" sz="1200" dirty="0"/>
+              <a:t>…</a:t>
+            </a:r>
+            <a:r>
+              <a:rPr lang="ja-JP" altLang="en-US" sz="1200"/>
+              <a:t>中略</a:t>
+            </a:r>
+            <a:r>
+              <a:rPr lang="en-US" altLang="ja-JP" sz="1200" dirty="0"/>
+              <a:t>…</a:t>
+            </a:r>
+          </a:p>
+          <a:p>
+            <a:endParaRPr lang="en-US" altLang="ja-JP" sz="1200" dirty="0"/>
+          </a:p>
+          <a:p>
+            <a:r>
+              <a:rPr lang="en" altLang="ja-JP" sz="1200" dirty="0"/>
+              <a:t>```python</a:t>
+            </a:r>
+          </a:p>
+          <a:p>
+            <a:r>
+              <a:rPr lang="en" altLang="ja-JP" sz="1200" dirty="0"/>
+              <a:t>import </a:t>
+            </a:r>
+            <a:r>
+              <a:rPr lang="en" altLang="ja-JP" sz="1200" dirty="0" err="1"/>
+              <a:t>json</a:t>
+            </a:r>
+            <a:endParaRPr lang="en" altLang="ja-JP" sz="1200" dirty="0"/>
+          </a:p>
+          <a:p>
+            <a:r>
+              <a:rPr lang="en" altLang="ja-JP" sz="1200" dirty="0"/>
+              <a:t>import </a:t>
+            </a:r>
+            <a:r>
+              <a:rPr lang="en" altLang="ja-JP" sz="1200" dirty="0" err="1"/>
+              <a:t>nltk</a:t>
+            </a:r>
+            <a:endParaRPr lang="en" altLang="ja-JP" sz="1200" dirty="0"/>
+          </a:p>
+          <a:p>
+            <a:r>
+              <a:rPr lang="en" altLang="ja-JP" sz="1200" dirty="0"/>
+              <a:t>from </a:t>
+            </a:r>
+            <a:r>
+              <a:rPr lang="en" altLang="ja-JP" sz="1200" dirty="0" err="1"/>
+              <a:t>nltk.tokenize</a:t>
+            </a:r>
+            <a:r>
+              <a:rPr lang="en" altLang="ja-JP" sz="1200" dirty="0"/>
+              <a:t> import </a:t>
+            </a:r>
+            <a:r>
+              <a:rPr lang="en" altLang="ja-JP" sz="1200" dirty="0" err="1"/>
+              <a:t>word_tokenize</a:t>
+            </a:r>
+            <a:endParaRPr lang="en" altLang="ja-JP" sz="1200" dirty="0"/>
+          </a:p>
+          <a:p>
+            <a:endParaRPr lang="en" altLang="ja-JP" sz="1200" dirty="0"/>
+          </a:p>
+          <a:p>
+            <a:r>
+              <a:rPr lang="en-US" altLang="ja-JP" sz="1200" dirty="0"/>
+              <a:t>…</a:t>
+            </a:r>
+            <a:r>
+              <a:rPr lang="ja-JP" altLang="en-US" sz="1200"/>
+              <a:t>中略</a:t>
+            </a:r>
+            <a:r>
+              <a:rPr lang="en-US" altLang="ja-JP" sz="1200" dirty="0"/>
+              <a:t>…</a:t>
+            </a:r>
+          </a:p>
+          <a:p>
+            <a:endParaRPr lang="en" altLang="ja-JP" sz="1200" dirty="0"/>
+          </a:p>
+          <a:p>
+            <a:r>
+              <a:rPr lang="en" altLang="ja-JP" sz="1200" dirty="0"/>
+              <a:t># Run the script</a:t>
+            </a:r>
+          </a:p>
+          <a:p>
+            <a:r>
+              <a:rPr lang="en" altLang="ja-JP" sz="1200" dirty="0"/>
+              <a:t>result = </a:t>
+            </a:r>
+            <a:r>
+              <a:rPr lang="en" altLang="ja-JP" sz="1200" dirty="0" err="1"/>
+              <a:t>check_location_candidates</a:t>
+            </a:r>
+            <a:r>
+              <a:rPr lang="en" altLang="ja-JP" sz="1200" dirty="0"/>
+              <a:t>(</a:t>
+            </a:r>
+            <a:r>
+              <a:rPr lang="en" altLang="ja-JP" sz="1200" dirty="0" err="1"/>
+              <a:t>json_data</a:t>
+            </a:r>
+            <a:r>
+              <a:rPr lang="en" altLang="ja-JP" sz="1200" dirty="0"/>
+              <a:t>)</a:t>
+            </a:r>
+          </a:p>
+        </p:txBody>
+      </p:sp>
+    </p:spTree>
+    <p:extLst>
+      <p:ext uri="{BB962C8B-B14F-4D97-AF65-F5344CB8AC3E}">
+        <p14:creationId xmlns:p14="http://schemas.microsoft.com/office/powerpoint/2010/main" val="2630796194"/>
+      </p:ext>
+    </p:extLst>
+  </p:cSld>
+  <p:clrMapOvr>
+    <a:masterClrMapping/>
+  </p:clrMapOvr>
+</p:sld>
+</file>
+
+<file path=ppt/slides/slide13.xml><?xml version="1.0" encoding="utf-8"?>
+<p:sld xmlns:a="http://schemas.openxmlformats.org/drawingml/2006/main" xmlns:r="http://schemas.openxmlformats.org/officeDocument/2006/relationships" xmlns:p="http://schemas.openxmlformats.org/presentationml/2006/main">
+  <p:cSld>
+    <p:spTree>
+      <p:nvGrpSpPr>
+        <p:cNvPr id="1" name="">
+          <a:extLst>
+            <a:ext uri="{FF2B5EF4-FFF2-40B4-BE49-F238E27FC236}">
+              <a16:creationId xmlns:a16="http://schemas.microsoft.com/office/drawing/2014/main" id="{5AB6A39A-A965-CE60-BEFF-D26F21DA3B21}"/>
+            </a:ext>
+          </a:extLst>
+        </p:cNvPr>
+        <p:cNvGrpSpPr/>
+        <p:nvPr/>
+      </p:nvGrpSpPr>
+      <p:grpSpPr>
+        <a:xfrm>
+          <a:off x="0" y="0"/>
+          <a:ext cx="0" cy="0"/>
+          <a:chOff x="0" y="0"/>
+          <a:chExt cx="0" cy="0"/>
+        </a:xfrm>
+      </p:grpSpPr>
+      <p:sp>
+        <p:nvSpPr>
+          <p:cNvPr id="2" name="タイトル 1">
+            <a:extLst>
+              <a:ext uri="{FF2B5EF4-FFF2-40B4-BE49-F238E27FC236}">
+                <a16:creationId xmlns:a16="http://schemas.microsoft.com/office/drawing/2014/main" id="{066B9C7C-452F-EDC6-7935-2760A08BDAA1}"/>
+              </a:ext>
+            </a:extLst>
+          </p:cNvPr>
+          <p:cNvSpPr>
+            <a:spLocks noGrp="1"/>
+          </p:cNvSpPr>
+          <p:nvPr>
+            <p:ph type="title"/>
+          </p:nvPr>
+        </p:nvSpPr>
+        <p:spPr>
+          <a:xfrm>
+            <a:off x="0" y="1"/>
+            <a:ext cx="12192000" cy="577516"/>
+          </a:xfrm>
+          <a:solidFill>
+            <a:schemeClr val="bg1">
+              <a:lumMod val="85000"/>
+            </a:schemeClr>
+          </a:solidFill>
+        </p:spPr>
+        <p:txBody>
+          <a:bodyPr>
+            <a:normAutofit fontScale="90000"/>
+          </a:bodyPr>
+          <a:lstStyle/>
+          <a:p>
+            <a:r>
+              <a:rPr lang="ja-JP" altLang="en-US" sz="3600"/>
+              <a:t>結果</a:t>
+            </a:r>
+            <a:r>
+              <a:rPr lang="en-US" altLang="ja-JP" sz="3600" dirty="0">
+                <a:sym typeface="Wingdings" pitchFamily="2" charset="2"/>
+              </a:rPr>
+              <a:t>(</a:t>
+            </a:r>
+            <a:r>
+              <a:rPr lang="ja-JP" altLang="en-US" sz="3600">
+                <a:sym typeface="Wingdings" pitchFamily="2" charset="2"/>
+              </a:rPr>
+              <a:t>正しい出力形式</a:t>
+            </a:r>
+            <a:r>
+              <a:rPr lang="en-US" altLang="ja-JP" sz="3600" dirty="0">
+                <a:sym typeface="Wingdings" pitchFamily="2" charset="2"/>
+              </a:rPr>
+              <a:t>)</a:t>
+            </a:r>
+            <a:endParaRPr kumimoji="1" lang="ja-JP" altLang="en-US" sz="3600"/>
+          </a:p>
+        </p:txBody>
+      </p:sp>
+      <p:sp>
+        <p:nvSpPr>
+          <p:cNvPr id="3" name="テキスト ボックス 2">
+            <a:extLst>
+              <a:ext uri="{FF2B5EF4-FFF2-40B4-BE49-F238E27FC236}">
+                <a16:creationId xmlns:a16="http://schemas.microsoft.com/office/drawing/2014/main" id="{322FD0C8-E6B1-B5C0-5B54-DC19D9747946}"/>
+              </a:ext>
+            </a:extLst>
+          </p:cNvPr>
+          <p:cNvSpPr txBox="1"/>
+          <p:nvPr/>
+        </p:nvSpPr>
+        <p:spPr>
+          <a:xfrm>
+            <a:off x="0" y="659218"/>
+            <a:ext cx="2723823" cy="369332"/>
           </a:xfrm>
           <a:prstGeom prst="rect">
             <a:avLst/>
@@ -5347,7 +6865,7 @@
           <a:p>
             <a:r>
               <a:rPr kumimoji="1" lang="ja-JP" altLang="en-US"/>
-              <a:t>人</a:t>
+              <a:t>正しい出力形式とした例</a:t>
             </a:r>
           </a:p>
         </p:txBody>
@@ -5357,7 +6875,7 @@
           <p:cNvPr id="6" name="テキスト ボックス 5">
             <a:extLst>
               <a:ext uri="{FF2B5EF4-FFF2-40B4-BE49-F238E27FC236}">
-                <a16:creationId xmlns:a16="http://schemas.microsoft.com/office/drawing/2014/main" id="{14B1E202-4DFE-F8A0-1B36-6DF757469BAB}"/>
+                <a16:creationId xmlns:a16="http://schemas.microsoft.com/office/drawing/2014/main" id="{F2309387-A5BC-51F0-6CAD-9154F959E84F}"/>
               </a:ext>
             </a:extLst>
           </p:cNvPr>
@@ -5366,8 +6884,8 @@
         </p:nvSpPr>
         <p:spPr>
           <a:xfrm>
-            <a:off x="0" y="3518266"/>
-            <a:ext cx="1800493" cy="369332"/>
+            <a:off x="21266" y="4096453"/>
+            <a:ext cx="2262158" cy="369332"/>
           </a:xfrm>
           <a:prstGeom prst="rect">
             <a:avLst/>
@@ -5390,7 +6908,7 @@
             </a:r>
             <a:r>
               <a:rPr kumimoji="1" lang="ja-JP" altLang="en-US"/>
-              <a:t>形式</a:t>
+              <a:t>形式の数</a:t>
             </a:r>
           </a:p>
         </p:txBody>
@@ -5400,7 +6918,7 @@
           <p:cNvPr id="8" name="図 7" descr="テーブル&#10;&#10;AI 生成コンテンツは誤りを含む可能性があります。">
             <a:extLst>
               <a:ext uri="{FF2B5EF4-FFF2-40B4-BE49-F238E27FC236}">
-                <a16:creationId xmlns:a16="http://schemas.microsoft.com/office/drawing/2014/main" id="{D72BBDDA-5F1E-2F80-C09A-5478507D6089}"/>
+                <a16:creationId xmlns:a16="http://schemas.microsoft.com/office/drawing/2014/main" id="{91471F6B-9CD0-BE90-59BC-2801C9DC572A}"/>
               </a:ext>
             </a:extLst>
           </p:cNvPr>
@@ -5410,14 +6928,14 @@
           <p:nvPr/>
         </p:nvPicPr>
         <p:blipFill>
-          <a:blip r:embed="rId2"/>
+          <a:blip r:embed="rId3"/>
           <a:stretch>
             <a:fillRect/>
           </a:stretch>
         </p:blipFill>
         <p:spPr>
           <a:xfrm>
-            <a:off x="1819734" y="4285032"/>
+            <a:off x="1841000" y="4465785"/>
             <a:ext cx="3448883" cy="2152697"/>
           </a:xfrm>
           <a:prstGeom prst="rect">
@@ -5430,7 +6948,7 @@
           <p:cNvPr id="9" name="テキスト ボックス 8">
             <a:extLst>
               <a:ext uri="{FF2B5EF4-FFF2-40B4-BE49-F238E27FC236}">
-                <a16:creationId xmlns:a16="http://schemas.microsoft.com/office/drawing/2014/main" id="{4A694241-9C1C-E104-F33E-F94EE9286E7C}"/>
+                <a16:creationId xmlns:a16="http://schemas.microsoft.com/office/drawing/2014/main" id="{B1853A0B-0724-8A2C-C25C-CEAF57820E41}"/>
               </a:ext>
             </a:extLst>
           </p:cNvPr>
@@ -5439,7 +6957,7 @@
         </p:nvSpPr>
         <p:spPr>
           <a:xfrm>
-            <a:off x="5629739" y="5381479"/>
+            <a:off x="5651005" y="5562232"/>
             <a:ext cx="5328703" cy="369332"/>
           </a:xfrm>
           <a:prstGeom prst="rect">
@@ -5490,7 +7008,7 @@
           <p:cNvPr id="10" name="右中かっこ 9">
             <a:extLst>
               <a:ext uri="{FF2B5EF4-FFF2-40B4-BE49-F238E27FC236}">
-                <a16:creationId xmlns:a16="http://schemas.microsoft.com/office/drawing/2014/main" id="{886B1773-12DE-15E2-D36D-4FE5087320A8}"/>
+                <a16:creationId xmlns:a16="http://schemas.microsoft.com/office/drawing/2014/main" id="{00563AE2-6073-6E67-059D-1343F6539396}"/>
               </a:ext>
             </a:extLst>
           </p:cNvPr>
@@ -5499,7 +7017,7 @@
         </p:nvSpPr>
         <p:spPr>
           <a:xfrm>
-            <a:off x="5369434" y="4784652"/>
+            <a:off x="5390700" y="4965405"/>
             <a:ext cx="159488" cy="1562986"/>
           </a:xfrm>
           <a:prstGeom prst="rightBrace">
@@ -5529,10 +7047,582 @@
           </a:p>
         </p:txBody>
       </p:sp>
+      <p:sp>
+        <p:nvSpPr>
+          <p:cNvPr id="13" name="テキスト ボックス 12">
+            <a:extLst>
+              <a:ext uri="{FF2B5EF4-FFF2-40B4-BE49-F238E27FC236}">
+                <a16:creationId xmlns:a16="http://schemas.microsoft.com/office/drawing/2014/main" id="{45AE036E-6CD7-CC9D-3977-E09BBD813E23}"/>
+              </a:ext>
+            </a:extLst>
+          </p:cNvPr>
+          <p:cNvSpPr txBox="1"/>
+          <p:nvPr/>
+        </p:nvSpPr>
+        <p:spPr>
+          <a:xfrm>
+            <a:off x="202020" y="2090854"/>
+            <a:ext cx="8710332" cy="1815882"/>
+          </a:xfrm>
+          <a:prstGeom prst="rect">
+            <a:avLst/>
+          </a:prstGeom>
+          <a:noFill/>
+          <a:ln>
+            <a:solidFill>
+              <a:schemeClr val="tx1"/>
+            </a:solidFill>
+          </a:ln>
+        </p:spPr>
+        <p:txBody>
+          <a:bodyPr wrap="square" rtlCol="0">
+            <a:spAutoFit/>
+          </a:bodyPr>
+          <a:lstStyle/>
+          <a:p>
+            <a:r>
+              <a:rPr lang="en-US" altLang="ja-JP" sz="1400" dirty="0"/>
+              <a:t>[</a:t>
+            </a:r>
+            <a:r>
+              <a:rPr lang="en-US" altLang="ja-JP" sz="1400" dirty="0">
+                <a:highlight>
+                  <a:srgbClr val="808080"/>
+                </a:highlight>
+              </a:rPr>
+              <a:t>["</a:t>
+            </a:r>
+            <a:r>
+              <a:rPr lang="ja-JP" altLang="en-US" sz="1400">
+                <a:highlight>
+                  <a:srgbClr val="808080"/>
+                </a:highlight>
+              </a:rPr>
+              <a:t>滋賀</a:t>
+            </a:r>
+            <a:r>
+              <a:rPr lang="en-US" altLang="ja-JP" sz="1400" dirty="0">
+                <a:highlight>
+                  <a:srgbClr val="808080"/>
+                </a:highlight>
+              </a:rPr>
+              <a:t>","</a:t>
+            </a:r>
+            <a:r>
+              <a:rPr lang="ja-JP" altLang="en-US" sz="1400">
+                <a:highlight>
+                  <a:srgbClr val="808080"/>
+                </a:highlight>
+              </a:rPr>
+              <a:t>滋賀</a:t>
+            </a:r>
+            <a:r>
+              <a:rPr lang="en-US" altLang="ja-JP" sz="1400" dirty="0">
+                <a:highlight>
+                  <a:srgbClr val="808080"/>
+                </a:highlight>
+              </a:rPr>
+              <a:t>"]</a:t>
+            </a:r>
+            <a:r>
+              <a:rPr lang="en-US" altLang="ja-JP" sz="1400" dirty="0"/>
+              <a:t>,["</a:t>
+            </a:r>
+            <a:r>
+              <a:rPr lang="ja-JP" altLang="en-US" sz="1400"/>
+              <a:t>滋賀</a:t>
+            </a:r>
+            <a:r>
+              <a:rPr lang="en-US" altLang="ja-JP" sz="1400" dirty="0"/>
+              <a:t>",0],</a:t>
+            </a:r>
+            <a:r>
+              <a:rPr lang="en-US" altLang="ja-JP" sz="1400" dirty="0">
+                <a:highlight>
+                  <a:srgbClr val="808080"/>
+                </a:highlight>
+              </a:rPr>
+              <a:t>"</a:t>
+            </a:r>
+            <a:r>
+              <a:rPr lang="ja-JP" altLang="en-US" sz="1400">
+                <a:highlight>
+                  <a:srgbClr val="808080"/>
+                </a:highlight>
+              </a:rPr>
+              <a:t>消化器内科学 </a:t>
+            </a:r>
+            <a:r>
+              <a:rPr lang="en-US" altLang="ja-JP" sz="1400" dirty="0">
+                <a:highlight>
+                  <a:srgbClr val="808080"/>
+                </a:highlight>
+              </a:rPr>
+              <a:t>/ </a:t>
+            </a:r>
+            <a:r>
+              <a:rPr lang="ja-JP" altLang="en-US" sz="1400">
+                <a:highlight>
+                  <a:srgbClr val="808080"/>
+                </a:highlight>
+              </a:rPr>
+              <a:t>内科系臨床医学 </a:t>
+            </a:r>
+            <a:r>
+              <a:rPr lang="en-US" altLang="ja-JP" sz="1400" dirty="0">
+                <a:highlight>
+                  <a:srgbClr val="808080"/>
+                </a:highlight>
+              </a:rPr>
+              <a:t>/ </a:t>
+            </a:r>
+            <a:r>
+              <a:rPr lang="ja-JP" altLang="en-US" sz="1400">
+                <a:highlight>
+                  <a:srgbClr val="808080"/>
+                </a:highlight>
+              </a:rPr>
+              <a:t>医歯薬学 </a:t>
+            </a:r>
+            <a:r>
+              <a:rPr lang="en-US" altLang="ja-JP" sz="1400" dirty="0">
+                <a:highlight>
+                  <a:srgbClr val="808080"/>
+                </a:highlight>
+              </a:rPr>
+              <a:t>/ </a:t>
+            </a:r>
+            <a:r>
+              <a:rPr lang="ja-JP" altLang="en-US" sz="1400">
+                <a:highlight>
+                  <a:srgbClr val="808080"/>
+                </a:highlight>
+              </a:rPr>
+              <a:t>生物系</a:t>
+            </a:r>
+            <a:r>
+              <a:rPr lang="en-US" altLang="ja-JP" sz="1400" dirty="0">
+                <a:highlight>
+                  <a:srgbClr val="808080"/>
+                </a:highlight>
+              </a:rPr>
+              <a:t>"</a:t>
+            </a:r>
+            <a:r>
+              <a:rPr lang="en-US" altLang="ja-JP" sz="1400" dirty="0"/>
+              <a:t>,["</a:t>
+            </a:r>
+            <a:r>
+              <a:rPr lang="ja-JP" altLang="en-US" sz="1400"/>
+              <a:t>がん患者の精神症状に対する治療指針の確立</a:t>
+            </a:r>
+            <a:r>
+              <a:rPr lang="en-US" altLang="ja-JP" sz="1400" dirty="0"/>
+              <a:t>","23590876"," "," ","</a:t>
+            </a:r>
+            <a:r>
+              <a:rPr lang="ja-JP" altLang="en-US" sz="1400"/>
+              <a:t>滋賀県下でがん患者の精神症状対応に関する医療者アンケートを施行し、その結果に基づいて、せん妄の対応を検討した。後ろ向き調査から少量のミダゾラムと</a:t>
+            </a:r>
+            <a:r>
+              <a:rPr lang="en" altLang="ja-JP" sz="1400" dirty="0"/>
+              <a:t>HAL</a:t>
+            </a:r>
+            <a:r>
+              <a:rPr lang="ja-JP" altLang="en-US" sz="1400"/>
+              <a:t>の静脈内投与併用例の効果を見出した。また、緩和ケアチーム依頼患者について調査から、</a:t>
+            </a:r>
+            <a:r>
+              <a:rPr lang="en" altLang="ja-JP" sz="1400" dirty="0"/>
+              <a:t>HAL</a:t>
+            </a:r>
+            <a:r>
+              <a:rPr lang="ja-JP" altLang="en-US" sz="1400"/>
+              <a:t>静脈内投与はチーム介入以前であり、さらに</a:t>
+            </a:r>
+            <a:r>
+              <a:rPr lang="en" altLang="ja-JP" sz="1400" dirty="0"/>
+              <a:t>HAL</a:t>
+            </a:r>
+            <a:r>
+              <a:rPr lang="ja-JP" altLang="en-US" sz="1400"/>
+              <a:t>静脈内投与がせん妄がん患者に対して約</a:t>
+            </a:r>
+            <a:r>
+              <a:rPr lang="en-US" altLang="ja-JP" sz="1400" dirty="0"/>
+              <a:t>70</a:t>
+            </a:r>
+            <a:r>
+              <a:rPr lang="ja-JP" altLang="en-US" sz="1400"/>
+              <a:t>％奏功し、初期投与推奨量は</a:t>
+            </a:r>
+            <a:r>
+              <a:rPr lang="en-US" altLang="ja-JP" sz="1400" dirty="0"/>
+              <a:t>5㎎/</a:t>
+            </a:r>
+            <a:r>
+              <a:rPr lang="ja-JP" altLang="en-US" sz="1400"/>
+              <a:t>日であることを見出した。さらに滋賀県の複数のがん拠点病院で精神症状についての数回のスタッフへの講義のみよりも、スタッフへの継続的直接指導をした病院で、精神症状への対応改善</a:t>
+            </a:r>
+            <a:r>
+              <a:rPr lang="en-US" altLang="ja-JP" sz="1400" dirty="0"/>
+              <a:t>(</a:t>
+            </a:r>
+            <a:r>
+              <a:rPr lang="ja-JP" altLang="en-US" sz="1400"/>
+              <a:t>特にせん妄早期対応</a:t>
+            </a:r>
+            <a:r>
+              <a:rPr lang="en-US" altLang="ja-JP" sz="1400" dirty="0"/>
+              <a:t>)</a:t>
+            </a:r>
+            <a:r>
+              <a:rPr lang="ja-JP" altLang="en-US" sz="1400"/>
+              <a:t>により緩和ケアチーム対応数が約</a:t>
+            </a:r>
+            <a:r>
+              <a:rPr lang="en-US" altLang="ja-JP" sz="1400" dirty="0"/>
+              <a:t>40</a:t>
+            </a:r>
+            <a:r>
+              <a:rPr lang="ja-JP" altLang="en-US" sz="1400"/>
+              <a:t>％減少した。</a:t>
+            </a:r>
+            <a:r>
+              <a:rPr lang="en-US" altLang="ja-JP" sz="1400" dirty="0"/>
+              <a:t>"," "]]</a:t>
+            </a:r>
+          </a:p>
+        </p:txBody>
+      </p:sp>
+      <p:sp>
+        <p:nvSpPr>
+          <p:cNvPr id="14" name="テキスト ボックス 13">
+            <a:extLst>
+              <a:ext uri="{FF2B5EF4-FFF2-40B4-BE49-F238E27FC236}">
+                <a16:creationId xmlns:a16="http://schemas.microsoft.com/office/drawing/2014/main" id="{26DC0326-6B87-0289-69DA-FF9538FF3F85}"/>
+              </a:ext>
+            </a:extLst>
+          </p:cNvPr>
+          <p:cNvSpPr txBox="1"/>
+          <p:nvPr/>
+        </p:nvSpPr>
+        <p:spPr>
+          <a:xfrm>
+            <a:off x="202019" y="1085173"/>
+            <a:ext cx="1105786" cy="307777"/>
+          </a:xfrm>
+          <a:prstGeom prst="rect">
+            <a:avLst/>
+          </a:prstGeom>
+          <a:noFill/>
+          <a:ln>
+            <a:solidFill>
+              <a:schemeClr val="tx1"/>
+            </a:solidFill>
+          </a:ln>
+        </p:spPr>
+        <p:txBody>
+          <a:bodyPr wrap="square" rtlCol="0">
+            <a:spAutoFit/>
+          </a:bodyPr>
+          <a:lstStyle/>
+          <a:p>
+            <a:r>
+              <a:rPr lang="en-US" altLang="ja-JP" sz="1400" dirty="0"/>
+              <a:t>[["</a:t>
+            </a:r>
+            <a:r>
+              <a:rPr lang="ja-JP" altLang="en-US" sz="1400"/>
+              <a:t>滋賀</a:t>
+            </a:r>
+            <a:r>
+              <a:rPr lang="en-US" altLang="ja-JP" sz="1400" dirty="0"/>
+              <a:t>",0]]</a:t>
+            </a:r>
+          </a:p>
+        </p:txBody>
+      </p:sp>
+      <p:sp>
+        <p:nvSpPr>
+          <p:cNvPr id="15" name="テキスト ボックス 14">
+            <a:extLst>
+              <a:ext uri="{FF2B5EF4-FFF2-40B4-BE49-F238E27FC236}">
+                <a16:creationId xmlns:a16="http://schemas.microsoft.com/office/drawing/2014/main" id="{7EE0E484-4B27-E546-ACD4-5721A4827326}"/>
+              </a:ext>
+            </a:extLst>
+          </p:cNvPr>
+          <p:cNvSpPr txBox="1"/>
+          <p:nvPr/>
+        </p:nvSpPr>
+        <p:spPr>
+          <a:xfrm>
+            <a:off x="202019" y="1589003"/>
+            <a:ext cx="1105786" cy="307777"/>
+          </a:xfrm>
+          <a:prstGeom prst="rect">
+            <a:avLst/>
+          </a:prstGeom>
+          <a:noFill/>
+          <a:ln>
+            <a:solidFill>
+              <a:schemeClr val="tx1"/>
+            </a:solidFill>
+          </a:ln>
+        </p:spPr>
+        <p:txBody>
+          <a:bodyPr wrap="square" rtlCol="0">
+            <a:spAutoFit/>
+          </a:bodyPr>
+          <a:lstStyle/>
+          <a:p>
+            <a:r>
+              <a:rPr lang="en-US" altLang="ja-JP" sz="1400" dirty="0"/>
+              <a:t>["</a:t>
+            </a:r>
+            <a:r>
+              <a:rPr lang="ja-JP" altLang="en-US" sz="1400"/>
+              <a:t>滋賀</a:t>
+            </a:r>
+            <a:r>
+              <a:rPr lang="en-US" altLang="ja-JP" sz="1400" dirty="0"/>
+              <a:t>",0]</a:t>
+            </a:r>
+          </a:p>
+        </p:txBody>
+      </p:sp>
+      <p:sp>
+        <p:nvSpPr>
+          <p:cNvPr id="16" name="テキスト ボックス 15">
+            <a:extLst>
+              <a:ext uri="{FF2B5EF4-FFF2-40B4-BE49-F238E27FC236}">
+                <a16:creationId xmlns:a16="http://schemas.microsoft.com/office/drawing/2014/main" id="{A7F7691D-464B-8F3A-9D51-1D9D2625B00A}"/>
+              </a:ext>
+            </a:extLst>
+          </p:cNvPr>
+          <p:cNvSpPr txBox="1"/>
+          <p:nvPr/>
+        </p:nvSpPr>
+        <p:spPr>
+          <a:xfrm>
+            <a:off x="2296124" y="1304815"/>
+            <a:ext cx="5852884" cy="369332"/>
+          </a:xfrm>
+          <a:prstGeom prst="rect">
+            <a:avLst/>
+          </a:prstGeom>
+          <a:noFill/>
+        </p:spPr>
+        <p:txBody>
+          <a:bodyPr wrap="none" rtlCol="0">
+            <a:spAutoFit/>
+          </a:bodyPr>
+          <a:lstStyle/>
+          <a:p>
+            <a:r>
+              <a:rPr kumimoji="1" lang="ja-JP" altLang="en-US"/>
+              <a:t>第２要素のみと見做せるもの（文字列と</a:t>
+            </a:r>
+            <a:r>
+              <a:rPr lang="ja-JP" altLang="en-US"/>
+              <a:t>数値</a:t>
+            </a:r>
+            <a:r>
+              <a:rPr lang="en-US" altLang="ja-JP" dirty="0"/>
+              <a:t>0</a:t>
+            </a:r>
+            <a:r>
+              <a:rPr lang="ja-JP" altLang="en-US"/>
+              <a:t>の混成</a:t>
+            </a:r>
+            <a:r>
+              <a:rPr kumimoji="1" lang="ja-JP" altLang="en-US"/>
+              <a:t>）</a:t>
+            </a:r>
+          </a:p>
+        </p:txBody>
+      </p:sp>
+      <p:sp>
+        <p:nvSpPr>
+          <p:cNvPr id="17" name="テキスト ボックス 16">
+            <a:extLst>
+              <a:ext uri="{FF2B5EF4-FFF2-40B4-BE49-F238E27FC236}">
+                <a16:creationId xmlns:a16="http://schemas.microsoft.com/office/drawing/2014/main" id="{0AF3B828-4EFC-80F2-F921-C516E4363ACE}"/>
+              </a:ext>
+            </a:extLst>
+          </p:cNvPr>
+          <p:cNvSpPr txBox="1"/>
+          <p:nvPr/>
+        </p:nvSpPr>
+        <p:spPr>
+          <a:xfrm>
+            <a:off x="9000450" y="2814129"/>
+            <a:ext cx="2621230" cy="369332"/>
+          </a:xfrm>
+          <a:prstGeom prst="rect">
+            <a:avLst/>
+          </a:prstGeom>
+          <a:noFill/>
+        </p:spPr>
+        <p:txBody>
+          <a:bodyPr wrap="none" rtlCol="0">
+            <a:spAutoFit/>
+          </a:bodyPr>
+          <a:lstStyle/>
+          <a:p>
+            <a:r>
+              <a:rPr kumimoji="1" lang="ja-JP" altLang="en-US"/>
+              <a:t>第</a:t>
+            </a:r>
+            <a:r>
+              <a:rPr kumimoji="1" lang="en-US" altLang="ja-JP" dirty="0"/>
+              <a:t>2</a:t>
+            </a:r>
+            <a:r>
+              <a:rPr kumimoji="1" lang="ja-JP" altLang="en-US"/>
+              <a:t>要素が</a:t>
+            </a:r>
+            <a:r>
+              <a:rPr lang="ja-JP" altLang="en-US"/>
+              <a:t>抽出できるも</a:t>
+            </a:r>
+            <a:endParaRPr kumimoji="1" lang="ja-JP" altLang="en-US"/>
+          </a:p>
+        </p:txBody>
+      </p:sp>
+      <p:sp>
+        <p:nvSpPr>
+          <p:cNvPr id="18" name="テキスト ボックス 17">
+            <a:extLst>
+              <a:ext uri="{FF2B5EF4-FFF2-40B4-BE49-F238E27FC236}">
+                <a16:creationId xmlns:a16="http://schemas.microsoft.com/office/drawing/2014/main" id="{DCC62751-042F-F609-6AD5-4501FA34328A}"/>
+              </a:ext>
+            </a:extLst>
+          </p:cNvPr>
+          <p:cNvSpPr txBox="1"/>
+          <p:nvPr/>
+        </p:nvSpPr>
+        <p:spPr>
+          <a:xfrm>
+            <a:off x="8225208" y="1573615"/>
+            <a:ext cx="2441694" cy="338554"/>
+          </a:xfrm>
+          <a:prstGeom prst="rect">
+            <a:avLst/>
+          </a:prstGeom>
+          <a:noFill/>
+        </p:spPr>
+        <p:txBody>
+          <a:bodyPr wrap="none" rtlCol="0">
+            <a:spAutoFit/>
+          </a:bodyPr>
+          <a:lstStyle/>
+          <a:p>
+            <a:r>
+              <a:rPr kumimoji="1" lang="ja-JP" altLang="en-US" sz="1600" b="1"/>
+              <a:t>最終的にこの形式を抽出</a:t>
+            </a:r>
+          </a:p>
+        </p:txBody>
+      </p:sp>
+      <p:sp>
+        <p:nvSpPr>
+          <p:cNvPr id="19" name="右中かっこ 18">
+            <a:extLst>
+              <a:ext uri="{FF2B5EF4-FFF2-40B4-BE49-F238E27FC236}">
+                <a16:creationId xmlns:a16="http://schemas.microsoft.com/office/drawing/2014/main" id="{7FD55156-A77C-2DC3-0EC9-9C141BF19206}"/>
+              </a:ext>
+            </a:extLst>
+          </p:cNvPr>
+          <p:cNvSpPr/>
+          <p:nvPr/>
+        </p:nvSpPr>
+        <p:spPr>
+          <a:xfrm>
+            <a:off x="1778000" y="1085173"/>
+            <a:ext cx="177800" cy="811607"/>
+          </a:xfrm>
+          <a:prstGeom prst="rightBrace">
+            <a:avLst/>
+          </a:prstGeom>
+          <a:ln w="12700">
+            <a:solidFill>
+              <a:schemeClr val="tx1"/>
+            </a:solidFill>
+          </a:ln>
+        </p:spPr>
+        <p:style>
+          <a:lnRef idx="2">
+            <a:schemeClr val="accent1"/>
+          </a:lnRef>
+          <a:fillRef idx="0">
+            <a:schemeClr val="accent1"/>
+          </a:fillRef>
+          <a:effectRef idx="1">
+            <a:schemeClr val="accent1"/>
+          </a:effectRef>
+          <a:fontRef idx="minor">
+            <a:schemeClr val="tx1"/>
+          </a:fontRef>
+        </p:style>
+        <p:txBody>
+          <a:bodyPr rtlCol="0" anchor="ctr"/>
+          <a:lstStyle/>
+          <a:p>
+            <a:pPr algn="ctr"/>
+            <a:endParaRPr kumimoji="1" lang="ja-JP" altLang="en-US"/>
+          </a:p>
+        </p:txBody>
+      </p:sp>
+      <p:cxnSp>
+        <p:nvCxnSpPr>
+          <p:cNvPr id="21" name="直線矢印コネクタ 20">
+            <a:extLst>
+              <a:ext uri="{FF2B5EF4-FFF2-40B4-BE49-F238E27FC236}">
+                <a16:creationId xmlns:a16="http://schemas.microsoft.com/office/drawing/2014/main" id="{27A26C19-C6C9-BEA3-450A-648AFDFE9EC7}"/>
+              </a:ext>
+            </a:extLst>
+          </p:cNvPr>
+          <p:cNvCxnSpPr>
+            <a:stCxn id="18" idx="1"/>
+            <a:endCxn id="15" idx="3"/>
+          </p:cNvCxnSpPr>
+          <p:nvPr/>
+        </p:nvCxnSpPr>
+        <p:spPr>
+          <a:xfrm flipH="1">
+            <a:off x="1307805" y="1742892"/>
+            <a:ext cx="6917403" cy="0"/>
+          </a:xfrm>
+          <a:prstGeom prst="straightConnector1">
+            <a:avLst/>
+          </a:prstGeom>
+          <a:ln w="9525">
+            <a:solidFill>
+              <a:schemeClr val="tx1"/>
+            </a:solidFill>
+            <a:tailEnd type="triangle"/>
+          </a:ln>
+        </p:spPr>
+        <p:style>
+          <a:lnRef idx="2">
+            <a:schemeClr val="accent1"/>
+          </a:lnRef>
+          <a:fillRef idx="0">
+            <a:schemeClr val="accent1"/>
+          </a:fillRef>
+          <a:effectRef idx="1">
+            <a:schemeClr val="accent1"/>
+          </a:effectRef>
+          <a:fontRef idx="minor">
+            <a:schemeClr val="tx1"/>
+          </a:fontRef>
+        </p:style>
+      </p:cxnSp>
     </p:spTree>
     <p:extLst>
       <p:ext uri="{BB962C8B-B14F-4D97-AF65-F5344CB8AC3E}">
-        <p14:creationId xmlns:p14="http://schemas.microsoft.com/office/powerpoint/2010/main" val="2630796194"/>
+        <p14:creationId xmlns:p14="http://schemas.microsoft.com/office/powerpoint/2010/main" val="4075282495"/>
       </p:ext>
     </p:extLst>
   </p:cSld>
@@ -5542,7 +7632,7 @@
 </p:sld>
 </file>
 
-<file path=ppt/slides/slide13.xml><?xml version="1.0" encoding="utf-8"?>
+<file path=ppt/slides/slide14.xml><?xml version="1.0" encoding="utf-8"?>
 <p:sld xmlns:a="http://schemas.openxmlformats.org/drawingml/2006/main" xmlns:r="http://schemas.openxmlformats.org/officeDocument/2006/relationships" xmlns:p="http://schemas.openxmlformats.org/presentationml/2006/main">
   <p:cSld>
     <p:spTree>
@@ -5606,13 +7696,13 @@
               <a:rPr lang="en-US" altLang="ja-JP" sz="3600" dirty="0">
                 <a:sym typeface="Wingdings" pitchFamily="2" charset="2"/>
               </a:rPr>
-              <a:t>(</a:t>
+              <a:t>(NER</a:t>
             </a:r>
             <a:r>
               <a:rPr lang="ja-JP" altLang="en-US" sz="3600">
                 <a:sym typeface="Wingdings" pitchFamily="2" charset="2"/>
               </a:rPr>
-              <a:t>判定結果の差異と修正数</a:t>
+              <a:t>に対する判定の差異</a:t>
             </a:r>
             <a:r>
               <a:rPr lang="en-US" altLang="ja-JP" sz="3600" dirty="0">
@@ -5673,7 +7763,7 @@
         </p:nvSpPr>
         <p:spPr>
           <a:xfrm>
-            <a:off x="5784111" y="580876"/>
+            <a:off x="5923811" y="580876"/>
             <a:ext cx="1800493" cy="369332"/>
           </a:xfrm>
           <a:prstGeom prst="rect">
@@ -5811,7 +7901,7 @@
         </p:blipFill>
         <p:spPr>
           <a:xfrm>
-            <a:off x="6096000" y="1416023"/>
+            <a:off x="6235700" y="1416023"/>
             <a:ext cx="5021432" cy="3560014"/>
           </a:xfrm>
           <a:prstGeom prst="rect">
@@ -5888,7 +7978,7 @@
 </p:sld>
 </file>
 
-<file path=ppt/slides/slide14.xml><?xml version="1.0" encoding="utf-8"?>
+<file path=ppt/slides/slide15.xml><?xml version="1.0" encoding="utf-8"?>
 <p:sld xmlns:a="http://schemas.openxmlformats.org/drawingml/2006/main" xmlns:r="http://schemas.openxmlformats.org/officeDocument/2006/relationships" xmlns:p="http://schemas.openxmlformats.org/presentationml/2006/main">
   <p:cSld>
     <p:spTree>
@@ -5984,7 +8074,7 @@
         </p:nvSpPr>
         <p:spPr>
           <a:xfrm>
-            <a:off x="6096000" y="591508"/>
+            <a:off x="5283200" y="713822"/>
             <a:ext cx="5006499" cy="369332"/>
           </a:xfrm>
           <a:prstGeom prst="rect">
@@ -6048,7 +8138,7 @@
         </p:blipFill>
         <p:spPr>
           <a:xfrm>
-            <a:off x="6453964" y="1270363"/>
+            <a:off x="5641164" y="1346563"/>
             <a:ext cx="5522457" cy="4086818"/>
           </a:xfrm>
           <a:prstGeom prst="rect">
@@ -6070,7 +8160,7 @@
         </p:nvSpPr>
         <p:spPr>
           <a:xfrm>
-            <a:off x="0" y="612222"/>
+            <a:off x="723900" y="713822"/>
             <a:ext cx="3185487" cy="369332"/>
           </a:xfrm>
           <a:prstGeom prst="rect">
@@ -6113,7 +8203,7 @@
         </p:blipFill>
         <p:spPr>
           <a:xfrm>
-            <a:off x="296360" y="1270363"/>
+            <a:off x="1020260" y="1371963"/>
             <a:ext cx="2889127" cy="2183261"/>
           </a:xfrm>
           <a:prstGeom prst="rect">
@@ -6135,7 +8225,7 @@
         </p:nvSpPr>
         <p:spPr>
           <a:xfrm>
-            <a:off x="7584777" y="5433748"/>
+            <a:off x="6771977" y="5509948"/>
             <a:ext cx="3260829" cy="307777"/>
           </a:xfrm>
           <a:prstGeom prst="rect">
@@ -6178,7 +8268,7 @@
 </p:sld>
 </file>
 
-<file path=ppt/slides/slide15.xml><?xml version="1.0" encoding="utf-8"?>
+<file path=ppt/slides/slide16.xml><?xml version="1.0" encoding="utf-8"?>
 <p:sld xmlns:a="http://schemas.openxmlformats.org/drawingml/2006/main" xmlns:r="http://schemas.openxmlformats.org/officeDocument/2006/relationships" xmlns:p="http://schemas.openxmlformats.org/presentationml/2006/main">
   <p:cSld>
     <p:spTree>
@@ -9970,7 +12060,7 @@
         <p:spPr>
           <a:xfrm>
             <a:off x="-1" y="577517"/>
-            <a:ext cx="12192000" cy="4524315"/>
+            <a:ext cx="12192000" cy="4801314"/>
           </a:xfrm>
           <a:prstGeom prst="rect">
             <a:avLst/>
@@ -10075,6 +12165,17 @@
             <a:r>
               <a:rPr lang="ja-JP" altLang="en-US"/>
               <a:t>にはないさらに上位の概念の付与）</a:t>
+            </a:r>
+            <a:endParaRPr lang="en-US" altLang="ja-JP" dirty="0"/>
+          </a:p>
+          <a:p>
+            <a:r>
+              <a:rPr lang="en-US" altLang="ja-JP" dirty="0"/>
+              <a:t>※</a:t>
+            </a:r>
+            <a:r>
+              <a:rPr lang="ja-JP" altLang="en-US"/>
+              <a:t>形態素解析というより構文解析の課題にまで発展してきている</a:t>
             </a:r>
             <a:endParaRPr lang="en-US" altLang="ja-JP" dirty="0"/>
           </a:p>
@@ -10262,7 +12363,17 @@
             </a:pPr>
             <a:r>
               <a:rPr lang="en" altLang="ja-JP" dirty="0"/>
-              <a:t>Toponym resolution leveraging lightweight and open-source large language models and geo-knowledge. 2024.  (https://www.tandfonline.com/doi/full/10.1080/13658816.2024.2405182)</a:t>
+              <a:t>Toponym resolution leveraging lightweight and open-source large language models and geo-knowledge. 2024.  (</a:t>
+            </a:r>
+            <a:r>
+              <a:rPr lang="en" altLang="ja-JP" dirty="0">
+                <a:hlinkClick r:id="rId2"/>
+              </a:rPr>
+              <a:t>https://www.tandfonline.com/doi/full/10.1080/13658816.2024.2405182</a:t>
+            </a:r>
+            <a:r>
+              <a:rPr lang="en" altLang="ja-JP" dirty="0"/>
+              <a:t>)</a:t>
             </a:r>
           </a:p>
           <a:p>
@@ -10325,7 +12436,7 @@
             </a:r>
             <a:r>
               <a:rPr lang="en-US" altLang="ja-JP" dirty="0">
-                <a:hlinkClick r:id="rId2"/>
+                <a:hlinkClick r:id="rId3"/>
               </a:rPr>
               <a:t>https://www.anlp.jp/proceedings/annual_meeting/2024/pdf_dir/C8-5.pdf</a:t>
             </a:r>
@@ -10424,7 +12535,7 @@
             </a:r>
             <a:r>
               <a:rPr lang="en-US" altLang="ja-JP" dirty="0">
-                <a:hlinkClick r:id="rId3"/>
+                <a:hlinkClick r:id="rId4"/>
               </a:rPr>
               <a:t>https://ir.library.osaka-u.ac.jp/repo/ouka/all/93281/IPSJ-JNL_63_2_310.pdf</a:t>
             </a:r>
@@ -10481,7 +12592,7 @@
             </a:r>
             <a:r>
               <a:rPr lang="en" altLang="ja-JP" dirty="0">
-                <a:hlinkClick r:id="rId4"/>
+                <a:hlinkClick r:id="rId5"/>
               </a:rPr>
               <a:t>https://aclanthology.org/C14-1147.pdf</a:t>
             </a:r>
@@ -10984,8 +13095,8 @@
         </p:nvSpPr>
         <p:spPr>
           <a:xfrm>
-            <a:off x="-1" y="577517"/>
-            <a:ext cx="12192000" cy="1754326"/>
+            <a:off x="-1" y="615617"/>
+            <a:ext cx="12192000" cy="2031325"/>
           </a:xfrm>
           <a:prstGeom prst="rect">
             <a:avLst/>
@@ -11001,6 +13112,29 @@
             <a:r>
               <a:rPr lang="ja-JP" altLang="en-US" b="1"/>
               <a:t>◾️文書からの地名の抽出に関して、技術的な課題を検討する</a:t>
+            </a:r>
+            <a:endParaRPr lang="en-US" altLang="ja-JP" b="1" dirty="0"/>
+          </a:p>
+          <a:p>
+            <a:r>
+              <a:rPr lang="ja-JP" altLang="en-US" b="1"/>
+              <a:t>▪️その一つ、</a:t>
+            </a:r>
+            <a:r>
+              <a:rPr lang="en-US" altLang="ja-JP" b="1" dirty="0"/>
+              <a:t>NER</a:t>
+            </a:r>
+            <a:r>
+              <a:rPr lang="ja-JP" altLang="en-US" b="1"/>
+              <a:t>と</a:t>
+            </a:r>
+            <a:r>
+              <a:rPr lang="en-US" altLang="ja-JP" b="1" dirty="0"/>
+              <a:t>LLM</a:t>
+            </a:r>
+            <a:r>
+              <a:rPr lang="ja-JP" altLang="en-US" b="1"/>
+              <a:t>の併用を実施・評価する</a:t>
             </a:r>
             <a:endParaRPr lang="en-US" altLang="ja-JP" b="1" dirty="0"/>
           </a:p>
@@ -11474,7 +13608,7 @@
         <p:spPr>
           <a:xfrm>
             <a:off x="3103267" y="3213854"/>
-            <a:ext cx="936475" cy="369332"/>
+            <a:ext cx="1624163" cy="369332"/>
           </a:xfrm>
           <a:prstGeom prst="rect">
             <a:avLst/>
@@ -11488,8 +13622,16 @@
           <a:lstStyle/>
           <a:p>
             <a:r>
+              <a:rPr lang="ja-JP" altLang="en-US"/>
+              <a:t>報告書数</a:t>
+            </a:r>
+            <a:r>
+              <a:rPr lang="en-US" altLang="ja-JP" dirty="0"/>
+              <a:t>:</a:t>
+            </a:r>
+            <a:r>
               <a:rPr kumimoji="1" lang="en-US" altLang="ja-JP" dirty="0"/>
-              <a:t>n=200 </a:t>
+              <a:t>200 </a:t>
             </a:r>
             <a:endParaRPr kumimoji="1" lang="ja-JP" altLang="en-US"/>
           </a:p>
@@ -11542,7 +13684,11 @@
             </a:r>
             <a:r>
               <a:rPr lang="ja-JP" altLang="en-US" dirty="0"/>
-              <a:t>名による判定結果を選抜</a:t>
+              <a:t>名による</a:t>
+            </a:r>
+            <a:r>
+              <a:rPr lang="ja-JP" altLang="en-US"/>
+              <a:t>判定結果の選抜</a:t>
             </a:r>
             <a:endParaRPr lang="en-US" altLang="ja-JP" dirty="0"/>
           </a:p>
@@ -11562,7 +13708,7 @@
         </p:nvSpPr>
         <p:spPr>
           <a:xfrm>
-            <a:off x="3103267" y="4678950"/>
+            <a:off x="3103267" y="4689583"/>
             <a:ext cx="2212465" cy="369332"/>
           </a:xfrm>
           <a:prstGeom prst="rect">
@@ -11598,7 +13744,7 @@
         </p:nvSpPr>
         <p:spPr>
           <a:xfrm>
-            <a:off x="3103266" y="5411498"/>
+            <a:off x="3103266" y="5422131"/>
             <a:ext cx="870751" cy="369332"/>
           </a:xfrm>
           <a:prstGeom prst="rect">
@@ -12241,8 +14387,8 @@
         </p:nvSpPr>
         <p:spPr>
           <a:xfrm>
-            <a:off x="8016240" y="1338244"/>
-            <a:ext cx="2492990" cy="1754326"/>
+            <a:off x="9052559" y="1338244"/>
+            <a:ext cx="2722793" cy="1754326"/>
           </a:xfrm>
           <a:prstGeom prst="rect">
             <a:avLst/>
@@ -12255,44 +14401,44 @@
           </a:ln>
         </p:spPr>
         <p:txBody>
-          <a:bodyPr wrap="none" rtlCol="0">
+          <a:bodyPr wrap="square" rtlCol="0">
             <a:spAutoFit/>
           </a:bodyPr>
           <a:lstStyle/>
           <a:p>
             <a:r>
               <a:rPr kumimoji="1" lang="ja-JP" altLang="en-US"/>
-              <a:t>修正の程度の差</a:t>
-            </a:r>
-            <a:endParaRPr kumimoji="1" lang="en-US" altLang="ja-JP"/>
+              <a:t>修正の程度</a:t>
+            </a:r>
+            <a:endParaRPr kumimoji="1" lang="en-US" altLang="ja-JP" dirty="0"/>
           </a:p>
           <a:p>
             <a:r>
               <a:rPr lang="ja-JP" altLang="en-US"/>
               <a:t>・判定者による</a:t>
             </a:r>
-            <a:endParaRPr lang="en-US" altLang="ja-JP"/>
+            <a:endParaRPr lang="en-US" altLang="ja-JP" dirty="0"/>
           </a:p>
           <a:p>
             <a:r>
               <a:rPr lang="ja-JP" altLang="en-US"/>
               <a:t>　　・距離行列</a:t>
             </a:r>
-            <a:endParaRPr lang="en-US" altLang="ja-JP"/>
+            <a:endParaRPr lang="en-US" altLang="ja-JP" dirty="0"/>
           </a:p>
           <a:p>
             <a:r>
               <a:rPr lang="ja-JP" altLang="en-US"/>
               <a:t>　　・クラスタリング</a:t>
             </a:r>
-            <a:endParaRPr lang="en-US" altLang="ja-JP"/>
+            <a:endParaRPr lang="en-US" altLang="ja-JP" dirty="0"/>
           </a:p>
           <a:p>
             <a:r>
               <a:rPr kumimoji="1" lang="ja-JP" altLang="en-US"/>
               <a:t>・大学ごと</a:t>
             </a:r>
-            <a:endParaRPr kumimoji="1" lang="en-US" altLang="ja-JP"/>
+            <a:endParaRPr kumimoji="1" lang="en-US" altLang="ja-JP" dirty="0"/>
           </a:p>
           <a:p>
             <a:r>
@@ -12317,7 +14463,7 @@
         </p:nvSpPr>
         <p:spPr>
           <a:xfrm>
-            <a:off x="8016240" y="4491713"/>
+            <a:off x="9051530" y="4385231"/>
             <a:ext cx="2723823" cy="923330"/>
           </a:xfrm>
           <a:prstGeom prst="rect">
@@ -12340,19 +14486,19 @@
               <a:rPr lang="ja-JP" altLang="en-US"/>
               <a:t>出現（決定）地名の確認</a:t>
             </a:r>
-            <a:endParaRPr lang="en-US" altLang="ja-JP"/>
+            <a:endParaRPr lang="en-US" altLang="ja-JP" dirty="0"/>
           </a:p>
           <a:p>
             <a:r>
               <a:rPr kumimoji="1" lang="ja-JP" altLang="en-US"/>
               <a:t>・地名の例</a:t>
             </a:r>
-            <a:endParaRPr kumimoji="1" lang="en-US" altLang="ja-JP"/>
+            <a:endParaRPr kumimoji="1" lang="en-US" altLang="ja-JP" dirty="0"/>
           </a:p>
           <a:p>
             <a:r>
               <a:rPr lang="ja-JP" altLang="en-US"/>
-              <a:t>・大学ごとの嗜好</a:t>
+              <a:t>・大学ごとの異なり</a:t>
             </a:r>
             <a:endParaRPr kumimoji="1" lang="ja-JP" altLang="en-US"/>
           </a:p>
@@ -12368,6 +14514,7 @@
             </a:extLst>
           </p:cNvPr>
           <p:cNvCxnSpPr>
+            <a:cxnSpLocks/>
             <a:stCxn id="13" idx="3"/>
             <a:endCxn id="46" idx="1"/>
           </p:cNvCxnSpPr>
@@ -12376,10 +14523,12 @@
         <p:spPr>
           <a:xfrm flipV="1">
             <a:off x="4726307" y="2215407"/>
-            <a:ext cx="3289933" cy="3072872"/>
+            <a:ext cx="4326252" cy="3072872"/>
           </a:xfrm>
           <a:prstGeom prst="bentConnector3">
-            <a:avLst/>
+            <a:avLst>
+              <a:gd name="adj1" fmla="val 50000"/>
+            </a:avLst>
           </a:prstGeom>
           <a:ln>
             <a:solidFill>
@@ -12419,12 +14568,12 @@
         </p:nvCxnSpPr>
         <p:spPr>
           <a:xfrm flipV="1">
-            <a:off x="3616227" y="4953378"/>
-            <a:ext cx="4400013" cy="1320003"/>
+            <a:off x="3616227" y="4846896"/>
+            <a:ext cx="5435303" cy="1426485"/>
           </a:xfrm>
           <a:prstGeom prst="bentConnector3">
             <a:avLst>
-              <a:gd name="adj1" fmla="val 80942"/>
+              <a:gd name="adj1" fmla="val 87236"/>
             </a:avLst>
           </a:prstGeom>
           <a:ln>
@@ -12491,6 +14640,174 @@
               <a:rPr kumimoji="1" lang="ja-JP" altLang="en-US" sz="1200"/>
               <a:t>によるフィルター</a:t>
             </a:r>
+          </a:p>
+        </p:txBody>
+      </p:sp>
+      <p:sp>
+        <p:nvSpPr>
+          <p:cNvPr id="14" name="テキスト ボックス 13">
+            <a:extLst>
+              <a:ext uri="{FF2B5EF4-FFF2-40B4-BE49-F238E27FC236}">
+                <a16:creationId xmlns:a16="http://schemas.microsoft.com/office/drawing/2014/main" id="{B49311BE-C714-6329-51CC-FF85D8119BDC}"/>
+              </a:ext>
+            </a:extLst>
+          </p:cNvPr>
+          <p:cNvSpPr txBox="1"/>
+          <p:nvPr/>
+        </p:nvSpPr>
+        <p:spPr>
+          <a:xfrm>
+            <a:off x="9654908" y="5324688"/>
+            <a:ext cx="2122697" cy="338554"/>
+          </a:xfrm>
+          <a:prstGeom prst="rect">
+            <a:avLst/>
+          </a:prstGeom>
+          <a:noFill/>
+        </p:spPr>
+        <p:txBody>
+          <a:bodyPr wrap="none" rtlCol="0">
+            <a:spAutoFit/>
+          </a:bodyPr>
+          <a:lstStyle/>
+          <a:p>
+            <a:r>
+              <a:rPr kumimoji="1" lang="ja-JP" altLang="en-US" sz="1600"/>
+              <a:t>地名数</a:t>
+            </a:r>
+            <a:r>
+              <a:rPr kumimoji="1" lang="en-US" altLang="ja-JP" sz="1600" dirty="0"/>
+              <a:t>(</a:t>
+            </a:r>
+            <a:r>
+              <a:rPr lang="ja-JP" altLang="en-US" sz="1600"/>
+              <a:t>ユニーク</a:t>
+            </a:r>
+            <a:r>
+              <a:rPr kumimoji="1" lang="en-US" altLang="ja-JP" sz="1600" dirty="0"/>
+              <a:t>): 99</a:t>
+            </a:r>
+            <a:endParaRPr kumimoji="1" lang="ja-JP" altLang="en-US" sz="1600"/>
+          </a:p>
+        </p:txBody>
+      </p:sp>
+      <p:sp>
+        <p:nvSpPr>
+          <p:cNvPr id="15" name="テキスト ボックス 14">
+            <a:extLst>
+              <a:ext uri="{FF2B5EF4-FFF2-40B4-BE49-F238E27FC236}">
+                <a16:creationId xmlns:a16="http://schemas.microsoft.com/office/drawing/2014/main" id="{874F5013-91B2-5883-A1ED-16F5AE1E67C0}"/>
+              </a:ext>
+            </a:extLst>
+          </p:cNvPr>
+          <p:cNvSpPr txBox="1"/>
+          <p:nvPr/>
+        </p:nvSpPr>
+        <p:spPr>
+          <a:xfrm>
+            <a:off x="9124682" y="3104499"/>
+            <a:ext cx="2646878" cy="338554"/>
+          </a:xfrm>
+          <a:prstGeom prst="rect">
+            <a:avLst/>
+          </a:prstGeom>
+          <a:noFill/>
+        </p:spPr>
+        <p:txBody>
+          <a:bodyPr wrap="none" rtlCol="0">
+            <a:spAutoFit/>
+          </a:bodyPr>
+          <a:lstStyle/>
+          <a:p>
+            <a:r>
+              <a:rPr kumimoji="1" lang="ja-JP" altLang="en-US" sz="1600"/>
+              <a:t>地名候補数</a:t>
+            </a:r>
+            <a:r>
+              <a:rPr kumimoji="1" lang="en-US" altLang="ja-JP" sz="1600" dirty="0"/>
+              <a:t>(</a:t>
+            </a:r>
+            <a:r>
+              <a:rPr lang="ja-JP" altLang="en-US" sz="1600"/>
+              <a:t>ユニーク</a:t>
+            </a:r>
+            <a:r>
+              <a:rPr kumimoji="1" lang="en-US" altLang="ja-JP" sz="1600" dirty="0"/>
+              <a:t>): 141</a:t>
+            </a:r>
+            <a:endParaRPr kumimoji="1" lang="ja-JP" altLang="en-US" sz="1600"/>
+          </a:p>
+        </p:txBody>
+      </p:sp>
+      <p:sp>
+        <p:nvSpPr>
+          <p:cNvPr id="27" name="テキスト ボックス 26">
+            <a:extLst>
+              <a:ext uri="{FF2B5EF4-FFF2-40B4-BE49-F238E27FC236}">
+                <a16:creationId xmlns:a16="http://schemas.microsoft.com/office/drawing/2014/main" id="{9CB31746-755C-0454-679A-07488AFE3972}"/>
+              </a:ext>
+            </a:extLst>
+          </p:cNvPr>
+          <p:cNvSpPr txBox="1"/>
+          <p:nvPr/>
+        </p:nvSpPr>
+        <p:spPr>
+          <a:xfrm>
+            <a:off x="4627491" y="3386614"/>
+            <a:ext cx="851515" cy="338554"/>
+          </a:xfrm>
+          <a:prstGeom prst="rect">
+            <a:avLst/>
+          </a:prstGeom>
+          <a:noFill/>
+        </p:spPr>
+        <p:txBody>
+          <a:bodyPr wrap="none" rtlCol="0">
+            <a:spAutoFit/>
+          </a:bodyPr>
+          <a:lstStyle/>
+          <a:p>
+            <a:r>
+              <a:rPr kumimoji="1" lang="en-US" altLang="ja-JP" sz="1600" b="1" dirty="0" err="1"/>
+              <a:t>mecab</a:t>
+            </a:r>
+            <a:endParaRPr kumimoji="1" lang="ja-JP" altLang="en-US" sz="1600" b="1"/>
+          </a:p>
+        </p:txBody>
+      </p:sp>
+      <p:sp>
+        <p:nvSpPr>
+          <p:cNvPr id="28" name="テキスト ボックス 27">
+            <a:extLst>
+              <a:ext uri="{FF2B5EF4-FFF2-40B4-BE49-F238E27FC236}">
+                <a16:creationId xmlns:a16="http://schemas.microsoft.com/office/drawing/2014/main" id="{36803E7D-B8E9-2CA5-0E54-143269A0D742}"/>
+              </a:ext>
+            </a:extLst>
+          </p:cNvPr>
+          <p:cNvSpPr txBox="1"/>
+          <p:nvPr/>
+        </p:nvSpPr>
+        <p:spPr>
+          <a:xfrm>
+            <a:off x="4562202" y="4174382"/>
+            <a:ext cx="1082348" cy="307777"/>
+          </a:xfrm>
+          <a:prstGeom prst="rect">
+            <a:avLst/>
+          </a:prstGeom>
+          <a:noFill/>
+        </p:spPr>
+        <p:txBody>
+          <a:bodyPr wrap="none" rtlCol="0">
+            <a:spAutoFit/>
+          </a:bodyPr>
+          <a:lstStyle/>
+          <a:p>
+            <a:r>
+              <a:rPr lang="ja-JP" altLang="en-US" sz="1400" b="1"/>
+              <a:t>プロンプト</a:t>
+            </a:r>
+            <a:endParaRPr kumimoji="1" lang="ja-JP" altLang="en-US" sz="1400" b="1"/>
           </a:p>
         </p:txBody>
       </p:sp>
@@ -12592,13 +14909,18 @@
         </p:nvSpPr>
         <p:spPr>
           <a:xfrm>
-            <a:off x="0" y="1720840"/>
-            <a:ext cx="12192000" cy="3416320"/>
+            <a:off x="377952" y="1720840"/>
+            <a:ext cx="11436096" cy="3416320"/>
           </a:xfrm>
           <a:prstGeom prst="rect">
             <a:avLst/>
           </a:prstGeom>
           <a:noFill/>
+          <a:ln>
+            <a:solidFill>
+              <a:schemeClr val="dk1"/>
+            </a:solidFill>
+          </a:ln>
         </p:spPr>
         <p:txBody>
           <a:bodyPr wrap="square" rtlCol="0">
@@ -13232,4 +15554,319 @@
     </a:ext>
   </a:extLst>
 </a:theme>
+</file>
+
+<file path=ppt/theme/theme2.xml><?xml version="1.0" encoding="utf-8"?>
+<a:theme xmlns:a="http://schemas.openxmlformats.org/drawingml/2006/main" name="Office テーマ">
+  <a:themeElements>
+    <a:clrScheme name="Office">
+      <a:dk1>
+        <a:sysClr val="windowText" lastClr="000000"/>
+      </a:dk1>
+      <a:lt1>
+        <a:sysClr val="window" lastClr="FFFFFF"/>
+      </a:lt1>
+      <a:dk2>
+        <a:srgbClr val="0E2841"/>
+      </a:dk2>
+      <a:lt2>
+        <a:srgbClr val="E8E8E8"/>
+      </a:lt2>
+      <a:accent1>
+        <a:srgbClr val="156082"/>
+      </a:accent1>
+      <a:accent2>
+        <a:srgbClr val="E97132"/>
+      </a:accent2>
+      <a:accent3>
+        <a:srgbClr val="196B24"/>
+      </a:accent3>
+      <a:accent4>
+        <a:srgbClr val="0F9ED5"/>
+      </a:accent4>
+      <a:accent5>
+        <a:srgbClr val="A02B93"/>
+      </a:accent5>
+      <a:accent6>
+        <a:srgbClr val="4EA72E"/>
+      </a:accent6>
+      <a:hlink>
+        <a:srgbClr val="467886"/>
+      </a:hlink>
+      <a:folHlink>
+        <a:srgbClr val="96607D"/>
+      </a:folHlink>
+    </a:clrScheme>
+    <a:fontScheme name="Office">
+      <a:majorFont>
+        <a:latin typeface="游ゴシック Light" panose="02110004020202020204"/>
+        <a:ea typeface=""/>
+        <a:cs typeface=""/>
+        <a:font script="Jpan" typeface="游ゴシック Light"/>
+        <a:font script="Hang" typeface="맑은 고딕"/>
+        <a:font script="Hans" typeface="等线 Light"/>
+        <a:font script="Hant" typeface="新細明體"/>
+        <a:font script="Arab" typeface="Times New Roman"/>
+        <a:font script="Hebr" typeface="Times New Roman"/>
+        <a:font script="Thai" typeface="Angsana New"/>
+        <a:font script="Ethi" typeface="Nyala"/>
+        <a:font script="Beng" typeface="Vrinda"/>
+        <a:font script="Gujr" typeface="Shruti"/>
+        <a:font script="Khmr" typeface="MoolBoran"/>
+        <a:font script="Knda" typeface="Tunga"/>
+        <a:font script="Guru" typeface="Raavi"/>
+        <a:font script="Cans" typeface="Euphemia"/>
+        <a:font script="Cher" typeface="Plantagenet Cherokee"/>
+        <a:font script="Yiii" typeface="Microsoft Yi Baiti"/>
+        <a:font script="Tibt" typeface="Microsoft Himalaya"/>
+        <a:font script="Thaa" typeface="MV Boli"/>
+        <a:font script="Deva" typeface="Mangal"/>
+        <a:font script="Telu" typeface="Gautami"/>
+        <a:font script="Taml" typeface="Latha"/>
+        <a:font script="Syrc" typeface="Estrangelo Edessa"/>
+        <a:font script="Orya" typeface="Kalinga"/>
+        <a:font script="Mlym" typeface="Kartika"/>
+        <a:font script="Laoo" typeface="DokChampa"/>
+        <a:font script="Sinh" typeface="Iskoola Pota"/>
+        <a:font script="Mong" typeface="Mongolian Baiti"/>
+        <a:font script="Viet" typeface="Times New Roman"/>
+        <a:font script="Uigh" typeface="Microsoft Uighur"/>
+        <a:font script="Geor" typeface="Sylfaen"/>
+        <a:font script="Armn" typeface="Arial"/>
+        <a:font script="Bugi" typeface="Leelawadee UI"/>
+        <a:font script="Bopo" typeface="Microsoft JhengHei"/>
+        <a:font script="Java" typeface="Javanese Text"/>
+        <a:font script="Lisu" typeface="Segoe UI"/>
+        <a:font script="Mymr" typeface="Myanmar Text"/>
+        <a:font script="Nkoo" typeface="Ebrima"/>
+        <a:font script="Olck" typeface="Nirmala UI"/>
+        <a:font script="Osma" typeface="Ebrima"/>
+        <a:font script="Phag" typeface="Phagspa"/>
+        <a:font script="Syrn" typeface="Estrangelo Edessa"/>
+        <a:font script="Syrj" typeface="Estrangelo Edessa"/>
+        <a:font script="Syre" typeface="Estrangelo Edessa"/>
+        <a:font script="Sora" typeface="Nirmala UI"/>
+        <a:font script="Tale" typeface="Microsoft Tai Le"/>
+        <a:font script="Talu" typeface="Microsoft New Tai Lue"/>
+        <a:font script="Tfng" typeface="Ebrima"/>
+      </a:majorFont>
+      <a:minorFont>
+        <a:latin typeface="游ゴシック" panose="02110004020202020204"/>
+        <a:ea typeface=""/>
+        <a:cs typeface=""/>
+        <a:font script="Jpan" typeface="游ゴシック"/>
+        <a:font script="Hang" typeface="맑은 고딕"/>
+        <a:font script="Hans" typeface="等线"/>
+        <a:font script="Hant" typeface="新細明體"/>
+        <a:font script="Arab" typeface="Arial"/>
+        <a:font script="Hebr" typeface="Arial"/>
+        <a:font script="Thai" typeface="Cordia New"/>
+        <a:font script="Ethi" typeface="Nyala"/>
+        <a:font script="Beng" typeface="Vrinda"/>
+        <a:font script="Gujr" typeface="Shruti"/>
+        <a:font script="Khmr" typeface="DaunPenh"/>
+        <a:font script="Knda" typeface="Tunga"/>
+        <a:font script="Guru" typeface="Raavi"/>
+        <a:font script="Cans" typeface="Euphemia"/>
+        <a:font script="Cher" typeface="Plantagenet Cherokee"/>
+        <a:font script="Yiii" typeface="Microsoft Yi Baiti"/>
+        <a:font script="Tibt" typeface="Microsoft Himalaya"/>
+        <a:font script="Thaa" typeface="MV Boli"/>
+        <a:font script="Deva" typeface="Mangal"/>
+        <a:font script="Telu" typeface="Gautami"/>
+        <a:font script="Taml" typeface="Latha"/>
+        <a:font script="Syrc" typeface="Estrangelo Edessa"/>
+        <a:font script="Orya" typeface="Kalinga"/>
+        <a:font script="Mlym" typeface="Kartika"/>
+        <a:font script="Laoo" typeface="DokChampa"/>
+        <a:font script="Sinh" typeface="Iskoola Pota"/>
+        <a:font script="Mong" typeface="Mongolian Baiti"/>
+        <a:font script="Viet" typeface="Arial"/>
+        <a:font script="Uigh" typeface="Microsoft Uighur"/>
+        <a:font script="Geor" typeface="Sylfaen"/>
+        <a:font script="Armn" typeface="Arial"/>
+        <a:font script="Bugi" typeface="Leelawadee UI"/>
+        <a:font script="Bopo" typeface="Microsoft JhengHei"/>
+        <a:font script="Java" typeface="Javanese Text"/>
+        <a:font script="Lisu" typeface="Segoe UI"/>
+        <a:font script="Mymr" typeface="Myanmar Text"/>
+        <a:font script="Nkoo" typeface="Ebrima"/>
+        <a:font script="Olck" typeface="Nirmala UI"/>
+        <a:font script="Osma" typeface="Ebrima"/>
+        <a:font script="Phag" typeface="Phagspa"/>
+        <a:font script="Syrn" typeface="Estrangelo Edessa"/>
+        <a:font script="Syrj" typeface="Estrangelo Edessa"/>
+        <a:font script="Syre" typeface="Estrangelo Edessa"/>
+        <a:font script="Sora" typeface="Nirmala UI"/>
+        <a:font script="Tale" typeface="Microsoft Tai Le"/>
+        <a:font script="Talu" typeface="Microsoft New Tai Lue"/>
+        <a:font script="Tfng" typeface="Ebrima"/>
+      </a:minorFont>
+    </a:fontScheme>
+    <a:fmtScheme name="Office">
+      <a:fillStyleLst>
+        <a:solidFill>
+          <a:schemeClr val="phClr"/>
+        </a:solidFill>
+        <a:gradFill rotWithShape="1">
+          <a:gsLst>
+            <a:gs pos="0">
+              <a:schemeClr val="phClr">
+                <a:lumMod val="110000"/>
+                <a:satMod val="105000"/>
+                <a:tint val="67000"/>
+              </a:schemeClr>
+            </a:gs>
+            <a:gs pos="50000">
+              <a:schemeClr val="phClr">
+                <a:lumMod val="105000"/>
+                <a:satMod val="103000"/>
+                <a:tint val="73000"/>
+              </a:schemeClr>
+            </a:gs>
+            <a:gs pos="100000">
+              <a:schemeClr val="phClr">
+                <a:lumMod val="105000"/>
+                <a:satMod val="109000"/>
+                <a:tint val="81000"/>
+              </a:schemeClr>
+            </a:gs>
+          </a:gsLst>
+          <a:lin ang="5400000" scaled="0"/>
+        </a:gradFill>
+        <a:gradFill rotWithShape="1">
+          <a:gsLst>
+            <a:gs pos="0">
+              <a:schemeClr val="phClr">
+                <a:satMod val="103000"/>
+                <a:lumMod val="102000"/>
+                <a:tint val="94000"/>
+              </a:schemeClr>
+            </a:gs>
+            <a:gs pos="50000">
+              <a:schemeClr val="phClr">
+                <a:satMod val="110000"/>
+                <a:lumMod val="100000"/>
+                <a:shade val="100000"/>
+              </a:schemeClr>
+            </a:gs>
+            <a:gs pos="100000">
+              <a:schemeClr val="phClr">
+                <a:lumMod val="99000"/>
+                <a:satMod val="120000"/>
+                <a:shade val="78000"/>
+              </a:schemeClr>
+            </a:gs>
+          </a:gsLst>
+          <a:lin ang="5400000" scaled="0"/>
+        </a:gradFill>
+      </a:fillStyleLst>
+      <a:lnStyleLst>
+        <a:ln w="12700" cap="flat" cmpd="sng" algn="ctr">
+          <a:solidFill>
+            <a:schemeClr val="phClr"/>
+          </a:solidFill>
+          <a:prstDash val="solid"/>
+          <a:miter lim="800000"/>
+        </a:ln>
+        <a:ln w="19050" cap="flat" cmpd="sng" algn="ctr">
+          <a:solidFill>
+            <a:schemeClr val="phClr"/>
+          </a:solidFill>
+          <a:prstDash val="solid"/>
+          <a:miter lim="800000"/>
+        </a:ln>
+        <a:ln w="25400" cap="flat" cmpd="sng" algn="ctr">
+          <a:solidFill>
+            <a:schemeClr val="phClr"/>
+          </a:solidFill>
+          <a:prstDash val="solid"/>
+          <a:miter lim="800000"/>
+        </a:ln>
+      </a:lnStyleLst>
+      <a:effectStyleLst>
+        <a:effectStyle>
+          <a:effectLst/>
+        </a:effectStyle>
+        <a:effectStyle>
+          <a:effectLst/>
+        </a:effectStyle>
+        <a:effectStyle>
+          <a:effectLst>
+            <a:outerShdw blurRad="57150" dist="19050" dir="5400000" algn="ctr" rotWithShape="0">
+              <a:srgbClr val="000000">
+                <a:alpha val="63000"/>
+              </a:srgbClr>
+            </a:outerShdw>
+          </a:effectLst>
+        </a:effectStyle>
+      </a:effectStyleLst>
+      <a:bgFillStyleLst>
+        <a:solidFill>
+          <a:schemeClr val="phClr"/>
+        </a:solidFill>
+        <a:solidFill>
+          <a:schemeClr val="phClr">
+            <a:tint val="95000"/>
+            <a:satMod val="170000"/>
+          </a:schemeClr>
+        </a:solidFill>
+        <a:gradFill rotWithShape="1">
+          <a:gsLst>
+            <a:gs pos="0">
+              <a:schemeClr val="phClr">
+                <a:tint val="93000"/>
+                <a:satMod val="150000"/>
+                <a:shade val="98000"/>
+                <a:lumMod val="102000"/>
+              </a:schemeClr>
+            </a:gs>
+            <a:gs pos="50000">
+              <a:schemeClr val="phClr">
+                <a:tint val="98000"/>
+                <a:satMod val="130000"/>
+                <a:shade val="90000"/>
+                <a:lumMod val="103000"/>
+              </a:schemeClr>
+            </a:gs>
+            <a:gs pos="100000">
+              <a:schemeClr val="phClr">
+                <a:shade val="63000"/>
+                <a:satMod val="120000"/>
+              </a:schemeClr>
+            </a:gs>
+          </a:gsLst>
+          <a:lin ang="5400000" scaled="0"/>
+        </a:gradFill>
+      </a:bgFillStyleLst>
+    </a:fmtScheme>
+  </a:themeElements>
+  <a:objectDefaults>
+    <a:lnDef>
+      <a:spPr/>
+      <a:bodyPr/>
+      <a:lstStyle/>
+      <a:style>
+        <a:lnRef idx="2">
+          <a:schemeClr val="accent1"/>
+        </a:lnRef>
+        <a:fillRef idx="0">
+          <a:schemeClr val="accent1"/>
+        </a:fillRef>
+        <a:effectRef idx="1">
+          <a:schemeClr val="accent1"/>
+        </a:effectRef>
+        <a:fontRef idx="minor">
+          <a:schemeClr val="tx1"/>
+        </a:fontRef>
+      </a:style>
+    </a:lnDef>
+  </a:objectDefaults>
+  <a:extraClrSchemeLst/>
+  <a:extLst>
+    <a:ext uri="{05A4C25C-085E-4340-85A3-A5531E510DB2}">
+      <thm15:themeFamily xmlns:thm15="http://schemas.microsoft.com/office/thememl/2012/main" name="Office Theme" id="{2E142A2C-CD16-42D6-873A-C26D2A0506FA}" vid="{1BDDFF52-6CD6-40A5-AB3C-68EB2F1E4D0A}"/>
+    </a:ext>
+  </a:extLst>
+</a:theme>
 </file>
--- a/jsik2026taikai.pptx
+++ b/jsik2026taikai.pptx
@@ -4453,7 +4453,7 @@
           <a:lstStyle/>
           <a:p>
             <a:r>
-              <a:rPr kumimoji="1" lang="en-US" altLang="ja-JP"/>
+              <a:rPr kumimoji="1" lang="en-US" altLang="ja-JP" dirty="0"/>
               <a:t>AI</a:t>
             </a:r>
           </a:p>
@@ -4463,7 +4463,7 @@
               <a:buChar char="•"/>
             </a:pPr>
             <a:r>
-              <a:rPr lang="en-US" altLang="ja-JP"/>
+              <a:rPr lang="en-US" altLang="ja-JP" dirty="0"/>
               <a:t>Gemma3 (4b)</a:t>
             </a:r>
           </a:p>
@@ -4473,7 +4473,7 @@
               <a:buChar char="•"/>
             </a:pPr>
             <a:r>
-              <a:rPr kumimoji="1" lang="en-US" altLang="ja-JP"/>
+              <a:rPr kumimoji="1" lang="en-US" altLang="ja-JP" dirty="0"/>
               <a:t>Llama3 (8b)</a:t>
             </a:r>
           </a:p>
@@ -4483,7 +4483,7 @@
               <a:buChar char="•"/>
             </a:pPr>
             <a:r>
-              <a:rPr lang="en-US" altLang="ja-JP"/>
+              <a:rPr lang="en-US" altLang="ja-JP" dirty="0"/>
               <a:t>Qwen3 (32b)</a:t>
             </a:r>
             <a:endParaRPr kumimoji="1" lang="ja-JP" altLang="en-US"/>
@@ -4504,7 +4504,7 @@
         </p:nvSpPr>
         <p:spPr>
           <a:xfrm>
-            <a:off x="509156" y="2421076"/>
+            <a:off x="509156" y="2559301"/>
             <a:ext cx="832279" cy="646331"/>
           </a:xfrm>
           <a:prstGeom prst="rect">
@@ -4522,7 +4522,7 @@
               <a:rPr kumimoji="1" lang="ja-JP" altLang="en-US"/>
               <a:t>人</a:t>
             </a:r>
-            <a:endParaRPr kumimoji="1" lang="en-US" altLang="ja-JP"/>
+            <a:endParaRPr kumimoji="1" lang="en-US" altLang="ja-JP" dirty="0"/>
           </a:p>
           <a:p>
             <a:pPr marL="285750" indent="-285750">
@@ -4530,7 +4530,7 @@
               <a:buChar char="•"/>
             </a:pPr>
             <a:r>
-              <a:rPr lang="en-US" altLang="ja-JP"/>
+              <a:rPr lang="en-US" altLang="ja-JP" dirty="0"/>
               <a:t>3</a:t>
             </a:r>
             <a:r>
@@ -4646,7 +4646,7 @@
         </p:nvSpPr>
         <p:spPr>
           <a:xfrm>
-            <a:off x="4070933" y="2605742"/>
+            <a:off x="4070933" y="2743967"/>
             <a:ext cx="4166525" cy="923330"/>
           </a:xfrm>
           <a:prstGeom prst="rect">
@@ -14407,8 +14407,8 @@
           <a:lstStyle/>
           <a:p>
             <a:r>
-              <a:rPr kumimoji="1" lang="ja-JP" altLang="en-US"/>
-              <a:t>修正の程度</a:t>
+              <a:rPr lang="ja-JP" altLang="en-US"/>
+              <a:t>判定の差異</a:t>
             </a:r>
             <a:endParaRPr kumimoji="1" lang="en-US" altLang="ja-JP" dirty="0"/>
           </a:p>

--- a/jsik2026taikai.pptx
+++ b/jsik2026taikai.pptx
@@ -4411,7 +4411,7 @@
           <a:p>
             <a:r>
               <a:rPr kumimoji="1" lang="ja-JP" altLang="en-US" sz="3600"/>
-              <a:t>マテリアル・方法（使用した</a:t>
+              <a:t>マテリアル・方法（</a:t>
             </a:r>
             <a:r>
               <a:rPr kumimoji="1" lang="en-US" altLang="ja-JP" sz="3600" dirty="0"/>
@@ -4504,7 +4504,7 @@
         </p:nvSpPr>
         <p:spPr>
           <a:xfrm>
-            <a:off x="509156" y="2559301"/>
+            <a:off x="509156" y="4069130"/>
             <a:ext cx="832279" cy="646331"/>
           </a:xfrm>
           <a:prstGeom prst="rect">
@@ -4556,7 +4556,7 @@
         <p:spPr>
           <a:xfrm>
             <a:off x="4070933" y="1064612"/>
-            <a:ext cx="7367723" cy="646331"/>
+            <a:ext cx="7367723" cy="923330"/>
           </a:xfrm>
           <a:prstGeom prst="rect">
             <a:avLst/>
@@ -4578,7 +4578,7 @@
               <a:t>ローカル環境（</a:t>
             </a:r>
             <a:r>
-              <a:rPr kumimoji="1" lang="en-US" altLang="ja-JP"/>
+              <a:rPr kumimoji="1" lang="en-US" altLang="ja-JP" dirty="0"/>
               <a:t>Ollama</a:t>
             </a:r>
             <a:r>
@@ -4586,7 +4586,7 @@
               <a:t>）による</a:t>
             </a:r>
             <a:r>
-              <a:rPr kumimoji="1" lang="en-US" altLang="ja-JP"/>
+              <a:rPr kumimoji="1" lang="en-US" altLang="ja-JP" dirty="0"/>
               <a:t>1</a:t>
             </a:r>
             <a:r>
@@ -4594,7 +4594,7 @@
               <a:t>ドキュメント</a:t>
             </a:r>
             <a:r>
-              <a:rPr kumimoji="1" lang="en-US" altLang="ja-JP"/>
+              <a:rPr kumimoji="1" lang="en-US" altLang="ja-JP" dirty="0"/>
               <a:t>/1</a:t>
             </a:r>
             <a:r>
@@ -4602,14 +4602,14 @@
               <a:t>クエリー</a:t>
             </a:r>
             <a:r>
-              <a:rPr kumimoji="1" lang="en-US" altLang="ja-JP"/>
+              <a:rPr kumimoji="1" lang="en-US" altLang="ja-JP" dirty="0"/>
               <a:t>/1</a:t>
             </a:r>
             <a:r>
               <a:rPr kumimoji="1" lang="ja-JP" altLang="en-US"/>
               <a:t>回のみ</a:t>
             </a:r>
-            <a:endParaRPr kumimoji="1" lang="en-US" altLang="ja-JP"/>
+            <a:endParaRPr kumimoji="1" lang="en-US" altLang="ja-JP" dirty="0"/>
           </a:p>
           <a:p>
             <a:pPr marL="285750" indent="-285750">
@@ -4621,14 +4621,20 @@
               <a:t>総計</a:t>
             </a:r>
             <a:r>
-              <a:rPr lang="en-US" altLang="ja-JP"/>
+              <a:rPr lang="en-US" altLang="ja-JP" dirty="0"/>
               <a:t>600</a:t>
             </a:r>
             <a:r>
               <a:rPr lang="ja-JP" altLang="en-US"/>
               <a:t>クエリー</a:t>
             </a:r>
-            <a:endParaRPr kumimoji="1" lang="ja-JP" altLang="en-US"/>
+            <a:endParaRPr lang="en-US" altLang="ja-JP" dirty="0"/>
+          </a:p>
+          <a:p>
+            <a:r>
+              <a:rPr kumimoji="1" lang="ja-JP" altLang="en-US"/>
+              <a:t>　</a:t>
+            </a:r>
           </a:p>
         </p:txBody>
       </p:sp>
@@ -4646,7 +4652,7 @@
         </p:nvSpPr>
         <p:spPr>
           <a:xfrm>
-            <a:off x="4070933" y="2743967"/>
+            <a:off x="4070933" y="4253796"/>
             <a:ext cx="4166525" cy="923330"/>
           </a:xfrm>
           <a:prstGeom prst="rect">
@@ -4668,7 +4674,7 @@
               <a:rPr lang="ja-JP" altLang="en-US"/>
               <a:t>期限付き</a:t>
             </a:r>
-            <a:endParaRPr lang="en-US" altLang="ja-JP"/>
+            <a:endParaRPr lang="en-US" altLang="ja-JP" dirty="0"/>
           </a:p>
           <a:p>
             <a:pPr marL="285750" indent="-285750">
@@ -4677,9 +4683,9 @@
             </a:pPr>
             <a:r>
               <a:rPr lang="ja-JP" altLang="en-US"/>
-              <a:t>再提出化</a:t>
-            </a:r>
-            <a:endParaRPr lang="en-US" altLang="ja-JP"/>
+              <a:t>再提出可</a:t>
+            </a:r>
+            <a:endParaRPr lang="en-US" altLang="ja-JP" dirty="0"/>
           </a:p>
           <a:p>
             <a:pPr marL="285750" indent="-285750">
@@ -4693,6 +4699,36 @@
           </a:p>
         </p:txBody>
       </p:sp>
+      <p:pic>
+        <p:nvPicPr>
+          <p:cNvPr id="8" name="図 7" descr="テキスト&#10;&#10;AI 生成コンテンツは誤りを含む可能性があります。">
+            <a:extLst>
+              <a:ext uri="{FF2B5EF4-FFF2-40B4-BE49-F238E27FC236}">
+                <a16:creationId xmlns:a16="http://schemas.microsoft.com/office/drawing/2014/main" id="{557D3E7F-AFDC-3BC4-E600-EF963425D269}"/>
+              </a:ext>
+            </a:extLst>
+          </p:cNvPr>
+          <p:cNvPicPr>
+            <a:picLocks noChangeAspect="1"/>
+          </p:cNvPicPr>
+          <p:nvPr/>
+        </p:nvPicPr>
+        <p:blipFill>
+          <a:blip r:embed="rId2"/>
+          <a:stretch>
+            <a:fillRect/>
+          </a:stretch>
+        </p:blipFill>
+        <p:spPr>
+          <a:xfrm>
+            <a:off x="4471284" y="1713759"/>
+            <a:ext cx="6465052" cy="1518535"/>
+          </a:xfrm>
+          <a:prstGeom prst="rect">
+            <a:avLst/>
+          </a:prstGeom>
+        </p:spPr>
+      </p:pic>
     </p:spTree>
     <p:extLst>
       <p:ext uri="{BB962C8B-B14F-4D97-AF65-F5344CB8AC3E}">
@@ -12060,7 +12096,7 @@
         <p:spPr>
           <a:xfrm>
             <a:off x="-1" y="577517"/>
-            <a:ext cx="12192000" cy="4801314"/>
+            <a:ext cx="12192000" cy="4247317"/>
           </a:xfrm>
           <a:prstGeom prst="rect">
             <a:avLst/>
@@ -12185,14 +12221,7 @@
           <a:p>
             <a:r>
               <a:rPr lang="ja-JP" altLang="en-US" b="1"/>
-              <a:t>◾️特に地名にかかる課題として</a:t>
-            </a:r>
-            <a:endParaRPr lang="en-US" altLang="ja-JP" b="1" dirty="0"/>
-          </a:p>
-          <a:p>
-            <a:r>
-              <a:rPr lang="ja-JP" altLang="en-US" b="1"/>
-              <a:t>▪️名称そのもの</a:t>
+              <a:t>◾️同一名称の曖昧性の課題</a:t>
             </a:r>
             <a:endParaRPr lang="en-US" altLang="ja-JP" b="1" dirty="0"/>
           </a:p>
@@ -12208,12 +12237,9 @@
             <a:endParaRPr lang="en-US" altLang="ja-JP" dirty="0"/>
           </a:p>
           <a:p>
-            <a:endParaRPr lang="en-US" altLang="ja-JP" dirty="0"/>
-          </a:p>
-          <a:p>
             <a:r>
               <a:rPr lang="ja-JP" altLang="en-US" b="1"/>
-              <a:t>▪️名称の関係性</a:t>
+              <a:t>▪️名称の関係性を用いた解決が多い</a:t>
             </a:r>
             <a:endParaRPr lang="en-US" altLang="ja-JP" b="1" dirty="0"/>
           </a:p>
@@ -13096,7 +13122,7 @@
         <p:spPr>
           <a:xfrm>
             <a:off x="-1" y="615617"/>
-            <a:ext cx="12192000" cy="2031325"/>
+            <a:ext cx="12192000" cy="2308324"/>
           </a:xfrm>
           <a:prstGeom prst="rect">
             <a:avLst/>
@@ -13198,6 +13224,17 @@
             <a:r>
               <a:rPr lang="ja-JP" altLang="en-US"/>
               <a:t>を用いることにより簡易な方法を模索する</a:t>
+            </a:r>
+            <a:endParaRPr lang="en-US" altLang="ja-JP" dirty="0"/>
+          </a:p>
+          <a:p>
+            <a:pPr marL="285750" indent="-285750">
+              <a:buFont typeface="Arial" panose="020B0604020202020204" pitchFamily="34" charset="0"/>
+              <a:buChar char="•"/>
+            </a:pPr>
+            <a:r>
+              <a:rPr lang="ja-JP" altLang="en-US"/>
+              <a:t>曖昧性解決にまで踏み込んでいない</a:t>
             </a:r>
             <a:endParaRPr lang="en-US" altLang="ja-JP" dirty="0"/>
           </a:p>

--- a/jsik2026taikai.pptx
+++ b/jsik2026taikai.pptx
@@ -5,7 +5,7 @@
     <p:sldMasterId id="2147483648" r:id="rId1"/>
   </p:sldMasterIdLst>
   <p:notesMasterIdLst>
-    <p:notesMasterId r:id="rId18"/>
+    <p:notesMasterId r:id="rId19"/>
   </p:notesMasterIdLst>
   <p:sldIdLst>
     <p:sldId id="256" r:id="rId2"/>
@@ -16,14 +16,15 @@
     <p:sldId id="313" r:id="rId7"/>
     <p:sldId id="305" r:id="rId8"/>
     <p:sldId id="307" r:id="rId9"/>
-    <p:sldId id="309" r:id="rId10"/>
-    <p:sldId id="310" r:id="rId11"/>
-    <p:sldId id="308" r:id="rId12"/>
-    <p:sldId id="312" r:id="rId13"/>
-    <p:sldId id="317" r:id="rId14"/>
-    <p:sldId id="314" r:id="rId15"/>
-    <p:sldId id="315" r:id="rId16"/>
-    <p:sldId id="316" r:id="rId17"/>
+    <p:sldId id="318" r:id="rId10"/>
+    <p:sldId id="309" r:id="rId11"/>
+    <p:sldId id="310" r:id="rId12"/>
+    <p:sldId id="308" r:id="rId13"/>
+    <p:sldId id="312" r:id="rId14"/>
+    <p:sldId id="317" r:id="rId15"/>
+    <p:sldId id="314" r:id="rId16"/>
+    <p:sldId id="315" r:id="rId17"/>
+    <p:sldId id="316" r:id="rId18"/>
   </p:sldIdLst>
   <p:sldSz cx="12192000" cy="6858000"/>
   <p:notesSz cx="6858000" cy="9144000"/>
@@ -576,7 +577,7 @@
           <a:p>
             <a:fld id="{AD21AD6E-4550-3C43-945D-BD5179E945F6}" type="slidenum">
               <a:rPr kumimoji="1" lang="ja-JP" altLang="en-US" smtClean="0"/>
-              <a:t>13</a:t>
+              <a:t>14</a:t>
             </a:fld>
             <a:endParaRPr kumimoji="1" lang="ja-JP" altLang="en-US"/>
           </a:p>
@@ -4361,6 +4362,423 @@
         <p:cNvPr id="1" name="">
           <a:extLst>
             <a:ext uri="{FF2B5EF4-FFF2-40B4-BE49-F238E27FC236}">
+              <a16:creationId xmlns:a16="http://schemas.microsoft.com/office/drawing/2014/main" id="{27B622E3-1D88-097D-0343-32872DBECF48}"/>
+            </a:ext>
+          </a:extLst>
+        </p:cNvPr>
+        <p:cNvGrpSpPr/>
+        <p:nvPr/>
+      </p:nvGrpSpPr>
+      <p:grpSpPr>
+        <a:xfrm>
+          <a:off x="0" y="0"/>
+          <a:ext cx="0" cy="0"/>
+          <a:chOff x="0" y="0"/>
+          <a:chExt cx="0" cy="0"/>
+        </a:xfrm>
+      </p:grpSpPr>
+      <p:sp>
+        <p:nvSpPr>
+          <p:cNvPr id="2" name="タイトル 1">
+            <a:extLst>
+              <a:ext uri="{FF2B5EF4-FFF2-40B4-BE49-F238E27FC236}">
+                <a16:creationId xmlns:a16="http://schemas.microsoft.com/office/drawing/2014/main" id="{B62EDC01-EC4F-BEDC-7426-C76D07DBBBC9}"/>
+              </a:ext>
+            </a:extLst>
+          </p:cNvPr>
+          <p:cNvSpPr>
+            <a:spLocks noGrp="1"/>
+          </p:cNvSpPr>
+          <p:nvPr>
+            <p:ph type="title"/>
+          </p:nvPr>
+        </p:nvSpPr>
+        <p:spPr>
+          <a:xfrm>
+            <a:off x="0" y="1"/>
+            <a:ext cx="12192000" cy="577516"/>
+          </a:xfrm>
+          <a:solidFill>
+            <a:schemeClr val="bg1">
+              <a:lumMod val="85000"/>
+            </a:schemeClr>
+          </a:solidFill>
+        </p:spPr>
+        <p:txBody>
+          <a:bodyPr>
+            <a:normAutofit fontScale="90000"/>
+          </a:bodyPr>
+          <a:lstStyle/>
+          <a:p>
+            <a:r>
+              <a:rPr kumimoji="1" lang="ja-JP" altLang="en-US" sz="3600"/>
+              <a:t>マテリアル・方法（判定依頼</a:t>
+            </a:r>
+            <a:r>
+              <a:rPr lang="ja-JP" altLang="en-US" sz="3600"/>
+              <a:t>プロンプト</a:t>
+            </a:r>
+            <a:r>
+              <a:rPr kumimoji="1" lang="ja-JP" altLang="en-US" sz="3600"/>
+              <a:t>）</a:t>
+            </a:r>
+          </a:p>
+        </p:txBody>
+      </p:sp>
+      <p:sp>
+        <p:nvSpPr>
+          <p:cNvPr id="3" name="テキスト ボックス 2">
+            <a:extLst>
+              <a:ext uri="{FF2B5EF4-FFF2-40B4-BE49-F238E27FC236}">
+                <a16:creationId xmlns:a16="http://schemas.microsoft.com/office/drawing/2014/main" id="{E338ACB1-AAC0-8369-EA96-CBA6FD444B9D}"/>
+              </a:ext>
+            </a:extLst>
+          </p:cNvPr>
+          <p:cNvSpPr txBox="1"/>
+          <p:nvPr/>
+        </p:nvSpPr>
+        <p:spPr>
+          <a:xfrm>
+            <a:off x="377952" y="1720840"/>
+            <a:ext cx="11436096" cy="3416320"/>
+          </a:xfrm>
+          <a:prstGeom prst="rect">
+            <a:avLst/>
+          </a:prstGeom>
+          <a:noFill/>
+          <a:ln>
+            <a:solidFill>
+              <a:schemeClr val="dk1"/>
+            </a:solidFill>
+          </a:ln>
+        </p:spPr>
+        <p:txBody>
+          <a:bodyPr wrap="square" rtlCol="0">
+            <a:spAutoFit/>
+          </a:bodyPr>
+          <a:lstStyle/>
+          <a:p>
+            <a:r>
+              <a:rPr lang="ja-JP" altLang="en-US"/>
+              <a:t>添付のデータに対して以下の作業を行って下さい。</a:t>
+            </a:r>
+          </a:p>
+          <a:p>
+            <a:r>
+              <a:rPr lang="ja-JP" altLang="en-US"/>
+              <a:t> </a:t>
+            </a:r>
+          </a:p>
+          <a:p>
+            <a:r>
+              <a:rPr lang="ja-JP" altLang="en-US"/>
+              <a:t> </a:t>
+            </a:r>
+            <a:r>
+              <a:rPr lang="en-US" altLang="ja-JP" dirty="0"/>
+              <a:t>- </a:t>
+            </a:r>
+            <a:r>
+              <a:rPr lang="ja-JP" altLang="en-US"/>
+              <a:t>概要 </a:t>
+            </a:r>
+            <a:r>
+              <a:rPr lang="en-US" altLang="ja-JP" dirty="0"/>
+              <a:t>: </a:t>
+            </a:r>
+            <a:r>
+              <a:rPr lang="ja-JP" altLang="en-US"/>
+              <a:t>地名候補を地名であるか判定する。</a:t>
+            </a:r>
+          </a:p>
+          <a:p>
+            <a:r>
+              <a:rPr lang="ja-JP" altLang="en-US"/>
+              <a:t> </a:t>
+            </a:r>
+            <a:r>
+              <a:rPr lang="en-US" altLang="ja-JP" dirty="0"/>
+              <a:t>- </a:t>
+            </a:r>
+            <a:r>
+              <a:rPr lang="ja-JP" altLang="en-US"/>
+              <a:t>入力データ形式 </a:t>
+            </a:r>
+            <a:r>
+              <a:rPr lang="en-US" altLang="ja-JP" dirty="0"/>
+              <a:t>: </a:t>
+            </a:r>
+            <a:r>
+              <a:rPr lang="en" altLang="ja-JP" dirty="0" err="1"/>
+              <a:t>json</a:t>
+            </a:r>
+            <a:r>
+              <a:rPr lang="ja-JP" altLang="en-US"/>
+              <a:t>形式、</a:t>
+            </a:r>
+            <a:r>
+              <a:rPr lang="en-US" altLang="ja-JP" dirty="0"/>
+              <a:t>4 </a:t>
+            </a:r>
+            <a:r>
+              <a:rPr lang="ja-JP" altLang="en-US"/>
+              <a:t>つの要素から成る。各要素はさらに配列である可能性がある。</a:t>
+            </a:r>
+          </a:p>
+          <a:p>
+            <a:r>
+              <a:rPr lang="ja-JP" altLang="en-US"/>
+              <a:t> </a:t>
+            </a:r>
+            <a:r>
+              <a:rPr lang="en-US" altLang="ja-JP" dirty="0"/>
+              <a:t>- </a:t>
+            </a:r>
+            <a:r>
+              <a:rPr lang="ja-JP" altLang="en-US"/>
+              <a:t>入力データの各要素の説明 </a:t>
+            </a:r>
+            <a:r>
+              <a:rPr lang="en-US" altLang="ja-JP" dirty="0"/>
+              <a:t>: </a:t>
+            </a:r>
+          </a:p>
+          <a:p>
+            <a:r>
+              <a:rPr lang="en-US" altLang="ja-JP" dirty="0"/>
+              <a:t>  - </a:t>
+            </a:r>
+            <a:r>
+              <a:rPr lang="ja-JP" altLang="en-US"/>
+              <a:t>第</a:t>
+            </a:r>
+            <a:r>
+              <a:rPr lang="en-US" altLang="ja-JP" dirty="0"/>
+              <a:t>1</a:t>
+            </a:r>
+            <a:r>
+              <a:rPr lang="ja-JP" altLang="en-US"/>
+              <a:t>要素 </a:t>
+            </a:r>
+            <a:r>
+              <a:rPr lang="en-US" altLang="ja-JP" dirty="0"/>
+              <a:t>: </a:t>
+            </a:r>
+            <a:r>
+              <a:rPr lang="ja-JP" altLang="en-US"/>
+              <a:t>無視して良い</a:t>
+            </a:r>
+          </a:p>
+          <a:p>
+            <a:r>
+              <a:rPr lang="ja-JP" altLang="en-US"/>
+              <a:t>  </a:t>
+            </a:r>
+            <a:r>
+              <a:rPr lang="en-US" altLang="ja-JP" dirty="0"/>
+              <a:t>- </a:t>
+            </a:r>
+            <a:r>
+              <a:rPr lang="ja-JP" altLang="en-US"/>
+              <a:t>第</a:t>
+            </a:r>
+            <a:r>
+              <a:rPr lang="en-US" altLang="ja-JP" dirty="0"/>
+              <a:t>2</a:t>
+            </a:r>
+            <a:r>
+              <a:rPr lang="ja-JP" altLang="en-US"/>
+              <a:t>要素 </a:t>
+            </a:r>
+            <a:r>
+              <a:rPr lang="en-US" altLang="ja-JP" dirty="0"/>
+              <a:t>: </a:t>
+            </a:r>
+            <a:r>
+              <a:rPr lang="ja-JP" altLang="en-US"/>
+              <a:t>第</a:t>
+            </a:r>
+            <a:r>
+              <a:rPr lang="en-US" altLang="ja-JP" dirty="0"/>
+              <a:t>4</a:t>
+            </a:r>
+            <a:r>
+              <a:rPr lang="ja-JP" altLang="en-US"/>
+              <a:t>要素から抽出された地名候補</a:t>
+            </a:r>
+          </a:p>
+          <a:p>
+            <a:r>
+              <a:rPr lang="ja-JP" altLang="en-US"/>
+              <a:t>  </a:t>
+            </a:r>
+            <a:r>
+              <a:rPr lang="en-US" altLang="ja-JP" dirty="0"/>
+              <a:t>- </a:t>
+            </a:r>
+            <a:r>
+              <a:rPr lang="ja-JP" altLang="en-US"/>
+              <a:t>第</a:t>
+            </a:r>
+            <a:r>
+              <a:rPr lang="en-US" altLang="ja-JP" dirty="0"/>
+              <a:t>3</a:t>
+            </a:r>
+            <a:r>
+              <a:rPr lang="ja-JP" altLang="en-US"/>
+              <a:t>要素 </a:t>
+            </a:r>
+            <a:r>
+              <a:rPr lang="en-US" altLang="ja-JP" dirty="0"/>
+              <a:t>: </a:t>
+            </a:r>
+            <a:r>
+              <a:rPr lang="ja-JP" altLang="en-US"/>
+              <a:t>無視して良い</a:t>
+            </a:r>
+          </a:p>
+          <a:p>
+            <a:r>
+              <a:rPr lang="ja-JP" altLang="en-US"/>
+              <a:t>  </a:t>
+            </a:r>
+            <a:r>
+              <a:rPr lang="en-US" altLang="ja-JP" dirty="0"/>
+              <a:t>- </a:t>
+            </a:r>
+            <a:r>
+              <a:rPr lang="ja-JP" altLang="en-US"/>
+              <a:t>第</a:t>
+            </a:r>
+            <a:r>
+              <a:rPr lang="en-US" altLang="ja-JP" dirty="0"/>
+              <a:t>4</a:t>
+            </a:r>
+            <a:r>
+              <a:rPr lang="ja-JP" altLang="en-US"/>
+              <a:t>要素 </a:t>
+            </a:r>
+            <a:r>
+              <a:rPr lang="en-US" altLang="ja-JP" dirty="0"/>
+              <a:t>: </a:t>
+            </a:r>
+            <a:r>
+              <a:rPr lang="ja-JP" altLang="en-US"/>
+              <a:t>文章 （配列）</a:t>
+            </a:r>
+          </a:p>
+          <a:p>
+            <a:r>
+              <a:rPr lang="en-US" altLang="ja-JP" dirty="0"/>
+              <a:t>- </a:t>
+            </a:r>
+            <a:r>
+              <a:rPr lang="ja-JP" altLang="en-US"/>
+              <a:t>行ってほしい作業 </a:t>
+            </a:r>
+            <a:r>
+              <a:rPr lang="en-US" altLang="ja-JP" dirty="0"/>
+              <a:t>: </a:t>
+            </a:r>
+            <a:r>
+              <a:rPr lang="en" altLang="ja-JP" dirty="0" err="1"/>
+              <a:t>json</a:t>
+            </a:r>
+            <a:r>
+              <a:rPr lang="ja-JP" altLang="en-US"/>
+              <a:t>の第</a:t>
+            </a:r>
+            <a:r>
+              <a:rPr lang="en-US" altLang="ja-JP" dirty="0"/>
+              <a:t>2</a:t>
+            </a:r>
+            <a:r>
+              <a:rPr lang="ja-JP" altLang="en-US"/>
+              <a:t>要素の各地名候補が地名であるかを、第</a:t>
+            </a:r>
+            <a:r>
+              <a:rPr lang="en-US" altLang="ja-JP" dirty="0"/>
+              <a:t>4</a:t>
+            </a:r>
+            <a:r>
+              <a:rPr lang="ja-JP" altLang="en-US"/>
+              <a:t>要素の文脈から判定してほしい。</a:t>
+            </a:r>
+          </a:p>
+          <a:p>
+            <a:r>
+              <a:rPr lang="en-US" altLang="ja-JP" dirty="0"/>
+              <a:t>- </a:t>
+            </a:r>
+            <a:r>
+              <a:rPr lang="ja-JP" altLang="en-US"/>
+              <a:t>出力データ形式 （判定結果） </a:t>
+            </a:r>
+            <a:r>
+              <a:rPr lang="en-US" altLang="ja-JP" dirty="0"/>
+              <a:t>: </a:t>
+            </a:r>
+            <a:r>
+              <a:rPr lang="ja-JP" altLang="en-US"/>
+              <a:t>第</a:t>
+            </a:r>
+            <a:r>
+              <a:rPr lang="en-US" altLang="ja-JP" dirty="0"/>
+              <a:t>2</a:t>
+            </a:r>
+            <a:r>
+              <a:rPr lang="ja-JP" altLang="en-US"/>
+              <a:t>要素のみを次のように出力する </a:t>
+            </a:r>
+            <a:r>
+              <a:rPr lang="en-US" altLang="ja-JP" dirty="0"/>
+              <a:t>: </a:t>
+            </a:r>
+            <a:r>
+              <a:rPr lang="ja-JP" altLang="en-US"/>
+              <a:t>第</a:t>
+            </a:r>
+            <a:r>
+              <a:rPr lang="en-US" altLang="ja-JP" dirty="0"/>
+              <a:t>2</a:t>
+            </a:r>
+            <a:r>
+              <a:rPr lang="ja-JP" altLang="en-US"/>
+              <a:t>要素の地名候補が地名であればそのまま残し、そうでない場合は</a:t>
+            </a:r>
+            <a:r>
+              <a:rPr lang="en-US" altLang="ja-JP" dirty="0"/>
+              <a:t>0</a:t>
+            </a:r>
+            <a:r>
+              <a:rPr lang="ja-JP" altLang="en-US"/>
+              <a:t>に置きかえたもの。</a:t>
+            </a:r>
+            <a:endParaRPr kumimoji="1" lang="ja-JP" altLang="en-US"/>
+          </a:p>
+        </p:txBody>
+      </p:sp>
+    </p:spTree>
+    <p:extLst>
+      <p:ext uri="{BB962C8B-B14F-4D97-AF65-F5344CB8AC3E}">
+        <p14:creationId xmlns:p14="http://schemas.microsoft.com/office/powerpoint/2010/main" val="1609540031"/>
+      </p:ext>
+    </p:extLst>
+  </p:cSld>
+  <p:clrMapOvr>
+    <a:masterClrMapping/>
+  </p:clrMapOvr>
+</p:sld>
+</file>
+
+<file path=ppt/slides/slide11.xml><?xml version="1.0" encoding="utf-8"?>
+<p:sld xmlns:a="http://schemas.openxmlformats.org/drawingml/2006/main" xmlns:r="http://schemas.openxmlformats.org/officeDocument/2006/relationships" xmlns:p="http://schemas.openxmlformats.org/presentationml/2006/main">
+  <p:cSld>
+    <p:spTree>
+      <p:nvGrpSpPr>
+        <p:cNvPr id="1" name="">
+          <a:extLst>
+            <a:ext uri="{FF2B5EF4-FFF2-40B4-BE49-F238E27FC236}">
               <a16:creationId xmlns:a16="http://schemas.microsoft.com/office/drawing/2014/main" id="{B41F33F5-0DFD-B6B1-3D10-353348B2241A}"/>
             </a:ext>
           </a:extLst>
@@ -4742,7 +5160,7 @@
 </p:sld>
 </file>
 
-<file path=ppt/slides/slide11.xml><?xml version="1.0" encoding="utf-8"?>
+<file path=ppt/slides/slide12.xml><?xml version="1.0" encoding="utf-8"?>
 <p:sld xmlns:a="http://schemas.openxmlformats.org/drawingml/2006/main" xmlns:r="http://schemas.openxmlformats.org/officeDocument/2006/relationships" xmlns:p="http://schemas.openxmlformats.org/presentationml/2006/main">
   <p:cSld>
     <p:spTree>
@@ -5646,7 +6064,7 @@
 </p:sld>
 </file>
 
-<file path=ppt/slides/slide12.xml><?xml version="1.0" encoding="utf-8"?>
+<file path=ppt/slides/slide13.xml><?xml version="1.0" encoding="utf-8"?>
 <p:sld xmlns:a="http://schemas.openxmlformats.org/drawingml/2006/main" xmlns:r="http://schemas.openxmlformats.org/officeDocument/2006/relationships" xmlns:p="http://schemas.openxmlformats.org/presentationml/2006/main">
   <p:cSld>
     <p:spTree>
@@ -6789,7 +7207,7 @@
 </p:sld>
 </file>
 
-<file path=ppt/slides/slide13.xml><?xml version="1.0" encoding="utf-8"?>
+<file path=ppt/slides/slide14.xml><?xml version="1.0" encoding="utf-8"?>
 <p:sld xmlns:a="http://schemas.openxmlformats.org/drawingml/2006/main" xmlns:r="http://schemas.openxmlformats.org/officeDocument/2006/relationships" xmlns:p="http://schemas.openxmlformats.org/presentationml/2006/main">
   <p:cSld>
     <p:spTree>
@@ -7493,7 +7911,7 @@
         <p:spPr>
           <a:xfrm>
             <a:off x="9000450" y="2814129"/>
-            <a:ext cx="2621230" cy="369332"/>
+            <a:ext cx="2852063" cy="369332"/>
           </a:xfrm>
           <a:prstGeom prst="rect">
             <a:avLst/>
@@ -7520,7 +7938,7 @@
             </a:r>
             <a:r>
               <a:rPr lang="ja-JP" altLang="en-US"/>
-              <a:t>抽出できるも</a:t>
+              <a:t>抽出できるもの</a:t>
             </a:r>
             <a:endParaRPr kumimoji="1" lang="ja-JP" altLang="en-US"/>
           </a:p>
@@ -7668,7 +8086,7 @@
 </p:sld>
 </file>
 
-<file path=ppt/slides/slide14.xml><?xml version="1.0" encoding="utf-8"?>
+<file path=ppt/slides/slide15.xml><?xml version="1.0" encoding="utf-8"?>
 <p:sld xmlns:a="http://schemas.openxmlformats.org/drawingml/2006/main" xmlns:r="http://schemas.openxmlformats.org/officeDocument/2006/relationships" xmlns:p="http://schemas.openxmlformats.org/presentationml/2006/main">
   <p:cSld>
     <p:spTree>
@@ -8014,7 +8432,7 @@
 </p:sld>
 </file>
 
-<file path=ppt/slides/slide15.xml><?xml version="1.0" encoding="utf-8"?>
+<file path=ppt/slides/slide16.xml><?xml version="1.0" encoding="utf-8"?>
 <p:sld xmlns:a="http://schemas.openxmlformats.org/drawingml/2006/main" xmlns:r="http://schemas.openxmlformats.org/officeDocument/2006/relationships" xmlns:p="http://schemas.openxmlformats.org/presentationml/2006/main">
   <p:cSld>
     <p:spTree>
@@ -8304,7 +8722,7 @@
 </p:sld>
 </file>
 
-<file path=ppt/slides/slide16.xml><?xml version="1.0" encoding="utf-8"?>
+<file path=ppt/slides/slide17.xml><?xml version="1.0" encoding="utf-8"?>
 <p:sld xmlns:a="http://schemas.openxmlformats.org/drawingml/2006/main" xmlns:r="http://schemas.openxmlformats.org/officeDocument/2006/relationships" xmlns:p="http://schemas.openxmlformats.org/presentationml/2006/main">
   <p:cSld>
     <p:spTree>
@@ -14869,7 +15287,7 @@
         <p:cNvPr id="1" name="">
           <a:extLst>
             <a:ext uri="{FF2B5EF4-FFF2-40B4-BE49-F238E27FC236}">
-              <a16:creationId xmlns:a16="http://schemas.microsoft.com/office/drawing/2014/main" id="{27B622E3-1D88-097D-0343-32872DBECF48}"/>
+              <a16:creationId xmlns:a16="http://schemas.microsoft.com/office/drawing/2014/main" id="{45D1EA99-60AA-5390-0D3D-56D4CEB0011F}"/>
             </a:ext>
           </a:extLst>
         </p:cNvPr>
@@ -14889,7 +15307,7 @@
           <p:cNvPr id="2" name="タイトル 1">
             <a:extLst>
               <a:ext uri="{FF2B5EF4-FFF2-40B4-BE49-F238E27FC236}">
-                <a16:creationId xmlns:a16="http://schemas.microsoft.com/office/drawing/2014/main" id="{B62EDC01-EC4F-BEDC-7426-C76D07DBBBC9}"/>
+                <a16:creationId xmlns:a16="http://schemas.microsoft.com/office/drawing/2014/main" id="{5436E73C-C135-9AF7-6D96-1B6566C22C58}"/>
               </a:ext>
             </a:extLst>
           </p:cNvPr>
@@ -14922,8 +15340,8 @@
               <a:t>マテリアル・方法（</a:t>
             </a:r>
             <a:r>
-              <a:rPr lang="ja-JP" altLang="en-US" sz="3600"/>
-              <a:t>プロンプト</a:t>
+              <a:rPr kumimoji="1" lang="en-US" altLang="ja-JP" sz="3600"/>
+              <a:t>NER</a:t>
             </a:r>
             <a:r>
               <a:rPr kumimoji="1" lang="ja-JP" altLang="en-US" sz="3600"/>
@@ -14934,10 +15352,10 @@
       </p:sp>
       <p:sp>
         <p:nvSpPr>
-          <p:cNvPr id="3" name="テキスト ボックス 2">
-            <a:extLst>
-              <a:ext uri="{FF2B5EF4-FFF2-40B4-BE49-F238E27FC236}">
-                <a16:creationId xmlns:a16="http://schemas.microsoft.com/office/drawing/2014/main" id="{E338ACB1-AAC0-8369-EA96-CBA6FD444B9D}"/>
+          <p:cNvPr id="4" name="テキスト ボックス 3">
+            <a:extLst>
+              <a:ext uri="{FF2B5EF4-FFF2-40B4-BE49-F238E27FC236}">
+                <a16:creationId xmlns:a16="http://schemas.microsoft.com/office/drawing/2014/main" id="{5C02DBFA-43A0-570F-85FB-DE2048B43B02}"/>
               </a:ext>
             </a:extLst>
           </p:cNvPr>
@@ -14946,329 +15364,149 @@
         </p:nvSpPr>
         <p:spPr>
           <a:xfrm>
-            <a:off x="377952" y="1720840"/>
-            <a:ext cx="11436096" cy="3416320"/>
+            <a:off x="0" y="643420"/>
+            <a:ext cx="6705682" cy="2308324"/>
           </a:xfrm>
           <a:prstGeom prst="rect">
             <a:avLst/>
           </a:prstGeom>
           <a:noFill/>
-          <a:ln>
-            <a:solidFill>
-              <a:schemeClr val="dk1"/>
-            </a:solidFill>
-          </a:ln>
-        </p:spPr>
-        <p:txBody>
-          <a:bodyPr wrap="square" rtlCol="0">
+        </p:spPr>
+        <p:txBody>
+          <a:bodyPr wrap="none" rtlCol="0">
             <a:spAutoFit/>
           </a:bodyPr>
           <a:lstStyle/>
           <a:p>
+            <a:pPr marL="285750" indent="-285750">
+              <a:buFont typeface="Arial" panose="020B0604020202020204" pitchFamily="34" charset="0"/>
+              <a:buChar char="•"/>
+            </a:pPr>
+            <a:r>
+              <a:rPr lang="en-US" altLang="ja-JP"/>
+              <a:t>mecab</a:t>
+            </a:r>
             <a:r>
               <a:rPr lang="ja-JP" altLang="en-US"/>
-              <a:t>添付のデータに対して以下の作業を行って下さい。</a:t>
-            </a:r>
-          </a:p>
-          <a:p>
+              <a:t>による形態素解析</a:t>
+            </a:r>
+            <a:endParaRPr lang="en-US" altLang="ja-JP"/>
+          </a:p>
+          <a:p>
+            <a:pPr marL="742950" lvl="1" indent="-285750">
+              <a:buFont typeface="Arial" panose="020B0604020202020204" pitchFamily="34" charset="0"/>
+              <a:buChar char="•"/>
+            </a:pPr>
+            <a:r>
+              <a:rPr kumimoji="1" lang="en-US" altLang="ja-JP"/>
+              <a:t>'</a:t>
+            </a:r>
+            <a:r>
+              <a:rPr kumimoji="1" lang="ja-JP" altLang="en-US"/>
+              <a:t>固有名詞</a:t>
+            </a:r>
+            <a:r>
+              <a:rPr kumimoji="1" lang="en-US" altLang="ja-JP"/>
+              <a:t>'</a:t>
+            </a:r>
+            <a:r>
+              <a:rPr kumimoji="1" lang="ja-JP" altLang="en-US"/>
+              <a:t>、</a:t>
+            </a:r>
+            <a:r>
+              <a:rPr kumimoji="1" lang="en-US" altLang="ja-JP"/>
+              <a:t>'</a:t>
+            </a:r>
+            <a:r>
+              <a:rPr kumimoji="1" lang="ja-JP" altLang="en-US"/>
+              <a:t>地域</a:t>
+            </a:r>
+            <a:r>
+              <a:rPr kumimoji="1" lang="en-US" altLang="ja-JP"/>
+              <a:t>'</a:t>
+            </a:r>
+            <a:r>
+              <a:rPr kumimoji="1" lang="ja-JP" altLang="en-US"/>
+              <a:t>のラベルのあるものを抽出</a:t>
+            </a:r>
+            <a:endParaRPr kumimoji="1" lang="en-US" altLang="ja-JP"/>
+          </a:p>
+          <a:p>
+            <a:pPr marL="742950" lvl="1" indent="-285750">
+              <a:buFont typeface="Arial" panose="020B0604020202020204" pitchFamily="34" charset="0"/>
+              <a:buChar char="•"/>
+            </a:pPr>
             <a:r>
               <a:rPr lang="ja-JP" altLang="en-US"/>
-              <a:t> </a:t>
-            </a:r>
-          </a:p>
-          <a:p>
+              <a:t>品詞の属性情報を削除し表現部分のみを抽出、リスト化</a:t>
+            </a:r>
+            <a:endParaRPr lang="en-US" altLang="ja-JP"/>
+          </a:p>
+          <a:p>
+            <a:pPr marL="742950" lvl="1" indent="-285750">
+              <a:buFont typeface="Arial" panose="020B0604020202020204" pitchFamily="34" charset="0"/>
+              <a:buChar char="•"/>
+            </a:pPr>
+            <a:r>
+              <a:rPr kumimoji="1" lang="ja-JP" altLang="en-US"/>
+              <a:t>以上を報告書ごとに行う</a:t>
+            </a:r>
+            <a:endParaRPr kumimoji="1" lang="en-US" altLang="ja-JP"/>
+          </a:p>
+          <a:p>
+            <a:pPr marL="285750" indent="-285750">
+              <a:buFont typeface="Arial" panose="020B0604020202020204" pitchFamily="34" charset="0"/>
+              <a:buChar char="•"/>
+            </a:pPr>
+            <a:r>
+              <a:rPr kumimoji="1" lang="ja-JP" altLang="en-US"/>
+              <a:t>作業用ファイルの作成</a:t>
+            </a:r>
+            <a:endParaRPr kumimoji="1" lang="en-US" altLang="ja-JP"/>
+          </a:p>
+          <a:p>
+            <a:pPr marL="742950" lvl="1" indent="-285750">
+              <a:buFont typeface="Arial" panose="020B0604020202020204" pitchFamily="34" charset="0"/>
+              <a:buChar char="•"/>
+            </a:pPr>
+            <a:r>
+              <a:rPr kumimoji="1" lang="ja-JP" altLang="en-US"/>
+              <a:t>報告書のタイトル、本文を抽出</a:t>
+            </a:r>
+            <a:endParaRPr kumimoji="1" lang="en-US" altLang="ja-JP"/>
+          </a:p>
+          <a:p>
+            <a:pPr marL="742950" lvl="1" indent="-285750">
+              <a:buFont typeface="Arial" panose="020B0604020202020204" pitchFamily="34" charset="0"/>
+              <a:buChar char="•"/>
+            </a:pPr>
+            <a:r>
+              <a:rPr lang="en-US" altLang="ja-JP"/>
+              <a:t>NER</a:t>
+            </a:r>
             <a:r>
               <a:rPr lang="ja-JP" altLang="en-US"/>
-              <a:t> </a:t>
-            </a:r>
-            <a:r>
-              <a:rPr lang="en-US" altLang="ja-JP" dirty="0"/>
-              <a:t>- </a:t>
-            </a:r>
+              <a:t>結果のリストと結合</a:t>
+            </a:r>
+            <a:endParaRPr lang="en-US" altLang="ja-JP"/>
+          </a:p>
+          <a:p>
+            <a:pPr marL="742950" lvl="1" indent="-285750">
+              <a:buFont typeface="Arial" panose="020B0604020202020204" pitchFamily="34" charset="0"/>
+              <a:buChar char="•"/>
+            </a:pPr>
             <a:r>
               <a:rPr lang="ja-JP" altLang="en-US"/>
-              <a:t>概要 </a:t>
-            </a:r>
-            <a:r>
-              <a:rPr lang="en-US" altLang="ja-JP" dirty="0"/>
-              <a:t>: </a:t>
-            </a:r>
-            <a:r>
-              <a:rPr lang="ja-JP" altLang="en-US"/>
-              <a:t>地名候補を地名であるか判定する。</a:t>
-            </a:r>
-          </a:p>
-          <a:p>
-            <a:r>
-              <a:rPr lang="ja-JP" altLang="en-US"/>
-              <a:t> </a:t>
-            </a:r>
-            <a:r>
-              <a:rPr lang="en-US" altLang="ja-JP" dirty="0"/>
-              <a:t>- </a:t>
-            </a:r>
-            <a:r>
-              <a:rPr lang="ja-JP" altLang="en-US"/>
-              <a:t>入力データ形式 </a:t>
-            </a:r>
-            <a:r>
-              <a:rPr lang="en-US" altLang="ja-JP" dirty="0"/>
-              <a:t>: </a:t>
-            </a:r>
-            <a:r>
-              <a:rPr lang="en" altLang="ja-JP" dirty="0" err="1"/>
-              <a:t>json</a:t>
-            </a:r>
-            <a:r>
-              <a:rPr lang="ja-JP" altLang="en-US"/>
-              <a:t>形式、</a:t>
-            </a:r>
-            <a:r>
-              <a:rPr lang="en-US" altLang="ja-JP" dirty="0"/>
-              <a:t>4 </a:t>
-            </a:r>
-            <a:r>
-              <a:rPr lang="ja-JP" altLang="en-US"/>
-              <a:t>つの要素から成る。各要素はさらに配列である可能性がある。</a:t>
-            </a:r>
-          </a:p>
-          <a:p>
-            <a:r>
-              <a:rPr lang="ja-JP" altLang="en-US"/>
-              <a:t> </a:t>
-            </a:r>
-            <a:r>
-              <a:rPr lang="en-US" altLang="ja-JP" dirty="0"/>
-              <a:t>- </a:t>
-            </a:r>
-            <a:r>
-              <a:rPr lang="ja-JP" altLang="en-US"/>
-              <a:t>入力データの各要素の説明 </a:t>
-            </a:r>
-            <a:r>
-              <a:rPr lang="en-US" altLang="ja-JP" dirty="0"/>
-              <a:t>: </a:t>
-            </a:r>
-          </a:p>
-          <a:p>
-            <a:r>
-              <a:rPr lang="en-US" altLang="ja-JP" dirty="0"/>
-              <a:t>  - </a:t>
-            </a:r>
-            <a:r>
-              <a:rPr lang="ja-JP" altLang="en-US"/>
-              <a:t>第</a:t>
-            </a:r>
-            <a:r>
-              <a:rPr lang="en-US" altLang="ja-JP" dirty="0"/>
-              <a:t>1</a:t>
-            </a:r>
-            <a:r>
-              <a:rPr lang="ja-JP" altLang="en-US"/>
-              <a:t>要素 </a:t>
-            </a:r>
-            <a:r>
-              <a:rPr lang="en-US" altLang="ja-JP" dirty="0"/>
-              <a:t>: </a:t>
-            </a:r>
-            <a:r>
-              <a:rPr lang="ja-JP" altLang="en-US"/>
-              <a:t>無視して良い</a:t>
-            </a:r>
-          </a:p>
-          <a:p>
-            <a:r>
-              <a:rPr lang="ja-JP" altLang="en-US"/>
-              <a:t>  </a:t>
-            </a:r>
-            <a:r>
-              <a:rPr lang="en-US" altLang="ja-JP" dirty="0"/>
-              <a:t>- </a:t>
-            </a:r>
-            <a:r>
-              <a:rPr lang="ja-JP" altLang="en-US"/>
-              <a:t>第</a:t>
-            </a:r>
-            <a:r>
-              <a:rPr lang="en-US" altLang="ja-JP" dirty="0"/>
-              <a:t>2</a:t>
-            </a:r>
-            <a:r>
-              <a:rPr lang="ja-JP" altLang="en-US"/>
-              <a:t>要素 </a:t>
-            </a:r>
-            <a:r>
-              <a:rPr lang="en-US" altLang="ja-JP" dirty="0"/>
-              <a:t>: </a:t>
-            </a:r>
-            <a:r>
-              <a:rPr lang="ja-JP" altLang="en-US"/>
-              <a:t>第</a:t>
-            </a:r>
-            <a:r>
-              <a:rPr lang="en-US" altLang="ja-JP" dirty="0"/>
-              <a:t>4</a:t>
-            </a:r>
-            <a:r>
-              <a:rPr lang="ja-JP" altLang="en-US"/>
-              <a:t>要素から抽出された地名候補</a:t>
-            </a:r>
-          </a:p>
-          <a:p>
-            <a:r>
-              <a:rPr lang="ja-JP" altLang="en-US"/>
-              <a:t>  </a:t>
-            </a:r>
-            <a:r>
-              <a:rPr lang="en-US" altLang="ja-JP" dirty="0"/>
-              <a:t>- </a:t>
-            </a:r>
-            <a:r>
-              <a:rPr lang="ja-JP" altLang="en-US"/>
-              <a:t>第</a:t>
-            </a:r>
-            <a:r>
-              <a:rPr lang="en-US" altLang="ja-JP" dirty="0"/>
-              <a:t>3</a:t>
-            </a:r>
-            <a:r>
-              <a:rPr lang="ja-JP" altLang="en-US"/>
-              <a:t>要素 </a:t>
-            </a:r>
-            <a:r>
-              <a:rPr lang="en-US" altLang="ja-JP" dirty="0"/>
-              <a:t>: </a:t>
-            </a:r>
-            <a:r>
-              <a:rPr lang="ja-JP" altLang="en-US"/>
-              <a:t>無視して良い</a:t>
-            </a:r>
-          </a:p>
-          <a:p>
-            <a:r>
-              <a:rPr lang="ja-JP" altLang="en-US"/>
-              <a:t>  </a:t>
-            </a:r>
-            <a:r>
-              <a:rPr lang="en-US" altLang="ja-JP" dirty="0"/>
-              <a:t>- </a:t>
-            </a:r>
-            <a:r>
-              <a:rPr lang="ja-JP" altLang="en-US"/>
-              <a:t>第</a:t>
-            </a:r>
-            <a:r>
-              <a:rPr lang="en-US" altLang="ja-JP" dirty="0"/>
-              <a:t>4</a:t>
-            </a:r>
-            <a:r>
-              <a:rPr lang="ja-JP" altLang="en-US"/>
-              <a:t>要素 </a:t>
-            </a:r>
-            <a:r>
-              <a:rPr lang="en-US" altLang="ja-JP" dirty="0"/>
-              <a:t>: </a:t>
-            </a:r>
-            <a:r>
-              <a:rPr lang="ja-JP" altLang="en-US"/>
-              <a:t>文章 （配列）</a:t>
-            </a:r>
-          </a:p>
-          <a:p>
-            <a:r>
-              <a:rPr lang="en-US" altLang="ja-JP" dirty="0"/>
-              <a:t>- </a:t>
-            </a:r>
-            <a:r>
-              <a:rPr lang="ja-JP" altLang="en-US"/>
-              <a:t>行ってほしい作業 </a:t>
-            </a:r>
-            <a:r>
-              <a:rPr lang="en-US" altLang="ja-JP" dirty="0"/>
-              <a:t>: </a:t>
-            </a:r>
-            <a:r>
-              <a:rPr lang="en" altLang="ja-JP" dirty="0" err="1"/>
-              <a:t>json</a:t>
-            </a:r>
-            <a:r>
-              <a:rPr lang="ja-JP" altLang="en-US"/>
-              <a:t>の第</a:t>
-            </a:r>
-            <a:r>
-              <a:rPr lang="en-US" altLang="ja-JP" dirty="0"/>
-              <a:t>2</a:t>
-            </a:r>
-            <a:r>
-              <a:rPr lang="ja-JP" altLang="en-US"/>
-              <a:t>要素の各地名候補が地名であるかを、第</a:t>
-            </a:r>
-            <a:r>
-              <a:rPr lang="en-US" altLang="ja-JP" dirty="0"/>
-              <a:t>4</a:t>
-            </a:r>
-            <a:r>
-              <a:rPr lang="ja-JP" altLang="en-US"/>
-              <a:t>要素の文脈から判定してほしい。</a:t>
-            </a:r>
-          </a:p>
-          <a:p>
-            <a:r>
-              <a:rPr lang="en-US" altLang="ja-JP" dirty="0"/>
-              <a:t>- </a:t>
-            </a:r>
-            <a:r>
-              <a:rPr lang="ja-JP" altLang="en-US"/>
-              <a:t>出力データ形式 （判定結果） </a:t>
-            </a:r>
-            <a:r>
-              <a:rPr lang="en-US" altLang="ja-JP" dirty="0"/>
-              <a:t>: </a:t>
-            </a:r>
-            <a:r>
-              <a:rPr lang="ja-JP" altLang="en-US"/>
-              <a:t>第</a:t>
-            </a:r>
-            <a:r>
-              <a:rPr lang="en-US" altLang="ja-JP" dirty="0"/>
-              <a:t>2</a:t>
-            </a:r>
-            <a:r>
-              <a:rPr lang="ja-JP" altLang="en-US"/>
-              <a:t>要素のみを次のように出力する </a:t>
-            </a:r>
-            <a:r>
-              <a:rPr lang="en-US" altLang="ja-JP" dirty="0"/>
-              <a:t>: </a:t>
-            </a:r>
-            <a:r>
-              <a:rPr lang="ja-JP" altLang="en-US"/>
-              <a:t>第</a:t>
-            </a:r>
-            <a:r>
-              <a:rPr lang="en-US" altLang="ja-JP" dirty="0"/>
-              <a:t>2</a:t>
-            </a:r>
-            <a:r>
-              <a:rPr lang="ja-JP" altLang="en-US"/>
-              <a:t>要素の地名候補が地名であればそのまま残し、そうでない場合は</a:t>
-            </a:r>
-            <a:r>
-              <a:rPr lang="en-US" altLang="ja-JP" dirty="0"/>
-              <a:t>0</a:t>
-            </a:r>
-            <a:r>
-              <a:rPr lang="ja-JP" altLang="en-US"/>
-              <a:t>に置きかえたもの。</a:t>
-            </a:r>
-            <a:endParaRPr kumimoji="1" lang="ja-JP" altLang="en-US"/>
+              <a:t>以上を報告書ごとに行う</a:t>
+            </a:r>
+            <a:endParaRPr lang="en-US" altLang="ja-JP"/>
           </a:p>
         </p:txBody>
       </p:sp>
     </p:spTree>
     <p:extLst>
       <p:ext uri="{BB962C8B-B14F-4D97-AF65-F5344CB8AC3E}">
-        <p14:creationId xmlns:p14="http://schemas.microsoft.com/office/powerpoint/2010/main" val="1609540031"/>
+        <p14:creationId xmlns:p14="http://schemas.microsoft.com/office/powerpoint/2010/main" val="3715758299"/>
       </p:ext>
     </p:extLst>
   </p:cSld>

--- a/jsik2026taikai.pptx
+++ b/jsik2026taikai.pptx
@@ -5,7 +5,7 @@
     <p:sldMasterId id="2147483648" r:id="rId1"/>
   </p:sldMasterIdLst>
   <p:notesMasterIdLst>
-    <p:notesMasterId r:id="rId19"/>
+    <p:notesMasterId r:id="rId20"/>
   </p:notesMasterIdLst>
   <p:sldIdLst>
     <p:sldId id="256" r:id="rId2"/>
@@ -25,6 +25,7 @@
     <p:sldId id="314" r:id="rId16"/>
     <p:sldId id="315" r:id="rId17"/>
     <p:sldId id="316" r:id="rId18"/>
+    <p:sldId id="319" r:id="rId19"/>
   </p:sldIdLst>
   <p:sldSz cx="12192000" cy="6858000"/>
   <p:notesSz cx="6858000" cy="9144000"/>
@@ -4156,8 +4157,8 @@
         </p:nvSpPr>
         <p:spPr>
           <a:xfrm>
-            <a:off x="2292989" y="3842010"/>
-            <a:ext cx="7606021" cy="461665"/>
+            <a:off x="1990871" y="3850097"/>
+            <a:ext cx="8210254" cy="461665"/>
           </a:xfrm>
           <a:prstGeom prst="rect">
             <a:avLst/>
@@ -4172,7 +4173,7 @@
           <a:p>
             <a:r>
               <a:rPr lang="ja-JP" altLang="en-US" sz="2400"/>
-              <a:t>黄秋実</a:t>
+              <a:t>○黄秋実</a:t>
             </a:r>
             <a:r>
               <a:rPr lang="en-US" altLang="ja-JP" sz="2400" baseline="30000" dirty="0"/>
@@ -4224,7 +4225,7 @@
             </a:r>
             <a:r>
               <a:rPr lang="en-US" altLang="ja-JP" sz="2400" baseline="30000" dirty="0"/>
-              <a:t>1*</a:t>
+              <a:t>1*†</a:t>
             </a:r>
           </a:p>
         </p:txBody>
@@ -4244,7 +4245,7 @@
         <p:spPr>
           <a:xfrm>
             <a:off x="4205994" y="4557722"/>
-            <a:ext cx="3780008" cy="830997"/>
+            <a:ext cx="3780008" cy="1200329"/>
           </a:xfrm>
           <a:prstGeom prst="rect">
             <a:avLst/>
@@ -4286,6 +4287,22 @@
               <a:rPr lang="ja-JP" altLang="en-US" sz="2400"/>
               <a:t>国立情報学研究所</a:t>
             </a:r>
+            <a:endParaRPr lang="en-US" altLang="ja-JP" sz="2400"/>
+          </a:p>
+          <a:p>
+            <a:pPr algn="ctr"/>
+            <a:r>
+              <a:rPr lang="en-US" altLang="ja-JP" sz="2400" baseline="30000" dirty="0"/>
+              <a:t>*</a:t>
+            </a:r>
+            <a:r>
+              <a:rPr lang="en-US" altLang="ja-JP" sz="2400" dirty="0"/>
+              <a:t> </a:t>
+            </a:r>
+            <a:r>
+              <a:rPr lang="ja-JP" altLang="en-US" sz="2400" dirty="0"/>
+              <a:t>連絡先著者</a:t>
+            </a:r>
             <a:endParaRPr lang="en-US" altLang="ja-JP" sz="2400" baseline="30000" dirty="0"/>
           </a:p>
         </p:txBody>
@@ -4338,6 +4355,46 @@
               <a:rPr lang="en-US" altLang="ja-JP" sz="3200" dirty="0"/>
               <a:t>-</a:t>
             </a:r>
+          </a:p>
+        </p:txBody>
+      </p:sp>
+      <p:sp>
+        <p:nvSpPr>
+          <p:cNvPr id="7" name="テキスト ボックス 6">
+            <a:extLst>
+              <a:ext uri="{FF2B5EF4-FFF2-40B4-BE49-F238E27FC236}">
+                <a16:creationId xmlns:a16="http://schemas.microsoft.com/office/drawing/2014/main" id="{915C563C-151C-A16C-32B7-9AB353C5D587}"/>
+              </a:ext>
+            </a:extLst>
+          </p:cNvPr>
+          <p:cNvSpPr txBox="1"/>
+          <p:nvPr/>
+        </p:nvSpPr>
+        <p:spPr>
+          <a:xfrm>
+            <a:off x="5349640" y="6236043"/>
+            <a:ext cx="1492716" cy="369332"/>
+          </a:xfrm>
+          <a:prstGeom prst="rect">
+            <a:avLst/>
+          </a:prstGeom>
+          <a:noFill/>
+        </p:spPr>
+        <p:txBody>
+          <a:bodyPr wrap="none" rtlCol="0">
+            <a:spAutoFit/>
+          </a:bodyPr>
+          <a:lstStyle/>
+          <a:p>
+            <a:r>
+              <a:rPr lang="en-US" altLang="ja-JP" baseline="30000" dirty="0"/>
+              <a:t>†</a:t>
+            </a:r>
+            <a:r>
+              <a:rPr lang="ja-JP" altLang="en-US" dirty="0"/>
+              <a:t>代理発表者</a:t>
+            </a:r>
+            <a:endParaRPr lang="en-US" altLang="ja-JP" baseline="30000" dirty="0"/>
           </a:p>
         </p:txBody>
       </p:sp>
@@ -4758,6 +4815,46 @@
           </a:p>
         </p:txBody>
       </p:sp>
+      <p:sp>
+        <p:nvSpPr>
+          <p:cNvPr id="4" name="テキスト ボックス 3">
+            <a:extLst>
+              <a:ext uri="{FF2B5EF4-FFF2-40B4-BE49-F238E27FC236}">
+                <a16:creationId xmlns:a16="http://schemas.microsoft.com/office/drawing/2014/main" id="{9BBA087E-E339-5F99-5921-0C21B70F6076}"/>
+              </a:ext>
+            </a:extLst>
+          </p:cNvPr>
+          <p:cNvSpPr txBox="1"/>
+          <p:nvPr/>
+        </p:nvSpPr>
+        <p:spPr>
+          <a:xfrm>
+            <a:off x="377952" y="6095817"/>
+            <a:ext cx="8032968" cy="369332"/>
+          </a:xfrm>
+          <a:prstGeom prst="rect">
+            <a:avLst/>
+          </a:prstGeom>
+          <a:noFill/>
+        </p:spPr>
+        <p:txBody>
+          <a:bodyPr wrap="none" rtlCol="0">
+            <a:spAutoFit/>
+          </a:bodyPr>
+          <a:lstStyle/>
+          <a:p>
+            <a:r>
+              <a:rPr kumimoji="1" lang="en-US" altLang="ja-JP"/>
+              <a:t>※</a:t>
+            </a:r>
+            <a:r>
+              <a:rPr lang="ja-JP" altLang="en-US"/>
+              <a:t>プロンプトを調整しながら試行し、ある程度安定した結果が得られたもの</a:t>
+            </a:r>
+            <a:endParaRPr kumimoji="1" lang="ja-JP" altLang="en-US"/>
+          </a:p>
+        </p:txBody>
+      </p:sp>
     </p:spTree>
     <p:extLst>
       <p:ext uri="{BB962C8B-B14F-4D97-AF65-F5344CB8AC3E}">
@@ -4872,7 +4969,7 @@
           <a:p>
             <a:r>
               <a:rPr kumimoji="1" lang="en-US" altLang="ja-JP" dirty="0"/>
-              <a:t>AI</a:t>
+              <a:t>AI:</a:t>
             </a:r>
           </a:p>
           <a:p>
@@ -4940,6 +5037,10 @@
               <a:rPr kumimoji="1" lang="ja-JP" altLang="en-US"/>
               <a:t>人</a:t>
             </a:r>
+            <a:r>
+              <a:rPr kumimoji="1" lang="en-US" altLang="ja-JP"/>
+              <a:t>:</a:t>
+            </a:r>
             <a:endParaRPr kumimoji="1" lang="en-US" altLang="ja-JP" dirty="0"/>
           </a:p>
           <a:p>
@@ -5070,7 +5171,7 @@
         </p:nvSpPr>
         <p:spPr>
           <a:xfrm>
-            <a:off x="4070933" y="4253796"/>
+            <a:off x="4070933" y="4327937"/>
             <a:ext cx="4166525" cy="923330"/>
           </a:xfrm>
           <a:prstGeom prst="rect">
@@ -5681,7 +5782,7 @@
         <p:spPr>
           <a:xfrm>
             <a:off x="-1" y="577517"/>
-            <a:ext cx="843501" cy="369332"/>
+            <a:ext cx="803425" cy="369332"/>
           </a:xfrm>
           <a:prstGeom prst="rect">
             <a:avLst/>
@@ -5695,10 +5796,10 @@
           <a:lstStyle/>
           <a:p>
             <a:r>
-              <a:rPr kumimoji="1" lang="en-US" altLang="ja-JP" b="1"/>
+              <a:rPr kumimoji="1" lang="en-US" altLang="ja-JP"/>
               <a:t>Input:</a:t>
             </a:r>
-            <a:endParaRPr kumimoji="1" lang="ja-JP" altLang="en-US" b="1"/>
+            <a:endParaRPr kumimoji="1" lang="ja-JP" altLang="en-US"/>
           </a:p>
         </p:txBody>
       </p:sp>
@@ -5731,22 +5832,22 @@
           <a:lstStyle/>
           <a:p>
             <a:r>
-              <a:rPr lang="en-US" altLang="ja-JP" b="1"/>
+              <a:rPr lang="en-US" altLang="ja-JP"/>
               <a:t>Out</a:t>
             </a:r>
             <a:r>
-              <a:rPr kumimoji="1" lang="en-US" altLang="ja-JP" b="1"/>
+              <a:rPr kumimoji="1" lang="en-US" altLang="ja-JP"/>
               <a:t>put</a:t>
             </a:r>
             <a:r>
-              <a:rPr kumimoji="1" lang="ja-JP" altLang="en-US" b="1"/>
+              <a:rPr kumimoji="1" lang="ja-JP" altLang="en-US"/>
               <a:t>（想定する形式）</a:t>
             </a:r>
             <a:r>
-              <a:rPr kumimoji="1" lang="en-US" altLang="ja-JP" b="1"/>
+              <a:rPr kumimoji="1" lang="en-US" altLang="ja-JP"/>
               <a:t>:</a:t>
             </a:r>
-            <a:endParaRPr kumimoji="1" lang="ja-JP" altLang="en-US" b="1"/>
+            <a:endParaRPr kumimoji="1" lang="ja-JP" altLang="en-US"/>
           </a:p>
         </p:txBody>
       </p:sp>
@@ -8183,7 +8284,7 @@
         <p:spPr>
           <a:xfrm>
             <a:off x="0" y="577517"/>
-            <a:ext cx="1107996" cy="369332"/>
+            <a:ext cx="2954655" cy="369332"/>
           </a:xfrm>
           <a:prstGeom prst="rect">
             <a:avLst/>
@@ -8198,7 +8299,7 @@
           <a:p>
             <a:r>
               <a:rPr kumimoji="1" lang="ja-JP" altLang="en-US"/>
-              <a:t>距離行列</a:t>
+              <a:t>距離行列（ハミング距離）</a:t>
             </a:r>
           </a:p>
         </p:txBody>
@@ -8792,7 +8893,7 @@
               <a:rPr lang="ja-JP" altLang="en-US" sz="3600">
                 <a:sym typeface="Wingdings" pitchFamily="2" charset="2"/>
               </a:rPr>
-              <a:t>出現した地名</a:t>
+              <a:t>判定により決定された地名</a:t>
             </a:r>
             <a:r>
               <a:rPr lang="en-US" altLang="ja-JP" sz="3600" dirty="0">
@@ -8804,10 +8905,1032 @@
           </a:p>
         </p:txBody>
       </p:sp>
+      <p:pic>
+        <p:nvPicPr>
+          <p:cNvPr id="4" name="図 3">
+            <a:extLst>
+              <a:ext uri="{FF2B5EF4-FFF2-40B4-BE49-F238E27FC236}">
+                <a16:creationId xmlns:a16="http://schemas.microsoft.com/office/drawing/2014/main" id="{3F13B2AF-A565-AEE8-9550-E535F476209B}"/>
+              </a:ext>
+            </a:extLst>
+          </p:cNvPr>
+          <p:cNvPicPr>
+            <a:picLocks noChangeAspect="1"/>
+          </p:cNvPicPr>
+          <p:nvPr/>
+        </p:nvPicPr>
+        <p:blipFill>
+          <a:blip r:embed="rId2"/>
+          <a:stretch>
+            <a:fillRect/>
+          </a:stretch>
+        </p:blipFill>
+        <p:spPr>
+          <a:xfrm>
+            <a:off x="1708463" y="1103657"/>
+            <a:ext cx="3951064" cy="5185064"/>
+          </a:xfrm>
+          <a:prstGeom prst="rect">
+            <a:avLst/>
+          </a:prstGeom>
+        </p:spPr>
+      </p:pic>
+      <p:sp>
+        <p:nvSpPr>
+          <p:cNvPr id="5" name="テキスト ボックス 4">
+            <a:extLst>
+              <a:ext uri="{FF2B5EF4-FFF2-40B4-BE49-F238E27FC236}">
+                <a16:creationId xmlns:a16="http://schemas.microsoft.com/office/drawing/2014/main" id="{FA73A07A-9A65-F2F6-82DC-5E13314311AB}"/>
+              </a:ext>
+            </a:extLst>
+          </p:cNvPr>
+          <p:cNvSpPr txBox="1"/>
+          <p:nvPr/>
+        </p:nvSpPr>
+        <p:spPr>
+          <a:xfrm>
+            <a:off x="1367485" y="655921"/>
+            <a:ext cx="2723823" cy="369332"/>
+          </a:xfrm>
+          <a:prstGeom prst="rect">
+            <a:avLst/>
+          </a:prstGeom>
+          <a:noFill/>
+        </p:spPr>
+        <p:txBody>
+          <a:bodyPr wrap="none" rtlCol="0">
+            <a:spAutoFit/>
+          </a:bodyPr>
+          <a:lstStyle/>
+          <a:p>
+            <a:r>
+              <a:rPr kumimoji="1" lang="ja-JP" altLang="en-US"/>
+              <a:t>大学ごとの地名の出現数</a:t>
+            </a:r>
+          </a:p>
+        </p:txBody>
+      </p:sp>
+      <p:sp>
+        <p:nvSpPr>
+          <p:cNvPr id="6" name="テキスト ボックス 5">
+            <a:extLst>
+              <a:ext uri="{FF2B5EF4-FFF2-40B4-BE49-F238E27FC236}">
+                <a16:creationId xmlns:a16="http://schemas.microsoft.com/office/drawing/2014/main" id="{39B58FBD-9DC2-8D17-676E-4A87A49211D1}"/>
+              </a:ext>
+            </a:extLst>
+          </p:cNvPr>
+          <p:cNvSpPr txBox="1"/>
+          <p:nvPr/>
+        </p:nvSpPr>
+        <p:spPr>
+          <a:xfrm>
+            <a:off x="7099277" y="667606"/>
+            <a:ext cx="3203121" cy="369332"/>
+          </a:xfrm>
+          <a:prstGeom prst="rect">
+            <a:avLst/>
+          </a:prstGeom>
+          <a:noFill/>
+        </p:spPr>
+        <p:txBody>
+          <a:bodyPr wrap="none" rtlCol="0">
+            <a:spAutoFit/>
+          </a:bodyPr>
+          <a:lstStyle/>
+          <a:p>
+            <a:r>
+              <a:rPr lang="ja-JP" altLang="en-US"/>
+              <a:t>決定</a:t>
+            </a:r>
+            <a:r>
+              <a:rPr kumimoji="1" lang="ja-JP" altLang="en-US"/>
+              <a:t>した地名による</a:t>
+            </a:r>
+            <a:r>
+              <a:rPr kumimoji="1" lang="en-US" altLang="ja-JP"/>
+              <a:t>Dice</a:t>
+            </a:r>
+            <a:r>
+              <a:rPr kumimoji="1" lang="ja-JP" altLang="en-US"/>
+              <a:t>係数</a:t>
+            </a:r>
+          </a:p>
+        </p:txBody>
+      </p:sp>
+      <p:pic>
+        <p:nvPicPr>
+          <p:cNvPr id="8" name="図 7">
+            <a:extLst>
+              <a:ext uri="{FF2B5EF4-FFF2-40B4-BE49-F238E27FC236}">
+                <a16:creationId xmlns:a16="http://schemas.microsoft.com/office/drawing/2014/main" id="{B96BBF83-052A-C45E-E03C-22D1BD14F97C}"/>
+              </a:ext>
+            </a:extLst>
+          </p:cNvPr>
+          <p:cNvPicPr>
+            <a:picLocks noChangeAspect="1"/>
+          </p:cNvPicPr>
+          <p:nvPr/>
+        </p:nvPicPr>
+        <p:blipFill>
+          <a:blip r:embed="rId3"/>
+          <a:stretch>
+            <a:fillRect/>
+          </a:stretch>
+        </p:blipFill>
+        <p:spPr>
+          <a:xfrm>
+            <a:off x="7427823" y="1021002"/>
+            <a:ext cx="2573294" cy="1218570"/>
+          </a:xfrm>
+          <a:prstGeom prst="rect">
+            <a:avLst/>
+          </a:prstGeom>
+        </p:spPr>
+      </p:pic>
+      <p:cxnSp>
+        <p:nvCxnSpPr>
+          <p:cNvPr id="10" name="直線コネクタ 9">
+            <a:extLst>
+              <a:ext uri="{FF2B5EF4-FFF2-40B4-BE49-F238E27FC236}">
+                <a16:creationId xmlns:a16="http://schemas.microsoft.com/office/drawing/2014/main" id="{C214B49A-A5EA-8290-E05D-632FF0D4B0C8}"/>
+              </a:ext>
+            </a:extLst>
+          </p:cNvPr>
+          <p:cNvCxnSpPr>
+            <a:cxnSpLocks/>
+          </p:cNvCxnSpPr>
+          <p:nvPr/>
+        </p:nvCxnSpPr>
+        <p:spPr>
+          <a:xfrm>
+            <a:off x="1679215" y="1244942"/>
+            <a:ext cx="3980312" cy="0"/>
+          </a:xfrm>
+          <a:prstGeom prst="line">
+            <a:avLst/>
+          </a:prstGeom>
+          <a:ln w="12700">
+            <a:solidFill>
+              <a:schemeClr val="tx1"/>
+            </a:solidFill>
+          </a:ln>
+        </p:spPr>
+        <p:style>
+          <a:lnRef idx="2">
+            <a:schemeClr val="accent1"/>
+          </a:lnRef>
+          <a:fillRef idx="0">
+            <a:schemeClr val="accent1"/>
+          </a:fillRef>
+          <a:effectRef idx="1">
+            <a:schemeClr val="accent1"/>
+          </a:effectRef>
+          <a:fontRef idx="minor">
+            <a:schemeClr val="tx1"/>
+          </a:fontRef>
+        </p:style>
+      </p:cxnSp>
+      <p:sp>
+        <p:nvSpPr>
+          <p:cNvPr id="13" name="テキスト ボックス 12">
+            <a:extLst>
+              <a:ext uri="{FF2B5EF4-FFF2-40B4-BE49-F238E27FC236}">
+                <a16:creationId xmlns:a16="http://schemas.microsoft.com/office/drawing/2014/main" id="{279BA018-0592-0313-E129-D62615BE6E0B}"/>
+              </a:ext>
+            </a:extLst>
+          </p:cNvPr>
+          <p:cNvSpPr txBox="1"/>
+          <p:nvPr/>
+        </p:nvSpPr>
+        <p:spPr>
+          <a:xfrm>
+            <a:off x="7427823" y="4903726"/>
+            <a:ext cx="3495550" cy="1384995"/>
+          </a:xfrm>
+          <a:prstGeom prst="rect">
+            <a:avLst/>
+          </a:prstGeom>
+          <a:noFill/>
+          <a:ln w="12700">
+            <a:solidFill>
+              <a:schemeClr val="tx1"/>
+            </a:solidFill>
+          </a:ln>
+        </p:spPr>
+        <p:txBody>
+          <a:bodyPr wrap="square" rtlCol="0">
+            <a:spAutoFit/>
+          </a:bodyPr>
+          <a:lstStyle/>
+          <a:p>
+            <a:r>
+              <a:rPr lang="ja-JP" altLang="en-US" sz="1400"/>
+              <a:t>中</a:t>
+            </a:r>
+            <a:r>
+              <a:rPr lang="en-US" altLang="ja-JP" sz="1400"/>
+              <a:t>, </a:t>
+            </a:r>
+            <a:r>
+              <a:rPr lang="ja-JP" altLang="en-US" sz="1400"/>
+              <a:t>亘</a:t>
+            </a:r>
+            <a:r>
+              <a:rPr lang="en-US" altLang="ja-JP" sz="1400"/>
+              <a:t>, </a:t>
+            </a:r>
+            <a:r>
+              <a:rPr lang="ja-JP" altLang="en-US" sz="1400"/>
+              <a:t>亜</a:t>
+            </a:r>
+            <a:r>
+              <a:rPr lang="en-US" altLang="ja-JP" sz="1400"/>
+              <a:t>, </a:t>
+            </a:r>
+            <a:r>
+              <a:rPr lang="ja-JP" altLang="en-US" sz="1400"/>
+              <a:t>加</a:t>
+            </a:r>
+            <a:r>
+              <a:rPr lang="en-US" altLang="ja-JP" sz="1400"/>
+              <a:t>, </a:t>
+            </a:r>
+            <a:r>
+              <a:rPr lang="ja-JP" altLang="en-US" sz="1400"/>
+              <a:t>周</a:t>
+            </a:r>
+            <a:r>
+              <a:rPr lang="en-US" altLang="ja-JP" sz="1400"/>
+              <a:t>, </a:t>
+            </a:r>
+            <a:r>
+              <a:rPr lang="ja-JP" altLang="en-US" sz="1400"/>
+              <a:t>境</a:t>
+            </a:r>
+            <a:r>
+              <a:rPr lang="en-US" altLang="ja-JP" sz="1400"/>
+              <a:t>, </a:t>
+            </a:r>
+            <a:r>
+              <a:rPr lang="ja-JP" altLang="en-US" sz="1400"/>
+              <a:t>成</a:t>
+            </a:r>
+            <a:r>
+              <a:rPr lang="en-US" altLang="ja-JP" sz="1400"/>
+              <a:t>, </a:t>
+            </a:r>
+            <a:r>
+              <a:rPr lang="ja-JP" altLang="en-US" sz="1400"/>
+              <a:t>日</a:t>
+            </a:r>
+            <a:r>
+              <a:rPr lang="en-US" altLang="ja-JP" sz="1400"/>
+              <a:t>, </a:t>
+            </a:r>
+            <a:r>
+              <a:rPr lang="ja-JP" altLang="en-US" sz="1400"/>
+              <a:t>曽</a:t>
+            </a:r>
+            <a:r>
+              <a:rPr lang="en-US" altLang="ja-JP" sz="1400"/>
+              <a:t>, </a:t>
+            </a:r>
+            <a:r>
+              <a:rPr lang="ja-JP" altLang="en-US" sz="1400"/>
+              <a:t>栄</a:t>
+            </a:r>
+            <a:r>
+              <a:rPr lang="en-US" altLang="ja-JP" sz="1400"/>
+              <a:t>, </a:t>
+            </a:r>
+            <a:r>
+              <a:rPr lang="ja-JP" altLang="en-US" sz="1400"/>
+              <a:t>求</a:t>
+            </a:r>
+            <a:r>
+              <a:rPr lang="en-US" altLang="ja-JP" sz="1400"/>
+              <a:t>, </a:t>
+            </a:r>
+            <a:r>
+              <a:rPr lang="ja-JP" altLang="en-US" sz="1400"/>
+              <a:t>泰</a:t>
+            </a:r>
+            <a:r>
+              <a:rPr lang="en-US" altLang="ja-JP" sz="1400"/>
+              <a:t>, </a:t>
+            </a:r>
+            <a:r>
+              <a:rPr lang="ja-JP" altLang="en-US" sz="1400"/>
+              <a:t>清</a:t>
+            </a:r>
+            <a:r>
+              <a:rPr lang="en-US" altLang="ja-JP" sz="1400"/>
+              <a:t>, </a:t>
+            </a:r>
+            <a:r>
+              <a:rPr lang="ja-JP" altLang="en-US" sz="1400"/>
+              <a:t>継</a:t>
+            </a:r>
+            <a:r>
+              <a:rPr lang="en-US" altLang="ja-JP" sz="1400"/>
+              <a:t>, </a:t>
+            </a:r>
+            <a:r>
+              <a:rPr lang="ja-JP" altLang="en-US" sz="1400"/>
+              <a:t>纒</a:t>
+            </a:r>
+            <a:r>
+              <a:rPr lang="en-US" altLang="ja-JP" sz="1400"/>
+              <a:t>, </a:t>
+            </a:r>
+            <a:r>
+              <a:rPr lang="ja-JP" altLang="en-US" sz="1400"/>
+              <a:t>起</a:t>
+            </a:r>
+            <a:r>
+              <a:rPr lang="en-US" altLang="ja-JP" sz="1400"/>
+              <a:t>, </a:t>
+            </a:r>
+            <a:r>
+              <a:rPr lang="ja-JP" altLang="en-US" sz="1400"/>
+              <a:t>集</a:t>
+            </a:r>
+            <a:r>
+              <a:rPr lang="en-US" altLang="ja-JP" sz="1400"/>
+              <a:t>, </a:t>
+            </a:r>
+            <a:r>
+              <a:rPr lang="ja-JP" altLang="en-US" sz="1400"/>
+              <a:t>離</a:t>
+            </a:r>
+            <a:r>
+              <a:rPr lang="en-US" altLang="ja-JP" sz="1400"/>
+              <a:t>, </a:t>
+            </a:r>
+            <a:r>
+              <a:rPr lang="ja-JP" altLang="en-US" sz="1400"/>
+              <a:t>静</a:t>
+            </a:r>
+            <a:r>
+              <a:rPr lang="en-US" altLang="ja-JP" sz="1400"/>
+              <a:t>, </a:t>
+            </a:r>
+            <a:r>
+              <a:rPr lang="ja-JP" altLang="en-US" sz="1400"/>
+              <a:t>ネス</a:t>
+            </a:r>
+            <a:r>
+              <a:rPr lang="en-US" altLang="ja-JP" sz="1400"/>
+              <a:t>, </a:t>
+            </a:r>
+            <a:r>
+              <a:rPr lang="ja-JP" altLang="en-US" sz="1400"/>
+              <a:t>ポー</a:t>
+            </a:r>
+            <a:r>
+              <a:rPr lang="en-US" altLang="ja-JP" sz="1400"/>
+              <a:t>, </a:t>
+            </a:r>
+            <a:r>
+              <a:rPr lang="ja-JP" altLang="en-US" sz="1400"/>
+              <a:t>下条</a:t>
+            </a:r>
+            <a:r>
+              <a:rPr lang="en-US" altLang="ja-JP" sz="1400"/>
+              <a:t>, </a:t>
+            </a:r>
+            <a:r>
+              <a:rPr lang="ja-JP" altLang="en-US" sz="1400"/>
+              <a:t>中野</a:t>
+            </a:r>
+            <a:r>
+              <a:rPr lang="en-US" altLang="ja-JP" sz="1400"/>
+              <a:t>, </a:t>
+            </a:r>
+            <a:r>
+              <a:rPr lang="ja-JP" altLang="en-US" sz="1400"/>
+              <a:t>丹後</a:t>
+            </a:r>
+            <a:r>
+              <a:rPr lang="en-US" altLang="ja-JP" sz="1400"/>
+              <a:t>, </a:t>
+            </a:r>
+            <a:r>
+              <a:rPr lang="ja-JP" altLang="en-US" sz="1400"/>
+              <a:t>京都</a:t>
+            </a:r>
+            <a:r>
+              <a:rPr lang="en-US" altLang="ja-JP" sz="1400"/>
+              <a:t>, </a:t>
+            </a:r>
+            <a:r>
+              <a:rPr lang="ja-JP" altLang="en-US" sz="1400"/>
+              <a:t>元岡</a:t>
+            </a:r>
+            <a:r>
+              <a:rPr lang="en-US" altLang="ja-JP" sz="1400"/>
+              <a:t>, </a:t>
+            </a:r>
+            <a:r>
+              <a:rPr lang="ja-JP" altLang="en-US" sz="1400"/>
+              <a:t>内保</a:t>
+            </a:r>
+            <a:r>
+              <a:rPr lang="en-US" altLang="ja-JP" sz="1400"/>
+              <a:t>, </a:t>
+            </a:r>
+            <a:r>
+              <a:rPr lang="ja-JP" altLang="en-US" sz="1400"/>
+              <a:t>土井</a:t>
+            </a:r>
+            <a:r>
+              <a:rPr lang="en-US" altLang="ja-JP" sz="1400"/>
+              <a:t>, </a:t>
+            </a:r>
+            <a:r>
+              <a:rPr lang="ja-JP" altLang="en-US" sz="1400"/>
+              <a:t>宮谷</a:t>
+            </a:r>
+            <a:r>
+              <a:rPr lang="en-US" altLang="ja-JP" sz="1400"/>
+              <a:t>, </a:t>
+            </a:r>
+            <a:r>
+              <a:rPr lang="ja-JP" altLang="en-US" sz="1400"/>
+              <a:t>山口</a:t>
+            </a:r>
+            <a:r>
+              <a:rPr lang="en-US" altLang="ja-JP" sz="1400"/>
+              <a:t>, </a:t>
+            </a:r>
+            <a:r>
+              <a:rPr lang="ja-JP" altLang="en-US" sz="1400"/>
+              <a:t>彦沢</a:t>
+            </a:r>
+            <a:r>
+              <a:rPr lang="en-US" altLang="ja-JP" sz="1400"/>
+              <a:t>, </a:t>
+            </a:r>
+            <a:r>
+              <a:rPr lang="ja-JP" altLang="en-US" sz="1400"/>
+              <a:t>日内</a:t>
+            </a:r>
+            <a:r>
+              <a:rPr lang="en-US" altLang="ja-JP" sz="1400"/>
+              <a:t>, </a:t>
+            </a:r>
+            <a:r>
+              <a:rPr lang="ja-JP" altLang="en-US" sz="1400"/>
+              <a:t>毛利</a:t>
+            </a:r>
+            <a:r>
+              <a:rPr lang="en-US" altLang="ja-JP" sz="1400"/>
+              <a:t>, </a:t>
+            </a:r>
+            <a:r>
+              <a:rPr lang="ja-JP" altLang="en-US" sz="1400"/>
+              <a:t>生葉</a:t>
+            </a:r>
+            <a:r>
+              <a:rPr lang="en-US" altLang="ja-JP" sz="1400"/>
+              <a:t>, </a:t>
+            </a:r>
+            <a:r>
+              <a:rPr lang="ja-JP" altLang="en-US" sz="1400"/>
+              <a:t>的場</a:t>
+            </a:r>
+            <a:r>
+              <a:rPr lang="en-US" altLang="ja-JP" sz="1400"/>
+              <a:t>, </a:t>
+            </a:r>
+            <a:r>
+              <a:rPr lang="ja-JP" altLang="en-US" sz="1400"/>
+              <a:t>福生</a:t>
+            </a:r>
+            <a:r>
+              <a:rPr lang="en-US" altLang="ja-JP" sz="1400"/>
+              <a:t>, </a:t>
+            </a:r>
+            <a:r>
+              <a:rPr lang="ja-JP" altLang="en-US" sz="1400"/>
+              <a:t>稲津</a:t>
+            </a:r>
+            <a:r>
+              <a:rPr lang="en-US" altLang="ja-JP" sz="1400"/>
+              <a:t>, </a:t>
+            </a:r>
+            <a:r>
+              <a:rPr lang="ja-JP" altLang="en-US" sz="1400"/>
+              <a:t>大学北</a:t>
+            </a:r>
+            <a:r>
+              <a:rPr lang="en-US" altLang="ja-JP" sz="1400"/>
+              <a:t>, </a:t>
+            </a:r>
+            <a:r>
+              <a:rPr lang="ja-JP" altLang="en-US" sz="1400"/>
+              <a:t>小笠原</a:t>
+            </a:r>
+            <a:r>
+              <a:rPr lang="en-US" altLang="ja-JP" sz="1400"/>
+              <a:t>, </a:t>
+            </a:r>
+            <a:r>
+              <a:rPr lang="ja-JP" altLang="en-US" sz="1400"/>
+              <a:t>東日本</a:t>
+            </a:r>
+            <a:r>
+              <a:rPr lang="en-US" altLang="ja-JP" sz="1400"/>
+              <a:t>, </a:t>
+            </a:r>
+            <a:r>
+              <a:rPr lang="ja-JP" altLang="en-US" sz="1400"/>
+              <a:t>琵琶湖</a:t>
+            </a:r>
+            <a:r>
+              <a:rPr lang="en-US" altLang="ja-JP" sz="1400"/>
+              <a:t>, </a:t>
+            </a:r>
+            <a:r>
+              <a:rPr lang="ja-JP" altLang="en-US" sz="1400"/>
+              <a:t>ベルゲン</a:t>
+            </a:r>
+            <a:r>
+              <a:rPr lang="en-US" altLang="ja-JP" sz="1400"/>
+              <a:t>, </a:t>
+            </a:r>
+            <a:r>
+              <a:rPr lang="ja-JP" altLang="en-US" sz="1400"/>
+              <a:t>ワシントン</a:t>
+            </a:r>
+            <a:r>
+              <a:rPr lang="en-US" altLang="ja-JP" sz="1400"/>
+              <a:t>, </a:t>
+            </a:r>
+            <a:r>
+              <a:rPr lang="ja-JP" altLang="en-US" sz="1400"/>
+              <a:t>マンチェスター</a:t>
+            </a:r>
+            <a:r>
+              <a:rPr lang="en-US" altLang="ja-JP" sz="1400"/>
+              <a:t>, </a:t>
+            </a:r>
+            <a:r>
+              <a:rPr lang="en" altLang="ja-JP" sz="1400"/>
+              <a:t>ATP</a:t>
+            </a:r>
+          </a:p>
+        </p:txBody>
+      </p:sp>
+      <p:sp>
+        <p:nvSpPr>
+          <p:cNvPr id="14" name="テキスト ボックス 13">
+            <a:extLst>
+              <a:ext uri="{FF2B5EF4-FFF2-40B4-BE49-F238E27FC236}">
+                <a16:creationId xmlns:a16="http://schemas.microsoft.com/office/drawing/2014/main" id="{C94994D4-CB44-7FED-88F4-CD690297D941}"/>
+              </a:ext>
+            </a:extLst>
+          </p:cNvPr>
+          <p:cNvSpPr txBox="1"/>
+          <p:nvPr/>
+        </p:nvSpPr>
+        <p:spPr>
+          <a:xfrm>
+            <a:off x="7099277" y="4361049"/>
+            <a:ext cx="4570482" cy="369332"/>
+          </a:xfrm>
+          <a:prstGeom prst="rect">
+            <a:avLst/>
+          </a:prstGeom>
+          <a:noFill/>
+        </p:spPr>
+        <p:txBody>
+          <a:bodyPr wrap="none" rtlCol="0">
+            <a:spAutoFit/>
+          </a:bodyPr>
+          <a:lstStyle/>
+          <a:p>
+            <a:r>
+              <a:rPr kumimoji="1" lang="ja-JP" altLang="en-US"/>
+              <a:t>地名でないと判定された場合があるターム</a:t>
+            </a:r>
+          </a:p>
+        </p:txBody>
+      </p:sp>
     </p:spTree>
     <p:extLst>
       <p:ext uri="{BB962C8B-B14F-4D97-AF65-F5344CB8AC3E}">
         <p14:creationId xmlns:p14="http://schemas.microsoft.com/office/powerpoint/2010/main" val="2082332962"/>
+      </p:ext>
+    </p:extLst>
+  </p:cSld>
+  <p:clrMapOvr>
+    <a:masterClrMapping/>
+  </p:clrMapOvr>
+</p:sld>
+</file>
+
+<file path=ppt/slides/slide18.xml><?xml version="1.0" encoding="utf-8"?>
+<p:sld xmlns:a="http://schemas.openxmlformats.org/drawingml/2006/main" xmlns:r="http://schemas.openxmlformats.org/officeDocument/2006/relationships" xmlns:p="http://schemas.openxmlformats.org/presentationml/2006/main">
+  <p:cSld>
+    <p:spTree>
+      <p:nvGrpSpPr>
+        <p:cNvPr id="1" name="">
+          <a:extLst>
+            <a:ext uri="{FF2B5EF4-FFF2-40B4-BE49-F238E27FC236}">
+              <a16:creationId xmlns:a16="http://schemas.microsoft.com/office/drawing/2014/main" id="{88C9DA51-A403-7873-5F7E-B6D6929B0EB2}"/>
+            </a:ext>
+          </a:extLst>
+        </p:cNvPr>
+        <p:cNvGrpSpPr/>
+        <p:nvPr/>
+      </p:nvGrpSpPr>
+      <p:grpSpPr>
+        <a:xfrm>
+          <a:off x="0" y="0"/>
+          <a:ext cx="0" cy="0"/>
+          <a:chOff x="0" y="0"/>
+          <a:chExt cx="0" cy="0"/>
+        </a:xfrm>
+      </p:grpSpPr>
+      <p:sp>
+        <p:nvSpPr>
+          <p:cNvPr id="2" name="タイトル 1">
+            <a:extLst>
+              <a:ext uri="{FF2B5EF4-FFF2-40B4-BE49-F238E27FC236}">
+                <a16:creationId xmlns:a16="http://schemas.microsoft.com/office/drawing/2014/main" id="{3C6B37F8-D551-CB67-7D8F-C28C1E761DA6}"/>
+              </a:ext>
+            </a:extLst>
+          </p:cNvPr>
+          <p:cNvSpPr>
+            <a:spLocks noGrp="1"/>
+          </p:cNvSpPr>
+          <p:nvPr>
+            <p:ph type="title"/>
+          </p:nvPr>
+        </p:nvSpPr>
+        <p:spPr>
+          <a:xfrm>
+            <a:off x="0" y="1"/>
+            <a:ext cx="12192000" cy="577516"/>
+          </a:xfrm>
+          <a:solidFill>
+            <a:schemeClr val="bg1">
+              <a:lumMod val="85000"/>
+            </a:schemeClr>
+          </a:solidFill>
+        </p:spPr>
+        <p:txBody>
+          <a:bodyPr>
+            <a:normAutofit fontScale="90000"/>
+          </a:bodyPr>
+          <a:lstStyle/>
+          <a:p>
+            <a:r>
+              <a:rPr kumimoji="1" lang="ja-JP" altLang="en-US" sz="3600"/>
+              <a:t>まとめ</a:t>
+            </a:r>
+          </a:p>
+        </p:txBody>
+      </p:sp>
+      <p:sp>
+        <p:nvSpPr>
+          <p:cNvPr id="3" name="テキスト ボックス 2">
+            <a:extLst>
+              <a:ext uri="{FF2B5EF4-FFF2-40B4-BE49-F238E27FC236}">
+                <a16:creationId xmlns:a16="http://schemas.microsoft.com/office/drawing/2014/main" id="{ECA3ACB1-7262-E3EE-C4CE-FD8716E60AC9}"/>
+              </a:ext>
+            </a:extLst>
+          </p:cNvPr>
+          <p:cNvSpPr txBox="1"/>
+          <p:nvPr/>
+        </p:nvSpPr>
+        <p:spPr>
+          <a:xfrm>
+            <a:off x="766119" y="816415"/>
+            <a:ext cx="3896497" cy="646331"/>
+          </a:xfrm>
+          <a:prstGeom prst="rect">
+            <a:avLst/>
+          </a:prstGeom>
+          <a:noFill/>
+          <a:ln w="12700">
+            <a:solidFill>
+              <a:schemeClr val="tx1"/>
+            </a:solidFill>
+          </a:ln>
+        </p:spPr>
+        <p:txBody>
+          <a:bodyPr wrap="square" rtlCol="0">
+            <a:spAutoFit/>
+          </a:bodyPr>
+          <a:lstStyle/>
+          <a:p>
+            <a:r>
+              <a:rPr lang="en-US" altLang="ja-JP"/>
+              <a:t>NER</a:t>
+            </a:r>
+            <a:r>
+              <a:rPr lang="ja-JP" altLang="en-US"/>
+              <a:t>と判定との差が大きい</a:t>
+            </a:r>
+            <a:endParaRPr lang="en-US" altLang="ja-JP"/>
+          </a:p>
+          <a:p>
+            <a:pPr marL="285750" indent="-285750">
+              <a:buFont typeface="Arial" panose="020B0604020202020204" pitchFamily="34" charset="0"/>
+              <a:buChar char="•"/>
+            </a:pPr>
+            <a:r>
+              <a:rPr kumimoji="1" lang="en-US" altLang="ja-JP"/>
+              <a:t>7%~34%</a:t>
+            </a:r>
+          </a:p>
+        </p:txBody>
+      </p:sp>
+      <p:sp>
+        <p:nvSpPr>
+          <p:cNvPr id="7" name="テキスト ボックス 6">
+            <a:extLst>
+              <a:ext uri="{FF2B5EF4-FFF2-40B4-BE49-F238E27FC236}">
+                <a16:creationId xmlns:a16="http://schemas.microsoft.com/office/drawing/2014/main" id="{9E2E33CE-9C6A-5290-EC10-6F434CA0EA20}"/>
+              </a:ext>
+            </a:extLst>
+          </p:cNvPr>
+          <p:cNvSpPr txBox="1"/>
+          <p:nvPr/>
+        </p:nvSpPr>
+        <p:spPr>
+          <a:xfrm>
+            <a:off x="6096000" y="816415"/>
+            <a:ext cx="5395783" cy="2585323"/>
+          </a:xfrm>
+          <a:prstGeom prst="rect">
+            <a:avLst/>
+          </a:prstGeom>
+          <a:noFill/>
+        </p:spPr>
+        <p:txBody>
+          <a:bodyPr wrap="square" rtlCol="0">
+            <a:spAutoFit/>
+          </a:bodyPr>
+          <a:lstStyle/>
+          <a:p>
+            <a:r>
+              <a:rPr kumimoji="1" lang="ja-JP" altLang="en-US"/>
+              <a:t>日本語</a:t>
+            </a:r>
+            <a:r>
+              <a:rPr kumimoji="1" lang="en-US" altLang="ja-JP"/>
+              <a:t>NER</a:t>
+            </a:r>
+            <a:r>
+              <a:rPr kumimoji="1" lang="ja-JP" altLang="en-US"/>
+              <a:t>に関しては</a:t>
+            </a:r>
+            <a:endParaRPr kumimoji="1" lang="en-US" altLang="ja-JP"/>
+          </a:p>
+          <a:p>
+            <a:pPr marL="285750" indent="-285750">
+              <a:buFont typeface="Arial" panose="020B0604020202020204" pitchFamily="34" charset="0"/>
+              <a:buChar char="•"/>
+            </a:pPr>
+            <a:r>
+              <a:rPr kumimoji="1" lang="ja-JP" altLang="en-US"/>
+              <a:t>形態素解析のみでの解決は難しい</a:t>
+            </a:r>
+            <a:endParaRPr kumimoji="1" lang="en-US" altLang="ja-JP"/>
+          </a:p>
+          <a:p>
+            <a:pPr marL="742950" lvl="1" indent="-285750">
+              <a:buFont typeface="Arial" panose="020B0604020202020204" pitchFamily="34" charset="0"/>
+              <a:buChar char="•"/>
+            </a:pPr>
+            <a:r>
+              <a:rPr kumimoji="1" lang="ja-JP" altLang="en-US"/>
+              <a:t>（人が見た時に）明らかに人名である場合も地名と認識する場合がかなりある</a:t>
+            </a:r>
+            <a:endParaRPr kumimoji="1" lang="en-US" altLang="ja-JP"/>
+          </a:p>
+          <a:p>
+            <a:pPr marL="285750" indent="-285750">
+              <a:buFont typeface="Arial" panose="020B0604020202020204" pitchFamily="34" charset="0"/>
+              <a:buChar char="•"/>
+            </a:pPr>
+            <a:r>
+              <a:rPr lang="ja-JP" altLang="en-US"/>
+              <a:t>非常に細やかなルールの設定とエキスパートとしての訓練が必要であることを示唆している</a:t>
+            </a:r>
+          </a:p>
+          <a:p>
+            <a:pPr marL="285750" indent="-285750">
+              <a:buFont typeface="Arial" panose="020B0604020202020204" pitchFamily="34" charset="0"/>
+              <a:buChar char="•"/>
+            </a:pPr>
+            <a:r>
+              <a:rPr kumimoji="1" lang="ja-JP" altLang="en-US"/>
+              <a:t>本研究は、</a:t>
+            </a:r>
+            <a:r>
+              <a:rPr kumimoji="1" lang="en-US" altLang="ja-JP"/>
+              <a:t>AI</a:t>
+            </a:r>
+            <a:r>
+              <a:rPr kumimoji="1" lang="ja-JP" altLang="en-US"/>
+              <a:t>に関しては判定よりも「出力形式」が問題となったケースであった。プロンプトの調整が困難であることを物語っている</a:t>
+            </a:r>
+          </a:p>
+        </p:txBody>
+      </p:sp>
+      <p:sp>
+        <p:nvSpPr>
+          <p:cNvPr id="9" name="テキスト ボックス 8">
+            <a:extLst>
+              <a:ext uri="{FF2B5EF4-FFF2-40B4-BE49-F238E27FC236}">
+                <a16:creationId xmlns:a16="http://schemas.microsoft.com/office/drawing/2014/main" id="{E1928388-C9F5-89BD-8736-99A9A7963599}"/>
+              </a:ext>
+            </a:extLst>
+          </p:cNvPr>
+          <p:cNvSpPr txBox="1"/>
+          <p:nvPr/>
+        </p:nvSpPr>
+        <p:spPr>
+          <a:xfrm>
+            <a:off x="766119" y="1870569"/>
+            <a:ext cx="3896497" cy="923330"/>
+          </a:xfrm>
+          <a:prstGeom prst="rect">
+            <a:avLst/>
+          </a:prstGeom>
+          <a:noFill/>
+          <a:ln w="12700">
+            <a:solidFill>
+              <a:schemeClr val="tx1"/>
+            </a:solidFill>
+          </a:ln>
+        </p:spPr>
+        <p:txBody>
+          <a:bodyPr wrap="square" rtlCol="0">
+            <a:spAutoFit/>
+          </a:bodyPr>
+          <a:lstStyle/>
+          <a:p>
+            <a:r>
+              <a:rPr lang="ja-JP" altLang="en-US"/>
+              <a:t>判定（者）間でも差が大きい</a:t>
+            </a:r>
+            <a:endParaRPr lang="en-US" altLang="ja-JP"/>
+          </a:p>
+          <a:p>
+            <a:pPr marL="285750" indent="-285750">
+              <a:buFont typeface="Arial" panose="020B0604020202020204" pitchFamily="34" charset="0"/>
+              <a:buChar char="•"/>
+            </a:pPr>
+            <a:r>
+              <a:rPr lang="ja-JP" altLang="en-US"/>
+              <a:t>最大</a:t>
+            </a:r>
+            <a:r>
+              <a:rPr lang="en-US" altLang="ja-JP"/>
+              <a:t>34%</a:t>
+            </a:r>
+          </a:p>
+          <a:p>
+            <a:pPr marL="285750" indent="-285750">
+              <a:buFont typeface="Arial" panose="020B0604020202020204" pitchFamily="34" charset="0"/>
+              <a:buChar char="•"/>
+            </a:pPr>
+            <a:r>
+              <a:rPr lang="ja-JP" altLang="en-US"/>
+              <a:t>人と人でも</a:t>
+            </a:r>
+            <a:r>
+              <a:rPr lang="en-US" altLang="ja-JP"/>
+              <a:t>7%</a:t>
+            </a:r>
+          </a:p>
+        </p:txBody>
+      </p:sp>
+      <p:sp>
+        <p:nvSpPr>
+          <p:cNvPr id="11" name="テキスト ボックス 10">
+            <a:extLst>
+              <a:ext uri="{FF2B5EF4-FFF2-40B4-BE49-F238E27FC236}">
+                <a16:creationId xmlns:a16="http://schemas.microsoft.com/office/drawing/2014/main" id="{F601E439-4975-999E-D8D5-C26D7DD78E5A}"/>
+              </a:ext>
+            </a:extLst>
+          </p:cNvPr>
+          <p:cNvSpPr txBox="1"/>
+          <p:nvPr/>
+        </p:nvSpPr>
+        <p:spPr>
+          <a:xfrm>
+            <a:off x="766119" y="3201722"/>
+            <a:ext cx="3896496" cy="646331"/>
+          </a:xfrm>
+          <a:prstGeom prst="rect">
+            <a:avLst/>
+          </a:prstGeom>
+          <a:noFill/>
+          <a:ln w="12700">
+            <a:solidFill>
+              <a:schemeClr val="tx1"/>
+            </a:solidFill>
+          </a:ln>
+        </p:spPr>
+        <p:txBody>
+          <a:bodyPr wrap="square" rtlCol="0">
+            <a:spAutoFit/>
+          </a:bodyPr>
+          <a:lstStyle/>
+          <a:p>
+            <a:r>
+              <a:rPr lang="en-US" altLang="ja-JP"/>
+              <a:t>AI</a:t>
+            </a:r>
+            <a:r>
+              <a:rPr lang="ja-JP" altLang="en-US"/>
+              <a:t>の出力形式が課題</a:t>
+            </a:r>
+            <a:endParaRPr lang="en-US" altLang="ja-JP"/>
+          </a:p>
+          <a:p>
+            <a:pPr marL="285750" indent="-285750">
+              <a:buFont typeface="Arial" panose="020B0604020202020204" pitchFamily="34" charset="0"/>
+              <a:buChar char="•"/>
+            </a:pPr>
+            <a:r>
+              <a:rPr lang="ja-JP" altLang="en-US"/>
+              <a:t>最大でも</a:t>
+            </a:r>
+            <a:r>
+              <a:rPr lang="en-US" altLang="ja-JP"/>
+              <a:t>75%</a:t>
+            </a:r>
+            <a:r>
+              <a:rPr lang="ja-JP" altLang="en-US"/>
+              <a:t>の適正率</a:t>
+            </a:r>
+            <a:endParaRPr lang="en-US" altLang="ja-JP"/>
+          </a:p>
+        </p:txBody>
+      </p:sp>
+      <p:sp>
+        <p:nvSpPr>
+          <p:cNvPr id="12" name="テキスト ボックス 11">
+            <a:extLst>
+              <a:ext uri="{FF2B5EF4-FFF2-40B4-BE49-F238E27FC236}">
+                <a16:creationId xmlns:a16="http://schemas.microsoft.com/office/drawing/2014/main" id="{8880220B-4CFD-DE88-C97E-37E5DBC99497}"/>
+              </a:ext>
+            </a:extLst>
+          </p:cNvPr>
+          <p:cNvSpPr txBox="1"/>
+          <p:nvPr/>
+        </p:nvSpPr>
+        <p:spPr>
+          <a:xfrm>
+            <a:off x="766119" y="4255876"/>
+            <a:ext cx="3896496" cy="923330"/>
+          </a:xfrm>
+          <a:prstGeom prst="rect">
+            <a:avLst/>
+          </a:prstGeom>
+          <a:noFill/>
+          <a:ln w="12700">
+            <a:solidFill>
+              <a:schemeClr val="tx1"/>
+            </a:solidFill>
+          </a:ln>
+        </p:spPr>
+        <p:txBody>
+          <a:bodyPr wrap="square" rtlCol="0">
+            <a:spAutoFit/>
+          </a:bodyPr>
+          <a:lstStyle/>
+          <a:p>
+            <a:r>
+              <a:rPr lang="ja-JP" altLang="en-US"/>
+              <a:t>指標としての可能性</a:t>
+            </a:r>
+            <a:endParaRPr lang="en-US" altLang="ja-JP"/>
+          </a:p>
+          <a:p>
+            <a:pPr marL="285750" indent="-285750">
+              <a:buFont typeface="Arial" panose="020B0604020202020204" pitchFamily="34" charset="0"/>
+              <a:buChar char="•"/>
+            </a:pPr>
+            <a:r>
+              <a:rPr lang="ja-JP" altLang="en-US"/>
+              <a:t>精度は低いながらも大学ごとの特徴を捉えているように見える</a:t>
+            </a:r>
+            <a:endParaRPr lang="en-US" altLang="ja-JP"/>
+          </a:p>
+        </p:txBody>
+      </p:sp>
+    </p:spTree>
+    <p:extLst>
+      <p:ext uri="{BB962C8B-B14F-4D97-AF65-F5344CB8AC3E}">
+        <p14:creationId xmlns:p14="http://schemas.microsoft.com/office/powerpoint/2010/main" val="1349135157"/>
       </p:ext>
     </p:extLst>
   </p:cSld>
@@ -12639,7 +13762,7 @@
           <a:p>
             <a:r>
               <a:rPr lang="ja-JP" altLang="en-US" b="1"/>
-              <a:t>◾️同一名称の曖昧性の課題</a:t>
+              <a:t>◾️同一名称の曖昧性（特に地名）の課題</a:t>
             </a:r>
             <a:endParaRPr lang="en-US" altLang="ja-JP" b="1" dirty="0"/>
           </a:p>
@@ -12657,7 +13780,7 @@
           <a:p>
             <a:r>
               <a:rPr lang="ja-JP" altLang="en-US" b="1"/>
-              <a:t>▪️名称の関係性を用いた解決が多い</a:t>
+              <a:t>▪️名称の関係性を用いた解決</a:t>
             </a:r>
             <a:endParaRPr lang="en-US" altLang="ja-JP" b="1" dirty="0"/>
           </a:p>
@@ -13339,13 +14462,18 @@
         </p:nvSpPr>
         <p:spPr>
           <a:xfrm>
-            <a:off x="0" y="3644206"/>
-            <a:ext cx="12192000" cy="1754326"/>
+            <a:off x="860854" y="3693633"/>
+            <a:ext cx="10470292" cy="1754326"/>
           </a:xfrm>
           <a:prstGeom prst="rect">
             <a:avLst/>
           </a:prstGeom>
           <a:noFill/>
+          <a:ln w="12700">
+            <a:solidFill>
+              <a:schemeClr val="tx1"/>
+            </a:solidFill>
+          </a:ln>
         </p:spPr>
         <p:txBody>
           <a:bodyPr wrap="square" rtlCol="0">
@@ -13366,6 +14494,10 @@
               <a:t>toponym</a:t>
             </a:r>
             <a:r>
+              <a:rPr kumimoji="1" lang="ja-JP" altLang="en-US" dirty="0"/>
+              <a:t>研究</a:t>
+            </a:r>
+            <a:r>
               <a:rPr kumimoji="1" lang="ja-JP" altLang="en-US"/>
               <a:t>）</a:t>
             </a:r>
@@ -13378,7 +14510,7 @@
             </a:pPr>
             <a:r>
               <a:rPr kumimoji="1" lang="ja-JP" altLang="en-US"/>
-              <a:t>曖昧性解決においても地理情報と結びつけて行うものがほとんど</a:t>
+              <a:t>曖昧性解決においても地理情報と結びつけて行うものが多い</a:t>
             </a:r>
             <a:endParaRPr kumimoji="1" lang="en-US" altLang="ja-JP" dirty="0"/>
           </a:p>

--- a/jsik2026taikai.pptx
+++ b/jsik2026taikai.pptx
@@ -214,7 +214,7 @@
           <a:p>
             <a:fld id="{21858D78-C21E-6D4A-8EB0-1034401A7884}" type="datetimeFigureOut">
               <a:rPr kumimoji="1" lang="ja-JP" altLang="en-US" smtClean="0"/>
-              <a:t>2026/4/28</a:t>
+              <a:t>2026/4/30</a:t>
             </a:fld>
             <a:endParaRPr kumimoji="1" lang="ja-JP" altLang="en-US"/>
           </a:p>
@@ -744,7 +744,7 @@
           <a:p>
             <a:fld id="{716789AD-CAC3-AD41-B5C9-BF5C62A1889D}" type="datetimeFigureOut">
               <a:rPr kumimoji="1" lang="ja-JP" altLang="en-US" smtClean="0"/>
-              <a:t>2026/4/28</a:t>
+              <a:t>2026/4/30</a:t>
             </a:fld>
             <a:endParaRPr kumimoji="1" lang="ja-JP" altLang="en-US"/>
           </a:p>
@@ -974,7 +974,7 @@
           <a:p>
             <a:fld id="{716789AD-CAC3-AD41-B5C9-BF5C62A1889D}" type="datetimeFigureOut">
               <a:rPr kumimoji="1" lang="ja-JP" altLang="en-US" smtClean="0"/>
-              <a:t>2026/4/28</a:t>
+              <a:t>2026/4/30</a:t>
             </a:fld>
             <a:endParaRPr kumimoji="1" lang="ja-JP" altLang="en-US"/>
           </a:p>
@@ -1214,7 +1214,7 @@
           <a:p>
             <a:fld id="{716789AD-CAC3-AD41-B5C9-BF5C62A1889D}" type="datetimeFigureOut">
               <a:rPr kumimoji="1" lang="ja-JP" altLang="en-US" smtClean="0"/>
-              <a:t>2026/4/28</a:t>
+              <a:t>2026/4/30</a:t>
             </a:fld>
             <a:endParaRPr kumimoji="1" lang="ja-JP" altLang="en-US"/>
           </a:p>
@@ -1444,7 +1444,7 @@
           <a:p>
             <a:fld id="{716789AD-CAC3-AD41-B5C9-BF5C62A1889D}" type="datetimeFigureOut">
               <a:rPr kumimoji="1" lang="ja-JP" altLang="en-US" smtClean="0"/>
-              <a:t>2026/4/28</a:t>
+              <a:t>2026/4/30</a:t>
             </a:fld>
             <a:endParaRPr kumimoji="1" lang="ja-JP" altLang="en-US"/>
           </a:p>
@@ -1719,7 +1719,7 @@
           <a:p>
             <a:fld id="{716789AD-CAC3-AD41-B5C9-BF5C62A1889D}" type="datetimeFigureOut">
               <a:rPr kumimoji="1" lang="ja-JP" altLang="en-US" smtClean="0"/>
-              <a:t>2026/4/28</a:t>
+              <a:t>2026/4/30</a:t>
             </a:fld>
             <a:endParaRPr kumimoji="1" lang="ja-JP" altLang="en-US"/>
           </a:p>
@@ -2048,7 +2048,7 @@
           <a:p>
             <a:fld id="{716789AD-CAC3-AD41-B5C9-BF5C62A1889D}" type="datetimeFigureOut">
               <a:rPr kumimoji="1" lang="ja-JP" altLang="en-US" smtClean="0"/>
-              <a:t>2026/4/28</a:t>
+              <a:t>2026/4/30</a:t>
             </a:fld>
             <a:endParaRPr kumimoji="1" lang="ja-JP" altLang="en-US"/>
           </a:p>
@@ -2524,7 +2524,7 @@
           <a:p>
             <a:fld id="{716789AD-CAC3-AD41-B5C9-BF5C62A1889D}" type="datetimeFigureOut">
               <a:rPr kumimoji="1" lang="ja-JP" altLang="en-US" smtClean="0"/>
-              <a:t>2026/4/28</a:t>
+              <a:t>2026/4/30</a:t>
             </a:fld>
             <a:endParaRPr kumimoji="1" lang="ja-JP" altLang="en-US"/>
           </a:p>
@@ -2665,7 +2665,7 @@
           <a:p>
             <a:fld id="{716789AD-CAC3-AD41-B5C9-BF5C62A1889D}" type="datetimeFigureOut">
               <a:rPr kumimoji="1" lang="ja-JP" altLang="en-US" smtClean="0"/>
-              <a:t>2026/4/28</a:t>
+              <a:t>2026/4/30</a:t>
             </a:fld>
             <a:endParaRPr kumimoji="1" lang="ja-JP" altLang="en-US"/>
           </a:p>
@@ -2778,7 +2778,7 @@
           <a:p>
             <a:fld id="{716789AD-CAC3-AD41-B5C9-BF5C62A1889D}" type="datetimeFigureOut">
               <a:rPr kumimoji="1" lang="ja-JP" altLang="en-US" smtClean="0"/>
-              <a:t>2026/4/28</a:t>
+              <a:t>2026/4/30</a:t>
             </a:fld>
             <a:endParaRPr kumimoji="1" lang="ja-JP" altLang="en-US"/>
           </a:p>
@@ -3121,7 +3121,7 @@
           <a:p>
             <a:fld id="{716789AD-CAC3-AD41-B5C9-BF5C62A1889D}" type="datetimeFigureOut">
               <a:rPr kumimoji="1" lang="ja-JP" altLang="en-US" smtClean="0"/>
-              <a:t>2026/4/28</a:t>
+              <a:t>2026/4/30</a:t>
             </a:fld>
             <a:endParaRPr kumimoji="1" lang="ja-JP" altLang="en-US"/>
           </a:p>
@@ -3409,7 +3409,7 @@
           <a:p>
             <a:fld id="{716789AD-CAC3-AD41-B5C9-BF5C62A1889D}" type="datetimeFigureOut">
               <a:rPr kumimoji="1" lang="ja-JP" altLang="en-US" smtClean="0"/>
-              <a:t>2026/4/28</a:t>
+              <a:t>2026/4/30</a:t>
             </a:fld>
             <a:endParaRPr kumimoji="1" lang="ja-JP" altLang="en-US"/>
           </a:p>
@@ -3682,7 +3682,7 @@
           <a:p>
             <a:fld id="{716789AD-CAC3-AD41-B5C9-BF5C62A1889D}" type="datetimeFigureOut">
               <a:rPr kumimoji="1" lang="ja-JP" altLang="en-US" smtClean="0"/>
-              <a:t>2026/4/28</a:t>
+              <a:t>2026/4/30</a:t>
             </a:fld>
             <a:endParaRPr kumimoji="1" lang="ja-JP" altLang="en-US"/>
           </a:p>
@@ -6249,41 +6249,6 @@
       </p:sp>
       <p:sp>
         <p:nvSpPr>
-          <p:cNvPr id="3" name="テキスト ボックス 2">
-            <a:extLst>
-              <a:ext uri="{FF2B5EF4-FFF2-40B4-BE49-F238E27FC236}">
-                <a16:creationId xmlns:a16="http://schemas.microsoft.com/office/drawing/2014/main" id="{894164B1-D474-E3FC-7257-909A1AB306A4}"/>
-              </a:ext>
-            </a:extLst>
-          </p:cNvPr>
-          <p:cNvSpPr txBox="1"/>
-          <p:nvPr/>
-        </p:nvSpPr>
-        <p:spPr>
-          <a:xfrm>
-            <a:off x="0" y="659218"/>
-            <a:ext cx="415498" cy="369332"/>
-          </a:xfrm>
-          <a:prstGeom prst="rect">
-            <a:avLst/>
-          </a:prstGeom>
-          <a:noFill/>
-        </p:spPr>
-        <p:txBody>
-          <a:bodyPr wrap="none" rtlCol="0">
-            <a:spAutoFit/>
-          </a:bodyPr>
-          <a:lstStyle/>
-          <a:p>
-            <a:r>
-              <a:rPr kumimoji="1" lang="ja-JP" altLang="en-US"/>
-              <a:t>例</a:t>
-            </a:r>
-          </a:p>
-        </p:txBody>
-      </p:sp>
-      <p:sp>
-        <p:nvSpPr>
           <p:cNvPr id="11" name="テキスト ボックス 10">
             <a:extLst>
               <a:ext uri="{FF2B5EF4-FFF2-40B4-BE49-F238E27FC236}">
@@ -8893,7 +8858,7 @@
               <a:rPr lang="ja-JP" altLang="en-US" sz="3600">
                 <a:sym typeface="Wingdings" pitchFamily="2" charset="2"/>
               </a:rPr>
-              <a:t>判定により決定された地名</a:t>
+              <a:t>決定された地名</a:t>
             </a:r>
             <a:r>
               <a:rPr lang="en-US" altLang="ja-JP" sz="3600" dirty="0">
@@ -9104,7 +9069,7 @@
         </p:nvSpPr>
         <p:spPr>
           <a:xfrm>
-            <a:off x="7427823" y="4903726"/>
+            <a:off x="7427823" y="3266312"/>
             <a:ext cx="3495550" cy="1384995"/>
           </a:xfrm>
           <a:prstGeom prst="rect">
@@ -9496,7 +9461,7 @@
         </p:nvSpPr>
         <p:spPr>
           <a:xfrm>
-            <a:off x="7099277" y="4361049"/>
+            <a:off x="7099277" y="2723635"/>
             <a:ext cx="4570482" cy="369332"/>
           </a:xfrm>
           <a:prstGeom prst="rect">
@@ -9514,6 +9479,70 @@
               <a:rPr kumimoji="1" lang="ja-JP" altLang="en-US"/>
               <a:t>地名でないと判定された場合があるターム</a:t>
             </a:r>
+          </a:p>
+        </p:txBody>
+      </p:sp>
+      <p:sp>
+        <p:nvSpPr>
+          <p:cNvPr id="3" name="テキスト ボックス 2">
+            <a:extLst>
+              <a:ext uri="{FF2B5EF4-FFF2-40B4-BE49-F238E27FC236}">
+                <a16:creationId xmlns:a16="http://schemas.microsoft.com/office/drawing/2014/main" id="{1AC3567B-D659-985B-5383-1843046D4AA0}"/>
+              </a:ext>
+            </a:extLst>
+          </p:cNvPr>
+          <p:cNvSpPr txBox="1"/>
+          <p:nvPr/>
+        </p:nvSpPr>
+        <p:spPr>
+          <a:xfrm>
+            <a:off x="7230140" y="5826640"/>
+            <a:ext cx="4439619" cy="646331"/>
+          </a:xfrm>
+          <a:prstGeom prst="rect">
+            <a:avLst/>
+          </a:prstGeom>
+          <a:noFill/>
+        </p:spPr>
+        <p:txBody>
+          <a:bodyPr wrap="square" rtlCol="0">
+            <a:spAutoFit/>
+          </a:bodyPr>
+          <a:lstStyle/>
+          <a:p>
+            <a:r>
+              <a:rPr kumimoji="1" lang="en-US" altLang="ja-JP" dirty="0"/>
+              <a:t>※</a:t>
+            </a:r>
+            <a:r>
+              <a:rPr kumimoji="1" lang="ja-JP" altLang="en-US"/>
+              <a:t>決定は</a:t>
+            </a:r>
+            <a:r>
+              <a:rPr kumimoji="1" lang="en-US" altLang="ja-JP" dirty="0"/>
+              <a:t>2</a:t>
+            </a:r>
+            <a:r>
+              <a:rPr kumimoji="1" lang="ja-JP" altLang="en-US"/>
+              <a:t>種の</a:t>
+            </a:r>
+            <a:r>
+              <a:rPr kumimoji="1" lang="en-US" altLang="ja-JP" dirty="0"/>
+              <a:t>AI</a:t>
+            </a:r>
+            <a:r>
+              <a:rPr kumimoji="1" lang="ja-JP" altLang="en-US"/>
+              <a:t>、</a:t>
+            </a:r>
+            <a:r>
+              <a:rPr kumimoji="1" lang="en-US" altLang="ja-JP" dirty="0"/>
+              <a:t>3</a:t>
+            </a:r>
+            <a:r>
+              <a:rPr kumimoji="1" lang="ja-JP" altLang="en-US"/>
+              <a:t>名の人による各サイトの多数決</a:t>
+            </a:r>
+            <a:endParaRPr kumimoji="1" lang="en-US" altLang="ja-JP" dirty="0"/>
           </a:p>
         </p:txBody>
       </p:sp>
@@ -13637,7 +13666,7 @@
         <p:spPr>
           <a:xfrm>
             <a:off x="-1" y="577517"/>
-            <a:ext cx="12192000" cy="4247317"/>
+            <a:ext cx="12192000" cy="4801314"/>
           </a:xfrm>
           <a:prstGeom prst="rect">
             <a:avLst/>
@@ -13681,7 +13710,7 @@
             </a:pPr>
             <a:r>
               <a:rPr lang="ja-JP" altLang="en-US"/>
-              <a:t>「地名」、「人名」、「固有現象名」等にかかる記述の特定（形態素の特徴量が十分か・正しいか）</a:t>
+              <a:t>「地名」、「人名」、「固有現象名」等にかかる記述の解析（形態素の特徴量が正しいか・十分か）</a:t>
             </a:r>
             <a:endParaRPr lang="en-US" altLang="ja-JP" dirty="0"/>
           </a:p>
@@ -13700,7 +13729,26 @@
             </a:r>
             <a:r>
               <a:rPr lang="ja-JP" altLang="en-US"/>
-              <a:t>人名を地名と特定する可能性が残る</a:t>
+              <a:t>地名を人名や組織名と特定する可能性</a:t>
+            </a:r>
+            <a:endParaRPr lang="en-US" altLang="ja-JP" dirty="0"/>
+          </a:p>
+          <a:p>
+            <a:pPr marL="742950" lvl="1" indent="-285750">
+              <a:buFont typeface="Arial" panose="020B0604020202020204" pitchFamily="34" charset="0"/>
+              <a:buChar char="•"/>
+            </a:pPr>
+            <a:r>
+              <a:rPr lang="ja-JP" altLang="en-US"/>
+              <a:t>例</a:t>
+            </a:r>
+            <a:r>
+              <a:rPr lang="en-US" altLang="ja-JP" dirty="0"/>
+              <a:t>: </a:t>
+            </a:r>
+            <a:r>
+              <a:rPr lang="ja-JP" altLang="en-US"/>
+              <a:t>下のようなより上位の判定に十分な情報を提供しているか</a:t>
             </a:r>
             <a:endParaRPr lang="en-US" altLang="ja-JP" dirty="0"/>
           </a:p>
@@ -13711,7 +13759,7 @@
             </a:pPr>
             <a:r>
               <a:rPr lang="ja-JP" altLang="en-US"/>
-              <a:t>特定する記述のレベル（複合語等）</a:t>
+              <a:t>特定したい記述にレベル（複合語等）がある</a:t>
             </a:r>
             <a:endParaRPr lang="en-US" altLang="ja-JP" dirty="0"/>
           </a:p>
@@ -13764,7 +13812,7 @@
               <a:rPr lang="ja-JP" altLang="en-US" b="1"/>
               <a:t>◾️同一名称の曖昧性（特に地名）の課題</a:t>
             </a:r>
-            <a:endParaRPr lang="en-US" altLang="ja-JP" b="1" dirty="0"/>
+            <a:endParaRPr lang="en-US" altLang="ja-JP" dirty="0"/>
           </a:p>
           <a:p>
             <a:pPr marL="285750" indent="-285750">
@@ -13803,6 +13851,17 @@
             <a:r>
               <a:rPr lang="ja-JP" altLang="en-US"/>
               <a:t>地理的な関係性</a:t>
+            </a:r>
+            <a:endParaRPr lang="en-US" altLang="ja-JP" dirty="0"/>
+          </a:p>
+          <a:p>
+            <a:r>
+              <a:rPr lang="en-US" altLang="ja-JP" dirty="0"/>
+              <a:t>※</a:t>
+            </a:r>
+            <a:r>
+              <a:rPr lang="ja-JP" altLang="en-US"/>
+              <a:t>人名の同姓同名問題は言わずもがな</a:t>
             </a:r>
             <a:endParaRPr lang="en-US" altLang="ja-JP" dirty="0"/>
           </a:p>
@@ -14318,7 +14377,7 @@
         <p:spPr>
           <a:xfrm>
             <a:off x="0" y="577517"/>
-            <a:ext cx="12192000" cy="2308324"/>
+            <a:ext cx="12192000" cy="3139321"/>
           </a:xfrm>
           <a:prstGeom prst="rect">
             <a:avLst/>
@@ -14444,6 +14503,32 @@
               </a:rPr>
               <a:t>機械学習を用いていない</a:t>
             </a:r>
+            <a:endParaRPr lang="en-US" altLang="ja-JP" dirty="0">
+              <a:solidFill>
+                <a:srgbClr val="333333"/>
+              </a:solidFill>
+              <a:latin typeface="Hiragino Kaku Gothic ProN"/>
+            </a:endParaRPr>
+          </a:p>
+          <a:p>
+            <a:pPr marL="285750" indent="-285750">
+              <a:buFont typeface="Arial" panose="020B0604020202020204" pitchFamily="34" charset="0"/>
+              <a:buChar char="•"/>
+            </a:pPr>
+            <a:r>
+              <a:rPr lang="en" altLang="ja-JP" dirty="0"/>
+              <a:t>A Method for Eliminating Articles by Homonymous Authors from the Large Number of Articles Retrieved by Author Search. 2011.</a:t>
+            </a:r>
+          </a:p>
+          <a:p>
+            <a:pPr marL="742950" lvl="1" indent="-285750">
+              <a:buFont typeface="Arial" panose="020B0604020202020204" pitchFamily="34" charset="0"/>
+              <a:buChar char="•"/>
+            </a:pPr>
+            <a:r>
+              <a:rPr lang="ja-JP" altLang="en-US"/>
+              <a:t>地名ではなく人名の同姓同イニシアル問題にアプローチ</a:t>
+            </a:r>
             <a:endParaRPr lang="en-US" altLang="ja-JP" dirty="0"/>
           </a:p>
         </p:txBody>
@@ -14462,7 +14547,7 @@
         </p:nvSpPr>
         <p:spPr>
           <a:xfrm>
-            <a:off x="860854" y="3693633"/>
+            <a:off x="860854" y="4682462"/>
             <a:ext cx="10470292" cy="1754326"/>
           </a:xfrm>
           <a:prstGeom prst="rect">

--- a/jsik2026taikai.pptx
+++ b/jsik2026taikai.pptx
@@ -214,7 +214,7 @@
           <a:p>
             <a:fld id="{21858D78-C21E-6D4A-8EB0-1034401A7884}" type="datetimeFigureOut">
               <a:rPr kumimoji="1" lang="ja-JP" altLang="en-US" smtClean="0"/>
-              <a:t>2026/4/30</a:t>
+              <a:t>2026/5/1</a:t>
             </a:fld>
             <a:endParaRPr kumimoji="1" lang="ja-JP" altLang="en-US"/>
           </a:p>
@@ -744,7 +744,7 @@
           <a:p>
             <a:fld id="{716789AD-CAC3-AD41-B5C9-BF5C62A1889D}" type="datetimeFigureOut">
               <a:rPr kumimoji="1" lang="ja-JP" altLang="en-US" smtClean="0"/>
-              <a:t>2026/4/30</a:t>
+              <a:t>2026/5/1</a:t>
             </a:fld>
             <a:endParaRPr kumimoji="1" lang="ja-JP" altLang="en-US"/>
           </a:p>
@@ -974,7 +974,7 @@
           <a:p>
             <a:fld id="{716789AD-CAC3-AD41-B5C9-BF5C62A1889D}" type="datetimeFigureOut">
               <a:rPr kumimoji="1" lang="ja-JP" altLang="en-US" smtClean="0"/>
-              <a:t>2026/4/30</a:t>
+              <a:t>2026/5/1</a:t>
             </a:fld>
             <a:endParaRPr kumimoji="1" lang="ja-JP" altLang="en-US"/>
           </a:p>
@@ -1214,7 +1214,7 @@
           <a:p>
             <a:fld id="{716789AD-CAC3-AD41-B5C9-BF5C62A1889D}" type="datetimeFigureOut">
               <a:rPr kumimoji="1" lang="ja-JP" altLang="en-US" smtClean="0"/>
-              <a:t>2026/4/30</a:t>
+              <a:t>2026/5/1</a:t>
             </a:fld>
             <a:endParaRPr kumimoji="1" lang="ja-JP" altLang="en-US"/>
           </a:p>
@@ -1444,7 +1444,7 @@
           <a:p>
             <a:fld id="{716789AD-CAC3-AD41-B5C9-BF5C62A1889D}" type="datetimeFigureOut">
               <a:rPr kumimoji="1" lang="ja-JP" altLang="en-US" smtClean="0"/>
-              <a:t>2026/4/30</a:t>
+              <a:t>2026/5/1</a:t>
             </a:fld>
             <a:endParaRPr kumimoji="1" lang="ja-JP" altLang="en-US"/>
           </a:p>
@@ -1719,7 +1719,7 @@
           <a:p>
             <a:fld id="{716789AD-CAC3-AD41-B5C9-BF5C62A1889D}" type="datetimeFigureOut">
               <a:rPr kumimoji="1" lang="ja-JP" altLang="en-US" smtClean="0"/>
-              <a:t>2026/4/30</a:t>
+              <a:t>2026/5/1</a:t>
             </a:fld>
             <a:endParaRPr kumimoji="1" lang="ja-JP" altLang="en-US"/>
           </a:p>
@@ -2048,7 +2048,7 @@
           <a:p>
             <a:fld id="{716789AD-CAC3-AD41-B5C9-BF5C62A1889D}" type="datetimeFigureOut">
               <a:rPr kumimoji="1" lang="ja-JP" altLang="en-US" smtClean="0"/>
-              <a:t>2026/4/30</a:t>
+              <a:t>2026/5/1</a:t>
             </a:fld>
             <a:endParaRPr kumimoji="1" lang="ja-JP" altLang="en-US"/>
           </a:p>
@@ -2524,7 +2524,7 @@
           <a:p>
             <a:fld id="{716789AD-CAC3-AD41-B5C9-BF5C62A1889D}" type="datetimeFigureOut">
               <a:rPr kumimoji="1" lang="ja-JP" altLang="en-US" smtClean="0"/>
-              <a:t>2026/4/30</a:t>
+              <a:t>2026/5/1</a:t>
             </a:fld>
             <a:endParaRPr kumimoji="1" lang="ja-JP" altLang="en-US"/>
           </a:p>
@@ -2665,7 +2665,7 @@
           <a:p>
             <a:fld id="{716789AD-CAC3-AD41-B5C9-BF5C62A1889D}" type="datetimeFigureOut">
               <a:rPr kumimoji="1" lang="ja-JP" altLang="en-US" smtClean="0"/>
-              <a:t>2026/4/30</a:t>
+              <a:t>2026/5/1</a:t>
             </a:fld>
             <a:endParaRPr kumimoji="1" lang="ja-JP" altLang="en-US"/>
           </a:p>
@@ -2778,7 +2778,7 @@
           <a:p>
             <a:fld id="{716789AD-CAC3-AD41-B5C9-BF5C62A1889D}" type="datetimeFigureOut">
               <a:rPr kumimoji="1" lang="ja-JP" altLang="en-US" smtClean="0"/>
-              <a:t>2026/4/30</a:t>
+              <a:t>2026/5/1</a:t>
             </a:fld>
             <a:endParaRPr kumimoji="1" lang="ja-JP" altLang="en-US"/>
           </a:p>
@@ -3121,7 +3121,7 @@
           <a:p>
             <a:fld id="{716789AD-CAC3-AD41-B5C9-BF5C62A1889D}" type="datetimeFigureOut">
               <a:rPr kumimoji="1" lang="ja-JP" altLang="en-US" smtClean="0"/>
-              <a:t>2026/4/30</a:t>
+              <a:t>2026/5/1</a:t>
             </a:fld>
             <a:endParaRPr kumimoji="1" lang="ja-JP" altLang="en-US"/>
           </a:p>
@@ -3409,7 +3409,7 @@
           <a:p>
             <a:fld id="{716789AD-CAC3-AD41-B5C9-BF5C62A1889D}" type="datetimeFigureOut">
               <a:rPr kumimoji="1" lang="ja-JP" altLang="en-US" smtClean="0"/>
-              <a:t>2026/4/30</a:t>
+              <a:t>2026/5/1</a:t>
             </a:fld>
             <a:endParaRPr kumimoji="1" lang="ja-JP" altLang="en-US"/>
           </a:p>
@@ -3682,7 +3682,7 @@
           <a:p>
             <a:fld id="{716789AD-CAC3-AD41-B5C9-BF5C62A1889D}" type="datetimeFigureOut">
               <a:rPr kumimoji="1" lang="ja-JP" altLang="en-US" smtClean="0"/>
-              <a:t>2026/4/30</a:t>
+              <a:t>2026/5/1</a:t>
             </a:fld>
             <a:endParaRPr kumimoji="1" lang="ja-JP" altLang="en-US"/>
           </a:p>
@@ -7478,7 +7478,7 @@
         <p:spPr>
           <a:xfrm>
             <a:off x="5651005" y="5562232"/>
-            <a:ext cx="5328703" cy="369332"/>
+            <a:ext cx="5445722" cy="369332"/>
           </a:xfrm>
           <a:prstGeom prst="rect">
             <a:avLst/>
@@ -7497,7 +7497,7 @@
             </a:r>
             <a:r>
               <a:rPr kumimoji="1" lang="en-US" altLang="ja-JP" dirty="0"/>
-              <a:t> AI</a:t>
+              <a:t> AIs</a:t>
             </a:r>
             <a:r>
               <a:rPr kumimoji="1" lang="ja-JP" altLang="en-US"/>
@@ -7582,7 +7582,7 @@
         <p:spPr>
           <a:xfrm>
             <a:off x="202020" y="2090854"/>
-            <a:ext cx="8710332" cy="1815882"/>
+            <a:ext cx="8427630" cy="1815882"/>
           </a:xfrm>
           <a:prstGeom prst="rect">
             <a:avLst/>
@@ -8562,7 +8562,13 @@
               <a:rPr lang="en-US" altLang="ja-JP" sz="3600" dirty="0">
                 <a:sym typeface="Wingdings" pitchFamily="2" charset="2"/>
               </a:rPr>
-              <a:t>(</a:t>
+              <a:t>(NER</a:t>
+            </a:r>
+            <a:r>
+              <a:rPr lang="ja-JP" altLang="en-US" sz="3600" dirty="0">
+                <a:sym typeface="Wingdings" pitchFamily="2" charset="2"/>
+              </a:rPr>
+              <a:t>に対する</a:t>
             </a:r>
             <a:r>
               <a:rPr lang="ja-JP" altLang="en-US" sz="3600">
@@ -8892,7 +8898,7 @@
         </p:blipFill>
         <p:spPr>
           <a:xfrm>
-            <a:off x="1708463" y="1103657"/>
+            <a:off x="1485628" y="1095419"/>
             <a:ext cx="3951064" cy="5185064"/>
           </a:xfrm>
           <a:prstGeom prst="rect">
@@ -8914,7 +8920,7 @@
         </p:nvSpPr>
         <p:spPr>
           <a:xfrm>
-            <a:off x="1367485" y="655921"/>
+            <a:off x="1155214" y="566389"/>
             <a:ext cx="2723823" cy="369332"/>
           </a:xfrm>
           <a:prstGeom prst="rect">
@@ -8949,7 +8955,7 @@
         </p:nvSpPr>
         <p:spPr>
           <a:xfrm>
-            <a:off x="7099277" y="667606"/>
+            <a:off x="6731882" y="2414481"/>
             <a:ext cx="3203121" cy="369332"/>
           </a:xfrm>
           <a:prstGeom prst="rect">
@@ -9004,7 +9010,7 @@
         </p:blipFill>
         <p:spPr>
           <a:xfrm>
-            <a:off x="7427823" y="1021002"/>
+            <a:off x="7003278" y="2783604"/>
             <a:ext cx="2573294" cy="1218570"/>
           </a:xfrm>
           <a:prstGeom prst="rect">
@@ -9028,7 +9034,7 @@
         </p:nvCxnSpPr>
         <p:spPr>
           <a:xfrm>
-            <a:off x="1679215" y="1244942"/>
+            <a:off x="1442454" y="1244942"/>
             <a:ext cx="3980312" cy="0"/>
           </a:xfrm>
           <a:prstGeom prst="line">
@@ -9069,7 +9075,7 @@
         </p:nvSpPr>
         <p:spPr>
           <a:xfrm>
-            <a:off x="7427823" y="3266312"/>
+            <a:off x="7003278" y="4887311"/>
             <a:ext cx="3495550" cy="1384995"/>
           </a:xfrm>
           <a:prstGeom prst="rect">
@@ -9461,7 +9467,7 @@
         </p:nvSpPr>
         <p:spPr>
           <a:xfrm>
-            <a:off x="7099277" y="2723635"/>
+            <a:off x="6674732" y="4507916"/>
             <a:ext cx="4570482" cy="369332"/>
           </a:xfrm>
           <a:prstGeom prst="rect">
@@ -9496,8 +9502,8 @@
         </p:nvSpPr>
         <p:spPr>
           <a:xfrm>
-            <a:off x="7230140" y="5826640"/>
-            <a:ext cx="4439619" cy="646331"/>
+            <a:off x="1442454" y="6440076"/>
+            <a:ext cx="3707085" cy="276999"/>
           </a:xfrm>
           <a:prstGeom prst="rect">
             <a:avLst/>
@@ -9511,41 +9517,106 @@
           <a:lstStyle/>
           <a:p>
             <a:r>
-              <a:rPr kumimoji="1" lang="en-US" altLang="ja-JP" dirty="0"/>
+              <a:rPr kumimoji="1" lang="en-US" altLang="ja-JP" sz="1200" dirty="0"/>
               <a:t>※</a:t>
             </a:r>
             <a:r>
+              <a:rPr kumimoji="1" lang="ja-JP" altLang="en-US" sz="1200"/>
+              <a:t>決定は</a:t>
+            </a:r>
+            <a:r>
+              <a:rPr kumimoji="1" lang="en-US" altLang="ja-JP" sz="1200" dirty="0"/>
+              <a:t>2</a:t>
+            </a:r>
+            <a:r>
+              <a:rPr kumimoji="1" lang="ja-JP" altLang="en-US" sz="1200"/>
+              <a:t>種の</a:t>
+            </a:r>
+            <a:r>
+              <a:rPr kumimoji="1" lang="en-US" altLang="ja-JP" sz="1200" dirty="0"/>
+              <a:t>AI</a:t>
+            </a:r>
+            <a:r>
+              <a:rPr kumimoji="1" lang="ja-JP" altLang="en-US" sz="1200"/>
+              <a:t>、</a:t>
+            </a:r>
+            <a:r>
+              <a:rPr kumimoji="1" lang="en-US" altLang="ja-JP" sz="1200" dirty="0"/>
+              <a:t>3</a:t>
+            </a:r>
+            <a:r>
+              <a:rPr kumimoji="1" lang="ja-JP" altLang="en-US" sz="1200"/>
+              <a:t>名の人による各サイトの多数決</a:t>
+            </a:r>
+            <a:endParaRPr kumimoji="1" lang="en-US" altLang="ja-JP" sz="1200" dirty="0"/>
+          </a:p>
+        </p:txBody>
+      </p:sp>
+      <p:sp>
+        <p:nvSpPr>
+          <p:cNvPr id="7" name="テキスト ボックス 6">
+            <a:extLst>
+              <a:ext uri="{FF2B5EF4-FFF2-40B4-BE49-F238E27FC236}">
+                <a16:creationId xmlns:a16="http://schemas.microsoft.com/office/drawing/2014/main" id="{EBC72453-F203-9733-C732-74FCECACCD22}"/>
+              </a:ext>
+            </a:extLst>
+          </p:cNvPr>
+          <p:cNvSpPr txBox="1"/>
+          <p:nvPr/>
+        </p:nvSpPr>
+        <p:spPr>
+          <a:xfrm>
+            <a:off x="6731881" y="585694"/>
+            <a:ext cx="2723823" cy="369332"/>
+          </a:xfrm>
+          <a:prstGeom prst="rect">
+            <a:avLst/>
+          </a:prstGeom>
+          <a:noFill/>
+        </p:spPr>
+        <p:txBody>
+          <a:bodyPr wrap="none" rtlCol="0">
+            <a:spAutoFit/>
+          </a:bodyPr>
+          <a:lstStyle/>
+          <a:p>
+            <a:r>
               <a:rPr kumimoji="1" lang="ja-JP" altLang="en-US"/>
-              <a:t>決定は</a:t>
-            </a:r>
-            <a:r>
-              <a:rPr kumimoji="1" lang="en-US" altLang="ja-JP" dirty="0"/>
-              <a:t>2</a:t>
-            </a:r>
-            <a:r>
-              <a:rPr kumimoji="1" lang="ja-JP" altLang="en-US"/>
-              <a:t>種の</a:t>
-            </a:r>
-            <a:r>
-              <a:rPr kumimoji="1" lang="en-US" altLang="ja-JP" dirty="0"/>
-              <a:t>AI</a:t>
-            </a:r>
-            <a:r>
-              <a:rPr kumimoji="1" lang="ja-JP" altLang="en-US"/>
-              <a:t>、</a:t>
-            </a:r>
-            <a:r>
-              <a:rPr kumimoji="1" lang="en-US" altLang="ja-JP" dirty="0"/>
-              <a:t>3</a:t>
-            </a:r>
-            <a:r>
-              <a:rPr kumimoji="1" lang="ja-JP" altLang="en-US"/>
-              <a:t>名の人による各サイトの多数決</a:t>
-            </a:r>
-            <a:endParaRPr kumimoji="1" lang="en-US" altLang="ja-JP" dirty="0"/>
-          </a:p>
-        </p:txBody>
-      </p:sp>
+              <a:t>地名が出現した報告書数</a:t>
+            </a:r>
+          </a:p>
+        </p:txBody>
+      </p:sp>
+      <p:pic>
+        <p:nvPicPr>
+          <p:cNvPr id="15" name="図 14">
+            <a:extLst>
+              <a:ext uri="{FF2B5EF4-FFF2-40B4-BE49-F238E27FC236}">
+                <a16:creationId xmlns:a16="http://schemas.microsoft.com/office/drawing/2014/main" id="{F9380533-B022-AD19-01E0-1646732B0451}"/>
+              </a:ext>
+            </a:extLst>
+          </p:cNvPr>
+          <p:cNvPicPr>
+            <a:picLocks noChangeAspect="1"/>
+          </p:cNvPicPr>
+          <p:nvPr/>
+        </p:nvPicPr>
+        <p:blipFill>
+          <a:blip r:embed="rId4"/>
+          <a:stretch>
+            <a:fillRect/>
+          </a:stretch>
+        </p:blipFill>
+        <p:spPr>
+          <a:xfrm>
+            <a:off x="7003278" y="997265"/>
+            <a:ext cx="1185501" cy="750118"/>
+          </a:xfrm>
+          <a:prstGeom prst="rect">
+            <a:avLst/>
+          </a:prstGeom>
+        </p:spPr>
+      </p:pic>
     </p:spTree>
     <p:extLst>
       <p:ext uri="{BB962C8B-B14F-4D97-AF65-F5344CB8AC3E}">
@@ -9692,7 +9763,7 @@
         <p:spPr>
           <a:xfrm>
             <a:off x="6096000" y="816415"/>
-            <a:ext cx="5395783" cy="2585323"/>
+            <a:ext cx="5395783" cy="2862322"/>
           </a:xfrm>
           <a:prstGeom prst="rect">
             <a:avLst/>
@@ -9715,7 +9786,7 @@
             </a:r>
             <a:r>
               <a:rPr kumimoji="1" lang="ja-JP" altLang="en-US"/>
-              <a:t>に関しては</a:t>
+              <a:t>に関して</a:t>
             </a:r>
             <a:endParaRPr kumimoji="1" lang="en-US" altLang="ja-JP"/>
           </a:p>
@@ -9750,6 +9821,20 @@
               <a:rPr lang="ja-JP" altLang="en-US"/>
               <a:t>非常に細やかなルールの設定とエキスパートとしての訓練が必要であることを示唆している</a:t>
             </a:r>
+            <a:endParaRPr lang="en-US" altLang="ja-JP"/>
+          </a:p>
+          <a:p>
+            <a:endParaRPr lang="en-US" altLang="ja-JP"/>
+          </a:p>
+          <a:p>
+            <a:r>
+              <a:rPr lang="en-US" altLang="ja-JP"/>
+              <a:t>AI</a:t>
+            </a:r>
+            <a:r>
+              <a:rPr lang="ja-JP" altLang="en-US"/>
+              <a:t>特有の問題</a:t>
+            </a:r>
           </a:p>
           <a:p>
             <a:pPr marL="285750" indent="-285750">
@@ -9766,7 +9851,7 @@
             </a:r>
             <a:r>
               <a:rPr kumimoji="1" lang="ja-JP" altLang="en-US"/>
-              <a:t>に関しては判定よりも「出力形式」が問題となったケースであった。プロンプトの調整が困難であることを物語っている</a:t>
+              <a:t>に関しては判定よりも「出力形式」が問題となったケースであった。</a:t>
             </a:r>
           </a:p>
         </p:txBody>
@@ -9919,7 +10004,7 @@
         <p:spPr>
           <a:xfrm>
             <a:off x="766119" y="4255876"/>
-            <a:ext cx="3896496" cy="923330"/>
+            <a:ext cx="3896496" cy="1200329"/>
           </a:xfrm>
           <a:prstGeom prst="rect">
             <a:avLst/>
@@ -9939,7 +10024,7 @@
           <a:p>
             <a:r>
               <a:rPr lang="ja-JP" altLang="en-US"/>
-              <a:t>指標としての可能性</a:t>
+              <a:t>指標（特徴化）の可能性</a:t>
             </a:r>
             <a:endParaRPr lang="en-US" altLang="ja-JP"/>
           </a:p>
@@ -9950,7 +10035,7 @@
             </a:pPr>
             <a:r>
               <a:rPr lang="ja-JP" altLang="en-US"/>
-              <a:t>精度は低いながらも大学ごとの特徴を捉えているように見える</a:t>
+              <a:t>地名決定の精度が低いことを考慮しても大学ごとの特徴を捉えているように見える</a:t>
             </a:r>
             <a:endParaRPr lang="en-US" altLang="ja-JP"/>
           </a:p>
@@ -13810,7 +13895,7 @@
           <a:p>
             <a:r>
               <a:rPr lang="ja-JP" altLang="en-US" b="1"/>
-              <a:t>◾️同一名称の曖昧性（特に地名）の課題</a:t>
+              <a:t>◾️同一表現の曖昧性（特に地名）</a:t>
             </a:r>
             <a:endParaRPr lang="en-US" altLang="ja-JP" dirty="0"/>
           </a:p>
@@ -14517,7 +14602,17 @@
             </a:pPr>
             <a:r>
               <a:rPr lang="en" altLang="ja-JP" dirty="0"/>
-              <a:t>A Method for Eliminating Articles by Homonymous Authors from the Large Number of Articles Retrieved by Author Search. 2011.</a:t>
+              <a:t>A Method for Eliminating Articles by Homonymous Authors from the Large Number of Articles Retrieved by Author Search. 2011. (</a:t>
+            </a:r>
+            <a:r>
+              <a:rPr lang="en" altLang="ja-JP" dirty="0">
+                <a:hlinkClick r:id="rId4"/>
+              </a:rPr>
+              <a:t>https://dl.acm.org/doi/abs/10.1002/asi.21491</a:t>
+            </a:r>
+            <a:r>
+              <a:rPr lang="en" altLang="ja-JP" dirty="0"/>
+              <a:t>)</a:t>
             </a:r>
           </a:p>
           <a:p>
@@ -15214,7 +15309,7 @@
           <a:p>
             <a:r>
               <a:rPr lang="ja-JP" altLang="en-US" dirty="0"/>
-              <a:t>研究課題名・本文および地名抽出結果</a:t>
+              <a:t>研究課題名・本文からの地名抽出結果</a:t>
             </a:r>
             <a:endParaRPr lang="en-US" altLang="ja-JP" dirty="0"/>
           </a:p>
@@ -16425,7 +16520,7 @@
         </p:nvSpPr>
         <p:spPr>
           <a:xfrm>
-            <a:off x="4627491" y="3386614"/>
+            <a:off x="4627491" y="3378450"/>
             <a:ext cx="851515" cy="338554"/>
           </a:xfrm>
           <a:prstGeom prst="rect">
@@ -16461,8 +16556,8 @@
         </p:nvSpPr>
         <p:spPr>
           <a:xfrm>
-            <a:off x="4562202" y="4174382"/>
-            <a:ext cx="1082348" cy="307777"/>
+            <a:off x="4562202" y="4125398"/>
+            <a:ext cx="1146468" cy="323165"/>
           </a:xfrm>
           <a:prstGeom prst="rect">
             <a:avLst/>
@@ -16476,10 +16571,10 @@
           <a:lstStyle/>
           <a:p>
             <a:r>
-              <a:rPr lang="ja-JP" altLang="en-US" sz="1400" b="1"/>
+              <a:rPr lang="ja-JP" altLang="en-US" sz="1500" b="1"/>
               <a:t>プロンプト</a:t>
             </a:r>
-            <a:endParaRPr kumimoji="1" lang="ja-JP" altLang="en-US" sz="1400" b="1"/>
+            <a:endParaRPr kumimoji="1" lang="ja-JP" altLang="en-US" sz="1500" b="1"/>
           </a:p>
         </p:txBody>
       </p:sp>

--- a/jsik2026taikai.pptx
+++ b/jsik2026taikai.pptx
@@ -7543,6 +7543,7 @@
           <a:prstGeom prst="rightBrace">
             <a:avLst/>
           </a:prstGeom>
+          <a:ln w="12700"/>
         </p:spPr>
         <p:style>
           <a:lnRef idx="2">
@@ -7581,7 +7582,7 @@
         </p:nvSpPr>
         <p:spPr>
           <a:xfrm>
-            <a:off x="202020" y="2090854"/>
+            <a:off x="202020" y="1029503"/>
             <a:ext cx="8427630" cy="1815882"/>
           </a:xfrm>
           <a:prstGeom prst="rect">
@@ -7829,7 +7830,7 @@
         </p:nvSpPr>
         <p:spPr>
           <a:xfrm>
-            <a:off x="202019" y="1085173"/>
+            <a:off x="189319" y="3056446"/>
             <a:ext cx="1105786" cy="307777"/>
           </a:xfrm>
           <a:prstGeom prst="rect">
@@ -7877,7 +7878,7 @@
         </p:nvSpPr>
         <p:spPr>
           <a:xfrm>
-            <a:off x="202019" y="1589003"/>
+            <a:off x="189319" y="3560276"/>
             <a:ext cx="1105786" cy="307777"/>
           </a:xfrm>
           <a:prstGeom prst="rect">
@@ -7925,7 +7926,7 @@
         </p:nvSpPr>
         <p:spPr>
           <a:xfrm>
-            <a:off x="2296124" y="1304815"/>
+            <a:off x="2173354" y="3276088"/>
             <a:ext cx="5852884" cy="369332"/>
           </a:xfrm>
           <a:prstGeom prst="rect">
@@ -7976,7 +7977,7 @@
         </p:nvSpPr>
         <p:spPr>
           <a:xfrm>
-            <a:off x="9000450" y="2814129"/>
+            <a:off x="8881916" y="1752778"/>
             <a:ext cx="2852063" cy="369332"/>
           </a:xfrm>
           <a:prstGeom prst="rect">
@@ -8024,7 +8025,7 @@
         </p:nvSpPr>
         <p:spPr>
           <a:xfrm>
-            <a:off x="8225208" y="1573615"/>
+            <a:off x="8212509" y="3529499"/>
             <a:ext cx="2441694" cy="338554"/>
           </a:xfrm>
           <a:prstGeom prst="rect">
@@ -8059,7 +8060,7 @@
         </p:nvSpPr>
         <p:spPr>
           <a:xfrm>
-            <a:off x="1778000" y="1085173"/>
+            <a:off x="1765300" y="3056446"/>
             <a:ext cx="177800" cy="811607"/>
           </a:xfrm>
           <a:prstGeom prst="rightBrace">
@@ -8111,13 +8112,13 @@
         </p:nvCxnSpPr>
         <p:spPr>
           <a:xfrm flipH="1">
-            <a:off x="1307805" y="1742892"/>
-            <a:ext cx="6917403" cy="0"/>
+            <a:off x="1295105" y="3698776"/>
+            <a:ext cx="6917404" cy="15389"/>
           </a:xfrm>
           <a:prstGeom prst="straightConnector1">
             <a:avLst/>
           </a:prstGeom>
-          <a:ln w="9525">
+          <a:ln w="19050">
             <a:solidFill>
               <a:schemeClr val="tx1"/>
             </a:solidFill>
@@ -8864,7 +8865,7 @@
               <a:rPr lang="ja-JP" altLang="en-US" sz="3600">
                 <a:sym typeface="Wingdings" pitchFamily="2" charset="2"/>
               </a:rPr>
-              <a:t>決定された地名</a:t>
+              <a:t>決定された地名について</a:t>
             </a:r>
             <a:r>
               <a:rPr lang="en-US" altLang="ja-JP" sz="3600" dirty="0">
@@ -9762,8 +9763,8 @@
         </p:nvSpPr>
         <p:spPr>
           <a:xfrm>
-            <a:off x="6096000" y="816415"/>
-            <a:ext cx="5395783" cy="2862322"/>
+            <a:off x="6033408" y="824566"/>
+            <a:ext cx="5793112" cy="2862322"/>
           </a:xfrm>
           <a:prstGeom prst="rect">
             <a:avLst/>
@@ -9786,7 +9787,15 @@
             </a:r>
             <a:r>
               <a:rPr kumimoji="1" lang="ja-JP" altLang="en-US"/>
-              <a:t>に関して</a:t>
+              <a:t>の</a:t>
+            </a:r>
+            <a:r>
+              <a:rPr kumimoji="1" lang="en-US" altLang="ja-JP"/>
+              <a:t>AI</a:t>
+            </a:r>
+            <a:r>
+              <a:rPr kumimoji="1" lang="ja-JP" altLang="en-US"/>
+              <a:t>利用に関して</a:t>
             </a:r>
             <a:endParaRPr kumimoji="1" lang="en-US" altLang="ja-JP"/>
           </a:p>
@@ -9797,7 +9806,7 @@
             </a:pPr>
             <a:r>
               <a:rPr kumimoji="1" lang="ja-JP" altLang="en-US"/>
-              <a:t>形態素解析のみでの解決は難しい</a:t>
+              <a:t>形態素解析のみでの解決は難しい場合に対応できる可能性はある</a:t>
             </a:r>
             <a:endParaRPr kumimoji="1" lang="en-US" altLang="ja-JP"/>
           </a:p>
@@ -9808,7 +9817,7 @@
             </a:pPr>
             <a:r>
               <a:rPr kumimoji="1" lang="ja-JP" altLang="en-US"/>
-              <a:t>（人が見た時に）明らかに人名である場合も地名と認識する場合がかなりある</a:t>
+              <a:t>（人が見た時に）明らかに人名である場合など</a:t>
             </a:r>
             <a:endParaRPr kumimoji="1" lang="en-US" altLang="ja-JP"/>
           </a:p>
@@ -9851,7 +9860,7 @@
             </a:r>
             <a:r>
               <a:rPr kumimoji="1" lang="ja-JP" altLang="en-US"/>
-              <a:t>に関しては判定よりも「出力形式」が問題となったケースであった。</a:t>
+              <a:t>に関しては判定よりも「出力形式」が問題となったケースであった</a:t>
             </a:r>
           </a:p>
         </p:txBody>
@@ -14642,8 +14651,8 @@
         </p:nvSpPr>
         <p:spPr>
           <a:xfrm>
-            <a:off x="860854" y="4682462"/>
-            <a:ext cx="10470292" cy="1754326"/>
+            <a:off x="860854" y="4306906"/>
+            <a:ext cx="10332382" cy="1754326"/>
           </a:xfrm>
           <a:prstGeom prst="rect">
             <a:avLst/>
@@ -14701,7 +14710,7 @@
             </a:pPr>
             <a:r>
               <a:rPr lang="ja-JP" altLang="en-US"/>
-              <a:t>地理情報を利用しない曖昧性解決においては、近年には独自</a:t>
+              <a:t>地理情報を利用しない曖昧性解決においては、近年に独自</a:t>
             </a:r>
             <a:r>
               <a:rPr lang="en-US" altLang="ja-JP" dirty="0"/>
@@ -14732,7 +14741,7 @@
             </a:r>
             <a:r>
               <a:rPr lang="ja-JP" altLang="en-US"/>
-              <a:t>が用いられはじめたのはごく最近</a:t>
+              <a:t>が用いられはじめたのはさらにごく最近</a:t>
             </a:r>
             <a:endParaRPr lang="en-US" altLang="ja-JP" dirty="0"/>
           </a:p>
@@ -14754,7 +14763,15 @@
             </a:pPr>
             <a:r>
               <a:rPr kumimoji="1" lang="ja-JP" altLang="en-US"/>
-              <a:t>日本語における事例はほぼ見られないが、古くは辞書ベース・ルールベース</a:t>
+              <a:t>日本語における事例は少ないが、辞書ベース・ルールベースのものが</a:t>
+            </a:r>
+            <a:r>
+              <a:rPr kumimoji="1" lang="en-US" altLang="ja-JP"/>
+              <a:t>2000</a:t>
+            </a:r>
+            <a:r>
+              <a:rPr kumimoji="1" lang="ja-JP" altLang="en-US"/>
+              <a:t>年頃までは見られる</a:t>
             </a:r>
             <a:endParaRPr kumimoji="1" lang="en-US" altLang="ja-JP" dirty="0"/>
           </a:p>
@@ -15476,7 +15493,7 @@
         <p:spPr>
           <a:xfrm>
             <a:off x="3103267" y="4689583"/>
-            <a:ext cx="2212465" cy="369332"/>
+            <a:ext cx="2175596" cy="369332"/>
           </a:xfrm>
           <a:prstGeom prst="rect">
             <a:avLst/>
@@ -15491,7 +15508,15 @@
           <a:p>
             <a:r>
               <a:rPr kumimoji="1" lang="en-US" altLang="ja-JP" dirty="0"/>
-              <a:t>n=1200 -&gt; n=1000</a:t>
+              <a:t>n=1200 </a:t>
+            </a:r>
+            <a:r>
+              <a:rPr kumimoji="1" lang="ja-JP" altLang="en-US" dirty="0"/>
+              <a:t>→</a:t>
+            </a:r>
+            <a:r>
+              <a:rPr kumimoji="1" lang="en-US" altLang="ja-JP" dirty="0"/>
+              <a:t> n=1000</a:t>
             </a:r>
             <a:endParaRPr kumimoji="1" lang="ja-JP" altLang="en-US"/>
           </a:p>

--- a/jsik2026taikai.pptx
+++ b/jsik2026taikai.pptx
@@ -214,7 +214,7 @@
           <a:p>
             <a:fld id="{21858D78-C21E-6D4A-8EB0-1034401A7884}" type="datetimeFigureOut">
               <a:rPr kumimoji="1" lang="ja-JP" altLang="en-US" smtClean="0"/>
-              <a:t>2026/5/1</a:t>
+              <a:t>2026/5/7</a:t>
             </a:fld>
             <a:endParaRPr kumimoji="1" lang="ja-JP" altLang="en-US"/>
           </a:p>
@@ -744,7 +744,7 @@
           <a:p>
             <a:fld id="{716789AD-CAC3-AD41-B5C9-BF5C62A1889D}" type="datetimeFigureOut">
               <a:rPr kumimoji="1" lang="ja-JP" altLang="en-US" smtClean="0"/>
-              <a:t>2026/5/1</a:t>
+              <a:t>2026/5/7</a:t>
             </a:fld>
             <a:endParaRPr kumimoji="1" lang="ja-JP" altLang="en-US"/>
           </a:p>
@@ -974,7 +974,7 @@
           <a:p>
             <a:fld id="{716789AD-CAC3-AD41-B5C9-BF5C62A1889D}" type="datetimeFigureOut">
               <a:rPr kumimoji="1" lang="ja-JP" altLang="en-US" smtClean="0"/>
-              <a:t>2026/5/1</a:t>
+              <a:t>2026/5/7</a:t>
             </a:fld>
             <a:endParaRPr kumimoji="1" lang="ja-JP" altLang="en-US"/>
           </a:p>
@@ -1214,7 +1214,7 @@
           <a:p>
             <a:fld id="{716789AD-CAC3-AD41-B5C9-BF5C62A1889D}" type="datetimeFigureOut">
               <a:rPr kumimoji="1" lang="ja-JP" altLang="en-US" smtClean="0"/>
-              <a:t>2026/5/1</a:t>
+              <a:t>2026/5/7</a:t>
             </a:fld>
             <a:endParaRPr kumimoji="1" lang="ja-JP" altLang="en-US"/>
           </a:p>
@@ -1444,7 +1444,7 @@
           <a:p>
             <a:fld id="{716789AD-CAC3-AD41-B5C9-BF5C62A1889D}" type="datetimeFigureOut">
               <a:rPr kumimoji="1" lang="ja-JP" altLang="en-US" smtClean="0"/>
-              <a:t>2026/5/1</a:t>
+              <a:t>2026/5/7</a:t>
             </a:fld>
             <a:endParaRPr kumimoji="1" lang="ja-JP" altLang="en-US"/>
           </a:p>
@@ -1719,7 +1719,7 @@
           <a:p>
             <a:fld id="{716789AD-CAC3-AD41-B5C9-BF5C62A1889D}" type="datetimeFigureOut">
               <a:rPr kumimoji="1" lang="ja-JP" altLang="en-US" smtClean="0"/>
-              <a:t>2026/5/1</a:t>
+              <a:t>2026/5/7</a:t>
             </a:fld>
             <a:endParaRPr kumimoji="1" lang="ja-JP" altLang="en-US"/>
           </a:p>
@@ -2048,7 +2048,7 @@
           <a:p>
             <a:fld id="{716789AD-CAC3-AD41-B5C9-BF5C62A1889D}" type="datetimeFigureOut">
               <a:rPr kumimoji="1" lang="ja-JP" altLang="en-US" smtClean="0"/>
-              <a:t>2026/5/1</a:t>
+              <a:t>2026/5/7</a:t>
             </a:fld>
             <a:endParaRPr kumimoji="1" lang="ja-JP" altLang="en-US"/>
           </a:p>
@@ -2524,7 +2524,7 @@
           <a:p>
             <a:fld id="{716789AD-CAC3-AD41-B5C9-BF5C62A1889D}" type="datetimeFigureOut">
               <a:rPr kumimoji="1" lang="ja-JP" altLang="en-US" smtClean="0"/>
-              <a:t>2026/5/1</a:t>
+              <a:t>2026/5/7</a:t>
             </a:fld>
             <a:endParaRPr kumimoji="1" lang="ja-JP" altLang="en-US"/>
           </a:p>
@@ -2665,7 +2665,7 @@
           <a:p>
             <a:fld id="{716789AD-CAC3-AD41-B5C9-BF5C62A1889D}" type="datetimeFigureOut">
               <a:rPr kumimoji="1" lang="ja-JP" altLang="en-US" smtClean="0"/>
-              <a:t>2026/5/1</a:t>
+              <a:t>2026/5/7</a:t>
             </a:fld>
             <a:endParaRPr kumimoji="1" lang="ja-JP" altLang="en-US"/>
           </a:p>
@@ -2778,7 +2778,7 @@
           <a:p>
             <a:fld id="{716789AD-CAC3-AD41-B5C9-BF5C62A1889D}" type="datetimeFigureOut">
               <a:rPr kumimoji="1" lang="ja-JP" altLang="en-US" smtClean="0"/>
-              <a:t>2026/5/1</a:t>
+              <a:t>2026/5/7</a:t>
             </a:fld>
             <a:endParaRPr kumimoji="1" lang="ja-JP" altLang="en-US"/>
           </a:p>
@@ -3121,7 +3121,7 @@
           <a:p>
             <a:fld id="{716789AD-CAC3-AD41-B5C9-BF5C62A1889D}" type="datetimeFigureOut">
               <a:rPr kumimoji="1" lang="ja-JP" altLang="en-US" smtClean="0"/>
-              <a:t>2026/5/1</a:t>
+              <a:t>2026/5/7</a:t>
             </a:fld>
             <a:endParaRPr kumimoji="1" lang="ja-JP" altLang="en-US"/>
           </a:p>
@@ -3409,7 +3409,7 @@
           <a:p>
             <a:fld id="{716789AD-CAC3-AD41-B5C9-BF5C62A1889D}" type="datetimeFigureOut">
               <a:rPr kumimoji="1" lang="ja-JP" altLang="en-US" smtClean="0"/>
-              <a:t>2026/5/1</a:t>
+              <a:t>2026/5/7</a:t>
             </a:fld>
             <a:endParaRPr kumimoji="1" lang="ja-JP" altLang="en-US"/>
           </a:p>
@@ -3682,7 +3682,7 @@
           <a:p>
             <a:fld id="{716789AD-CAC3-AD41-B5C9-BF5C62A1889D}" type="datetimeFigureOut">
               <a:rPr kumimoji="1" lang="ja-JP" altLang="en-US" smtClean="0"/>
-              <a:t>2026/5/1</a:t>
+              <a:t>2026/5/7</a:t>
             </a:fld>
             <a:endParaRPr kumimoji="1" lang="ja-JP" altLang="en-US"/>
           </a:p>
@@ -9764,7 +9764,7 @@
         <p:spPr>
           <a:xfrm>
             <a:off x="6033408" y="824566"/>
-            <a:ext cx="5793112" cy="2862322"/>
+            <a:ext cx="5793112" cy="2585323"/>
           </a:xfrm>
           <a:prstGeom prst="rect">
             <a:avLst/>
@@ -9811,17 +9811,6 @@
             <a:endParaRPr kumimoji="1" lang="en-US" altLang="ja-JP"/>
           </a:p>
           <a:p>
-            <a:pPr marL="742950" lvl="1" indent="-285750">
-              <a:buFont typeface="Arial" panose="020B0604020202020204" pitchFamily="34" charset="0"/>
-              <a:buChar char="•"/>
-            </a:pPr>
-            <a:r>
-              <a:rPr kumimoji="1" lang="ja-JP" altLang="en-US"/>
-              <a:t>（人が見た時に）明らかに人名である場合など</a:t>
-            </a:r>
-            <a:endParaRPr kumimoji="1" lang="en-US" altLang="ja-JP"/>
-          </a:p>
-          <a:p>
             <a:pPr marL="285750" indent="-285750">
               <a:buFont typeface="Arial" panose="020B0604020202020204" pitchFamily="34" charset="0"/>
               <a:buChar char="•"/>
@@ -9879,7 +9868,7 @@
         </p:nvSpPr>
         <p:spPr>
           <a:xfrm>
-            <a:off x="766119" y="1870569"/>
+            <a:off x="766119" y="1701644"/>
             <a:ext cx="3896497" cy="923330"/>
           </a:xfrm>
           <a:prstGeom prst="rect">
@@ -9948,7 +9937,7 @@
         </p:nvSpPr>
         <p:spPr>
           <a:xfrm>
-            <a:off x="766119" y="3201722"/>
+            <a:off x="766119" y="2863872"/>
             <a:ext cx="3896496" cy="646331"/>
           </a:xfrm>
           <a:prstGeom prst="rect">
@@ -10012,7 +10001,7 @@
         </p:nvSpPr>
         <p:spPr>
           <a:xfrm>
-            <a:off x="766119" y="4255876"/>
+            <a:off x="766119" y="3749101"/>
             <a:ext cx="3896496" cy="1200329"/>
           </a:xfrm>
           <a:prstGeom prst="rect">
@@ -10047,6 +10036,54 @@
               <a:t>地名決定の精度が低いことを考慮しても大学ごとの特徴を捉えているように見える</a:t>
             </a:r>
             <a:endParaRPr lang="en-US" altLang="ja-JP"/>
+          </a:p>
+        </p:txBody>
+      </p:sp>
+      <p:sp>
+        <p:nvSpPr>
+          <p:cNvPr id="4" name="テキスト ボックス 3">
+            <a:extLst>
+              <a:ext uri="{FF2B5EF4-FFF2-40B4-BE49-F238E27FC236}">
+                <a16:creationId xmlns:a16="http://schemas.microsoft.com/office/drawing/2014/main" id="{2A1EFCD4-D5E0-2B30-16D3-0C40E7A69E9A}"/>
+              </a:ext>
+            </a:extLst>
+          </p:cNvPr>
+          <p:cNvSpPr txBox="1"/>
+          <p:nvPr/>
+        </p:nvSpPr>
+        <p:spPr>
+          <a:xfrm>
+            <a:off x="766119" y="5188328"/>
+            <a:ext cx="3896496" cy="923330"/>
+          </a:xfrm>
+          <a:prstGeom prst="rect">
+            <a:avLst/>
+          </a:prstGeom>
+          <a:noFill/>
+          <a:ln w="12700">
+            <a:solidFill>
+              <a:schemeClr val="tx1"/>
+            </a:solidFill>
+          </a:ln>
+        </p:spPr>
+        <p:txBody>
+          <a:bodyPr wrap="square" rtlCol="0">
+            <a:spAutoFit/>
+          </a:bodyPr>
+          <a:lstStyle/>
+          <a:p>
+            <a:r>
+              <a:rPr kumimoji="1" lang="ja-JP" altLang="en-US"/>
+              <a:t>本研究の方法では</a:t>
+            </a:r>
+            <a:r>
+              <a:rPr kumimoji="1" lang="en-US" altLang="ja-JP"/>
+              <a:t>NER</a:t>
+            </a:r>
+            <a:r>
+              <a:rPr kumimoji="1" lang="ja-JP" altLang="en-US"/>
+              <a:t>にて抽出されない固有表現のリカバリには対応できない</a:t>
+            </a:r>
           </a:p>
         </p:txBody>
       </p:sp>
